--- a/docs/DSR-II2025_JL_slides.pptx
+++ b/docs/DSR-II2025_JL_slides.pptx
@@ -25958,7 +25958,7 @@
                 <a:latin typeface="Courier New" pitchFamily="49" charset="0"/>
                 <a:cs typeface="Courier New" pitchFamily="49" charset="0"/>
               </a:rPr>
-              <a:t>Library</a:t>
+              <a:t>library</a:t>
             </a:r>
             <a:r>
               <a:rPr lang="pt-PT" sz="1200" dirty="0">

--- a/docs/DSR-II2025_JL_slides.pptx
+++ b/docs/DSR-II2025_JL_slides.pptx
@@ -4,59 +4,60 @@
   <p:sldMasterIdLst>
     <p:sldMasterId id="2147483648" r:id="rId1"/>
     <p:sldMasterId id="2147483657" r:id="rId2"/>
+    <p:sldMasterId id="2147483661" r:id="rId3"/>
   </p:sldMasterIdLst>
   <p:notesMasterIdLst>
-    <p:notesMasterId r:id="rId46"/>
+    <p:notesMasterId r:id="rId47"/>
   </p:notesMasterIdLst>
   <p:handoutMasterIdLst>
-    <p:handoutMasterId r:id="rId47"/>
+    <p:handoutMasterId r:id="rId48"/>
   </p:handoutMasterIdLst>
   <p:sldIdLst>
-    <p:sldId id="803" r:id="rId3"/>
-    <p:sldId id="1387" r:id="rId4"/>
-    <p:sldId id="1382" r:id="rId5"/>
-    <p:sldId id="1332" r:id="rId6"/>
-    <p:sldId id="1375" r:id="rId7"/>
-    <p:sldId id="1384" r:id="rId8"/>
-    <p:sldId id="1366" r:id="rId9"/>
-    <p:sldId id="1094" r:id="rId10"/>
-    <p:sldId id="1364" r:id="rId11"/>
-    <p:sldId id="1369" r:id="rId12"/>
-    <p:sldId id="1365" r:id="rId13"/>
-    <p:sldId id="1385" r:id="rId14"/>
-    <p:sldId id="1128" r:id="rId15"/>
-    <p:sldId id="1076" r:id="rId16"/>
-    <p:sldId id="1363" r:id="rId17"/>
-    <p:sldId id="1367" r:id="rId18"/>
-    <p:sldId id="1386" r:id="rId19"/>
-    <p:sldId id="1271" r:id="rId20"/>
-    <p:sldId id="1368" r:id="rId21"/>
-    <p:sldId id="1370" r:id="rId22"/>
-    <p:sldId id="1361" r:id="rId23"/>
-    <p:sldId id="1371" r:id="rId24"/>
-    <p:sldId id="1372" r:id="rId25"/>
-    <p:sldId id="1390" r:id="rId26"/>
-    <p:sldId id="1389" r:id="rId27"/>
-    <p:sldId id="1388" r:id="rId28"/>
-    <p:sldId id="1391" r:id="rId29"/>
-    <p:sldId id="1392" r:id="rId30"/>
-    <p:sldId id="1393" r:id="rId31"/>
-    <p:sldId id="1394" r:id="rId32"/>
-    <p:sldId id="1395" r:id="rId33"/>
-    <p:sldId id="1376" r:id="rId34"/>
-    <p:sldId id="1379" r:id="rId35"/>
-    <p:sldId id="1377" r:id="rId36"/>
-    <p:sldId id="1380" r:id="rId37"/>
-    <p:sldId id="1378" r:id="rId38"/>
-    <p:sldId id="1357" r:id="rId39"/>
-    <p:sldId id="1327" r:id="rId40"/>
-    <p:sldId id="1329" r:id="rId41"/>
-    <p:sldId id="1328" r:id="rId42"/>
-    <p:sldId id="1396" r:id="rId43"/>
-    <p:sldId id="1383" r:id="rId44"/>
-    <p:sldId id="1067" r:id="rId45"/>
+    <p:sldId id="803" r:id="rId4"/>
+    <p:sldId id="1387" r:id="rId5"/>
+    <p:sldId id="1382" r:id="rId6"/>
+    <p:sldId id="1332" r:id="rId7"/>
+    <p:sldId id="1375" r:id="rId8"/>
+    <p:sldId id="1384" r:id="rId9"/>
+    <p:sldId id="1366" r:id="rId10"/>
+    <p:sldId id="1094" r:id="rId11"/>
+    <p:sldId id="1364" r:id="rId12"/>
+    <p:sldId id="1369" r:id="rId13"/>
+    <p:sldId id="1365" r:id="rId14"/>
+    <p:sldId id="1385" r:id="rId15"/>
+    <p:sldId id="1128" r:id="rId16"/>
+    <p:sldId id="1076" r:id="rId17"/>
+    <p:sldId id="1363" r:id="rId18"/>
+    <p:sldId id="1367" r:id="rId19"/>
+    <p:sldId id="1386" r:id="rId20"/>
+    <p:sldId id="1271" r:id="rId21"/>
+    <p:sldId id="1368" r:id="rId22"/>
+    <p:sldId id="1370" r:id="rId23"/>
+    <p:sldId id="1361" r:id="rId24"/>
+    <p:sldId id="1371" r:id="rId25"/>
+    <p:sldId id="1372" r:id="rId26"/>
+    <p:sldId id="1390" r:id="rId27"/>
+    <p:sldId id="1389" r:id="rId28"/>
+    <p:sldId id="1388" r:id="rId29"/>
+    <p:sldId id="1391" r:id="rId30"/>
+    <p:sldId id="1392" r:id="rId31"/>
+    <p:sldId id="1393" r:id="rId32"/>
+    <p:sldId id="1394" r:id="rId33"/>
+    <p:sldId id="1395" r:id="rId34"/>
+    <p:sldId id="1376" r:id="rId35"/>
+    <p:sldId id="1379" r:id="rId36"/>
+    <p:sldId id="1377" r:id="rId37"/>
+    <p:sldId id="1380" r:id="rId38"/>
+    <p:sldId id="1378" r:id="rId39"/>
+    <p:sldId id="1357" r:id="rId40"/>
+    <p:sldId id="1327" r:id="rId41"/>
+    <p:sldId id="1329" r:id="rId42"/>
+    <p:sldId id="1328" r:id="rId43"/>
+    <p:sldId id="1396" r:id="rId44"/>
+    <p:sldId id="1383" r:id="rId45"/>
+    <p:sldId id="1067" r:id="rId46"/>
   </p:sldIdLst>
-  <p:sldSz cx="9144000" cy="6858000" type="screen4x3"/>
+  <p:sldSz cx="12192000" cy="6858000"/>
   <p:notesSz cx="6811963" cy="9942513"/>
   <p:defaultTextStyle>
     <a:defPPr>
@@ -191,7 +192,7 @@
             <a:srgbClr val="A4A3A4"/>
           </p15:clr>
         </p15:guide>
-        <p15:guide id="2" pos="5465" userDrawn="1">
+        <p15:guide id="2" pos="7287" userDrawn="1">
           <p15:clr>
             <a:srgbClr val="A4A3A4"/>
           </p15:clr>
@@ -620,8 +621,8 @@
         </p:nvSpPr>
         <p:spPr bwMode="auto">
           <a:xfrm>
-            <a:off x="920750" y="744538"/>
-            <a:ext cx="4970463" cy="3729037"/>
+            <a:off x="92075" y="744538"/>
+            <a:ext cx="6627813" cy="3729037"/>
           </a:xfrm>
           <a:prstGeom prst="rect">
             <a:avLst/>
@@ -1010,6 +1011,10 @@
           </p:nvPr>
         </p:nvSpPr>
         <p:spPr>
+          <a:xfrm>
+            <a:off x="92075" y="744538"/>
+            <a:ext cx="6627813" cy="3729037"/>
+          </a:xfrm>
           <a:ln/>
         </p:spPr>
       </p:sp>
@@ -1098,6 +1103,10 @@
           </p:nvPr>
         </p:nvSpPr>
         <p:spPr>
+          <a:xfrm>
+            <a:off x="92075" y="744538"/>
+            <a:ext cx="6627813" cy="3729037"/>
+          </a:xfrm>
           <a:ln/>
         </p:spPr>
       </p:sp>
@@ -1164,7 +1173,12 @@
             <p:ph type="sldImg"/>
           </p:nvPr>
         </p:nvSpPr>
-        <p:spPr/>
+        <p:spPr>
+          <a:xfrm>
+            <a:off x="92075" y="744538"/>
+            <a:ext cx="6627813" cy="3729037"/>
+          </a:xfrm>
+        </p:spPr>
       </p:sp>
       <p:sp>
         <p:nvSpPr>
@@ -1254,7 +1268,12 @@
             <p:ph type="sldImg"/>
           </p:nvPr>
         </p:nvSpPr>
-        <p:spPr/>
+        <p:spPr>
+          <a:xfrm>
+            <a:off x="92075" y="744538"/>
+            <a:ext cx="6627813" cy="3729037"/>
+          </a:xfrm>
+        </p:spPr>
       </p:sp>
       <p:sp>
         <p:nvSpPr>
@@ -1344,7 +1363,12 @@
             <p:ph type="sldImg"/>
           </p:nvPr>
         </p:nvSpPr>
-        <p:spPr/>
+        <p:spPr>
+          <a:xfrm>
+            <a:off x="92075" y="744538"/>
+            <a:ext cx="6627813" cy="3729037"/>
+          </a:xfrm>
+        </p:spPr>
       </p:sp>
       <p:sp>
         <p:nvSpPr>
@@ -1434,7 +1458,12 @@
             <p:ph type="sldImg"/>
           </p:nvPr>
         </p:nvSpPr>
-        <p:spPr/>
+        <p:spPr>
+          <a:xfrm>
+            <a:off x="92075" y="744538"/>
+            <a:ext cx="6627813" cy="3729037"/>
+          </a:xfrm>
+        </p:spPr>
       </p:sp>
       <p:sp>
         <p:nvSpPr>
@@ -1524,7 +1553,12 @@
             <p:ph type="sldImg"/>
           </p:nvPr>
         </p:nvSpPr>
-        <p:spPr/>
+        <p:spPr>
+          <a:xfrm>
+            <a:off x="92075" y="744538"/>
+            <a:ext cx="6627813" cy="3729037"/>
+          </a:xfrm>
+        </p:spPr>
       </p:sp>
       <p:sp>
         <p:nvSpPr>
@@ -1614,7 +1648,12 @@
             <p:ph type="sldImg"/>
           </p:nvPr>
         </p:nvSpPr>
-        <p:spPr/>
+        <p:spPr>
+          <a:xfrm>
+            <a:off x="92075" y="744538"/>
+            <a:ext cx="6627813" cy="3729037"/>
+          </a:xfrm>
+        </p:spPr>
       </p:sp>
       <p:sp>
         <p:nvSpPr>
@@ -1731,6 +1770,10 @@
           </p:nvPr>
         </p:nvSpPr>
         <p:spPr>
+          <a:xfrm>
+            <a:off x="92075" y="744538"/>
+            <a:ext cx="6627813" cy="3729037"/>
+          </a:xfrm>
           <a:ln/>
         </p:spPr>
       </p:sp>
@@ -1824,6 +1867,10 @@
           </p:nvPr>
         </p:nvSpPr>
         <p:spPr>
+          <a:xfrm>
+            <a:off x="92075" y="744538"/>
+            <a:ext cx="6627813" cy="3729037"/>
+          </a:xfrm>
           <a:ln/>
         </p:spPr>
       </p:sp>
@@ -1917,6 +1964,10 @@
           </p:nvPr>
         </p:nvSpPr>
         <p:spPr>
+          <a:xfrm>
+            <a:off x="92075" y="744538"/>
+            <a:ext cx="6627813" cy="3729037"/>
+          </a:xfrm>
           <a:ln/>
         </p:spPr>
       </p:sp>
@@ -2005,6 +2056,10 @@
           </p:nvPr>
         </p:nvSpPr>
         <p:spPr>
+          <a:xfrm>
+            <a:off x="92075" y="744538"/>
+            <a:ext cx="6627813" cy="3729037"/>
+          </a:xfrm>
           <a:ln/>
         </p:spPr>
       </p:sp>
@@ -2098,6 +2153,10 @@
           </p:nvPr>
         </p:nvSpPr>
         <p:spPr>
+          <a:xfrm>
+            <a:off x="92075" y="744538"/>
+            <a:ext cx="6627813" cy="3729037"/>
+          </a:xfrm>
           <a:ln/>
         </p:spPr>
       </p:sp>
@@ -2191,6 +2250,10 @@
           </p:nvPr>
         </p:nvSpPr>
         <p:spPr>
+          <a:xfrm>
+            <a:off x="92075" y="744538"/>
+            <a:ext cx="6627813" cy="3729037"/>
+          </a:xfrm>
           <a:ln/>
         </p:spPr>
       </p:sp>
@@ -2284,6 +2347,10 @@
           </p:nvPr>
         </p:nvSpPr>
         <p:spPr>
+          <a:xfrm>
+            <a:off x="92075" y="744538"/>
+            <a:ext cx="6627813" cy="3729037"/>
+          </a:xfrm>
           <a:ln/>
         </p:spPr>
       </p:sp>
@@ -2377,6 +2444,10 @@
           </p:nvPr>
         </p:nvSpPr>
         <p:spPr>
+          <a:xfrm>
+            <a:off x="92075" y="744538"/>
+            <a:ext cx="6627813" cy="3729037"/>
+          </a:xfrm>
           <a:ln/>
         </p:spPr>
       </p:sp>
@@ -2446,7 +2517,7 @@
             <a:srgbClr val="FBAE40"/>
           </p15:clr>
         </p15:guide>
-        <p15:guide id="2" pos="2880" userDrawn="1">
+        <p15:guide id="2" pos="3840" userDrawn="1">
           <p15:clr>
             <a:srgbClr val="FBAE40"/>
           </p15:clr>
@@ -2454,6 +2525,985 @@
       </p15:sldGuideLst>
     </p:ext>
   </p:extLst>
+</p:sldLayout>
+</file>
+
+<file path=ppt/slideLayouts/slideLayout10.xml><?xml version="1.0" encoding="utf-8"?>
+<p:sldLayout xmlns:a="http://schemas.openxmlformats.org/drawingml/2006/main" xmlns:r="http://schemas.openxmlformats.org/officeDocument/2006/relationships" xmlns:p="http://schemas.openxmlformats.org/presentationml/2006/main" type="blank" preserve="1">
+  <p:cSld name="Blank">
+    <p:spTree>
+      <p:nvGrpSpPr>
+        <p:cNvPr id="1" name=""/>
+        <p:cNvGrpSpPr/>
+        <p:nvPr/>
+      </p:nvGrpSpPr>
+      <p:grpSpPr>
+        <a:xfrm>
+          <a:off x="0" y="0"/>
+          <a:ext cx="0" cy="0"/>
+          <a:chOff x="0" y="0"/>
+          <a:chExt cx="0" cy="0"/>
+        </a:xfrm>
+      </p:grpSpPr>
+      <p:sp>
+        <p:nvSpPr>
+          <p:cNvPr id="2" name="Date Placeholder 1"/>
+          <p:cNvSpPr>
+            <a:spLocks noGrp="1"/>
+          </p:cNvSpPr>
+          <p:nvPr>
+            <p:ph type="dt" sz="half" idx="10"/>
+          </p:nvPr>
+        </p:nvSpPr>
+        <p:spPr/>
+        <p:txBody>
+          <a:bodyPr/>
+          <a:lstStyle/>
+          <a:p>
+            <a:fld id="{C764DE79-268F-4C1A-8933-263129D2AF90}" type="datetimeFigureOut">
+              <a:rPr lang="en-US" dirty="0"/>
+              <a:t>12/9/2025</a:t>
+            </a:fld>
+            <a:endParaRPr lang="en-US" dirty="0"/>
+          </a:p>
+        </p:txBody>
+      </p:sp>
+      <p:sp>
+        <p:nvSpPr>
+          <p:cNvPr id="3" name="Footer Placeholder 2"/>
+          <p:cNvSpPr>
+            <a:spLocks noGrp="1"/>
+          </p:cNvSpPr>
+          <p:nvPr>
+            <p:ph type="ftr" sz="quarter" idx="11"/>
+          </p:nvPr>
+        </p:nvSpPr>
+        <p:spPr/>
+        <p:txBody>
+          <a:bodyPr/>
+          <a:lstStyle/>
+          <a:p>
+            <a:endParaRPr lang="en-US" dirty="0"/>
+          </a:p>
+        </p:txBody>
+      </p:sp>
+      <p:sp>
+        <p:nvSpPr>
+          <p:cNvPr id="4" name="Slide Number Placeholder 3"/>
+          <p:cNvSpPr>
+            <a:spLocks noGrp="1"/>
+          </p:cNvSpPr>
+          <p:nvPr>
+            <p:ph type="sldNum" sz="quarter" idx="12"/>
+          </p:nvPr>
+        </p:nvSpPr>
+        <p:spPr/>
+        <p:txBody>
+          <a:bodyPr/>
+          <a:lstStyle/>
+          <a:p>
+            <a:fld id="{48F63A3B-78C7-47BE-AE5E-E10140E04643}" type="slidenum">
+              <a:rPr lang="en-US" dirty="0"/>
+              <a:t>‹#›</a:t>
+            </a:fld>
+            <a:endParaRPr lang="en-US" dirty="0"/>
+          </a:p>
+        </p:txBody>
+      </p:sp>
+    </p:spTree>
+    <p:extLst>
+      <p:ext uri="{BB962C8B-B14F-4D97-AF65-F5344CB8AC3E}">
+        <p14:creationId xmlns:p14="http://schemas.microsoft.com/office/powerpoint/2010/main" val="523376980"/>
+      </p:ext>
+    </p:extLst>
+  </p:cSld>
+  <p:clrMapOvr>
+    <a:masterClrMapping/>
+  </p:clrMapOvr>
+</p:sldLayout>
+</file>
+
+<file path=ppt/slideLayouts/slideLayout11.xml><?xml version="1.0" encoding="utf-8"?>
+<p:sldLayout xmlns:a="http://schemas.openxmlformats.org/drawingml/2006/main" xmlns:r="http://schemas.openxmlformats.org/officeDocument/2006/relationships" xmlns:p="http://schemas.openxmlformats.org/presentationml/2006/main" type="objTx" preserve="1">
+  <p:cSld name="Content with Caption">
+    <p:spTree>
+      <p:nvGrpSpPr>
+        <p:cNvPr id="1" name=""/>
+        <p:cNvGrpSpPr/>
+        <p:nvPr/>
+      </p:nvGrpSpPr>
+      <p:grpSpPr>
+        <a:xfrm>
+          <a:off x="0" y="0"/>
+          <a:ext cx="0" cy="0"/>
+          <a:chOff x="0" y="0"/>
+          <a:chExt cx="0" cy="0"/>
+        </a:xfrm>
+      </p:grpSpPr>
+      <p:sp>
+        <p:nvSpPr>
+          <p:cNvPr id="2" name="Title 1"/>
+          <p:cNvSpPr>
+            <a:spLocks noGrp="1"/>
+          </p:cNvSpPr>
+          <p:nvPr>
+            <p:ph type="title"/>
+          </p:nvPr>
+        </p:nvSpPr>
+        <p:spPr>
+          <a:xfrm>
+            <a:off x="839788" y="457200"/>
+            <a:ext cx="3932237" cy="1600200"/>
+          </a:xfrm>
+        </p:spPr>
+        <p:txBody>
+          <a:bodyPr anchor="b"/>
+          <a:lstStyle>
+            <a:lvl1pPr>
+              <a:defRPr sz="3200"/>
+            </a:lvl1pPr>
+          </a:lstStyle>
+          <a:p>
+            <a:r>
+              <a:rPr lang="en-US"/>
+              <a:t>Click to edit Master title style</a:t>
+            </a:r>
+            <a:endParaRPr lang="en-US" dirty="0"/>
+          </a:p>
+        </p:txBody>
+      </p:sp>
+      <p:sp>
+        <p:nvSpPr>
+          <p:cNvPr id="3" name="Content Placeholder 2"/>
+          <p:cNvSpPr>
+            <a:spLocks noGrp="1"/>
+          </p:cNvSpPr>
+          <p:nvPr>
+            <p:ph idx="1"/>
+          </p:nvPr>
+        </p:nvSpPr>
+        <p:spPr>
+          <a:xfrm>
+            <a:off x="5183188" y="987425"/>
+            <a:ext cx="6172200" cy="4873625"/>
+          </a:xfrm>
+        </p:spPr>
+        <p:txBody>
+          <a:bodyPr/>
+          <a:lstStyle>
+            <a:lvl1pPr>
+              <a:defRPr sz="3200"/>
+            </a:lvl1pPr>
+            <a:lvl2pPr>
+              <a:defRPr sz="2800"/>
+            </a:lvl2pPr>
+            <a:lvl3pPr>
+              <a:defRPr sz="2400"/>
+            </a:lvl3pPr>
+            <a:lvl4pPr>
+              <a:defRPr sz="2000"/>
+            </a:lvl4pPr>
+            <a:lvl5pPr>
+              <a:defRPr sz="2000"/>
+            </a:lvl5pPr>
+            <a:lvl6pPr>
+              <a:defRPr sz="2000"/>
+            </a:lvl6pPr>
+            <a:lvl7pPr>
+              <a:defRPr sz="2000"/>
+            </a:lvl7pPr>
+            <a:lvl8pPr>
+              <a:defRPr sz="2000"/>
+            </a:lvl8pPr>
+            <a:lvl9pPr>
+              <a:defRPr sz="2000"/>
+            </a:lvl9pPr>
+          </a:lstStyle>
+          <a:p>
+            <a:pPr lvl="0"/>
+            <a:r>
+              <a:rPr lang="en-US"/>
+              <a:t>Click to edit Master text styles</a:t>
+            </a:r>
+          </a:p>
+          <a:p>
+            <a:pPr lvl="1"/>
+            <a:r>
+              <a:rPr lang="en-US"/>
+              <a:t>Second level</a:t>
+            </a:r>
+          </a:p>
+          <a:p>
+            <a:pPr lvl="2"/>
+            <a:r>
+              <a:rPr lang="en-US"/>
+              <a:t>Third level</a:t>
+            </a:r>
+          </a:p>
+          <a:p>
+            <a:pPr lvl="3"/>
+            <a:r>
+              <a:rPr lang="en-US"/>
+              <a:t>Fourth level</a:t>
+            </a:r>
+          </a:p>
+          <a:p>
+            <a:pPr lvl="4"/>
+            <a:r>
+              <a:rPr lang="en-US"/>
+              <a:t>Fifth level</a:t>
+            </a:r>
+            <a:endParaRPr lang="en-US" dirty="0"/>
+          </a:p>
+        </p:txBody>
+      </p:sp>
+      <p:sp>
+        <p:nvSpPr>
+          <p:cNvPr id="4" name="Text Placeholder 3"/>
+          <p:cNvSpPr>
+            <a:spLocks noGrp="1"/>
+          </p:cNvSpPr>
+          <p:nvPr>
+            <p:ph type="body" sz="half" idx="2"/>
+          </p:nvPr>
+        </p:nvSpPr>
+        <p:spPr>
+          <a:xfrm>
+            <a:off x="839788" y="2057400"/>
+            <a:ext cx="3932237" cy="3811588"/>
+          </a:xfrm>
+        </p:spPr>
+        <p:txBody>
+          <a:bodyPr/>
+          <a:lstStyle>
+            <a:lvl1pPr marL="0" indent="0">
+              <a:buNone/>
+              <a:defRPr sz="1600"/>
+            </a:lvl1pPr>
+            <a:lvl2pPr marL="457200" indent="0">
+              <a:buNone/>
+              <a:defRPr sz="1400"/>
+            </a:lvl2pPr>
+            <a:lvl3pPr marL="914400" indent="0">
+              <a:buNone/>
+              <a:defRPr sz="1200"/>
+            </a:lvl3pPr>
+            <a:lvl4pPr marL="1371600" indent="0">
+              <a:buNone/>
+              <a:defRPr sz="1000"/>
+            </a:lvl4pPr>
+            <a:lvl5pPr marL="1828800" indent="0">
+              <a:buNone/>
+              <a:defRPr sz="1000"/>
+            </a:lvl5pPr>
+            <a:lvl6pPr marL="2286000" indent="0">
+              <a:buNone/>
+              <a:defRPr sz="1000"/>
+            </a:lvl6pPr>
+            <a:lvl7pPr marL="2743200" indent="0">
+              <a:buNone/>
+              <a:defRPr sz="1000"/>
+            </a:lvl7pPr>
+            <a:lvl8pPr marL="3200400" indent="0">
+              <a:buNone/>
+              <a:defRPr sz="1000"/>
+            </a:lvl8pPr>
+            <a:lvl9pPr marL="3657600" indent="0">
+              <a:buNone/>
+              <a:defRPr sz="1000"/>
+            </a:lvl9pPr>
+          </a:lstStyle>
+          <a:p>
+            <a:pPr lvl="0"/>
+            <a:r>
+              <a:rPr lang="en-US"/>
+              <a:t>Click to edit Master text styles</a:t>
+            </a:r>
+          </a:p>
+        </p:txBody>
+      </p:sp>
+      <p:sp>
+        <p:nvSpPr>
+          <p:cNvPr id="5" name="Date Placeholder 4"/>
+          <p:cNvSpPr>
+            <a:spLocks noGrp="1"/>
+          </p:cNvSpPr>
+          <p:nvPr>
+            <p:ph type="dt" sz="half" idx="10"/>
+          </p:nvPr>
+        </p:nvSpPr>
+        <p:spPr/>
+        <p:txBody>
+          <a:bodyPr/>
+          <a:lstStyle/>
+          <a:p>
+            <a:fld id="{C764DE79-268F-4C1A-8933-263129D2AF90}" type="datetimeFigureOut">
+              <a:rPr lang="en-US" dirty="0"/>
+              <a:t>12/9/2025</a:t>
+            </a:fld>
+            <a:endParaRPr lang="en-US" dirty="0"/>
+          </a:p>
+        </p:txBody>
+      </p:sp>
+      <p:sp>
+        <p:nvSpPr>
+          <p:cNvPr id="6" name="Footer Placeholder 5"/>
+          <p:cNvSpPr>
+            <a:spLocks noGrp="1"/>
+          </p:cNvSpPr>
+          <p:nvPr>
+            <p:ph type="ftr" sz="quarter" idx="11"/>
+          </p:nvPr>
+        </p:nvSpPr>
+        <p:spPr/>
+        <p:txBody>
+          <a:bodyPr/>
+          <a:lstStyle/>
+          <a:p>
+            <a:endParaRPr lang="en-US" dirty="0"/>
+          </a:p>
+        </p:txBody>
+      </p:sp>
+      <p:sp>
+        <p:nvSpPr>
+          <p:cNvPr id="7" name="Slide Number Placeholder 6"/>
+          <p:cNvSpPr>
+            <a:spLocks noGrp="1"/>
+          </p:cNvSpPr>
+          <p:nvPr>
+            <p:ph type="sldNum" sz="quarter" idx="12"/>
+          </p:nvPr>
+        </p:nvSpPr>
+        <p:spPr/>
+        <p:txBody>
+          <a:bodyPr/>
+          <a:lstStyle/>
+          <a:p>
+            <a:fld id="{48F63A3B-78C7-47BE-AE5E-E10140E04643}" type="slidenum">
+              <a:rPr lang="en-US" dirty="0"/>
+              <a:t>‹#›</a:t>
+            </a:fld>
+            <a:endParaRPr lang="en-US" dirty="0"/>
+          </a:p>
+        </p:txBody>
+      </p:sp>
+    </p:spTree>
+    <p:extLst>
+      <p:ext uri="{BB962C8B-B14F-4D97-AF65-F5344CB8AC3E}">
+        <p14:creationId xmlns:p14="http://schemas.microsoft.com/office/powerpoint/2010/main" val="612061041"/>
+      </p:ext>
+    </p:extLst>
+  </p:cSld>
+  <p:clrMapOvr>
+    <a:masterClrMapping/>
+  </p:clrMapOvr>
+</p:sldLayout>
+</file>
+
+<file path=ppt/slideLayouts/slideLayout12.xml><?xml version="1.0" encoding="utf-8"?>
+<p:sldLayout xmlns:a="http://schemas.openxmlformats.org/drawingml/2006/main" xmlns:r="http://schemas.openxmlformats.org/officeDocument/2006/relationships" xmlns:p="http://schemas.openxmlformats.org/presentationml/2006/main" type="picTx" preserve="1">
+  <p:cSld name="Picture with Caption">
+    <p:spTree>
+      <p:nvGrpSpPr>
+        <p:cNvPr id="1" name=""/>
+        <p:cNvGrpSpPr/>
+        <p:nvPr/>
+      </p:nvGrpSpPr>
+      <p:grpSpPr>
+        <a:xfrm>
+          <a:off x="0" y="0"/>
+          <a:ext cx="0" cy="0"/>
+          <a:chOff x="0" y="0"/>
+          <a:chExt cx="0" cy="0"/>
+        </a:xfrm>
+      </p:grpSpPr>
+      <p:sp>
+        <p:nvSpPr>
+          <p:cNvPr id="2" name="Title 1"/>
+          <p:cNvSpPr>
+            <a:spLocks noGrp="1"/>
+          </p:cNvSpPr>
+          <p:nvPr>
+            <p:ph type="title"/>
+          </p:nvPr>
+        </p:nvSpPr>
+        <p:spPr>
+          <a:xfrm>
+            <a:off x="839788" y="457200"/>
+            <a:ext cx="3932237" cy="1600200"/>
+          </a:xfrm>
+        </p:spPr>
+        <p:txBody>
+          <a:bodyPr anchor="b"/>
+          <a:lstStyle>
+            <a:lvl1pPr>
+              <a:defRPr sz="3200"/>
+            </a:lvl1pPr>
+          </a:lstStyle>
+          <a:p>
+            <a:r>
+              <a:rPr lang="en-US"/>
+              <a:t>Click to edit Master title style</a:t>
+            </a:r>
+            <a:endParaRPr lang="en-US" dirty="0"/>
+          </a:p>
+        </p:txBody>
+      </p:sp>
+      <p:sp>
+        <p:nvSpPr>
+          <p:cNvPr id="3" name="Picture Placeholder 2"/>
+          <p:cNvSpPr>
+            <a:spLocks noGrp="1" noChangeAspect="1"/>
+          </p:cNvSpPr>
+          <p:nvPr>
+            <p:ph type="pic" idx="1"/>
+          </p:nvPr>
+        </p:nvSpPr>
+        <p:spPr>
+          <a:xfrm>
+            <a:off x="5183188" y="987425"/>
+            <a:ext cx="6172200" cy="4873625"/>
+          </a:xfrm>
+        </p:spPr>
+        <p:txBody>
+          <a:bodyPr anchor="t"/>
+          <a:lstStyle>
+            <a:lvl1pPr marL="0" indent="0">
+              <a:buNone/>
+              <a:defRPr sz="3200"/>
+            </a:lvl1pPr>
+            <a:lvl2pPr marL="457200" indent="0">
+              <a:buNone/>
+              <a:defRPr sz="2800"/>
+            </a:lvl2pPr>
+            <a:lvl3pPr marL="914400" indent="0">
+              <a:buNone/>
+              <a:defRPr sz="2400"/>
+            </a:lvl3pPr>
+            <a:lvl4pPr marL="1371600" indent="0">
+              <a:buNone/>
+              <a:defRPr sz="2000"/>
+            </a:lvl4pPr>
+            <a:lvl5pPr marL="1828800" indent="0">
+              <a:buNone/>
+              <a:defRPr sz="2000"/>
+            </a:lvl5pPr>
+            <a:lvl6pPr marL="2286000" indent="0">
+              <a:buNone/>
+              <a:defRPr sz="2000"/>
+            </a:lvl6pPr>
+            <a:lvl7pPr marL="2743200" indent="0">
+              <a:buNone/>
+              <a:defRPr sz="2000"/>
+            </a:lvl7pPr>
+            <a:lvl8pPr marL="3200400" indent="0">
+              <a:buNone/>
+              <a:defRPr sz="2000"/>
+            </a:lvl8pPr>
+            <a:lvl9pPr marL="3657600" indent="0">
+              <a:buNone/>
+              <a:defRPr sz="2000"/>
+            </a:lvl9pPr>
+          </a:lstStyle>
+          <a:p>
+            <a:r>
+              <a:rPr lang="en-US"/>
+              <a:t>Click icon to add picture</a:t>
+            </a:r>
+            <a:endParaRPr lang="en-US" dirty="0"/>
+          </a:p>
+        </p:txBody>
+      </p:sp>
+      <p:sp>
+        <p:nvSpPr>
+          <p:cNvPr id="4" name="Text Placeholder 3"/>
+          <p:cNvSpPr>
+            <a:spLocks noGrp="1"/>
+          </p:cNvSpPr>
+          <p:nvPr>
+            <p:ph type="body" sz="half" idx="2"/>
+          </p:nvPr>
+        </p:nvSpPr>
+        <p:spPr>
+          <a:xfrm>
+            <a:off x="839788" y="2057400"/>
+            <a:ext cx="3932237" cy="3811588"/>
+          </a:xfrm>
+        </p:spPr>
+        <p:txBody>
+          <a:bodyPr/>
+          <a:lstStyle>
+            <a:lvl1pPr marL="0" indent="0">
+              <a:buNone/>
+              <a:defRPr sz="1600"/>
+            </a:lvl1pPr>
+            <a:lvl2pPr marL="457200" indent="0">
+              <a:buNone/>
+              <a:defRPr sz="1400"/>
+            </a:lvl2pPr>
+            <a:lvl3pPr marL="914400" indent="0">
+              <a:buNone/>
+              <a:defRPr sz="1200"/>
+            </a:lvl3pPr>
+            <a:lvl4pPr marL="1371600" indent="0">
+              <a:buNone/>
+              <a:defRPr sz="1000"/>
+            </a:lvl4pPr>
+            <a:lvl5pPr marL="1828800" indent="0">
+              <a:buNone/>
+              <a:defRPr sz="1000"/>
+            </a:lvl5pPr>
+            <a:lvl6pPr marL="2286000" indent="0">
+              <a:buNone/>
+              <a:defRPr sz="1000"/>
+            </a:lvl6pPr>
+            <a:lvl7pPr marL="2743200" indent="0">
+              <a:buNone/>
+              <a:defRPr sz="1000"/>
+            </a:lvl7pPr>
+            <a:lvl8pPr marL="3200400" indent="0">
+              <a:buNone/>
+              <a:defRPr sz="1000"/>
+            </a:lvl8pPr>
+            <a:lvl9pPr marL="3657600" indent="0">
+              <a:buNone/>
+              <a:defRPr sz="1000"/>
+            </a:lvl9pPr>
+          </a:lstStyle>
+          <a:p>
+            <a:pPr lvl="0"/>
+            <a:r>
+              <a:rPr lang="en-US"/>
+              <a:t>Click to edit Master text styles</a:t>
+            </a:r>
+          </a:p>
+        </p:txBody>
+      </p:sp>
+      <p:sp>
+        <p:nvSpPr>
+          <p:cNvPr id="5" name="Date Placeholder 4"/>
+          <p:cNvSpPr>
+            <a:spLocks noGrp="1"/>
+          </p:cNvSpPr>
+          <p:nvPr>
+            <p:ph type="dt" sz="half" idx="10"/>
+          </p:nvPr>
+        </p:nvSpPr>
+        <p:spPr/>
+        <p:txBody>
+          <a:bodyPr/>
+          <a:lstStyle/>
+          <a:p>
+            <a:fld id="{C764DE79-268F-4C1A-8933-263129D2AF90}" type="datetimeFigureOut">
+              <a:rPr lang="en-US" dirty="0"/>
+              <a:t>12/9/2025</a:t>
+            </a:fld>
+            <a:endParaRPr lang="en-US" dirty="0"/>
+          </a:p>
+        </p:txBody>
+      </p:sp>
+      <p:sp>
+        <p:nvSpPr>
+          <p:cNvPr id="6" name="Footer Placeholder 5"/>
+          <p:cNvSpPr>
+            <a:spLocks noGrp="1"/>
+          </p:cNvSpPr>
+          <p:nvPr>
+            <p:ph type="ftr" sz="quarter" idx="11"/>
+          </p:nvPr>
+        </p:nvSpPr>
+        <p:spPr/>
+        <p:txBody>
+          <a:bodyPr/>
+          <a:lstStyle/>
+          <a:p>
+            <a:endParaRPr lang="en-US" dirty="0"/>
+          </a:p>
+        </p:txBody>
+      </p:sp>
+      <p:sp>
+        <p:nvSpPr>
+          <p:cNvPr id="7" name="Slide Number Placeholder 6"/>
+          <p:cNvSpPr>
+            <a:spLocks noGrp="1"/>
+          </p:cNvSpPr>
+          <p:nvPr>
+            <p:ph type="sldNum" sz="quarter" idx="12"/>
+          </p:nvPr>
+        </p:nvSpPr>
+        <p:spPr/>
+        <p:txBody>
+          <a:bodyPr/>
+          <a:lstStyle/>
+          <a:p>
+            <a:fld id="{48F63A3B-78C7-47BE-AE5E-E10140E04643}" type="slidenum">
+              <a:rPr lang="en-US" dirty="0"/>
+              <a:t>‹#›</a:t>
+            </a:fld>
+            <a:endParaRPr lang="en-US" dirty="0"/>
+          </a:p>
+        </p:txBody>
+      </p:sp>
+    </p:spTree>
+    <p:extLst>
+      <p:ext uri="{BB962C8B-B14F-4D97-AF65-F5344CB8AC3E}">
+        <p14:creationId xmlns:p14="http://schemas.microsoft.com/office/powerpoint/2010/main" val="3776947656"/>
+      </p:ext>
+    </p:extLst>
+  </p:cSld>
+  <p:clrMapOvr>
+    <a:masterClrMapping/>
+  </p:clrMapOvr>
+</p:sldLayout>
+</file>
+
+<file path=ppt/slideLayouts/slideLayout13.xml><?xml version="1.0" encoding="utf-8"?>
+<p:sldLayout xmlns:a="http://schemas.openxmlformats.org/drawingml/2006/main" xmlns:r="http://schemas.openxmlformats.org/officeDocument/2006/relationships" xmlns:p="http://schemas.openxmlformats.org/presentationml/2006/main" type="vertTx" preserve="1">
+  <p:cSld name="Title and Vertical Text">
+    <p:spTree>
+      <p:nvGrpSpPr>
+        <p:cNvPr id="1" name=""/>
+        <p:cNvGrpSpPr/>
+        <p:nvPr/>
+      </p:nvGrpSpPr>
+      <p:grpSpPr>
+        <a:xfrm>
+          <a:off x="0" y="0"/>
+          <a:ext cx="0" cy="0"/>
+          <a:chOff x="0" y="0"/>
+          <a:chExt cx="0" cy="0"/>
+        </a:xfrm>
+      </p:grpSpPr>
+      <p:sp>
+        <p:nvSpPr>
+          <p:cNvPr id="2" name="Title 1"/>
+          <p:cNvSpPr>
+            <a:spLocks noGrp="1"/>
+          </p:cNvSpPr>
+          <p:nvPr>
+            <p:ph type="title"/>
+          </p:nvPr>
+        </p:nvSpPr>
+        <p:spPr/>
+        <p:txBody>
+          <a:bodyPr/>
+          <a:lstStyle/>
+          <a:p>
+            <a:r>
+              <a:rPr lang="en-US"/>
+              <a:t>Click to edit Master title style</a:t>
+            </a:r>
+            <a:endParaRPr lang="en-US" dirty="0"/>
+          </a:p>
+        </p:txBody>
+      </p:sp>
+      <p:sp>
+        <p:nvSpPr>
+          <p:cNvPr id="3" name="Vertical Text Placeholder 2"/>
+          <p:cNvSpPr>
+            <a:spLocks noGrp="1"/>
+          </p:cNvSpPr>
+          <p:nvPr>
+            <p:ph type="body" orient="vert" idx="1"/>
+          </p:nvPr>
+        </p:nvSpPr>
+        <p:spPr/>
+        <p:txBody>
+          <a:bodyPr vert="eaVert"/>
+          <a:lstStyle/>
+          <a:p>
+            <a:pPr lvl="0"/>
+            <a:r>
+              <a:rPr lang="en-US"/>
+              <a:t>Click to edit Master text styles</a:t>
+            </a:r>
+          </a:p>
+          <a:p>
+            <a:pPr lvl="1"/>
+            <a:r>
+              <a:rPr lang="en-US"/>
+              <a:t>Second level</a:t>
+            </a:r>
+          </a:p>
+          <a:p>
+            <a:pPr lvl="2"/>
+            <a:r>
+              <a:rPr lang="en-US"/>
+              <a:t>Third level</a:t>
+            </a:r>
+          </a:p>
+          <a:p>
+            <a:pPr lvl="3"/>
+            <a:r>
+              <a:rPr lang="en-US"/>
+              <a:t>Fourth level</a:t>
+            </a:r>
+          </a:p>
+          <a:p>
+            <a:pPr lvl="4"/>
+            <a:r>
+              <a:rPr lang="en-US"/>
+              <a:t>Fifth level</a:t>
+            </a:r>
+            <a:endParaRPr lang="en-US" dirty="0"/>
+          </a:p>
+        </p:txBody>
+      </p:sp>
+      <p:sp>
+        <p:nvSpPr>
+          <p:cNvPr id="4" name="Date Placeholder 3"/>
+          <p:cNvSpPr>
+            <a:spLocks noGrp="1"/>
+          </p:cNvSpPr>
+          <p:nvPr>
+            <p:ph type="dt" sz="half" idx="10"/>
+          </p:nvPr>
+        </p:nvSpPr>
+        <p:spPr/>
+        <p:txBody>
+          <a:bodyPr/>
+          <a:lstStyle/>
+          <a:p>
+            <a:fld id="{C764DE79-268F-4C1A-8933-263129D2AF90}" type="datetimeFigureOut">
+              <a:rPr lang="en-US" dirty="0"/>
+              <a:t>12/9/2025</a:t>
+            </a:fld>
+            <a:endParaRPr lang="en-US" dirty="0"/>
+          </a:p>
+        </p:txBody>
+      </p:sp>
+      <p:sp>
+        <p:nvSpPr>
+          <p:cNvPr id="5" name="Footer Placeholder 4"/>
+          <p:cNvSpPr>
+            <a:spLocks noGrp="1"/>
+          </p:cNvSpPr>
+          <p:nvPr>
+            <p:ph type="ftr" sz="quarter" idx="11"/>
+          </p:nvPr>
+        </p:nvSpPr>
+        <p:spPr/>
+        <p:txBody>
+          <a:bodyPr/>
+          <a:lstStyle/>
+          <a:p>
+            <a:endParaRPr lang="en-US" dirty="0"/>
+          </a:p>
+        </p:txBody>
+      </p:sp>
+      <p:sp>
+        <p:nvSpPr>
+          <p:cNvPr id="6" name="Slide Number Placeholder 5"/>
+          <p:cNvSpPr>
+            <a:spLocks noGrp="1"/>
+          </p:cNvSpPr>
+          <p:nvPr>
+            <p:ph type="sldNum" sz="quarter" idx="12"/>
+          </p:nvPr>
+        </p:nvSpPr>
+        <p:spPr/>
+        <p:txBody>
+          <a:bodyPr/>
+          <a:lstStyle/>
+          <a:p>
+            <a:fld id="{48F63A3B-78C7-47BE-AE5E-E10140E04643}" type="slidenum">
+              <a:rPr lang="en-US" dirty="0"/>
+              <a:t>‹#›</a:t>
+            </a:fld>
+            <a:endParaRPr lang="en-US" dirty="0"/>
+          </a:p>
+        </p:txBody>
+      </p:sp>
+    </p:spTree>
+    <p:extLst>
+      <p:ext uri="{BB962C8B-B14F-4D97-AF65-F5344CB8AC3E}">
+        <p14:creationId xmlns:p14="http://schemas.microsoft.com/office/powerpoint/2010/main" val="4133920499"/>
+      </p:ext>
+    </p:extLst>
+  </p:cSld>
+  <p:clrMapOvr>
+    <a:masterClrMapping/>
+  </p:clrMapOvr>
+</p:sldLayout>
+</file>
+
+<file path=ppt/slideLayouts/slideLayout14.xml><?xml version="1.0" encoding="utf-8"?>
+<p:sldLayout xmlns:a="http://schemas.openxmlformats.org/drawingml/2006/main" xmlns:r="http://schemas.openxmlformats.org/officeDocument/2006/relationships" xmlns:p="http://schemas.openxmlformats.org/presentationml/2006/main" type="vertTitleAndTx" preserve="1">
+  <p:cSld name="Vertical Title and Text">
+    <p:spTree>
+      <p:nvGrpSpPr>
+        <p:cNvPr id="1" name=""/>
+        <p:cNvGrpSpPr/>
+        <p:nvPr/>
+      </p:nvGrpSpPr>
+      <p:grpSpPr>
+        <a:xfrm>
+          <a:off x="0" y="0"/>
+          <a:ext cx="0" cy="0"/>
+          <a:chOff x="0" y="0"/>
+          <a:chExt cx="0" cy="0"/>
+        </a:xfrm>
+      </p:grpSpPr>
+      <p:sp>
+        <p:nvSpPr>
+          <p:cNvPr id="2" name="Vertical Title 1"/>
+          <p:cNvSpPr>
+            <a:spLocks noGrp="1"/>
+          </p:cNvSpPr>
+          <p:nvPr>
+            <p:ph type="title" orient="vert"/>
+          </p:nvPr>
+        </p:nvSpPr>
+        <p:spPr>
+          <a:xfrm>
+            <a:off x="8724900" y="365125"/>
+            <a:ext cx="2628900" cy="5811838"/>
+          </a:xfrm>
+        </p:spPr>
+        <p:txBody>
+          <a:bodyPr vert="eaVert"/>
+          <a:lstStyle/>
+          <a:p>
+            <a:r>
+              <a:rPr lang="en-US"/>
+              <a:t>Click to edit Master title style</a:t>
+            </a:r>
+            <a:endParaRPr lang="en-US" dirty="0"/>
+          </a:p>
+        </p:txBody>
+      </p:sp>
+      <p:sp>
+        <p:nvSpPr>
+          <p:cNvPr id="3" name="Vertical Text Placeholder 2"/>
+          <p:cNvSpPr>
+            <a:spLocks noGrp="1"/>
+          </p:cNvSpPr>
+          <p:nvPr>
+            <p:ph type="body" orient="vert" idx="1"/>
+          </p:nvPr>
+        </p:nvSpPr>
+        <p:spPr>
+          <a:xfrm>
+            <a:off x="838200" y="365125"/>
+            <a:ext cx="7734300" cy="5811838"/>
+          </a:xfrm>
+        </p:spPr>
+        <p:txBody>
+          <a:bodyPr vert="eaVert"/>
+          <a:lstStyle/>
+          <a:p>
+            <a:pPr lvl="0"/>
+            <a:r>
+              <a:rPr lang="en-US"/>
+              <a:t>Click to edit Master text styles</a:t>
+            </a:r>
+          </a:p>
+          <a:p>
+            <a:pPr lvl="1"/>
+            <a:r>
+              <a:rPr lang="en-US"/>
+              <a:t>Second level</a:t>
+            </a:r>
+          </a:p>
+          <a:p>
+            <a:pPr lvl="2"/>
+            <a:r>
+              <a:rPr lang="en-US"/>
+              <a:t>Third level</a:t>
+            </a:r>
+          </a:p>
+          <a:p>
+            <a:pPr lvl="3"/>
+            <a:r>
+              <a:rPr lang="en-US"/>
+              <a:t>Fourth level</a:t>
+            </a:r>
+          </a:p>
+          <a:p>
+            <a:pPr lvl="4"/>
+            <a:r>
+              <a:rPr lang="en-US"/>
+              <a:t>Fifth level</a:t>
+            </a:r>
+            <a:endParaRPr lang="en-US" dirty="0"/>
+          </a:p>
+        </p:txBody>
+      </p:sp>
+      <p:sp>
+        <p:nvSpPr>
+          <p:cNvPr id="4" name="Date Placeholder 3"/>
+          <p:cNvSpPr>
+            <a:spLocks noGrp="1"/>
+          </p:cNvSpPr>
+          <p:nvPr>
+            <p:ph type="dt" sz="half" idx="10"/>
+          </p:nvPr>
+        </p:nvSpPr>
+        <p:spPr/>
+        <p:txBody>
+          <a:bodyPr/>
+          <a:lstStyle/>
+          <a:p>
+            <a:fld id="{C764DE79-268F-4C1A-8933-263129D2AF90}" type="datetimeFigureOut">
+              <a:rPr lang="en-US" dirty="0"/>
+              <a:t>12/9/2025</a:t>
+            </a:fld>
+            <a:endParaRPr lang="en-US" dirty="0"/>
+          </a:p>
+        </p:txBody>
+      </p:sp>
+      <p:sp>
+        <p:nvSpPr>
+          <p:cNvPr id="5" name="Footer Placeholder 4"/>
+          <p:cNvSpPr>
+            <a:spLocks noGrp="1"/>
+          </p:cNvSpPr>
+          <p:nvPr>
+            <p:ph type="ftr" sz="quarter" idx="11"/>
+          </p:nvPr>
+        </p:nvSpPr>
+        <p:spPr/>
+        <p:txBody>
+          <a:bodyPr/>
+          <a:lstStyle/>
+          <a:p>
+            <a:endParaRPr lang="en-US" dirty="0"/>
+          </a:p>
+        </p:txBody>
+      </p:sp>
+      <p:sp>
+        <p:nvSpPr>
+          <p:cNvPr id="6" name="Slide Number Placeholder 5"/>
+          <p:cNvSpPr>
+            <a:spLocks noGrp="1"/>
+          </p:cNvSpPr>
+          <p:nvPr>
+            <p:ph type="sldNum" sz="quarter" idx="12"/>
+          </p:nvPr>
+        </p:nvSpPr>
+        <p:spPr/>
+        <p:txBody>
+          <a:bodyPr/>
+          <a:lstStyle/>
+          <a:p>
+            <a:fld id="{48F63A3B-78C7-47BE-AE5E-E10140E04643}" type="slidenum">
+              <a:rPr lang="en-US" dirty="0"/>
+              <a:t>‹#›</a:t>
+            </a:fld>
+            <a:endParaRPr lang="en-US" dirty="0"/>
+          </a:p>
+        </p:txBody>
+      </p:sp>
+    </p:spTree>
+    <p:extLst>
+      <p:ext uri="{BB962C8B-B14F-4D97-AF65-F5344CB8AC3E}">
+        <p14:creationId xmlns:p14="http://schemas.microsoft.com/office/powerpoint/2010/main" val="2327727601"/>
+      </p:ext>
+    </p:extLst>
+  </p:cSld>
+  <p:clrMapOvr>
+    <a:masterClrMapping/>
+  </p:clrMapOvr>
 </p:sldLayout>
 </file>
 
@@ -2484,8 +3534,8 @@
         </p:nvSpPr>
         <p:spPr bwMode="auto">
           <a:xfrm>
-            <a:off x="8325294" y="6163979"/>
-            <a:ext cx="720000" cy="504056"/>
+            <a:off x="11100392" y="6163979"/>
+            <a:ext cx="960000" cy="504056"/>
           </a:xfrm>
           <a:prstGeom prst="rect">
             <a:avLst/>
@@ -2527,8 +3577,8 @@
         </p:nvSpPr>
         <p:spPr bwMode="auto">
           <a:xfrm>
-            <a:off x="3779912" y="6164408"/>
-            <a:ext cx="2808000" cy="504000"/>
+            <a:off x="5039883" y="6164408"/>
+            <a:ext cx="3744000" cy="504000"/>
           </a:xfrm>
           <a:prstGeom prst="rect">
             <a:avLst/>
@@ -2588,8 +3638,8 @@
         </p:nvSpPr>
         <p:spPr bwMode="auto">
           <a:xfrm>
-            <a:off x="6587911" y="6176009"/>
-            <a:ext cx="1670517" cy="504000"/>
+            <a:off x="8783882" y="6176009"/>
+            <a:ext cx="2227356" cy="504000"/>
           </a:xfrm>
           <a:prstGeom prst="rect">
             <a:avLst/>
@@ -2631,8 +3681,8 @@
         </p:nvSpPr>
         <p:spPr bwMode="auto">
           <a:xfrm flipV="1">
-            <a:off x="8027988" y="6215453"/>
-            <a:ext cx="469900" cy="457200"/>
+            <a:off x="10703984" y="6215453"/>
+            <a:ext cx="626533" cy="457200"/>
           </a:xfrm>
           <a:prstGeom prst="rect">
             <a:avLst/>
@@ -2680,7 +3730,7 @@
             <a:srgbClr val="FBAE40"/>
           </p15:clr>
         </p15:guide>
-        <p15:guide id="2" pos="2880" userDrawn="1">
+        <p15:guide id="2" pos="3840" userDrawn="1">
           <p15:clr>
             <a:srgbClr val="FBAE40"/>
           </p15:clr>
@@ -2712,6 +3762,1331 @@
     <p:extLst>
       <p:ext uri="{BB962C8B-B14F-4D97-AF65-F5344CB8AC3E}">
         <p14:creationId xmlns:p14="http://schemas.microsoft.com/office/powerpoint/2010/main" val="3322830576"/>
+      </p:ext>
+    </p:extLst>
+  </p:cSld>
+  <p:clrMapOvr>
+    <a:masterClrMapping/>
+  </p:clrMapOvr>
+</p:sldLayout>
+</file>
+
+<file path=ppt/slideLayouts/slideLayout4.xml><?xml version="1.0" encoding="utf-8"?>
+<p:sldLayout xmlns:a="http://schemas.openxmlformats.org/drawingml/2006/main" xmlns:r="http://schemas.openxmlformats.org/officeDocument/2006/relationships" xmlns:p="http://schemas.openxmlformats.org/presentationml/2006/main" type="title" preserve="1">
+  <p:cSld name="Title Slide">
+    <p:spTree>
+      <p:nvGrpSpPr>
+        <p:cNvPr id="1" name=""/>
+        <p:cNvGrpSpPr/>
+        <p:nvPr/>
+      </p:nvGrpSpPr>
+      <p:grpSpPr>
+        <a:xfrm>
+          <a:off x="0" y="0"/>
+          <a:ext cx="0" cy="0"/>
+          <a:chOff x="0" y="0"/>
+          <a:chExt cx="0" cy="0"/>
+        </a:xfrm>
+      </p:grpSpPr>
+      <p:sp>
+        <p:nvSpPr>
+          <p:cNvPr id="2" name="Title 1"/>
+          <p:cNvSpPr>
+            <a:spLocks noGrp="1"/>
+          </p:cNvSpPr>
+          <p:nvPr>
+            <p:ph type="ctrTitle"/>
+          </p:nvPr>
+        </p:nvSpPr>
+        <p:spPr>
+          <a:xfrm>
+            <a:off x="1524000" y="1122363"/>
+            <a:ext cx="9144000" cy="2387600"/>
+          </a:xfrm>
+        </p:spPr>
+        <p:txBody>
+          <a:bodyPr anchor="b"/>
+          <a:lstStyle>
+            <a:lvl1pPr algn="ctr">
+              <a:defRPr sz="6000"/>
+            </a:lvl1pPr>
+          </a:lstStyle>
+          <a:p>
+            <a:r>
+              <a:rPr lang="en-US"/>
+              <a:t>Click to edit Master title style</a:t>
+            </a:r>
+            <a:endParaRPr lang="en-US" dirty="0"/>
+          </a:p>
+        </p:txBody>
+      </p:sp>
+      <p:sp>
+        <p:nvSpPr>
+          <p:cNvPr id="3" name="Subtitle 2"/>
+          <p:cNvSpPr>
+            <a:spLocks noGrp="1"/>
+          </p:cNvSpPr>
+          <p:nvPr>
+            <p:ph type="subTitle" idx="1"/>
+          </p:nvPr>
+        </p:nvSpPr>
+        <p:spPr>
+          <a:xfrm>
+            <a:off x="1524000" y="3602038"/>
+            <a:ext cx="9144000" cy="1655762"/>
+          </a:xfrm>
+        </p:spPr>
+        <p:txBody>
+          <a:bodyPr/>
+          <a:lstStyle>
+            <a:lvl1pPr marL="0" indent="0" algn="ctr">
+              <a:buNone/>
+              <a:defRPr sz="2400"/>
+            </a:lvl1pPr>
+            <a:lvl2pPr marL="457200" indent="0" algn="ctr">
+              <a:buNone/>
+              <a:defRPr sz="2000"/>
+            </a:lvl2pPr>
+            <a:lvl3pPr marL="914400" indent="0" algn="ctr">
+              <a:buNone/>
+              <a:defRPr sz="1800"/>
+            </a:lvl3pPr>
+            <a:lvl4pPr marL="1371600" indent="0" algn="ctr">
+              <a:buNone/>
+              <a:defRPr sz="1600"/>
+            </a:lvl4pPr>
+            <a:lvl5pPr marL="1828800" indent="0" algn="ctr">
+              <a:buNone/>
+              <a:defRPr sz="1600"/>
+            </a:lvl5pPr>
+            <a:lvl6pPr marL="2286000" indent="0" algn="ctr">
+              <a:buNone/>
+              <a:defRPr sz="1600"/>
+            </a:lvl6pPr>
+            <a:lvl7pPr marL="2743200" indent="0" algn="ctr">
+              <a:buNone/>
+              <a:defRPr sz="1600"/>
+            </a:lvl7pPr>
+            <a:lvl8pPr marL="3200400" indent="0" algn="ctr">
+              <a:buNone/>
+              <a:defRPr sz="1600"/>
+            </a:lvl8pPr>
+            <a:lvl9pPr marL="3657600" indent="0" algn="ctr">
+              <a:buNone/>
+              <a:defRPr sz="1600"/>
+            </a:lvl9pPr>
+          </a:lstStyle>
+          <a:p>
+            <a:r>
+              <a:rPr lang="en-US"/>
+              <a:t>Click to edit Master subtitle style</a:t>
+            </a:r>
+            <a:endParaRPr lang="en-US" dirty="0"/>
+          </a:p>
+        </p:txBody>
+      </p:sp>
+      <p:sp>
+        <p:nvSpPr>
+          <p:cNvPr id="4" name="Date Placeholder 3"/>
+          <p:cNvSpPr>
+            <a:spLocks noGrp="1"/>
+          </p:cNvSpPr>
+          <p:nvPr>
+            <p:ph type="dt" sz="half" idx="10"/>
+          </p:nvPr>
+        </p:nvSpPr>
+        <p:spPr/>
+        <p:txBody>
+          <a:bodyPr/>
+          <a:lstStyle/>
+          <a:p>
+            <a:fld id="{C764DE79-268F-4C1A-8933-263129D2AF90}" type="datetimeFigureOut">
+              <a:rPr lang="en-US" dirty="0"/>
+              <a:t>12/9/2025</a:t>
+            </a:fld>
+            <a:endParaRPr lang="en-US" dirty="0"/>
+          </a:p>
+        </p:txBody>
+      </p:sp>
+      <p:sp>
+        <p:nvSpPr>
+          <p:cNvPr id="5" name="Footer Placeholder 4"/>
+          <p:cNvSpPr>
+            <a:spLocks noGrp="1"/>
+          </p:cNvSpPr>
+          <p:nvPr>
+            <p:ph type="ftr" sz="quarter" idx="11"/>
+          </p:nvPr>
+        </p:nvSpPr>
+        <p:spPr/>
+        <p:txBody>
+          <a:bodyPr/>
+          <a:lstStyle/>
+          <a:p>
+            <a:endParaRPr lang="en-US" dirty="0"/>
+          </a:p>
+        </p:txBody>
+      </p:sp>
+      <p:sp>
+        <p:nvSpPr>
+          <p:cNvPr id="6" name="Slide Number Placeholder 5"/>
+          <p:cNvSpPr>
+            <a:spLocks noGrp="1"/>
+          </p:cNvSpPr>
+          <p:nvPr>
+            <p:ph type="sldNum" sz="quarter" idx="12"/>
+          </p:nvPr>
+        </p:nvSpPr>
+        <p:spPr/>
+        <p:txBody>
+          <a:bodyPr/>
+          <a:lstStyle/>
+          <a:p>
+            <a:fld id="{48F63A3B-78C7-47BE-AE5E-E10140E04643}" type="slidenum">
+              <a:rPr lang="en-US" dirty="0"/>
+              <a:t>‹#›</a:t>
+            </a:fld>
+            <a:endParaRPr lang="en-US" dirty="0"/>
+          </a:p>
+        </p:txBody>
+      </p:sp>
+    </p:spTree>
+    <p:extLst>
+      <p:ext uri="{BB962C8B-B14F-4D97-AF65-F5344CB8AC3E}">
+        <p14:creationId xmlns:p14="http://schemas.microsoft.com/office/powerpoint/2010/main" val="321338581"/>
+      </p:ext>
+    </p:extLst>
+  </p:cSld>
+  <p:clrMapOvr>
+    <a:masterClrMapping/>
+  </p:clrMapOvr>
+</p:sldLayout>
+</file>
+
+<file path=ppt/slideLayouts/slideLayout5.xml><?xml version="1.0" encoding="utf-8"?>
+<p:sldLayout xmlns:a="http://schemas.openxmlformats.org/drawingml/2006/main" xmlns:r="http://schemas.openxmlformats.org/officeDocument/2006/relationships" xmlns:p="http://schemas.openxmlformats.org/presentationml/2006/main" type="obj" preserve="1">
+  <p:cSld name="Title and Content">
+    <p:spTree>
+      <p:nvGrpSpPr>
+        <p:cNvPr id="1" name=""/>
+        <p:cNvGrpSpPr/>
+        <p:nvPr/>
+      </p:nvGrpSpPr>
+      <p:grpSpPr>
+        <a:xfrm>
+          <a:off x="0" y="0"/>
+          <a:ext cx="0" cy="0"/>
+          <a:chOff x="0" y="0"/>
+          <a:chExt cx="0" cy="0"/>
+        </a:xfrm>
+      </p:grpSpPr>
+      <p:sp>
+        <p:nvSpPr>
+          <p:cNvPr id="2" name="Title 1"/>
+          <p:cNvSpPr>
+            <a:spLocks noGrp="1"/>
+          </p:cNvSpPr>
+          <p:nvPr>
+            <p:ph type="title"/>
+          </p:nvPr>
+        </p:nvSpPr>
+        <p:spPr/>
+        <p:txBody>
+          <a:bodyPr/>
+          <a:lstStyle/>
+          <a:p>
+            <a:r>
+              <a:rPr lang="en-US"/>
+              <a:t>Click to edit Master title style</a:t>
+            </a:r>
+            <a:endParaRPr lang="en-US" dirty="0"/>
+          </a:p>
+        </p:txBody>
+      </p:sp>
+      <p:sp>
+        <p:nvSpPr>
+          <p:cNvPr id="3" name="Content Placeholder 2"/>
+          <p:cNvSpPr>
+            <a:spLocks noGrp="1"/>
+          </p:cNvSpPr>
+          <p:nvPr>
+            <p:ph idx="1"/>
+          </p:nvPr>
+        </p:nvSpPr>
+        <p:spPr/>
+        <p:txBody>
+          <a:bodyPr/>
+          <a:lstStyle/>
+          <a:p>
+            <a:pPr lvl="0"/>
+            <a:r>
+              <a:rPr lang="en-US"/>
+              <a:t>Click to edit Master text styles</a:t>
+            </a:r>
+          </a:p>
+          <a:p>
+            <a:pPr lvl="1"/>
+            <a:r>
+              <a:rPr lang="en-US"/>
+              <a:t>Second level</a:t>
+            </a:r>
+          </a:p>
+          <a:p>
+            <a:pPr lvl="2"/>
+            <a:r>
+              <a:rPr lang="en-US"/>
+              <a:t>Third level</a:t>
+            </a:r>
+          </a:p>
+          <a:p>
+            <a:pPr lvl="3"/>
+            <a:r>
+              <a:rPr lang="en-US"/>
+              <a:t>Fourth level</a:t>
+            </a:r>
+          </a:p>
+          <a:p>
+            <a:pPr lvl="4"/>
+            <a:r>
+              <a:rPr lang="en-US"/>
+              <a:t>Fifth level</a:t>
+            </a:r>
+            <a:endParaRPr lang="en-US" dirty="0"/>
+          </a:p>
+        </p:txBody>
+      </p:sp>
+      <p:sp>
+        <p:nvSpPr>
+          <p:cNvPr id="4" name="Date Placeholder 3"/>
+          <p:cNvSpPr>
+            <a:spLocks noGrp="1"/>
+          </p:cNvSpPr>
+          <p:nvPr>
+            <p:ph type="dt" sz="half" idx="10"/>
+          </p:nvPr>
+        </p:nvSpPr>
+        <p:spPr/>
+        <p:txBody>
+          <a:bodyPr/>
+          <a:lstStyle/>
+          <a:p>
+            <a:fld id="{C764DE79-268F-4C1A-8933-263129D2AF90}" type="datetimeFigureOut">
+              <a:rPr lang="en-US" dirty="0"/>
+              <a:t>12/9/2025</a:t>
+            </a:fld>
+            <a:endParaRPr lang="en-US" dirty="0"/>
+          </a:p>
+        </p:txBody>
+      </p:sp>
+      <p:sp>
+        <p:nvSpPr>
+          <p:cNvPr id="5" name="Footer Placeholder 4"/>
+          <p:cNvSpPr>
+            <a:spLocks noGrp="1"/>
+          </p:cNvSpPr>
+          <p:nvPr>
+            <p:ph type="ftr" sz="quarter" idx="11"/>
+          </p:nvPr>
+        </p:nvSpPr>
+        <p:spPr/>
+        <p:txBody>
+          <a:bodyPr/>
+          <a:lstStyle/>
+          <a:p>
+            <a:endParaRPr lang="en-US" dirty="0"/>
+          </a:p>
+        </p:txBody>
+      </p:sp>
+      <p:sp>
+        <p:nvSpPr>
+          <p:cNvPr id="6" name="Slide Number Placeholder 5"/>
+          <p:cNvSpPr>
+            <a:spLocks noGrp="1"/>
+          </p:cNvSpPr>
+          <p:nvPr>
+            <p:ph type="sldNum" sz="quarter" idx="12"/>
+          </p:nvPr>
+        </p:nvSpPr>
+        <p:spPr/>
+        <p:txBody>
+          <a:bodyPr/>
+          <a:lstStyle/>
+          <a:p>
+            <a:fld id="{48F63A3B-78C7-47BE-AE5E-E10140E04643}" type="slidenum">
+              <a:rPr lang="en-US" dirty="0"/>
+              <a:t>‹#›</a:t>
+            </a:fld>
+            <a:endParaRPr lang="en-US" dirty="0"/>
+          </a:p>
+        </p:txBody>
+      </p:sp>
+    </p:spTree>
+    <p:extLst>
+      <p:ext uri="{BB962C8B-B14F-4D97-AF65-F5344CB8AC3E}">
+        <p14:creationId xmlns:p14="http://schemas.microsoft.com/office/powerpoint/2010/main" val="214310661"/>
+      </p:ext>
+    </p:extLst>
+  </p:cSld>
+  <p:clrMapOvr>
+    <a:masterClrMapping/>
+  </p:clrMapOvr>
+</p:sldLayout>
+</file>
+
+<file path=ppt/slideLayouts/slideLayout6.xml><?xml version="1.0" encoding="utf-8"?>
+<p:sldLayout xmlns:a="http://schemas.openxmlformats.org/drawingml/2006/main" xmlns:r="http://schemas.openxmlformats.org/officeDocument/2006/relationships" xmlns:p="http://schemas.openxmlformats.org/presentationml/2006/main" type="secHead" preserve="1">
+  <p:cSld name="Section Header">
+    <p:spTree>
+      <p:nvGrpSpPr>
+        <p:cNvPr id="1" name=""/>
+        <p:cNvGrpSpPr/>
+        <p:nvPr/>
+      </p:nvGrpSpPr>
+      <p:grpSpPr>
+        <a:xfrm>
+          <a:off x="0" y="0"/>
+          <a:ext cx="0" cy="0"/>
+          <a:chOff x="0" y="0"/>
+          <a:chExt cx="0" cy="0"/>
+        </a:xfrm>
+      </p:grpSpPr>
+      <p:sp>
+        <p:nvSpPr>
+          <p:cNvPr id="2" name="Title 1"/>
+          <p:cNvSpPr>
+            <a:spLocks noGrp="1"/>
+          </p:cNvSpPr>
+          <p:nvPr>
+            <p:ph type="title"/>
+          </p:nvPr>
+        </p:nvSpPr>
+        <p:spPr>
+          <a:xfrm>
+            <a:off x="831850" y="1709738"/>
+            <a:ext cx="10515600" cy="2852737"/>
+          </a:xfrm>
+        </p:spPr>
+        <p:txBody>
+          <a:bodyPr anchor="b"/>
+          <a:lstStyle>
+            <a:lvl1pPr>
+              <a:defRPr sz="6000"/>
+            </a:lvl1pPr>
+          </a:lstStyle>
+          <a:p>
+            <a:r>
+              <a:rPr lang="en-US"/>
+              <a:t>Click to edit Master title style</a:t>
+            </a:r>
+            <a:endParaRPr lang="en-US" dirty="0"/>
+          </a:p>
+        </p:txBody>
+      </p:sp>
+      <p:sp>
+        <p:nvSpPr>
+          <p:cNvPr id="3" name="Text Placeholder 2"/>
+          <p:cNvSpPr>
+            <a:spLocks noGrp="1"/>
+          </p:cNvSpPr>
+          <p:nvPr>
+            <p:ph type="body" idx="1"/>
+          </p:nvPr>
+        </p:nvSpPr>
+        <p:spPr>
+          <a:xfrm>
+            <a:off x="831850" y="4589463"/>
+            <a:ext cx="10515600" cy="1500187"/>
+          </a:xfrm>
+        </p:spPr>
+        <p:txBody>
+          <a:bodyPr/>
+          <a:lstStyle>
+            <a:lvl1pPr marL="0" indent="0">
+              <a:buNone/>
+              <a:defRPr sz="2400">
+                <a:solidFill>
+                  <a:schemeClr val="tx1">
+                    <a:tint val="75000"/>
+                  </a:schemeClr>
+                </a:solidFill>
+              </a:defRPr>
+            </a:lvl1pPr>
+            <a:lvl2pPr marL="457200" indent="0">
+              <a:buNone/>
+              <a:defRPr sz="2000">
+                <a:solidFill>
+                  <a:schemeClr val="tx1">
+                    <a:tint val="75000"/>
+                  </a:schemeClr>
+                </a:solidFill>
+              </a:defRPr>
+            </a:lvl2pPr>
+            <a:lvl3pPr marL="914400" indent="0">
+              <a:buNone/>
+              <a:defRPr sz="1800">
+                <a:solidFill>
+                  <a:schemeClr val="tx1">
+                    <a:tint val="75000"/>
+                  </a:schemeClr>
+                </a:solidFill>
+              </a:defRPr>
+            </a:lvl3pPr>
+            <a:lvl4pPr marL="1371600" indent="0">
+              <a:buNone/>
+              <a:defRPr sz="1600">
+                <a:solidFill>
+                  <a:schemeClr val="tx1">
+                    <a:tint val="75000"/>
+                  </a:schemeClr>
+                </a:solidFill>
+              </a:defRPr>
+            </a:lvl4pPr>
+            <a:lvl5pPr marL="1828800" indent="0">
+              <a:buNone/>
+              <a:defRPr sz="1600">
+                <a:solidFill>
+                  <a:schemeClr val="tx1">
+                    <a:tint val="75000"/>
+                  </a:schemeClr>
+                </a:solidFill>
+              </a:defRPr>
+            </a:lvl5pPr>
+            <a:lvl6pPr marL="2286000" indent="0">
+              <a:buNone/>
+              <a:defRPr sz="1600">
+                <a:solidFill>
+                  <a:schemeClr val="tx1">
+                    <a:tint val="75000"/>
+                  </a:schemeClr>
+                </a:solidFill>
+              </a:defRPr>
+            </a:lvl6pPr>
+            <a:lvl7pPr marL="2743200" indent="0">
+              <a:buNone/>
+              <a:defRPr sz="1600">
+                <a:solidFill>
+                  <a:schemeClr val="tx1">
+                    <a:tint val="75000"/>
+                  </a:schemeClr>
+                </a:solidFill>
+              </a:defRPr>
+            </a:lvl7pPr>
+            <a:lvl8pPr marL="3200400" indent="0">
+              <a:buNone/>
+              <a:defRPr sz="1600">
+                <a:solidFill>
+                  <a:schemeClr val="tx1">
+                    <a:tint val="75000"/>
+                  </a:schemeClr>
+                </a:solidFill>
+              </a:defRPr>
+            </a:lvl8pPr>
+            <a:lvl9pPr marL="3657600" indent="0">
+              <a:buNone/>
+              <a:defRPr sz="1600">
+                <a:solidFill>
+                  <a:schemeClr val="tx1">
+                    <a:tint val="75000"/>
+                  </a:schemeClr>
+                </a:solidFill>
+              </a:defRPr>
+            </a:lvl9pPr>
+          </a:lstStyle>
+          <a:p>
+            <a:pPr lvl="0"/>
+            <a:r>
+              <a:rPr lang="en-US"/>
+              <a:t>Click to edit Master text styles</a:t>
+            </a:r>
+          </a:p>
+        </p:txBody>
+      </p:sp>
+      <p:sp>
+        <p:nvSpPr>
+          <p:cNvPr id="4" name="Date Placeholder 3"/>
+          <p:cNvSpPr>
+            <a:spLocks noGrp="1"/>
+          </p:cNvSpPr>
+          <p:nvPr>
+            <p:ph type="dt" sz="half" idx="10"/>
+          </p:nvPr>
+        </p:nvSpPr>
+        <p:spPr/>
+        <p:txBody>
+          <a:bodyPr/>
+          <a:lstStyle/>
+          <a:p>
+            <a:fld id="{C764DE79-268F-4C1A-8933-263129D2AF90}" type="datetimeFigureOut">
+              <a:rPr lang="en-US" dirty="0"/>
+              <a:t>12/9/2025</a:t>
+            </a:fld>
+            <a:endParaRPr lang="en-US" dirty="0"/>
+          </a:p>
+        </p:txBody>
+      </p:sp>
+      <p:sp>
+        <p:nvSpPr>
+          <p:cNvPr id="5" name="Footer Placeholder 4"/>
+          <p:cNvSpPr>
+            <a:spLocks noGrp="1"/>
+          </p:cNvSpPr>
+          <p:nvPr>
+            <p:ph type="ftr" sz="quarter" idx="11"/>
+          </p:nvPr>
+        </p:nvSpPr>
+        <p:spPr/>
+        <p:txBody>
+          <a:bodyPr/>
+          <a:lstStyle/>
+          <a:p>
+            <a:endParaRPr lang="en-US" dirty="0"/>
+          </a:p>
+        </p:txBody>
+      </p:sp>
+      <p:sp>
+        <p:nvSpPr>
+          <p:cNvPr id="6" name="Slide Number Placeholder 5"/>
+          <p:cNvSpPr>
+            <a:spLocks noGrp="1"/>
+          </p:cNvSpPr>
+          <p:nvPr>
+            <p:ph type="sldNum" sz="quarter" idx="12"/>
+          </p:nvPr>
+        </p:nvSpPr>
+        <p:spPr/>
+        <p:txBody>
+          <a:bodyPr/>
+          <a:lstStyle/>
+          <a:p>
+            <a:fld id="{48F63A3B-78C7-47BE-AE5E-E10140E04643}" type="slidenum">
+              <a:rPr lang="en-US" dirty="0"/>
+              <a:t>‹#›</a:t>
+            </a:fld>
+            <a:endParaRPr lang="en-US" dirty="0"/>
+          </a:p>
+        </p:txBody>
+      </p:sp>
+    </p:spTree>
+    <p:extLst>
+      <p:ext uri="{BB962C8B-B14F-4D97-AF65-F5344CB8AC3E}">
+        <p14:creationId xmlns:p14="http://schemas.microsoft.com/office/powerpoint/2010/main" val="3388945379"/>
+      </p:ext>
+    </p:extLst>
+  </p:cSld>
+  <p:clrMapOvr>
+    <a:masterClrMapping/>
+  </p:clrMapOvr>
+</p:sldLayout>
+</file>
+
+<file path=ppt/slideLayouts/slideLayout7.xml><?xml version="1.0" encoding="utf-8"?>
+<p:sldLayout xmlns:a="http://schemas.openxmlformats.org/drawingml/2006/main" xmlns:r="http://schemas.openxmlformats.org/officeDocument/2006/relationships" xmlns:p="http://schemas.openxmlformats.org/presentationml/2006/main" type="twoObj" preserve="1">
+  <p:cSld name="Two Content">
+    <p:spTree>
+      <p:nvGrpSpPr>
+        <p:cNvPr id="1" name=""/>
+        <p:cNvGrpSpPr/>
+        <p:nvPr/>
+      </p:nvGrpSpPr>
+      <p:grpSpPr>
+        <a:xfrm>
+          <a:off x="0" y="0"/>
+          <a:ext cx="0" cy="0"/>
+          <a:chOff x="0" y="0"/>
+          <a:chExt cx="0" cy="0"/>
+        </a:xfrm>
+      </p:grpSpPr>
+      <p:sp>
+        <p:nvSpPr>
+          <p:cNvPr id="2" name="Title 1"/>
+          <p:cNvSpPr>
+            <a:spLocks noGrp="1"/>
+          </p:cNvSpPr>
+          <p:nvPr>
+            <p:ph type="title"/>
+          </p:nvPr>
+        </p:nvSpPr>
+        <p:spPr/>
+        <p:txBody>
+          <a:bodyPr/>
+          <a:lstStyle/>
+          <a:p>
+            <a:r>
+              <a:rPr lang="en-US"/>
+              <a:t>Click to edit Master title style</a:t>
+            </a:r>
+            <a:endParaRPr lang="en-US" dirty="0"/>
+          </a:p>
+        </p:txBody>
+      </p:sp>
+      <p:sp>
+        <p:nvSpPr>
+          <p:cNvPr id="3" name="Content Placeholder 2"/>
+          <p:cNvSpPr>
+            <a:spLocks noGrp="1"/>
+          </p:cNvSpPr>
+          <p:nvPr>
+            <p:ph sz="half" idx="1"/>
+          </p:nvPr>
+        </p:nvSpPr>
+        <p:spPr>
+          <a:xfrm>
+            <a:off x="838200" y="1825625"/>
+            <a:ext cx="5181600" cy="4351338"/>
+          </a:xfrm>
+        </p:spPr>
+        <p:txBody>
+          <a:bodyPr/>
+          <a:lstStyle/>
+          <a:p>
+            <a:pPr lvl="0"/>
+            <a:r>
+              <a:rPr lang="en-US"/>
+              <a:t>Click to edit Master text styles</a:t>
+            </a:r>
+          </a:p>
+          <a:p>
+            <a:pPr lvl="1"/>
+            <a:r>
+              <a:rPr lang="en-US"/>
+              <a:t>Second level</a:t>
+            </a:r>
+          </a:p>
+          <a:p>
+            <a:pPr lvl="2"/>
+            <a:r>
+              <a:rPr lang="en-US"/>
+              <a:t>Third level</a:t>
+            </a:r>
+          </a:p>
+          <a:p>
+            <a:pPr lvl="3"/>
+            <a:r>
+              <a:rPr lang="en-US"/>
+              <a:t>Fourth level</a:t>
+            </a:r>
+          </a:p>
+          <a:p>
+            <a:pPr lvl="4"/>
+            <a:r>
+              <a:rPr lang="en-US"/>
+              <a:t>Fifth level</a:t>
+            </a:r>
+            <a:endParaRPr lang="en-US" dirty="0"/>
+          </a:p>
+        </p:txBody>
+      </p:sp>
+      <p:sp>
+        <p:nvSpPr>
+          <p:cNvPr id="4" name="Content Placeholder 3"/>
+          <p:cNvSpPr>
+            <a:spLocks noGrp="1"/>
+          </p:cNvSpPr>
+          <p:nvPr>
+            <p:ph sz="half" idx="2"/>
+          </p:nvPr>
+        </p:nvSpPr>
+        <p:spPr>
+          <a:xfrm>
+            <a:off x="6172200" y="1825625"/>
+            <a:ext cx="5181600" cy="4351338"/>
+          </a:xfrm>
+        </p:spPr>
+        <p:txBody>
+          <a:bodyPr/>
+          <a:lstStyle/>
+          <a:p>
+            <a:pPr lvl="0"/>
+            <a:r>
+              <a:rPr lang="en-US"/>
+              <a:t>Click to edit Master text styles</a:t>
+            </a:r>
+          </a:p>
+          <a:p>
+            <a:pPr lvl="1"/>
+            <a:r>
+              <a:rPr lang="en-US"/>
+              <a:t>Second level</a:t>
+            </a:r>
+          </a:p>
+          <a:p>
+            <a:pPr lvl="2"/>
+            <a:r>
+              <a:rPr lang="en-US"/>
+              <a:t>Third level</a:t>
+            </a:r>
+          </a:p>
+          <a:p>
+            <a:pPr lvl="3"/>
+            <a:r>
+              <a:rPr lang="en-US"/>
+              <a:t>Fourth level</a:t>
+            </a:r>
+          </a:p>
+          <a:p>
+            <a:pPr lvl="4"/>
+            <a:r>
+              <a:rPr lang="en-US"/>
+              <a:t>Fifth level</a:t>
+            </a:r>
+            <a:endParaRPr lang="en-US" dirty="0"/>
+          </a:p>
+        </p:txBody>
+      </p:sp>
+      <p:sp>
+        <p:nvSpPr>
+          <p:cNvPr id="5" name="Date Placeholder 4"/>
+          <p:cNvSpPr>
+            <a:spLocks noGrp="1"/>
+          </p:cNvSpPr>
+          <p:nvPr>
+            <p:ph type="dt" sz="half" idx="10"/>
+          </p:nvPr>
+        </p:nvSpPr>
+        <p:spPr/>
+        <p:txBody>
+          <a:bodyPr/>
+          <a:lstStyle/>
+          <a:p>
+            <a:fld id="{C764DE79-268F-4C1A-8933-263129D2AF90}" type="datetimeFigureOut">
+              <a:rPr lang="en-US" dirty="0"/>
+              <a:t>12/9/2025</a:t>
+            </a:fld>
+            <a:endParaRPr lang="en-US" dirty="0"/>
+          </a:p>
+        </p:txBody>
+      </p:sp>
+      <p:sp>
+        <p:nvSpPr>
+          <p:cNvPr id="6" name="Footer Placeholder 5"/>
+          <p:cNvSpPr>
+            <a:spLocks noGrp="1"/>
+          </p:cNvSpPr>
+          <p:nvPr>
+            <p:ph type="ftr" sz="quarter" idx="11"/>
+          </p:nvPr>
+        </p:nvSpPr>
+        <p:spPr/>
+        <p:txBody>
+          <a:bodyPr/>
+          <a:lstStyle/>
+          <a:p>
+            <a:endParaRPr lang="en-US" dirty="0"/>
+          </a:p>
+        </p:txBody>
+      </p:sp>
+      <p:sp>
+        <p:nvSpPr>
+          <p:cNvPr id="7" name="Slide Number Placeholder 6"/>
+          <p:cNvSpPr>
+            <a:spLocks noGrp="1"/>
+          </p:cNvSpPr>
+          <p:nvPr>
+            <p:ph type="sldNum" sz="quarter" idx="12"/>
+          </p:nvPr>
+        </p:nvSpPr>
+        <p:spPr/>
+        <p:txBody>
+          <a:bodyPr/>
+          <a:lstStyle/>
+          <a:p>
+            <a:fld id="{48F63A3B-78C7-47BE-AE5E-E10140E04643}" type="slidenum">
+              <a:rPr lang="en-US" dirty="0"/>
+              <a:t>‹#›</a:t>
+            </a:fld>
+            <a:endParaRPr lang="en-US" dirty="0"/>
+          </a:p>
+        </p:txBody>
+      </p:sp>
+    </p:spTree>
+    <p:extLst>
+      <p:ext uri="{BB962C8B-B14F-4D97-AF65-F5344CB8AC3E}">
+        <p14:creationId xmlns:p14="http://schemas.microsoft.com/office/powerpoint/2010/main" val="1050126329"/>
+      </p:ext>
+    </p:extLst>
+  </p:cSld>
+  <p:clrMapOvr>
+    <a:masterClrMapping/>
+  </p:clrMapOvr>
+</p:sldLayout>
+</file>
+
+<file path=ppt/slideLayouts/slideLayout8.xml><?xml version="1.0" encoding="utf-8"?>
+<p:sldLayout xmlns:a="http://schemas.openxmlformats.org/drawingml/2006/main" xmlns:r="http://schemas.openxmlformats.org/officeDocument/2006/relationships" xmlns:p="http://schemas.openxmlformats.org/presentationml/2006/main" type="twoTxTwoObj" preserve="1">
+  <p:cSld name="Comparison">
+    <p:spTree>
+      <p:nvGrpSpPr>
+        <p:cNvPr id="1" name=""/>
+        <p:cNvGrpSpPr/>
+        <p:nvPr/>
+      </p:nvGrpSpPr>
+      <p:grpSpPr>
+        <a:xfrm>
+          <a:off x="0" y="0"/>
+          <a:ext cx="0" cy="0"/>
+          <a:chOff x="0" y="0"/>
+          <a:chExt cx="0" cy="0"/>
+        </a:xfrm>
+      </p:grpSpPr>
+      <p:sp>
+        <p:nvSpPr>
+          <p:cNvPr id="2" name="Title 1"/>
+          <p:cNvSpPr>
+            <a:spLocks noGrp="1"/>
+          </p:cNvSpPr>
+          <p:nvPr>
+            <p:ph type="title"/>
+          </p:nvPr>
+        </p:nvSpPr>
+        <p:spPr>
+          <a:xfrm>
+            <a:off x="839788" y="365125"/>
+            <a:ext cx="10515600" cy="1325563"/>
+          </a:xfrm>
+        </p:spPr>
+        <p:txBody>
+          <a:bodyPr/>
+          <a:lstStyle/>
+          <a:p>
+            <a:r>
+              <a:rPr lang="en-US"/>
+              <a:t>Click to edit Master title style</a:t>
+            </a:r>
+            <a:endParaRPr lang="en-US" dirty="0"/>
+          </a:p>
+        </p:txBody>
+      </p:sp>
+      <p:sp>
+        <p:nvSpPr>
+          <p:cNvPr id="3" name="Text Placeholder 2"/>
+          <p:cNvSpPr>
+            <a:spLocks noGrp="1"/>
+          </p:cNvSpPr>
+          <p:nvPr>
+            <p:ph type="body" idx="1"/>
+          </p:nvPr>
+        </p:nvSpPr>
+        <p:spPr>
+          <a:xfrm>
+            <a:off x="839788" y="1681163"/>
+            <a:ext cx="5157787" cy="823912"/>
+          </a:xfrm>
+        </p:spPr>
+        <p:txBody>
+          <a:bodyPr anchor="b"/>
+          <a:lstStyle>
+            <a:lvl1pPr marL="0" indent="0">
+              <a:buNone/>
+              <a:defRPr sz="2400" b="1"/>
+            </a:lvl1pPr>
+            <a:lvl2pPr marL="457200" indent="0">
+              <a:buNone/>
+              <a:defRPr sz="2000" b="1"/>
+            </a:lvl2pPr>
+            <a:lvl3pPr marL="914400" indent="0">
+              <a:buNone/>
+              <a:defRPr sz="1800" b="1"/>
+            </a:lvl3pPr>
+            <a:lvl4pPr marL="1371600" indent="0">
+              <a:buNone/>
+              <a:defRPr sz="1600" b="1"/>
+            </a:lvl4pPr>
+            <a:lvl5pPr marL="1828800" indent="0">
+              <a:buNone/>
+              <a:defRPr sz="1600" b="1"/>
+            </a:lvl5pPr>
+            <a:lvl6pPr marL="2286000" indent="0">
+              <a:buNone/>
+              <a:defRPr sz="1600" b="1"/>
+            </a:lvl6pPr>
+            <a:lvl7pPr marL="2743200" indent="0">
+              <a:buNone/>
+              <a:defRPr sz="1600" b="1"/>
+            </a:lvl7pPr>
+            <a:lvl8pPr marL="3200400" indent="0">
+              <a:buNone/>
+              <a:defRPr sz="1600" b="1"/>
+            </a:lvl8pPr>
+            <a:lvl9pPr marL="3657600" indent="0">
+              <a:buNone/>
+              <a:defRPr sz="1600" b="1"/>
+            </a:lvl9pPr>
+          </a:lstStyle>
+          <a:p>
+            <a:pPr lvl="0"/>
+            <a:r>
+              <a:rPr lang="en-US"/>
+              <a:t>Click to edit Master text styles</a:t>
+            </a:r>
+          </a:p>
+        </p:txBody>
+      </p:sp>
+      <p:sp>
+        <p:nvSpPr>
+          <p:cNvPr id="4" name="Content Placeholder 3"/>
+          <p:cNvSpPr>
+            <a:spLocks noGrp="1"/>
+          </p:cNvSpPr>
+          <p:nvPr>
+            <p:ph sz="half" idx="2"/>
+          </p:nvPr>
+        </p:nvSpPr>
+        <p:spPr>
+          <a:xfrm>
+            <a:off x="839788" y="2505075"/>
+            <a:ext cx="5157787" cy="3684588"/>
+          </a:xfrm>
+        </p:spPr>
+        <p:txBody>
+          <a:bodyPr/>
+          <a:lstStyle/>
+          <a:p>
+            <a:pPr lvl="0"/>
+            <a:r>
+              <a:rPr lang="en-US"/>
+              <a:t>Click to edit Master text styles</a:t>
+            </a:r>
+          </a:p>
+          <a:p>
+            <a:pPr lvl="1"/>
+            <a:r>
+              <a:rPr lang="en-US"/>
+              <a:t>Second level</a:t>
+            </a:r>
+          </a:p>
+          <a:p>
+            <a:pPr lvl="2"/>
+            <a:r>
+              <a:rPr lang="en-US"/>
+              <a:t>Third level</a:t>
+            </a:r>
+          </a:p>
+          <a:p>
+            <a:pPr lvl="3"/>
+            <a:r>
+              <a:rPr lang="en-US"/>
+              <a:t>Fourth level</a:t>
+            </a:r>
+          </a:p>
+          <a:p>
+            <a:pPr lvl="4"/>
+            <a:r>
+              <a:rPr lang="en-US"/>
+              <a:t>Fifth level</a:t>
+            </a:r>
+            <a:endParaRPr lang="en-US" dirty="0"/>
+          </a:p>
+        </p:txBody>
+      </p:sp>
+      <p:sp>
+        <p:nvSpPr>
+          <p:cNvPr id="5" name="Text Placeholder 4"/>
+          <p:cNvSpPr>
+            <a:spLocks noGrp="1"/>
+          </p:cNvSpPr>
+          <p:nvPr>
+            <p:ph type="body" sz="quarter" idx="3"/>
+          </p:nvPr>
+        </p:nvSpPr>
+        <p:spPr>
+          <a:xfrm>
+            <a:off x="6172200" y="1681163"/>
+            <a:ext cx="5183188" cy="823912"/>
+          </a:xfrm>
+        </p:spPr>
+        <p:txBody>
+          <a:bodyPr anchor="b"/>
+          <a:lstStyle>
+            <a:lvl1pPr marL="0" indent="0">
+              <a:buNone/>
+              <a:defRPr sz="2400" b="1"/>
+            </a:lvl1pPr>
+            <a:lvl2pPr marL="457200" indent="0">
+              <a:buNone/>
+              <a:defRPr sz="2000" b="1"/>
+            </a:lvl2pPr>
+            <a:lvl3pPr marL="914400" indent="0">
+              <a:buNone/>
+              <a:defRPr sz="1800" b="1"/>
+            </a:lvl3pPr>
+            <a:lvl4pPr marL="1371600" indent="0">
+              <a:buNone/>
+              <a:defRPr sz="1600" b="1"/>
+            </a:lvl4pPr>
+            <a:lvl5pPr marL="1828800" indent="0">
+              <a:buNone/>
+              <a:defRPr sz="1600" b="1"/>
+            </a:lvl5pPr>
+            <a:lvl6pPr marL="2286000" indent="0">
+              <a:buNone/>
+              <a:defRPr sz="1600" b="1"/>
+            </a:lvl6pPr>
+            <a:lvl7pPr marL="2743200" indent="0">
+              <a:buNone/>
+              <a:defRPr sz="1600" b="1"/>
+            </a:lvl7pPr>
+            <a:lvl8pPr marL="3200400" indent="0">
+              <a:buNone/>
+              <a:defRPr sz="1600" b="1"/>
+            </a:lvl8pPr>
+            <a:lvl9pPr marL="3657600" indent="0">
+              <a:buNone/>
+              <a:defRPr sz="1600" b="1"/>
+            </a:lvl9pPr>
+          </a:lstStyle>
+          <a:p>
+            <a:pPr lvl="0"/>
+            <a:r>
+              <a:rPr lang="en-US"/>
+              <a:t>Click to edit Master text styles</a:t>
+            </a:r>
+          </a:p>
+        </p:txBody>
+      </p:sp>
+      <p:sp>
+        <p:nvSpPr>
+          <p:cNvPr id="6" name="Content Placeholder 5"/>
+          <p:cNvSpPr>
+            <a:spLocks noGrp="1"/>
+          </p:cNvSpPr>
+          <p:nvPr>
+            <p:ph sz="quarter" idx="4"/>
+          </p:nvPr>
+        </p:nvSpPr>
+        <p:spPr>
+          <a:xfrm>
+            <a:off x="6172200" y="2505075"/>
+            <a:ext cx="5183188" cy="3684588"/>
+          </a:xfrm>
+        </p:spPr>
+        <p:txBody>
+          <a:bodyPr/>
+          <a:lstStyle/>
+          <a:p>
+            <a:pPr lvl="0"/>
+            <a:r>
+              <a:rPr lang="en-US"/>
+              <a:t>Click to edit Master text styles</a:t>
+            </a:r>
+          </a:p>
+          <a:p>
+            <a:pPr lvl="1"/>
+            <a:r>
+              <a:rPr lang="en-US"/>
+              <a:t>Second level</a:t>
+            </a:r>
+          </a:p>
+          <a:p>
+            <a:pPr lvl="2"/>
+            <a:r>
+              <a:rPr lang="en-US"/>
+              <a:t>Third level</a:t>
+            </a:r>
+          </a:p>
+          <a:p>
+            <a:pPr lvl="3"/>
+            <a:r>
+              <a:rPr lang="en-US"/>
+              <a:t>Fourth level</a:t>
+            </a:r>
+          </a:p>
+          <a:p>
+            <a:pPr lvl="4"/>
+            <a:r>
+              <a:rPr lang="en-US"/>
+              <a:t>Fifth level</a:t>
+            </a:r>
+            <a:endParaRPr lang="en-US" dirty="0"/>
+          </a:p>
+        </p:txBody>
+      </p:sp>
+      <p:sp>
+        <p:nvSpPr>
+          <p:cNvPr id="7" name="Date Placeholder 6"/>
+          <p:cNvSpPr>
+            <a:spLocks noGrp="1"/>
+          </p:cNvSpPr>
+          <p:nvPr>
+            <p:ph type="dt" sz="half" idx="10"/>
+          </p:nvPr>
+        </p:nvSpPr>
+        <p:spPr/>
+        <p:txBody>
+          <a:bodyPr/>
+          <a:lstStyle/>
+          <a:p>
+            <a:fld id="{C764DE79-268F-4C1A-8933-263129D2AF90}" type="datetimeFigureOut">
+              <a:rPr lang="en-US" dirty="0"/>
+              <a:t>12/9/2025</a:t>
+            </a:fld>
+            <a:endParaRPr lang="en-US" dirty="0"/>
+          </a:p>
+        </p:txBody>
+      </p:sp>
+      <p:sp>
+        <p:nvSpPr>
+          <p:cNvPr id="8" name="Footer Placeholder 7"/>
+          <p:cNvSpPr>
+            <a:spLocks noGrp="1"/>
+          </p:cNvSpPr>
+          <p:nvPr>
+            <p:ph type="ftr" sz="quarter" idx="11"/>
+          </p:nvPr>
+        </p:nvSpPr>
+        <p:spPr/>
+        <p:txBody>
+          <a:bodyPr/>
+          <a:lstStyle/>
+          <a:p>
+            <a:endParaRPr lang="en-US" dirty="0"/>
+          </a:p>
+        </p:txBody>
+      </p:sp>
+      <p:sp>
+        <p:nvSpPr>
+          <p:cNvPr id="9" name="Slide Number Placeholder 8"/>
+          <p:cNvSpPr>
+            <a:spLocks noGrp="1"/>
+          </p:cNvSpPr>
+          <p:nvPr>
+            <p:ph type="sldNum" sz="quarter" idx="12"/>
+          </p:nvPr>
+        </p:nvSpPr>
+        <p:spPr/>
+        <p:txBody>
+          <a:bodyPr/>
+          <a:lstStyle/>
+          <a:p>
+            <a:fld id="{48F63A3B-78C7-47BE-AE5E-E10140E04643}" type="slidenum">
+              <a:rPr lang="en-US" dirty="0"/>
+              <a:t>‹#›</a:t>
+            </a:fld>
+            <a:endParaRPr lang="en-US" dirty="0"/>
+          </a:p>
+        </p:txBody>
+      </p:sp>
+    </p:spTree>
+    <p:extLst>
+      <p:ext uri="{BB962C8B-B14F-4D97-AF65-F5344CB8AC3E}">
+        <p14:creationId xmlns:p14="http://schemas.microsoft.com/office/powerpoint/2010/main" val="1861960153"/>
+      </p:ext>
+    </p:extLst>
+  </p:cSld>
+  <p:clrMapOvr>
+    <a:masterClrMapping/>
+  </p:clrMapOvr>
+</p:sldLayout>
+</file>
+
+<file path=ppt/slideLayouts/slideLayout9.xml><?xml version="1.0" encoding="utf-8"?>
+<p:sldLayout xmlns:a="http://schemas.openxmlformats.org/drawingml/2006/main" xmlns:r="http://schemas.openxmlformats.org/officeDocument/2006/relationships" xmlns:p="http://schemas.openxmlformats.org/presentationml/2006/main" type="titleOnly" preserve="1">
+  <p:cSld name="Title Only">
+    <p:spTree>
+      <p:nvGrpSpPr>
+        <p:cNvPr id="1" name=""/>
+        <p:cNvGrpSpPr/>
+        <p:nvPr/>
+      </p:nvGrpSpPr>
+      <p:grpSpPr>
+        <a:xfrm>
+          <a:off x="0" y="0"/>
+          <a:ext cx="0" cy="0"/>
+          <a:chOff x="0" y="0"/>
+          <a:chExt cx="0" cy="0"/>
+        </a:xfrm>
+      </p:grpSpPr>
+      <p:sp>
+        <p:nvSpPr>
+          <p:cNvPr id="2" name="Title 1"/>
+          <p:cNvSpPr>
+            <a:spLocks noGrp="1"/>
+          </p:cNvSpPr>
+          <p:nvPr>
+            <p:ph type="title"/>
+          </p:nvPr>
+        </p:nvSpPr>
+        <p:spPr/>
+        <p:txBody>
+          <a:bodyPr/>
+          <a:lstStyle/>
+          <a:p>
+            <a:r>
+              <a:rPr lang="en-US"/>
+              <a:t>Click to edit Master title style</a:t>
+            </a:r>
+            <a:endParaRPr lang="en-US" dirty="0"/>
+          </a:p>
+        </p:txBody>
+      </p:sp>
+      <p:sp>
+        <p:nvSpPr>
+          <p:cNvPr id="3" name="Date Placeholder 2"/>
+          <p:cNvSpPr>
+            <a:spLocks noGrp="1"/>
+          </p:cNvSpPr>
+          <p:nvPr>
+            <p:ph type="dt" sz="half" idx="10"/>
+          </p:nvPr>
+        </p:nvSpPr>
+        <p:spPr/>
+        <p:txBody>
+          <a:bodyPr/>
+          <a:lstStyle/>
+          <a:p>
+            <a:fld id="{C764DE79-268F-4C1A-8933-263129D2AF90}" type="datetimeFigureOut">
+              <a:rPr lang="en-US" dirty="0"/>
+              <a:t>12/9/2025</a:t>
+            </a:fld>
+            <a:endParaRPr lang="en-US" dirty="0"/>
+          </a:p>
+        </p:txBody>
+      </p:sp>
+      <p:sp>
+        <p:nvSpPr>
+          <p:cNvPr id="4" name="Footer Placeholder 3"/>
+          <p:cNvSpPr>
+            <a:spLocks noGrp="1"/>
+          </p:cNvSpPr>
+          <p:nvPr>
+            <p:ph type="ftr" sz="quarter" idx="11"/>
+          </p:nvPr>
+        </p:nvSpPr>
+        <p:spPr/>
+        <p:txBody>
+          <a:bodyPr/>
+          <a:lstStyle/>
+          <a:p>
+            <a:endParaRPr lang="en-US" dirty="0"/>
+          </a:p>
+        </p:txBody>
+      </p:sp>
+      <p:sp>
+        <p:nvSpPr>
+          <p:cNvPr id="5" name="Slide Number Placeholder 4"/>
+          <p:cNvSpPr>
+            <a:spLocks noGrp="1"/>
+          </p:cNvSpPr>
+          <p:nvPr>
+            <p:ph type="sldNum" sz="quarter" idx="12"/>
+          </p:nvPr>
+        </p:nvSpPr>
+        <p:spPr/>
+        <p:txBody>
+          <a:bodyPr/>
+          <a:lstStyle/>
+          <a:p>
+            <a:fld id="{48F63A3B-78C7-47BE-AE5E-E10140E04643}" type="slidenum">
+              <a:rPr lang="en-US" dirty="0"/>
+              <a:t>‹#›</a:t>
+            </a:fld>
+            <a:endParaRPr lang="en-US" dirty="0"/>
+          </a:p>
+        </p:txBody>
+      </p:sp>
+    </p:spTree>
+    <p:extLst>
+      <p:ext uri="{BB962C8B-B14F-4D97-AF65-F5344CB8AC3E}">
+        <p14:creationId xmlns:p14="http://schemas.microsoft.com/office/powerpoint/2010/main" val="4262456463"/>
       </p:ext>
     </p:extLst>
   </p:cSld>
@@ -2756,8 +5131,8 @@
         </p:nvSpPr>
         <p:spPr bwMode="auto">
           <a:xfrm>
-            <a:off x="468313" y="765175"/>
-            <a:ext cx="215900" cy="215900"/>
+            <a:off x="624417" y="765175"/>
+            <a:ext cx="287867" cy="215900"/>
           </a:xfrm>
           <a:prstGeom prst="rect">
             <a:avLst/>
@@ -2780,7 +5155,7 @@
             <a:pPr>
               <a:defRPr/>
             </a:pPr>
-            <a:endParaRPr lang="en-US"/>
+            <a:endParaRPr lang="en-US" sz="6000"/>
           </a:p>
         </p:txBody>
       </p:sp>
@@ -2794,8 +5169,8 @@
         </p:nvSpPr>
         <p:spPr bwMode="auto">
           <a:xfrm>
-            <a:off x="757238" y="765175"/>
-            <a:ext cx="287337" cy="215900"/>
+            <a:off x="1009651" y="765175"/>
+            <a:ext cx="383116" cy="215900"/>
           </a:xfrm>
           <a:prstGeom prst="rect">
             <a:avLst/>
@@ -2840,8 +5215,8 @@
         </p:nvSpPr>
         <p:spPr bwMode="auto">
           <a:xfrm>
-            <a:off x="1116013" y="765175"/>
-            <a:ext cx="865187" cy="215900"/>
+            <a:off x="1488018" y="765175"/>
+            <a:ext cx="1153583" cy="215900"/>
           </a:xfrm>
           <a:prstGeom prst="rect">
             <a:avLst/>
@@ -2864,7 +5239,7 @@
             <a:pPr>
               <a:defRPr/>
             </a:pPr>
-            <a:endParaRPr lang="en-US"/>
+            <a:endParaRPr lang="en-US" sz="6000"/>
           </a:p>
         </p:txBody>
       </p:sp>
@@ -2878,8 +5253,8 @@
         </p:nvSpPr>
         <p:spPr bwMode="auto">
           <a:xfrm>
-            <a:off x="2052638" y="765175"/>
-            <a:ext cx="576262" cy="215900"/>
+            <a:off x="2736851" y="765175"/>
+            <a:ext cx="768349" cy="215900"/>
           </a:xfrm>
           <a:prstGeom prst="rect">
             <a:avLst/>
@@ -2902,7 +5277,7 @@
             <a:pPr>
               <a:defRPr/>
             </a:pPr>
-            <a:endParaRPr lang="en-US"/>
+            <a:endParaRPr lang="en-US" sz="6000"/>
           </a:p>
         </p:txBody>
       </p:sp>
@@ -2916,8 +5291,8 @@
         </p:nvSpPr>
         <p:spPr bwMode="auto">
           <a:xfrm>
-            <a:off x="828675" y="909638"/>
-            <a:ext cx="576263" cy="215900"/>
+            <a:off x="1104901" y="909638"/>
+            <a:ext cx="768351" cy="215900"/>
           </a:xfrm>
           <a:prstGeom prst="rect">
             <a:avLst/>
@@ -2940,7 +5315,7 @@
             <a:pPr>
               <a:defRPr/>
             </a:pPr>
-            <a:endParaRPr lang="en-US"/>
+            <a:endParaRPr lang="en-US" sz="6000"/>
           </a:p>
         </p:txBody>
       </p:sp>
@@ -2961,8 +5336,8 @@
         </p:blipFill>
         <p:spPr bwMode="auto">
           <a:xfrm>
-            <a:off x="250825" y="6237288"/>
-            <a:ext cx="3635375" cy="422275"/>
+            <a:off x="334434" y="6237289"/>
+            <a:ext cx="4847167" cy="422275"/>
           </a:xfrm>
           <a:prstGeom prst="rect">
             <a:avLst/>
@@ -3358,7 +5733,7 @@
             <a:srgbClr val="F26B43"/>
           </p15:clr>
         </p15:guide>
-        <p15:guide id="2" pos="2880" userDrawn="1">
+        <p15:guide id="2" pos="3840" userDrawn="1">
           <p15:clr>
             <a:srgbClr val="F26B43"/>
           </p15:clr>
@@ -3418,8 +5793,8 @@
         </p:blipFill>
         <p:spPr bwMode="auto">
           <a:xfrm>
-            <a:off x="179512" y="260648"/>
-            <a:ext cx="1872889" cy="665701"/>
+            <a:off x="239350" y="260649"/>
+            <a:ext cx="2497185" cy="665701"/>
           </a:xfrm>
           <a:prstGeom prst="rect">
             <a:avLst/>
@@ -3458,8 +5833,8 @@
         </p:blipFill>
         <p:spPr>
           <a:xfrm>
-            <a:off x="357186" y="6203895"/>
-            <a:ext cx="2350294" cy="476250"/>
+            <a:off x="476248" y="6203895"/>
+            <a:ext cx="3133725" cy="476250"/>
           </a:xfrm>
           <a:prstGeom prst="rect">
             <a:avLst/>
@@ -3494,8 +5869,8 @@
         </p:blipFill>
         <p:spPr>
           <a:xfrm>
-            <a:off x="4006021" y="6082427"/>
-            <a:ext cx="4067870" cy="586933"/>
+            <a:off x="5341361" y="6082428"/>
+            <a:ext cx="5423827" cy="586933"/>
           </a:xfrm>
           <a:prstGeom prst="rect">
             <a:avLst/>
@@ -3533,8 +5908,8 @@
         </p:blipFill>
         <p:spPr>
           <a:xfrm>
-            <a:off x="8073891" y="6226318"/>
-            <a:ext cx="712923" cy="344327"/>
+            <a:off x="10765189" y="6226319"/>
+            <a:ext cx="950564" cy="344327"/>
           </a:xfrm>
           <a:prstGeom prst="rect">
             <a:avLst/>
@@ -3840,7 +6215,714 @@
             <a:srgbClr val="F26B43"/>
           </p15:clr>
         </p15:guide>
-        <p15:guide id="2" pos="3840">
+        <p15:guide id="2" pos="5120" userDrawn="1">
+          <p15:clr>
+            <a:srgbClr val="F26B43"/>
+          </p15:clr>
+        </p15:guide>
+      </p15:sldGuideLst>
+    </p:ext>
+  </p:extLst>
+</p:sldMaster>
+</file>
+
+<file path=ppt/slideMasters/slideMaster3.xml><?xml version="1.0" encoding="utf-8"?>
+<p:sldMaster xmlns:a="http://schemas.openxmlformats.org/drawingml/2006/main" xmlns:r="http://schemas.openxmlformats.org/officeDocument/2006/relationships" xmlns:p="http://schemas.openxmlformats.org/presentationml/2006/main">
+  <p:cSld>
+    <p:bg>
+      <p:bgRef idx="1001">
+        <a:schemeClr val="bg1"/>
+      </p:bgRef>
+    </p:bg>
+    <p:spTree>
+      <p:nvGrpSpPr>
+        <p:cNvPr id="1" name=""/>
+        <p:cNvGrpSpPr/>
+        <p:nvPr/>
+      </p:nvGrpSpPr>
+      <p:grpSpPr>
+        <a:xfrm>
+          <a:off x="0" y="0"/>
+          <a:ext cx="0" cy="0"/>
+          <a:chOff x="0" y="0"/>
+          <a:chExt cx="0" cy="0"/>
+        </a:xfrm>
+      </p:grpSpPr>
+      <p:sp>
+        <p:nvSpPr>
+          <p:cNvPr id="2" name="Title Placeholder 1"/>
+          <p:cNvSpPr>
+            <a:spLocks noGrp="1"/>
+          </p:cNvSpPr>
+          <p:nvPr>
+            <p:ph type="title"/>
+          </p:nvPr>
+        </p:nvSpPr>
+        <p:spPr>
+          <a:xfrm>
+            <a:off x="838200" y="365125"/>
+            <a:ext cx="10515600" cy="1325563"/>
+          </a:xfrm>
+          <a:prstGeom prst="rect">
+            <a:avLst/>
+          </a:prstGeom>
+        </p:spPr>
+        <p:txBody>
+          <a:bodyPr vert="horz" lIns="91440" tIns="45720" rIns="91440" bIns="45720" rtlCol="0" anchor="ctr">
+            <a:normAutofit/>
+          </a:bodyPr>
+          <a:lstStyle/>
+          <a:p>
+            <a:r>
+              <a:rPr lang="en-US"/>
+              <a:t>Click to edit Master title style</a:t>
+            </a:r>
+            <a:endParaRPr lang="en-US" dirty="0"/>
+          </a:p>
+        </p:txBody>
+      </p:sp>
+      <p:sp>
+        <p:nvSpPr>
+          <p:cNvPr id="3" name="Text Placeholder 2"/>
+          <p:cNvSpPr>
+            <a:spLocks noGrp="1"/>
+          </p:cNvSpPr>
+          <p:nvPr>
+            <p:ph type="body" idx="1"/>
+          </p:nvPr>
+        </p:nvSpPr>
+        <p:spPr>
+          <a:xfrm>
+            <a:off x="838200" y="1825625"/>
+            <a:ext cx="10515600" cy="4351338"/>
+          </a:xfrm>
+          <a:prstGeom prst="rect">
+            <a:avLst/>
+          </a:prstGeom>
+        </p:spPr>
+        <p:txBody>
+          <a:bodyPr vert="horz" lIns="91440" tIns="45720" rIns="91440" bIns="45720" rtlCol="0">
+            <a:normAutofit/>
+          </a:bodyPr>
+          <a:lstStyle/>
+          <a:p>
+            <a:pPr lvl="0"/>
+            <a:r>
+              <a:rPr lang="en-US"/>
+              <a:t>Click to edit Master text styles</a:t>
+            </a:r>
+          </a:p>
+          <a:p>
+            <a:pPr lvl="1"/>
+            <a:r>
+              <a:rPr lang="en-US"/>
+              <a:t>Second level</a:t>
+            </a:r>
+          </a:p>
+          <a:p>
+            <a:pPr lvl="2"/>
+            <a:r>
+              <a:rPr lang="en-US"/>
+              <a:t>Third level</a:t>
+            </a:r>
+          </a:p>
+          <a:p>
+            <a:pPr lvl="3"/>
+            <a:r>
+              <a:rPr lang="en-US"/>
+              <a:t>Fourth level</a:t>
+            </a:r>
+          </a:p>
+          <a:p>
+            <a:pPr lvl="4"/>
+            <a:r>
+              <a:rPr lang="en-US"/>
+              <a:t>Fifth level</a:t>
+            </a:r>
+            <a:endParaRPr lang="en-US" dirty="0"/>
+          </a:p>
+        </p:txBody>
+      </p:sp>
+      <p:sp>
+        <p:nvSpPr>
+          <p:cNvPr id="4" name="Date Placeholder 3"/>
+          <p:cNvSpPr>
+            <a:spLocks noGrp="1"/>
+          </p:cNvSpPr>
+          <p:nvPr>
+            <p:ph type="dt" sz="half" idx="2"/>
+          </p:nvPr>
+        </p:nvSpPr>
+        <p:spPr>
+          <a:xfrm>
+            <a:off x="838200" y="6356350"/>
+            <a:ext cx="2743200" cy="365125"/>
+          </a:xfrm>
+          <a:prstGeom prst="rect">
+            <a:avLst/>
+          </a:prstGeom>
+        </p:spPr>
+        <p:txBody>
+          <a:bodyPr vert="horz" lIns="91440" tIns="45720" rIns="91440" bIns="45720" rtlCol="0" anchor="ctr"/>
+          <a:lstStyle>
+            <a:lvl1pPr algn="l">
+              <a:defRPr sz="1200">
+                <a:solidFill>
+                  <a:schemeClr val="tx1">
+                    <a:tint val="75000"/>
+                  </a:schemeClr>
+                </a:solidFill>
+              </a:defRPr>
+            </a:lvl1pPr>
+          </a:lstStyle>
+          <a:p>
+            <a:fld id="{C764DE79-268F-4C1A-8933-263129D2AF90}" type="datetimeFigureOut">
+              <a:rPr lang="en-US" dirty="0"/>
+              <a:t>12/9/2025</a:t>
+            </a:fld>
+            <a:endParaRPr lang="en-US" dirty="0"/>
+          </a:p>
+        </p:txBody>
+      </p:sp>
+      <p:sp>
+        <p:nvSpPr>
+          <p:cNvPr id="5" name="Footer Placeholder 4"/>
+          <p:cNvSpPr>
+            <a:spLocks noGrp="1"/>
+          </p:cNvSpPr>
+          <p:nvPr>
+            <p:ph type="ftr" sz="quarter" idx="3"/>
+          </p:nvPr>
+        </p:nvSpPr>
+        <p:spPr>
+          <a:xfrm>
+            <a:off x="4038600" y="6356350"/>
+            <a:ext cx="4114800" cy="365125"/>
+          </a:xfrm>
+          <a:prstGeom prst="rect">
+            <a:avLst/>
+          </a:prstGeom>
+        </p:spPr>
+        <p:txBody>
+          <a:bodyPr vert="horz" lIns="91440" tIns="45720" rIns="91440" bIns="45720" rtlCol="0" anchor="ctr"/>
+          <a:lstStyle>
+            <a:lvl1pPr algn="ctr">
+              <a:defRPr sz="1200">
+                <a:solidFill>
+                  <a:schemeClr val="tx1">
+                    <a:tint val="75000"/>
+                  </a:schemeClr>
+                </a:solidFill>
+              </a:defRPr>
+            </a:lvl1pPr>
+          </a:lstStyle>
+          <a:p>
+            <a:endParaRPr lang="en-US" dirty="0"/>
+          </a:p>
+        </p:txBody>
+      </p:sp>
+      <p:sp>
+        <p:nvSpPr>
+          <p:cNvPr id="6" name="Slide Number Placeholder 5"/>
+          <p:cNvSpPr>
+            <a:spLocks noGrp="1"/>
+          </p:cNvSpPr>
+          <p:nvPr>
+            <p:ph type="sldNum" sz="quarter" idx="4"/>
+          </p:nvPr>
+        </p:nvSpPr>
+        <p:spPr>
+          <a:xfrm>
+            <a:off x="8610600" y="6356350"/>
+            <a:ext cx="2743200" cy="365125"/>
+          </a:xfrm>
+          <a:prstGeom prst="rect">
+            <a:avLst/>
+          </a:prstGeom>
+        </p:spPr>
+        <p:txBody>
+          <a:bodyPr vert="horz" lIns="91440" tIns="45720" rIns="91440" bIns="45720" rtlCol="0" anchor="ctr"/>
+          <a:lstStyle>
+            <a:lvl1pPr algn="r">
+              <a:defRPr sz="1200">
+                <a:solidFill>
+                  <a:schemeClr val="tx1">
+                    <a:tint val="75000"/>
+                  </a:schemeClr>
+                </a:solidFill>
+              </a:defRPr>
+            </a:lvl1pPr>
+          </a:lstStyle>
+          <a:p>
+            <a:fld id="{48F63A3B-78C7-47BE-AE5E-E10140E04643}" type="slidenum">
+              <a:rPr lang="en-US" dirty="0"/>
+              <a:t>‹#›</a:t>
+            </a:fld>
+            <a:endParaRPr lang="en-US" dirty="0"/>
+          </a:p>
+        </p:txBody>
+      </p:sp>
+      <p:pic>
+        <p:nvPicPr>
+          <p:cNvPr id="7" name="Picture 2" descr="Proposta da CCDR Algarve ao Instituto Nacional de Estatística (INE) | RAARA">
+            <a:extLst>
+              <a:ext uri="{FF2B5EF4-FFF2-40B4-BE49-F238E27FC236}">
+                <a16:creationId xmlns:a16="http://schemas.microsoft.com/office/drawing/2014/main" id="{15BB259D-C105-86D0-2352-14F17054695C}"/>
+              </a:ext>
+            </a:extLst>
+          </p:cNvPr>
+          <p:cNvPicPr>
+            <a:picLocks noChangeAspect="1" noChangeArrowheads="1"/>
+          </p:cNvPicPr>
+          <p:nvPr userDrawn="1"/>
+        </p:nvPicPr>
+        <p:blipFill rotWithShape="1">
+          <a:blip r:embed="rId13" cstate="print">
+            <a:extLst>
+              <a:ext uri="{28A0092B-C50C-407E-A947-70E740481C1C}">
+                <a14:useLocalDpi xmlns:a14="http://schemas.microsoft.com/office/drawing/2010/main" val="0"/>
+              </a:ext>
+            </a:extLst>
+          </a:blip>
+          <a:srcRect t="11352" b="27068"/>
+          <a:stretch/>
+        </p:blipFill>
+        <p:spPr bwMode="auto">
+          <a:xfrm>
+            <a:off x="239350" y="260649"/>
+            <a:ext cx="2497185" cy="665701"/>
+          </a:xfrm>
+          <a:prstGeom prst="rect">
+            <a:avLst/>
+          </a:prstGeom>
+          <a:noFill/>
+          <a:extLst>
+            <a:ext uri="{909E8E84-426E-40DD-AFC4-6F175D3DCCD1}">
+              <a14:hiddenFill xmlns:a14="http://schemas.microsoft.com/office/drawing/2010/main">
+                <a:solidFill>
+                  <a:srgbClr val="FFFFFF"/>
+                </a:solidFill>
+              </a14:hiddenFill>
+            </a:ext>
+          </a:extLst>
+        </p:spPr>
+      </p:pic>
+      <p:pic>
+        <p:nvPicPr>
+          <p:cNvPr id="8" name="Picture 7">
+            <a:extLst>
+              <a:ext uri="{FF2B5EF4-FFF2-40B4-BE49-F238E27FC236}">
+                <a16:creationId xmlns:a16="http://schemas.microsoft.com/office/drawing/2014/main" id="{F0556E44-4CB4-9477-DFE6-80A97E70895D}"/>
+              </a:ext>
+            </a:extLst>
+          </p:cNvPr>
+          <p:cNvPicPr>
+            <a:picLocks noChangeAspect="1"/>
+          </p:cNvPicPr>
+          <p:nvPr userDrawn="1"/>
+        </p:nvPicPr>
+        <p:blipFill>
+          <a:blip r:embed="rId14"/>
+          <a:stretch>
+            <a:fillRect/>
+          </a:stretch>
+        </p:blipFill>
+        <p:spPr>
+          <a:xfrm>
+            <a:off x="476248" y="6203895"/>
+            <a:ext cx="3133725" cy="476250"/>
+          </a:xfrm>
+          <a:prstGeom prst="rect">
+            <a:avLst/>
+          </a:prstGeom>
+        </p:spPr>
+      </p:pic>
+      <p:pic>
+        <p:nvPicPr>
+          <p:cNvPr id="9" name="Picture 8">
+            <a:extLst>
+              <a:ext uri="{FF2B5EF4-FFF2-40B4-BE49-F238E27FC236}">
+                <a16:creationId xmlns:a16="http://schemas.microsoft.com/office/drawing/2014/main" id="{FA55D422-210E-C94E-136F-383243BFF92B}"/>
+              </a:ext>
+            </a:extLst>
+          </p:cNvPr>
+          <p:cNvPicPr>
+            <a:picLocks noChangeAspect="1"/>
+          </p:cNvPicPr>
+          <p:nvPr userDrawn="1"/>
+        </p:nvPicPr>
+        <p:blipFill>
+          <a:blip r:embed="rId15" cstate="print">
+            <a:extLst>
+              <a:ext uri="{28A0092B-C50C-407E-A947-70E740481C1C}">
+                <a14:useLocalDpi xmlns:a14="http://schemas.microsoft.com/office/drawing/2010/main" val="0"/>
+              </a:ext>
+            </a:extLst>
+          </a:blip>
+          <a:stretch>
+            <a:fillRect/>
+          </a:stretch>
+        </p:blipFill>
+        <p:spPr>
+          <a:xfrm>
+            <a:off x="5341361" y="6082428"/>
+            <a:ext cx="5423827" cy="586933"/>
+          </a:xfrm>
+          <a:prstGeom prst="rect">
+            <a:avLst/>
+          </a:prstGeom>
+        </p:spPr>
+      </p:pic>
+      <p:pic>
+        <p:nvPicPr>
+          <p:cNvPr id="10" name="Graphic 9">
+            <a:extLst>
+              <a:ext uri="{FF2B5EF4-FFF2-40B4-BE49-F238E27FC236}">
+                <a16:creationId xmlns:a16="http://schemas.microsoft.com/office/drawing/2014/main" id="{FC6E12E6-BE03-6D82-78C0-C972C149CCF3}"/>
+              </a:ext>
+            </a:extLst>
+          </p:cNvPr>
+          <p:cNvPicPr>
+            <a:picLocks noChangeAspect="1"/>
+          </p:cNvPicPr>
+          <p:nvPr userDrawn="1"/>
+        </p:nvPicPr>
+        <p:blipFill>
+          <a:blip r:embed="rId16" cstate="print">
+            <a:extLst>
+              <a:ext uri="{28A0092B-C50C-407E-A947-70E740481C1C}">
+                <a14:useLocalDpi xmlns:a14="http://schemas.microsoft.com/office/drawing/2010/main" val="0"/>
+              </a:ext>
+              <a:ext uri="{96DAC541-7B7A-43D3-8B79-37D633B846F1}">
+                <asvg:svgBlip xmlns:asvg="http://schemas.microsoft.com/office/drawing/2016/SVG/main" r:embed="rId17"/>
+              </a:ext>
+            </a:extLst>
+          </a:blip>
+          <a:stretch>
+            <a:fillRect/>
+          </a:stretch>
+        </p:blipFill>
+        <p:spPr>
+          <a:xfrm>
+            <a:off x="10765189" y="6226319"/>
+            <a:ext cx="950564" cy="344327"/>
+          </a:xfrm>
+          <a:prstGeom prst="rect">
+            <a:avLst/>
+          </a:prstGeom>
+        </p:spPr>
+      </p:pic>
+    </p:spTree>
+    <p:extLst>
+      <p:ext uri="{BB962C8B-B14F-4D97-AF65-F5344CB8AC3E}">
+        <p14:creationId xmlns:p14="http://schemas.microsoft.com/office/powerpoint/2010/main" val="1453151436"/>
+      </p:ext>
+    </p:extLst>
+  </p:cSld>
+  <p:clrMap bg1="lt1" tx1="dk1" bg2="lt2" tx2="dk2" accent1="accent1" accent2="accent2" accent3="accent3" accent4="accent4" accent5="accent5" accent6="accent6" hlink="hlink" folHlink="folHlink"/>
+  <p:sldLayoutIdLst>
+    <p:sldLayoutId id="2147483662" r:id="rId1"/>
+    <p:sldLayoutId id="2147483663" r:id="rId2"/>
+    <p:sldLayoutId id="2147483664" r:id="rId3"/>
+    <p:sldLayoutId id="2147483665" r:id="rId4"/>
+    <p:sldLayoutId id="2147483666" r:id="rId5"/>
+    <p:sldLayoutId id="2147483667" r:id="rId6"/>
+    <p:sldLayoutId id="2147483668" r:id="rId7"/>
+    <p:sldLayoutId id="2147483669" r:id="rId8"/>
+    <p:sldLayoutId id="2147483670" r:id="rId9"/>
+    <p:sldLayoutId id="2147483671" r:id="rId10"/>
+    <p:sldLayoutId id="2147483672" r:id="rId11"/>
+  </p:sldLayoutIdLst>
+  <p:hf sldNum="0" hdr="0" ftr="0" dt="0"/>
+  <p:txStyles>
+    <p:titleStyle>
+      <a:lvl1pPr algn="l" defTabSz="914400" rtl="0" eaLnBrk="1" latinLnBrk="0" hangingPunct="1">
+        <a:lnSpc>
+          <a:spcPct val="90000"/>
+        </a:lnSpc>
+        <a:spcBef>
+          <a:spcPct val="0"/>
+        </a:spcBef>
+        <a:buNone/>
+        <a:defRPr sz="4400" kern="1200">
+          <a:solidFill>
+            <a:schemeClr val="tx1"/>
+          </a:solidFill>
+          <a:latin typeface="+mj-lt"/>
+          <a:ea typeface="+mj-ea"/>
+          <a:cs typeface="+mj-cs"/>
+        </a:defRPr>
+      </a:lvl1pPr>
+    </p:titleStyle>
+    <p:bodyStyle>
+      <a:lvl1pPr marL="228600" indent="-228600" algn="l" defTabSz="914400" rtl="0" eaLnBrk="1" latinLnBrk="0" hangingPunct="1">
+        <a:lnSpc>
+          <a:spcPct val="90000"/>
+        </a:lnSpc>
+        <a:spcBef>
+          <a:spcPts val="1000"/>
+        </a:spcBef>
+        <a:buFont typeface="Arial" panose="020B0604020202020204" pitchFamily="34" charset="0"/>
+        <a:buChar char="•"/>
+        <a:defRPr sz="2800" kern="1200">
+          <a:solidFill>
+            <a:schemeClr val="tx1"/>
+          </a:solidFill>
+          <a:latin typeface="+mn-lt"/>
+          <a:ea typeface="+mn-ea"/>
+          <a:cs typeface="+mn-cs"/>
+        </a:defRPr>
+      </a:lvl1pPr>
+      <a:lvl2pPr marL="685800" indent="-228600" algn="l" defTabSz="914400" rtl="0" eaLnBrk="1" latinLnBrk="0" hangingPunct="1">
+        <a:lnSpc>
+          <a:spcPct val="90000"/>
+        </a:lnSpc>
+        <a:spcBef>
+          <a:spcPts val="500"/>
+        </a:spcBef>
+        <a:buFont typeface="Arial" panose="020B0604020202020204" pitchFamily="34" charset="0"/>
+        <a:buChar char="•"/>
+        <a:defRPr sz="2400" kern="1200">
+          <a:solidFill>
+            <a:schemeClr val="tx1"/>
+          </a:solidFill>
+          <a:latin typeface="+mn-lt"/>
+          <a:ea typeface="+mn-ea"/>
+          <a:cs typeface="+mn-cs"/>
+        </a:defRPr>
+      </a:lvl2pPr>
+      <a:lvl3pPr marL="1143000" indent="-228600" algn="l" defTabSz="914400" rtl="0" eaLnBrk="1" latinLnBrk="0" hangingPunct="1">
+        <a:lnSpc>
+          <a:spcPct val="90000"/>
+        </a:lnSpc>
+        <a:spcBef>
+          <a:spcPts val="500"/>
+        </a:spcBef>
+        <a:buFont typeface="Arial" panose="020B0604020202020204" pitchFamily="34" charset="0"/>
+        <a:buChar char="•"/>
+        <a:defRPr sz="2000" kern="1200">
+          <a:solidFill>
+            <a:schemeClr val="tx1"/>
+          </a:solidFill>
+          <a:latin typeface="+mn-lt"/>
+          <a:ea typeface="+mn-ea"/>
+          <a:cs typeface="+mn-cs"/>
+        </a:defRPr>
+      </a:lvl3pPr>
+      <a:lvl4pPr marL="1600200" indent="-228600" algn="l" defTabSz="914400" rtl="0" eaLnBrk="1" latinLnBrk="0" hangingPunct="1">
+        <a:lnSpc>
+          <a:spcPct val="90000"/>
+        </a:lnSpc>
+        <a:spcBef>
+          <a:spcPts val="500"/>
+        </a:spcBef>
+        <a:buFont typeface="Arial" panose="020B0604020202020204" pitchFamily="34" charset="0"/>
+        <a:buChar char="•"/>
+        <a:defRPr sz="1800" kern="1200">
+          <a:solidFill>
+            <a:schemeClr val="tx1"/>
+          </a:solidFill>
+          <a:latin typeface="+mn-lt"/>
+          <a:ea typeface="+mn-ea"/>
+          <a:cs typeface="+mn-cs"/>
+        </a:defRPr>
+      </a:lvl4pPr>
+      <a:lvl5pPr marL="2057400" indent="-228600" algn="l" defTabSz="914400" rtl="0" eaLnBrk="1" latinLnBrk="0" hangingPunct="1">
+        <a:lnSpc>
+          <a:spcPct val="90000"/>
+        </a:lnSpc>
+        <a:spcBef>
+          <a:spcPts val="500"/>
+        </a:spcBef>
+        <a:buFont typeface="Arial" panose="020B0604020202020204" pitchFamily="34" charset="0"/>
+        <a:buChar char="•"/>
+        <a:defRPr sz="1800" kern="1200">
+          <a:solidFill>
+            <a:schemeClr val="tx1"/>
+          </a:solidFill>
+          <a:latin typeface="+mn-lt"/>
+          <a:ea typeface="+mn-ea"/>
+          <a:cs typeface="+mn-cs"/>
+        </a:defRPr>
+      </a:lvl5pPr>
+      <a:lvl6pPr marL="2514600" indent="-228600" algn="l" defTabSz="914400" rtl="0" eaLnBrk="1" latinLnBrk="0" hangingPunct="1">
+        <a:lnSpc>
+          <a:spcPct val="90000"/>
+        </a:lnSpc>
+        <a:spcBef>
+          <a:spcPts val="500"/>
+        </a:spcBef>
+        <a:buFont typeface="Arial" panose="020B0604020202020204" pitchFamily="34" charset="0"/>
+        <a:buChar char="•"/>
+        <a:defRPr sz="1800" kern="1200">
+          <a:solidFill>
+            <a:schemeClr val="tx1"/>
+          </a:solidFill>
+          <a:latin typeface="+mn-lt"/>
+          <a:ea typeface="+mn-ea"/>
+          <a:cs typeface="+mn-cs"/>
+        </a:defRPr>
+      </a:lvl6pPr>
+      <a:lvl7pPr marL="2971800" indent="-228600" algn="l" defTabSz="914400" rtl="0" eaLnBrk="1" latinLnBrk="0" hangingPunct="1">
+        <a:lnSpc>
+          <a:spcPct val="90000"/>
+        </a:lnSpc>
+        <a:spcBef>
+          <a:spcPts val="500"/>
+        </a:spcBef>
+        <a:buFont typeface="Arial" panose="020B0604020202020204" pitchFamily="34" charset="0"/>
+        <a:buChar char="•"/>
+        <a:defRPr sz="1800" kern="1200">
+          <a:solidFill>
+            <a:schemeClr val="tx1"/>
+          </a:solidFill>
+          <a:latin typeface="+mn-lt"/>
+          <a:ea typeface="+mn-ea"/>
+          <a:cs typeface="+mn-cs"/>
+        </a:defRPr>
+      </a:lvl7pPr>
+      <a:lvl8pPr marL="3429000" indent="-228600" algn="l" defTabSz="914400" rtl="0" eaLnBrk="1" latinLnBrk="0" hangingPunct="1">
+        <a:lnSpc>
+          <a:spcPct val="90000"/>
+        </a:lnSpc>
+        <a:spcBef>
+          <a:spcPts val="500"/>
+        </a:spcBef>
+        <a:buFont typeface="Arial" panose="020B0604020202020204" pitchFamily="34" charset="0"/>
+        <a:buChar char="•"/>
+        <a:defRPr sz="1800" kern="1200">
+          <a:solidFill>
+            <a:schemeClr val="tx1"/>
+          </a:solidFill>
+          <a:latin typeface="+mn-lt"/>
+          <a:ea typeface="+mn-ea"/>
+          <a:cs typeface="+mn-cs"/>
+        </a:defRPr>
+      </a:lvl8pPr>
+      <a:lvl9pPr marL="3886200" indent="-228600" algn="l" defTabSz="914400" rtl="0" eaLnBrk="1" latinLnBrk="0" hangingPunct="1">
+        <a:lnSpc>
+          <a:spcPct val="90000"/>
+        </a:lnSpc>
+        <a:spcBef>
+          <a:spcPts val="500"/>
+        </a:spcBef>
+        <a:buFont typeface="Arial" panose="020B0604020202020204" pitchFamily="34" charset="0"/>
+        <a:buChar char="•"/>
+        <a:defRPr sz="1800" kern="1200">
+          <a:solidFill>
+            <a:schemeClr val="tx1"/>
+          </a:solidFill>
+          <a:latin typeface="+mn-lt"/>
+          <a:ea typeface="+mn-ea"/>
+          <a:cs typeface="+mn-cs"/>
+        </a:defRPr>
+      </a:lvl9pPr>
+    </p:bodyStyle>
+    <p:otherStyle>
+      <a:defPPr>
+        <a:defRPr lang="en-US"/>
+      </a:defPPr>
+      <a:lvl1pPr marL="0" algn="l" defTabSz="914400" rtl="0" eaLnBrk="1" latinLnBrk="0" hangingPunct="1">
+        <a:defRPr sz="1800" kern="1200">
+          <a:solidFill>
+            <a:schemeClr val="tx1"/>
+          </a:solidFill>
+          <a:latin typeface="+mn-lt"/>
+          <a:ea typeface="+mn-ea"/>
+          <a:cs typeface="+mn-cs"/>
+        </a:defRPr>
+      </a:lvl1pPr>
+      <a:lvl2pPr marL="457200" algn="l" defTabSz="914400" rtl="0" eaLnBrk="1" latinLnBrk="0" hangingPunct="1">
+        <a:defRPr sz="1800" kern="1200">
+          <a:solidFill>
+            <a:schemeClr val="tx1"/>
+          </a:solidFill>
+          <a:latin typeface="+mn-lt"/>
+          <a:ea typeface="+mn-ea"/>
+          <a:cs typeface="+mn-cs"/>
+        </a:defRPr>
+      </a:lvl2pPr>
+      <a:lvl3pPr marL="914400" algn="l" defTabSz="914400" rtl="0" eaLnBrk="1" latinLnBrk="0" hangingPunct="1">
+        <a:defRPr sz="1800" kern="1200">
+          <a:solidFill>
+            <a:schemeClr val="tx1"/>
+          </a:solidFill>
+          <a:latin typeface="+mn-lt"/>
+          <a:ea typeface="+mn-ea"/>
+          <a:cs typeface="+mn-cs"/>
+        </a:defRPr>
+      </a:lvl3pPr>
+      <a:lvl4pPr marL="1371600" algn="l" defTabSz="914400" rtl="0" eaLnBrk="1" latinLnBrk="0" hangingPunct="1">
+        <a:defRPr sz="1800" kern="1200">
+          <a:solidFill>
+            <a:schemeClr val="tx1"/>
+          </a:solidFill>
+          <a:latin typeface="+mn-lt"/>
+          <a:ea typeface="+mn-ea"/>
+          <a:cs typeface="+mn-cs"/>
+        </a:defRPr>
+      </a:lvl4pPr>
+      <a:lvl5pPr marL="1828800" algn="l" defTabSz="914400" rtl="0" eaLnBrk="1" latinLnBrk="0" hangingPunct="1">
+        <a:defRPr sz="1800" kern="1200">
+          <a:solidFill>
+            <a:schemeClr val="tx1"/>
+          </a:solidFill>
+          <a:latin typeface="+mn-lt"/>
+          <a:ea typeface="+mn-ea"/>
+          <a:cs typeface="+mn-cs"/>
+        </a:defRPr>
+      </a:lvl5pPr>
+      <a:lvl6pPr marL="2286000" algn="l" defTabSz="914400" rtl="0" eaLnBrk="1" latinLnBrk="0" hangingPunct="1">
+        <a:defRPr sz="1800" kern="1200">
+          <a:solidFill>
+            <a:schemeClr val="tx1"/>
+          </a:solidFill>
+          <a:latin typeface="+mn-lt"/>
+          <a:ea typeface="+mn-ea"/>
+          <a:cs typeface="+mn-cs"/>
+        </a:defRPr>
+      </a:lvl6pPr>
+      <a:lvl7pPr marL="2743200" algn="l" defTabSz="914400" rtl="0" eaLnBrk="1" latinLnBrk="0" hangingPunct="1">
+        <a:defRPr sz="1800" kern="1200">
+          <a:solidFill>
+            <a:schemeClr val="tx1"/>
+          </a:solidFill>
+          <a:latin typeface="+mn-lt"/>
+          <a:ea typeface="+mn-ea"/>
+          <a:cs typeface="+mn-cs"/>
+        </a:defRPr>
+      </a:lvl7pPr>
+      <a:lvl8pPr marL="3200400" algn="l" defTabSz="914400" rtl="0" eaLnBrk="1" latinLnBrk="0" hangingPunct="1">
+        <a:defRPr sz="1800" kern="1200">
+          <a:solidFill>
+            <a:schemeClr val="tx1"/>
+          </a:solidFill>
+          <a:latin typeface="+mn-lt"/>
+          <a:ea typeface="+mn-ea"/>
+          <a:cs typeface="+mn-cs"/>
+        </a:defRPr>
+      </a:lvl8pPr>
+      <a:lvl9pPr marL="3657600" algn="l" defTabSz="914400" rtl="0" eaLnBrk="1" latinLnBrk="0" hangingPunct="1">
+        <a:defRPr sz="1800" kern="1200">
+          <a:solidFill>
+            <a:schemeClr val="tx1"/>
+          </a:solidFill>
+          <a:latin typeface="+mn-lt"/>
+          <a:ea typeface="+mn-ea"/>
+          <a:cs typeface="+mn-cs"/>
+        </a:defRPr>
+      </a:lvl9pPr>
+    </p:otherStyle>
+  </p:txStyles>
+  <p:extLst>
+    <p:ext uri="{27BBF7A9-308A-43DC-89C8-2F10F3537804}">
+      <p15:sldGuideLst xmlns:p15="http://schemas.microsoft.com/office/powerpoint/2012/main">
+        <p15:guide id="1" orient="horz" pos="1525" userDrawn="1">
+          <p15:clr>
+            <a:srgbClr val="F26B43"/>
+          </p15:clr>
+        </p15:guide>
+        <p15:guide id="2" pos="5120" userDrawn="1">
           <p15:clr>
             <a:srgbClr val="F26B43"/>
           </p15:clr>
@@ -3882,7 +6964,7 @@
         </p:nvSpPr>
         <p:spPr>
           <a:xfrm>
-            <a:off x="1321666" y="2140905"/>
+            <a:off x="2845666" y="2140905"/>
             <a:ext cx="6500668" cy="757130"/>
           </a:xfrm>
           <a:prstGeom prst="rect">
@@ -3934,7 +7016,7 @@
         </p:nvSpPr>
         <p:spPr>
           <a:xfrm>
-            <a:off x="2545961" y="4070517"/>
+            <a:off x="4069961" y="4070517"/>
             <a:ext cx="4052078" cy="400110"/>
           </a:xfrm>
           <a:prstGeom prst="rect">
@@ -3956,23 +7038,29 @@
               </a:spcAft>
             </a:pPr>
             <a:r>
+              <a:rPr lang="pt-PT" sz="2000" b="1" u="sng" dirty="0">
+                <a:solidFill>
+                  <a:srgbClr val="4D4D4D"/>
+                </a:solidFill>
+                <a:latin typeface="Century Gothic" panose="020B0502020202020204" pitchFamily="34" charset="0"/>
+              </a:rPr>
+              <a:t>João Lopes</a:t>
+            </a:r>
+            <a:r>
               <a:rPr lang="pt-PT" sz="2000" b="1" dirty="0">
                 <a:solidFill>
                   <a:srgbClr val="4D4D4D"/>
                 </a:solidFill>
                 <a:latin typeface="Century Gothic" panose="020B0502020202020204" pitchFamily="34" charset="0"/>
               </a:rPr>
-              <a:t>Pedro Sousa e </a:t>
-            </a:r>
-            <a:r>
-              <a:rPr lang="pt-PT" sz="2000" b="1" u="sng" dirty="0">
-                <a:solidFill>
-                  <a:srgbClr val="4D4D4D"/>
-                </a:solidFill>
-                <a:latin typeface="Century Gothic" panose="020B0502020202020204" pitchFamily="34" charset="0"/>
-              </a:rPr>
-              <a:t>João Lopes</a:t>
-            </a:r>
+              <a:t> e Pedro Sousa</a:t>
+            </a:r>
+            <a:endParaRPr lang="pt-PT" sz="2000" b="1" u="sng" dirty="0">
+              <a:solidFill>
+                <a:srgbClr val="4D4D4D"/>
+              </a:solidFill>
+              <a:latin typeface="Century Gothic" panose="020B0502020202020204" pitchFamily="34" charset="0"/>
+            </a:endParaRPr>
           </a:p>
         </p:txBody>
       </p:sp>
@@ -3990,7 +7078,7 @@
         </p:nvSpPr>
         <p:spPr>
           <a:xfrm>
-            <a:off x="3563888" y="4778256"/>
+            <a:off x="5087888" y="4778256"/>
             <a:ext cx="2160240" cy="400110"/>
           </a:xfrm>
           <a:prstGeom prst="rect">
@@ -4037,7 +7125,7 @@
         </p:nvSpPr>
         <p:spPr>
           <a:xfrm>
-            <a:off x="1321666" y="1196752"/>
+            <a:off x="2845666" y="1196753"/>
             <a:ext cx="6500668" cy="535531"/>
           </a:xfrm>
           <a:prstGeom prst="rect">
@@ -4070,29 +7158,7 @@
                 </a:solidFill>
                 <a:latin typeface="Century Gothic" panose="020B0502020202020204" pitchFamily="34" charset="0"/>
               </a:rPr>
-              <a:t>Data </a:t>
-            </a:r>
-            <a:r>
-              <a:rPr lang="pt-PT" sz="3200" dirty="0" err="1">
-                <a:solidFill>
-                  <a:schemeClr val="accent1">
-                    <a:lumMod val="50000"/>
-                  </a:schemeClr>
-                </a:solidFill>
-                <a:latin typeface="Century Gothic" panose="020B0502020202020204" pitchFamily="34" charset="0"/>
-              </a:rPr>
-              <a:t>Science</a:t>
-            </a:r>
-            <a:r>
-              <a:rPr lang="pt-PT" sz="3200" dirty="0">
-                <a:solidFill>
-                  <a:schemeClr val="accent1">
-                    <a:lumMod val="50000"/>
-                  </a:schemeClr>
-                </a:solidFill>
-                <a:latin typeface="Century Gothic" panose="020B0502020202020204" pitchFamily="34" charset="0"/>
-              </a:rPr>
-              <a:t> com R - II</a:t>
+              <a:t>R para Ciência dos Dados - II</a:t>
             </a:r>
           </a:p>
         </p:txBody>
@@ -4132,7 +7198,7 @@
         </p:nvSpPr>
         <p:spPr bwMode="auto">
           <a:xfrm rot="5400000" flipV="1">
-            <a:off x="7775575" y="946150"/>
+            <a:off x="9299576" y="946151"/>
             <a:ext cx="504825" cy="1006475"/>
           </a:xfrm>
           <a:prstGeom prst="rect">
@@ -4173,8 +7239,8 @@
         </p:nvSpPr>
         <p:spPr bwMode="auto">
           <a:xfrm>
-            <a:off x="0" y="0"/>
-            <a:ext cx="9144000" cy="0"/>
+            <a:off x="1524001" y="-507831"/>
+            <a:ext cx="184731" cy="1015663"/>
           </a:xfrm>
           <a:prstGeom prst="rect">
             <a:avLst/>
@@ -4211,8 +7277,8 @@
         </p:nvSpPr>
         <p:spPr bwMode="auto">
           <a:xfrm>
-            <a:off x="0" y="0"/>
-            <a:ext cx="9144000" cy="0"/>
+            <a:off x="1524001" y="-507831"/>
+            <a:ext cx="184731" cy="1015663"/>
           </a:xfrm>
           <a:prstGeom prst="rect">
             <a:avLst/>
@@ -4249,7 +7315,7 @@
         </p:nvSpPr>
         <p:spPr bwMode="auto">
           <a:xfrm>
-            <a:off x="2771775" y="404813"/>
+            <a:off x="4295776" y="404814"/>
             <a:ext cx="6048375" cy="854075"/>
           </a:xfrm>
           <a:prstGeom prst="rect">
@@ -4302,7 +7368,7 @@
         </p:nvSpPr>
         <p:spPr bwMode="auto">
           <a:xfrm>
-            <a:off x="682625" y="1521983"/>
+            <a:off x="2206626" y="1521984"/>
             <a:ext cx="7705725" cy="523875"/>
           </a:xfrm>
           <a:prstGeom prst="rect">
@@ -4394,7 +7460,7 @@
         </p:nvSpPr>
         <p:spPr bwMode="auto">
           <a:xfrm>
-            <a:off x="791804" y="2153756"/>
+            <a:off x="2315804" y="2153756"/>
             <a:ext cx="7560392" cy="3939540"/>
           </a:xfrm>
           <a:prstGeom prst="rect">
@@ -4892,7 +7958,7 @@
         </p:nvSpPr>
         <p:spPr bwMode="auto">
           <a:xfrm>
-            <a:off x="2771775" y="404813"/>
+            <a:off x="4295776" y="404814"/>
             <a:ext cx="6048375" cy="854075"/>
           </a:xfrm>
           <a:prstGeom prst="rect">
@@ -4945,7 +8011,7 @@
         </p:nvSpPr>
         <p:spPr bwMode="auto">
           <a:xfrm rot="5400000" flipV="1">
-            <a:off x="7775575" y="946150"/>
+            <a:off x="9299576" y="946151"/>
             <a:ext cx="504825" cy="1006475"/>
           </a:xfrm>
           <a:prstGeom prst="rect">
@@ -5016,7 +8082,7 @@
         </p:nvSpPr>
         <p:spPr bwMode="auto">
           <a:xfrm>
-            <a:off x="1187624" y="1557338"/>
+            <a:off x="2711625" y="1557339"/>
             <a:ext cx="4968875" cy="3752309"/>
           </a:xfrm>
           <a:prstGeom prst="rect">
@@ -5326,7 +8392,7 @@
         </p:nvSpPr>
         <p:spPr bwMode="auto">
           <a:xfrm>
-            <a:off x="2771775" y="404813"/>
+            <a:off x="4295776" y="404814"/>
             <a:ext cx="6048375" cy="854075"/>
           </a:xfrm>
           <a:prstGeom prst="rect">
@@ -5379,7 +8445,7 @@
         </p:nvSpPr>
         <p:spPr bwMode="auto">
           <a:xfrm flipH="1">
-            <a:off x="541214" y="1557338"/>
+            <a:off x="2065214" y="1557338"/>
             <a:ext cx="647700" cy="0"/>
           </a:xfrm>
           <a:prstGeom prst="line">
@@ -5419,7 +8485,7 @@
         </p:nvSpPr>
         <p:spPr bwMode="auto">
           <a:xfrm>
-            <a:off x="1188914" y="1557338"/>
+            <a:off x="2712914" y="1557338"/>
             <a:ext cx="372" cy="3780000"/>
           </a:xfrm>
           <a:prstGeom prst="line">
@@ -5459,7 +8525,7 @@
         </p:nvSpPr>
         <p:spPr bwMode="auto">
           <a:xfrm>
-            <a:off x="5724128" y="1557338"/>
+            <a:off x="7248128" y="1557339"/>
             <a:ext cx="2606414" cy="3765133"/>
           </a:xfrm>
           <a:prstGeom prst="rect">
@@ -5700,7 +8766,7 @@
         </p:nvSpPr>
         <p:spPr bwMode="auto">
           <a:xfrm rot="5400000" flipV="1">
-            <a:off x="7775575" y="946150"/>
+            <a:off x="9299576" y="946151"/>
             <a:ext cx="504825" cy="1006475"/>
           </a:xfrm>
           <a:prstGeom prst="rect">
@@ -5745,7 +8811,7 @@
         </p:nvCxnSpPr>
         <p:spPr bwMode="auto">
           <a:xfrm>
-            <a:off x="2339752" y="1720850"/>
+            <a:off x="3863752" y="1720850"/>
             <a:ext cx="4608512" cy="0"/>
           </a:xfrm>
           <a:prstGeom prst="line">
@@ -5778,7 +8844,7 @@
         </p:nvCxnSpPr>
         <p:spPr bwMode="auto">
           <a:xfrm>
-            <a:off x="2987824" y="2636912"/>
+            <a:off x="4511824" y="2636912"/>
             <a:ext cx="3960440" cy="0"/>
           </a:xfrm>
           <a:prstGeom prst="line">
@@ -5811,7 +8877,7 @@
         </p:nvCxnSpPr>
         <p:spPr bwMode="auto">
           <a:xfrm>
-            <a:off x="2483768" y="3861048"/>
+            <a:off x="4007768" y="3861048"/>
             <a:ext cx="4464496" cy="0"/>
           </a:xfrm>
           <a:prstGeom prst="line">
@@ -5844,7 +8910,7 @@
         </p:nvCxnSpPr>
         <p:spPr bwMode="auto">
           <a:xfrm>
-            <a:off x="3203848" y="5104234"/>
+            <a:off x="4727848" y="5104234"/>
             <a:ext cx="3744416" cy="0"/>
           </a:xfrm>
           <a:prstGeom prst="line">
@@ -5903,7 +8969,7 @@
         </p:nvSpPr>
         <p:spPr bwMode="auto">
           <a:xfrm rot="5400000" flipV="1">
-            <a:off x="7775575" y="946150"/>
+            <a:off x="9299576" y="946151"/>
             <a:ext cx="504825" cy="1006475"/>
           </a:xfrm>
           <a:prstGeom prst="rect">
@@ -5944,7 +9010,7 @@
         </p:nvSpPr>
         <p:spPr bwMode="auto">
           <a:xfrm>
-            <a:off x="682625" y="1521983"/>
+            <a:off x="2206626" y="1521984"/>
             <a:ext cx="7705725" cy="523875"/>
           </a:xfrm>
           <a:prstGeom prst="rect">
@@ -6030,8 +9096,8 @@
         </p:nvSpPr>
         <p:spPr bwMode="auto">
           <a:xfrm>
-            <a:off x="0" y="0"/>
-            <a:ext cx="9144000" cy="0"/>
+            <a:off x="1524001" y="-507831"/>
+            <a:ext cx="184731" cy="1015663"/>
           </a:xfrm>
           <a:prstGeom prst="rect">
             <a:avLst/>
@@ -6068,8 +9134,8 @@
         </p:nvSpPr>
         <p:spPr bwMode="auto">
           <a:xfrm>
-            <a:off x="0" y="0"/>
-            <a:ext cx="9144000" cy="0"/>
+            <a:off x="1524001" y="-507831"/>
+            <a:ext cx="184731" cy="1015663"/>
           </a:xfrm>
           <a:prstGeom prst="rect">
             <a:avLst/>
@@ -6106,7 +9172,7 @@
         </p:nvSpPr>
         <p:spPr bwMode="auto">
           <a:xfrm>
-            <a:off x="2771775" y="404813"/>
+            <a:off x="4295776" y="404814"/>
             <a:ext cx="6048375" cy="854075"/>
           </a:xfrm>
           <a:prstGeom prst="rect">
@@ -6153,7 +9219,7 @@
         </p:nvSpPr>
         <p:spPr bwMode="auto">
           <a:xfrm>
-            <a:off x="540000" y="2160000"/>
+            <a:off x="2064000" y="2160000"/>
             <a:ext cx="7920432" cy="4093428"/>
           </a:xfrm>
           <a:prstGeom prst="rect">
@@ -6507,7 +9573,7 @@
         </p:nvSpPr>
         <p:spPr bwMode="auto">
           <a:xfrm rot="5400000" flipV="1">
-            <a:off x="7775575" y="946150"/>
+            <a:off x="9299576" y="946151"/>
             <a:ext cx="504825" cy="1006475"/>
           </a:xfrm>
           <a:prstGeom prst="rect">
@@ -6548,8 +9614,8 @@
         </p:nvSpPr>
         <p:spPr bwMode="auto">
           <a:xfrm>
-            <a:off x="0" y="0"/>
-            <a:ext cx="9144000" cy="0"/>
+            <a:off x="1524001" y="-507831"/>
+            <a:ext cx="184731" cy="1015663"/>
           </a:xfrm>
           <a:prstGeom prst="rect">
             <a:avLst/>
@@ -6586,8 +9652,8 @@
         </p:nvSpPr>
         <p:spPr bwMode="auto">
           <a:xfrm>
-            <a:off x="0" y="0"/>
-            <a:ext cx="9144000" cy="0"/>
+            <a:off x="1524001" y="-507831"/>
+            <a:ext cx="184731" cy="1015663"/>
           </a:xfrm>
           <a:prstGeom prst="rect">
             <a:avLst/>
@@ -6624,7 +9690,7 @@
         </p:nvSpPr>
         <p:spPr bwMode="auto">
           <a:xfrm>
-            <a:off x="2771775" y="404813"/>
+            <a:off x="4295776" y="404814"/>
             <a:ext cx="6048375" cy="854075"/>
           </a:xfrm>
           <a:prstGeom prst="rect">
@@ -6677,7 +9743,7 @@
         </p:nvSpPr>
         <p:spPr bwMode="auto">
           <a:xfrm>
-            <a:off x="682625" y="1521983"/>
+            <a:off x="2206626" y="1521984"/>
             <a:ext cx="7705725" cy="523875"/>
           </a:xfrm>
           <a:prstGeom prst="rect">
@@ -6769,7 +9835,7 @@
         </p:nvSpPr>
         <p:spPr bwMode="auto">
           <a:xfrm>
-            <a:off x="791804" y="2153756"/>
+            <a:off x="2315804" y="2153756"/>
             <a:ext cx="7560392" cy="3939540"/>
           </a:xfrm>
           <a:prstGeom prst="rect">
@@ -8812,7 +11878,7 @@
         </p:blipFill>
         <p:spPr>
           <a:xfrm>
-            <a:off x="1478845" y="2133600"/>
+            <a:off x="3002846" y="2133600"/>
             <a:ext cx="6186309" cy="4064926"/>
           </a:xfrm>
           <a:prstGeom prst="rect">
@@ -8830,7 +11896,7 @@
         </p:nvSpPr>
         <p:spPr bwMode="auto">
           <a:xfrm rot="5400000" flipV="1">
-            <a:off x="7775575" y="946150"/>
+            <a:off x="9299576" y="946151"/>
             <a:ext cx="504825" cy="1006475"/>
           </a:xfrm>
           <a:prstGeom prst="rect">
@@ -8871,8 +11937,8 @@
         </p:nvSpPr>
         <p:spPr bwMode="auto">
           <a:xfrm>
-            <a:off x="0" y="0"/>
-            <a:ext cx="9144000" cy="0"/>
+            <a:off x="1524001" y="-507831"/>
+            <a:ext cx="184731" cy="1015663"/>
           </a:xfrm>
           <a:prstGeom prst="rect">
             <a:avLst/>
@@ -8909,8 +11975,8 @@
         </p:nvSpPr>
         <p:spPr bwMode="auto">
           <a:xfrm>
-            <a:off x="0" y="0"/>
-            <a:ext cx="9144000" cy="0"/>
+            <a:off x="1524001" y="-507831"/>
+            <a:ext cx="184731" cy="1015663"/>
           </a:xfrm>
           <a:prstGeom prst="rect">
             <a:avLst/>
@@ -8947,7 +12013,7 @@
         </p:nvSpPr>
         <p:spPr bwMode="auto">
           <a:xfrm>
-            <a:off x="2771775" y="404813"/>
+            <a:off x="4295776" y="404814"/>
             <a:ext cx="6048375" cy="854075"/>
           </a:xfrm>
           <a:prstGeom prst="rect">
@@ -9000,7 +12066,7 @@
         </p:nvSpPr>
         <p:spPr bwMode="auto">
           <a:xfrm>
-            <a:off x="682625" y="1521983"/>
+            <a:off x="2206626" y="1521984"/>
             <a:ext cx="7705725" cy="523875"/>
           </a:xfrm>
           <a:prstGeom prst="rect">
@@ -9116,7 +12182,7 @@
         </p:nvSpPr>
         <p:spPr bwMode="auto">
           <a:xfrm>
-            <a:off x="2771775" y="404813"/>
+            <a:off x="4295776" y="404814"/>
             <a:ext cx="6048375" cy="854075"/>
           </a:xfrm>
           <a:prstGeom prst="rect">
@@ -9169,7 +12235,7 @@
         </p:nvSpPr>
         <p:spPr bwMode="auto">
           <a:xfrm rot="5400000" flipV="1">
-            <a:off x="7775575" y="946150"/>
+            <a:off x="9299576" y="946151"/>
             <a:ext cx="504825" cy="1006475"/>
           </a:xfrm>
           <a:prstGeom prst="rect">
@@ -9240,7 +12306,7 @@
         </p:nvSpPr>
         <p:spPr bwMode="auto">
           <a:xfrm>
-            <a:off x="1187624" y="1557338"/>
+            <a:off x="2711625" y="1557339"/>
             <a:ext cx="4968875" cy="4747453"/>
           </a:xfrm>
           <a:prstGeom prst="rect">
@@ -9838,7 +12904,7 @@
         </p:nvSpPr>
         <p:spPr bwMode="auto">
           <a:xfrm>
-            <a:off x="2771775" y="404813"/>
+            <a:off x="4295776" y="404814"/>
             <a:ext cx="6048375" cy="854075"/>
           </a:xfrm>
           <a:prstGeom prst="rect">
@@ -9891,7 +12957,7 @@
         </p:nvSpPr>
         <p:spPr bwMode="auto">
           <a:xfrm flipH="1">
-            <a:off x="541214" y="1557338"/>
+            <a:off x="2065214" y="1557338"/>
             <a:ext cx="647700" cy="0"/>
           </a:xfrm>
           <a:prstGeom prst="line">
@@ -9931,7 +12997,7 @@
         </p:nvSpPr>
         <p:spPr bwMode="auto">
           <a:xfrm>
-            <a:off x="1188914" y="1557338"/>
+            <a:off x="2712914" y="1557338"/>
             <a:ext cx="372" cy="4500000"/>
           </a:xfrm>
           <a:prstGeom prst="line">
@@ -9971,7 +13037,7 @@
         </p:nvSpPr>
         <p:spPr bwMode="auto">
           <a:xfrm>
-            <a:off x="5724128" y="1557338"/>
+            <a:off x="7248128" y="1557339"/>
             <a:ext cx="2606414" cy="4747453"/>
           </a:xfrm>
           <a:prstGeom prst="rect">
@@ -10273,7 +13339,7 @@
         </p:nvSpPr>
         <p:spPr bwMode="auto">
           <a:xfrm rot="5400000" flipV="1">
-            <a:off x="7775575" y="946150"/>
+            <a:off x="9299576" y="946151"/>
             <a:ext cx="504825" cy="1006475"/>
           </a:xfrm>
           <a:prstGeom prst="rect">
@@ -10320,7 +13386,7 @@
         </p:nvCxnSpPr>
         <p:spPr bwMode="auto">
           <a:xfrm>
-            <a:off x="3563888" y="1720850"/>
+            <a:off x="5087888" y="1720850"/>
             <a:ext cx="3384600" cy="0"/>
           </a:xfrm>
           <a:prstGeom prst="line">
@@ -10355,7 +13421,7 @@
         </p:nvCxnSpPr>
         <p:spPr bwMode="auto">
           <a:xfrm>
-            <a:off x="4139952" y="2881511"/>
+            <a:off x="5663952" y="2881511"/>
             <a:ext cx="2808536" cy="0"/>
           </a:xfrm>
           <a:prstGeom prst="line">
@@ -10390,7 +13456,7 @@
         </p:nvCxnSpPr>
         <p:spPr bwMode="auto">
           <a:xfrm>
-            <a:off x="4788024" y="4634086"/>
+            <a:off x="6312024" y="4634086"/>
             <a:ext cx="1080120" cy="0"/>
           </a:xfrm>
           <a:prstGeom prst="line">
@@ -10449,7 +13515,7 @@
         </p:nvSpPr>
         <p:spPr bwMode="auto">
           <a:xfrm rot="5400000" flipV="1">
-            <a:off x="7775575" y="946150"/>
+            <a:off x="9299576" y="946151"/>
             <a:ext cx="504825" cy="1006475"/>
           </a:xfrm>
           <a:prstGeom prst="rect">
@@ -10490,8 +13556,8 @@
         </p:nvSpPr>
         <p:spPr bwMode="auto">
           <a:xfrm>
-            <a:off x="0" y="0"/>
-            <a:ext cx="9144000" cy="0"/>
+            <a:off x="1524001" y="-507831"/>
+            <a:ext cx="184731" cy="1015663"/>
           </a:xfrm>
           <a:prstGeom prst="rect">
             <a:avLst/>
@@ -10528,8 +13594,8 @@
         </p:nvSpPr>
         <p:spPr bwMode="auto">
           <a:xfrm>
-            <a:off x="0" y="0"/>
-            <a:ext cx="9144000" cy="0"/>
+            <a:off x="1524001" y="-507831"/>
+            <a:ext cx="184731" cy="1015663"/>
           </a:xfrm>
           <a:prstGeom prst="rect">
             <a:avLst/>
@@ -10572,7 +13638,7 @@
         </p:nvSpPr>
         <p:spPr bwMode="auto">
           <a:xfrm>
-            <a:off x="2771775" y="404813"/>
+            <a:off x="4295776" y="404814"/>
             <a:ext cx="6048375" cy="854075"/>
           </a:xfrm>
           <a:prstGeom prst="rect">
@@ -10625,7 +13691,7 @@
         </p:nvSpPr>
         <p:spPr bwMode="auto">
           <a:xfrm>
-            <a:off x="540000" y="2160000"/>
+            <a:off x="2064000" y="2160000"/>
             <a:ext cx="7920432" cy="4093428"/>
           </a:xfrm>
           <a:prstGeom prst="rect">
@@ -11268,7 +14334,7 @@
         </p:nvSpPr>
         <p:spPr bwMode="auto">
           <a:xfrm>
-            <a:off x="682625" y="1521983"/>
+            <a:off x="2206626" y="1521984"/>
             <a:ext cx="7705725" cy="523875"/>
           </a:xfrm>
           <a:prstGeom prst="rect">
@@ -11442,7 +14508,7 @@
         </p:nvSpPr>
         <p:spPr bwMode="auto">
           <a:xfrm rot="5400000" flipV="1">
-            <a:off x="7775575" y="946150"/>
+            <a:off x="9299576" y="946151"/>
             <a:ext cx="504825" cy="1006475"/>
           </a:xfrm>
           <a:prstGeom prst="rect">
@@ -11483,8 +14549,8 @@
         </p:nvSpPr>
         <p:spPr bwMode="auto">
           <a:xfrm>
-            <a:off x="0" y="0"/>
-            <a:ext cx="9144000" cy="0"/>
+            <a:off x="1524001" y="-507831"/>
+            <a:ext cx="184731" cy="1015663"/>
           </a:xfrm>
           <a:prstGeom prst="rect">
             <a:avLst/>
@@ -11521,8 +14587,8 @@
         </p:nvSpPr>
         <p:spPr bwMode="auto">
           <a:xfrm>
-            <a:off x="0" y="0"/>
-            <a:ext cx="9144000" cy="0"/>
+            <a:off x="1524001" y="-507831"/>
+            <a:ext cx="184731" cy="1015663"/>
           </a:xfrm>
           <a:prstGeom prst="rect">
             <a:avLst/>
@@ -11559,7 +14625,7 @@
         </p:nvSpPr>
         <p:spPr bwMode="auto">
           <a:xfrm>
-            <a:off x="2771775" y="404813"/>
+            <a:off x="4295776" y="404814"/>
             <a:ext cx="6048375" cy="854075"/>
           </a:xfrm>
           <a:prstGeom prst="rect">
@@ -11612,7 +14678,7 @@
         </p:nvSpPr>
         <p:spPr bwMode="auto">
           <a:xfrm>
-            <a:off x="791804" y="2153756"/>
+            <a:off x="2315804" y="2153756"/>
             <a:ext cx="7560392" cy="3939540"/>
           </a:xfrm>
           <a:prstGeom prst="rect">
@@ -13733,7 +16799,7 @@
         </p:nvSpPr>
         <p:spPr bwMode="auto">
           <a:xfrm>
-            <a:off x="682625" y="1521983"/>
+            <a:off x="2206626" y="1521984"/>
             <a:ext cx="7705725" cy="523875"/>
           </a:xfrm>
           <a:prstGeom prst="rect">
@@ -13907,7 +16973,7 @@
         </p:nvSpPr>
         <p:spPr bwMode="auto">
           <a:xfrm>
-            <a:off x="2771775" y="404813"/>
+            <a:off x="4295776" y="404814"/>
             <a:ext cx="6048375" cy="854075"/>
           </a:xfrm>
           <a:prstGeom prst="rect">
@@ -13960,7 +17026,7 @@
         </p:nvSpPr>
         <p:spPr bwMode="auto">
           <a:xfrm rot="5400000" flipV="1">
-            <a:off x="7775575" y="946150"/>
+            <a:off x="9299576" y="946151"/>
             <a:ext cx="504825" cy="1006475"/>
           </a:xfrm>
           <a:prstGeom prst="rect">
@@ -14031,7 +17097,7 @@
         </p:nvSpPr>
         <p:spPr bwMode="auto">
           <a:xfrm rot="5400000" flipV="1">
-            <a:off x="7775575" y="946150"/>
+            <a:off x="9299576" y="946151"/>
             <a:ext cx="504825" cy="1006475"/>
           </a:xfrm>
           <a:prstGeom prst="rect">
@@ -14072,8 +17138,8 @@
         </p:nvSpPr>
         <p:spPr bwMode="auto">
           <a:xfrm>
-            <a:off x="0" y="0"/>
-            <a:ext cx="9144000" cy="0"/>
+            <a:off x="1524001" y="-507831"/>
+            <a:ext cx="184731" cy="1015663"/>
           </a:xfrm>
           <a:prstGeom prst="rect">
             <a:avLst/>
@@ -14110,8 +17176,8 @@
         </p:nvSpPr>
         <p:spPr bwMode="auto">
           <a:xfrm>
-            <a:off x="0" y="0"/>
-            <a:ext cx="9144000" cy="0"/>
+            <a:off x="1524001" y="-507831"/>
+            <a:ext cx="184731" cy="1015663"/>
           </a:xfrm>
           <a:prstGeom prst="rect">
             <a:avLst/>
@@ -14148,7 +17214,7 @@
         </p:nvSpPr>
         <p:spPr bwMode="auto">
           <a:xfrm>
-            <a:off x="2771775" y="404813"/>
+            <a:off x="4295776" y="404814"/>
             <a:ext cx="6048375" cy="854075"/>
           </a:xfrm>
           <a:prstGeom prst="rect">
@@ -14201,7 +17267,7 @@
         </p:nvSpPr>
         <p:spPr bwMode="auto">
           <a:xfrm>
-            <a:off x="791804" y="2153756"/>
+            <a:off x="2315804" y="2153756"/>
             <a:ext cx="7560392" cy="3939540"/>
           </a:xfrm>
           <a:prstGeom prst="rect">
@@ -14563,7 +17629,7 @@
         </p:nvSpPr>
         <p:spPr bwMode="auto">
           <a:xfrm>
-            <a:off x="682625" y="1521983"/>
+            <a:off x="2206626" y="1521984"/>
             <a:ext cx="7705725" cy="523875"/>
           </a:xfrm>
           <a:prstGeom prst="rect">
@@ -14737,7 +17803,7 @@
         </p:nvSpPr>
         <p:spPr bwMode="auto">
           <a:xfrm rot="5400000" flipV="1">
-            <a:off x="7775575" y="946150"/>
+            <a:off x="9299576" y="946151"/>
             <a:ext cx="504825" cy="1006475"/>
           </a:xfrm>
           <a:prstGeom prst="rect">
@@ -14778,8 +17844,8 @@
         </p:nvSpPr>
         <p:spPr bwMode="auto">
           <a:xfrm>
-            <a:off x="0" y="0"/>
-            <a:ext cx="9144000" cy="0"/>
+            <a:off x="1524001" y="-507831"/>
+            <a:ext cx="184731" cy="1015663"/>
           </a:xfrm>
           <a:prstGeom prst="rect">
             <a:avLst/>
@@ -14816,8 +17882,8 @@
         </p:nvSpPr>
         <p:spPr bwMode="auto">
           <a:xfrm>
-            <a:off x="0" y="0"/>
-            <a:ext cx="9144000" cy="0"/>
+            <a:off x="1524001" y="-507831"/>
+            <a:ext cx="184731" cy="1015663"/>
           </a:xfrm>
           <a:prstGeom prst="rect">
             <a:avLst/>
@@ -14854,7 +17920,7 @@
         </p:nvSpPr>
         <p:spPr bwMode="auto">
           <a:xfrm>
-            <a:off x="540000" y="2160000"/>
+            <a:off x="2064000" y="2160000"/>
             <a:ext cx="7920432" cy="2708434"/>
           </a:xfrm>
           <a:prstGeom prst="rect">
@@ -14991,7 +18057,7 @@
         </p:nvSpPr>
         <p:spPr>
           <a:xfrm>
-            <a:off x="570584" y="5330099"/>
+            <a:off x="2094584" y="5330099"/>
             <a:ext cx="7817766" cy="338554"/>
           </a:xfrm>
           <a:prstGeom prst="rect">
@@ -15036,7 +18102,7 @@
         </p:nvSpPr>
         <p:spPr bwMode="auto">
           <a:xfrm>
-            <a:off x="682625" y="1521983"/>
+            <a:off x="2206626" y="1521984"/>
             <a:ext cx="7705725" cy="523875"/>
           </a:xfrm>
           <a:prstGeom prst="rect">
@@ -15128,7 +18194,7 @@
         </p:nvSpPr>
         <p:spPr bwMode="auto">
           <a:xfrm>
-            <a:off x="2771775" y="404813"/>
+            <a:off x="4295776" y="404814"/>
             <a:ext cx="6048375" cy="854075"/>
           </a:xfrm>
           <a:prstGeom prst="rect">
@@ -15205,7 +18271,7 @@
         </p:nvSpPr>
         <p:spPr bwMode="auto">
           <a:xfrm rot="5400000" flipV="1">
-            <a:off x="7775575" y="946150"/>
+            <a:off x="9299576" y="946151"/>
             <a:ext cx="504825" cy="1006475"/>
           </a:xfrm>
           <a:prstGeom prst="rect">
@@ -15246,8 +18312,8 @@
         </p:nvSpPr>
         <p:spPr bwMode="auto">
           <a:xfrm>
-            <a:off x="0" y="0"/>
-            <a:ext cx="9144000" cy="0"/>
+            <a:off x="1524001" y="-507831"/>
+            <a:ext cx="184731" cy="1015663"/>
           </a:xfrm>
           <a:prstGeom prst="rect">
             <a:avLst/>
@@ -15284,8 +18350,8 @@
         </p:nvSpPr>
         <p:spPr bwMode="auto">
           <a:xfrm>
-            <a:off x="0" y="0"/>
-            <a:ext cx="9144000" cy="0"/>
+            <a:off x="1524001" y="-507831"/>
+            <a:ext cx="184731" cy="1015663"/>
           </a:xfrm>
           <a:prstGeom prst="rect">
             <a:avLst/>
@@ -15322,7 +18388,7 @@
         </p:nvSpPr>
         <p:spPr bwMode="auto">
           <a:xfrm>
-            <a:off x="2771775" y="404813"/>
+            <a:off x="4295776" y="404814"/>
             <a:ext cx="6048375" cy="854075"/>
           </a:xfrm>
           <a:prstGeom prst="rect">
@@ -15375,7 +18441,7 @@
         </p:nvSpPr>
         <p:spPr bwMode="auto">
           <a:xfrm>
-            <a:off x="791804" y="2153756"/>
+            <a:off x="2315804" y="2153756"/>
             <a:ext cx="7560392" cy="3939540"/>
           </a:xfrm>
           <a:prstGeom prst="rect">
@@ -15957,7 +19023,7 @@
         </p:nvSpPr>
         <p:spPr bwMode="auto">
           <a:xfrm>
-            <a:off x="682625" y="1521983"/>
+            <a:off x="2206626" y="1521984"/>
             <a:ext cx="7705725" cy="523875"/>
           </a:xfrm>
           <a:prstGeom prst="rect">
@@ -16091,7 +19157,7 @@
         </p:blipFill>
         <p:spPr>
           <a:xfrm>
-            <a:off x="1478844" y="2127069"/>
+            <a:off x="3002845" y="2127069"/>
             <a:ext cx="6186309" cy="4064926"/>
           </a:xfrm>
           <a:prstGeom prst="rect">
@@ -16109,7 +19175,7 @@
         </p:nvSpPr>
         <p:spPr bwMode="auto">
           <a:xfrm rot="5400000" flipV="1">
-            <a:off x="7775575" y="946150"/>
+            <a:off x="9299576" y="946151"/>
             <a:ext cx="504825" cy="1006475"/>
           </a:xfrm>
           <a:prstGeom prst="rect">
@@ -16150,8 +19216,8 @@
         </p:nvSpPr>
         <p:spPr bwMode="auto">
           <a:xfrm>
-            <a:off x="0" y="0"/>
-            <a:ext cx="9144000" cy="0"/>
+            <a:off x="1524001" y="-507831"/>
+            <a:ext cx="184731" cy="1015663"/>
           </a:xfrm>
           <a:prstGeom prst="rect">
             <a:avLst/>
@@ -16188,8 +19254,8 @@
         </p:nvSpPr>
         <p:spPr bwMode="auto">
           <a:xfrm>
-            <a:off x="0" y="0"/>
-            <a:ext cx="9144000" cy="0"/>
+            <a:off x="1524001" y="-507831"/>
+            <a:ext cx="184731" cy="1015663"/>
           </a:xfrm>
           <a:prstGeom prst="rect">
             <a:avLst/>
@@ -16226,7 +19292,7 @@
         </p:nvSpPr>
         <p:spPr bwMode="auto">
           <a:xfrm>
-            <a:off x="2771775" y="404813"/>
+            <a:off x="4295776" y="404814"/>
             <a:ext cx="6048375" cy="854075"/>
           </a:xfrm>
           <a:prstGeom prst="rect">
@@ -16279,7 +19345,7 @@
         </p:nvSpPr>
         <p:spPr bwMode="auto">
           <a:xfrm>
-            <a:off x="682625" y="1521983"/>
+            <a:off x="2206626" y="1521984"/>
             <a:ext cx="7705725" cy="523875"/>
           </a:xfrm>
           <a:prstGeom prst="rect">
@@ -16395,7 +19461,7 @@
         </p:nvSpPr>
         <p:spPr bwMode="auto">
           <a:xfrm rot="5400000" flipV="1">
-            <a:off x="7775575" y="946150"/>
+            <a:off x="9299576" y="946151"/>
             <a:ext cx="504825" cy="1006475"/>
           </a:xfrm>
           <a:prstGeom prst="rect">
@@ -16436,8 +19502,8 @@
         </p:nvSpPr>
         <p:spPr bwMode="auto">
           <a:xfrm>
-            <a:off x="0" y="0"/>
-            <a:ext cx="9144000" cy="0"/>
+            <a:off x="1524001" y="-507831"/>
+            <a:ext cx="184731" cy="1015663"/>
           </a:xfrm>
           <a:prstGeom prst="rect">
             <a:avLst/>
@@ -16474,8 +19540,8 @@
         </p:nvSpPr>
         <p:spPr bwMode="auto">
           <a:xfrm>
-            <a:off x="0" y="0"/>
-            <a:ext cx="9144000" cy="0"/>
+            <a:off x="1524001" y="-507831"/>
+            <a:ext cx="184731" cy="1015663"/>
           </a:xfrm>
           <a:prstGeom prst="rect">
             <a:avLst/>
@@ -16512,7 +19578,7 @@
         </p:nvSpPr>
         <p:spPr bwMode="auto">
           <a:xfrm>
-            <a:off x="2771775" y="404813"/>
+            <a:off x="4295776" y="404814"/>
             <a:ext cx="6048375" cy="854075"/>
           </a:xfrm>
           <a:prstGeom prst="rect">
@@ -16565,7 +19631,7 @@
         </p:nvSpPr>
         <p:spPr bwMode="auto">
           <a:xfrm>
-            <a:off x="791804" y="2153756"/>
+            <a:off x="2315804" y="2153756"/>
             <a:ext cx="7560392" cy="3939540"/>
           </a:xfrm>
           <a:prstGeom prst="rect">
@@ -18491,7 +21557,7 @@
         </p:nvSpPr>
         <p:spPr bwMode="auto">
           <a:xfrm>
-            <a:off x="682625" y="1521983"/>
+            <a:off x="2206626" y="1521983"/>
             <a:ext cx="7705725" cy="523220"/>
           </a:xfrm>
           <a:prstGeom prst="rect">
@@ -18613,7 +21679,7 @@
         </p:blipFill>
         <p:spPr>
           <a:xfrm>
-            <a:off x="1475656" y="2133600"/>
+            <a:off x="2999657" y="2133600"/>
             <a:ext cx="6186309" cy="4064926"/>
           </a:xfrm>
           <a:prstGeom prst="rect">
@@ -18631,7 +21697,7 @@
         </p:nvSpPr>
         <p:spPr bwMode="auto">
           <a:xfrm rot="5400000" flipV="1">
-            <a:off x="7775575" y="946150"/>
+            <a:off x="9299576" y="946151"/>
             <a:ext cx="504825" cy="1006475"/>
           </a:xfrm>
           <a:prstGeom prst="rect">
@@ -18672,8 +21738,8 @@
         </p:nvSpPr>
         <p:spPr bwMode="auto">
           <a:xfrm>
-            <a:off x="0" y="0"/>
-            <a:ext cx="9144000" cy="0"/>
+            <a:off x="1524001" y="-507831"/>
+            <a:ext cx="184731" cy="1015663"/>
           </a:xfrm>
           <a:prstGeom prst="rect">
             <a:avLst/>
@@ -18710,8 +21776,8 @@
         </p:nvSpPr>
         <p:spPr bwMode="auto">
           <a:xfrm>
-            <a:off x="0" y="0"/>
-            <a:ext cx="9144000" cy="0"/>
+            <a:off x="1524001" y="-507831"/>
+            <a:ext cx="184731" cy="1015663"/>
           </a:xfrm>
           <a:prstGeom prst="rect">
             <a:avLst/>
@@ -18748,7 +21814,7 @@
         </p:nvSpPr>
         <p:spPr bwMode="auto">
           <a:xfrm>
-            <a:off x="2771775" y="404813"/>
+            <a:off x="4295776" y="404814"/>
             <a:ext cx="6048375" cy="854075"/>
           </a:xfrm>
           <a:prstGeom prst="rect">
@@ -18801,7 +21867,7 @@
         </p:nvSpPr>
         <p:spPr bwMode="auto">
           <a:xfrm>
-            <a:off x="682625" y="1521983"/>
+            <a:off x="2206626" y="1521983"/>
             <a:ext cx="7705725" cy="523220"/>
           </a:xfrm>
           <a:prstGeom prst="rect">
@@ -18905,7 +21971,7 @@
         </p:nvSpPr>
         <p:spPr bwMode="auto">
           <a:xfrm rot="5400000" flipV="1">
-            <a:off x="7775575" y="946150"/>
+            <a:off x="9299576" y="946151"/>
             <a:ext cx="504825" cy="1006475"/>
           </a:xfrm>
           <a:prstGeom prst="rect">
@@ -18946,8 +22012,8 @@
         </p:nvSpPr>
         <p:spPr bwMode="auto">
           <a:xfrm>
-            <a:off x="0" y="0"/>
-            <a:ext cx="9144000" cy="0"/>
+            <a:off x="1524001" y="-507831"/>
+            <a:ext cx="184731" cy="1015663"/>
           </a:xfrm>
           <a:prstGeom prst="rect">
             <a:avLst/>
@@ -18984,8 +22050,8 @@
         </p:nvSpPr>
         <p:spPr bwMode="auto">
           <a:xfrm>
-            <a:off x="0" y="0"/>
-            <a:ext cx="9144000" cy="0"/>
+            <a:off x="1524001" y="-507831"/>
+            <a:ext cx="184731" cy="1015663"/>
           </a:xfrm>
           <a:prstGeom prst="rect">
             <a:avLst/>
@@ -19022,7 +22088,7 @@
         </p:nvSpPr>
         <p:spPr bwMode="auto">
           <a:xfrm>
-            <a:off x="2771775" y="404813"/>
+            <a:off x="4295776" y="404814"/>
             <a:ext cx="6048375" cy="854075"/>
           </a:xfrm>
           <a:prstGeom prst="rect">
@@ -19075,7 +22141,7 @@
         </p:nvSpPr>
         <p:spPr bwMode="auto">
           <a:xfrm>
-            <a:off x="791804" y="2153756"/>
+            <a:off x="2315804" y="2153756"/>
             <a:ext cx="7560392" cy="3939540"/>
           </a:xfrm>
           <a:prstGeom prst="rect">
@@ -21770,7 +24836,7 @@
         </p:nvSpPr>
         <p:spPr bwMode="auto">
           <a:xfrm>
-            <a:off x="682625" y="1521983"/>
+            <a:off x="2206626" y="1521983"/>
             <a:ext cx="7705725" cy="523220"/>
           </a:xfrm>
           <a:prstGeom prst="rect">
@@ -21892,7 +24958,7 @@
         </p:blipFill>
         <p:spPr>
           <a:xfrm>
-            <a:off x="1481316" y="2133600"/>
+            <a:off x="3005317" y="2133600"/>
             <a:ext cx="6186309" cy="4064926"/>
           </a:xfrm>
           <a:prstGeom prst="rect">
@@ -21910,7 +24976,7 @@
         </p:nvSpPr>
         <p:spPr bwMode="auto">
           <a:xfrm rot="5400000" flipV="1">
-            <a:off x="7775575" y="946150"/>
+            <a:off x="9299576" y="946151"/>
             <a:ext cx="504825" cy="1006475"/>
           </a:xfrm>
           <a:prstGeom prst="rect">
@@ -21951,8 +25017,8 @@
         </p:nvSpPr>
         <p:spPr bwMode="auto">
           <a:xfrm>
-            <a:off x="0" y="0"/>
-            <a:ext cx="9144000" cy="0"/>
+            <a:off x="1524001" y="-507831"/>
+            <a:ext cx="184731" cy="1015663"/>
           </a:xfrm>
           <a:prstGeom prst="rect">
             <a:avLst/>
@@ -21989,8 +25055,8 @@
         </p:nvSpPr>
         <p:spPr bwMode="auto">
           <a:xfrm>
-            <a:off x="0" y="0"/>
-            <a:ext cx="9144000" cy="0"/>
+            <a:off x="1524001" y="-507831"/>
+            <a:ext cx="184731" cy="1015663"/>
           </a:xfrm>
           <a:prstGeom prst="rect">
             <a:avLst/>
@@ -22027,7 +25093,7 @@
         </p:nvSpPr>
         <p:spPr bwMode="auto">
           <a:xfrm>
-            <a:off x="2771775" y="404813"/>
+            <a:off x="4295776" y="404814"/>
             <a:ext cx="6048375" cy="854075"/>
           </a:xfrm>
           <a:prstGeom prst="rect">
@@ -22080,7 +25146,7 @@
         </p:nvSpPr>
         <p:spPr bwMode="auto">
           <a:xfrm>
-            <a:off x="682625" y="1521983"/>
+            <a:off x="2206626" y="1521983"/>
             <a:ext cx="7705725" cy="523220"/>
           </a:xfrm>
           <a:prstGeom prst="rect">
@@ -22184,7 +25250,7 @@
         </p:nvSpPr>
         <p:spPr bwMode="auto">
           <a:xfrm rot="5400000" flipV="1">
-            <a:off x="7775575" y="946150"/>
+            <a:off x="9299576" y="946151"/>
             <a:ext cx="504825" cy="1006475"/>
           </a:xfrm>
           <a:prstGeom prst="rect">
@@ -22225,8 +25291,8 @@
         </p:nvSpPr>
         <p:spPr bwMode="auto">
           <a:xfrm>
-            <a:off x="0" y="0"/>
-            <a:ext cx="9144000" cy="0"/>
+            <a:off x="1524001" y="-507831"/>
+            <a:ext cx="184731" cy="1015663"/>
           </a:xfrm>
           <a:prstGeom prst="rect">
             <a:avLst/>
@@ -22263,8 +25329,8 @@
         </p:nvSpPr>
         <p:spPr bwMode="auto">
           <a:xfrm>
-            <a:off x="0" y="0"/>
-            <a:ext cx="9144000" cy="0"/>
+            <a:off x="1524001" y="-507831"/>
+            <a:ext cx="184731" cy="1015663"/>
           </a:xfrm>
           <a:prstGeom prst="rect">
             <a:avLst/>
@@ -22301,7 +25367,7 @@
         </p:nvSpPr>
         <p:spPr bwMode="auto">
           <a:xfrm>
-            <a:off x="2771775" y="404813"/>
+            <a:off x="4295776" y="404814"/>
             <a:ext cx="6048375" cy="854075"/>
           </a:xfrm>
           <a:prstGeom prst="rect">
@@ -22354,7 +25420,7 @@
         </p:nvSpPr>
         <p:spPr bwMode="auto">
           <a:xfrm>
-            <a:off x="791804" y="2153756"/>
+            <a:off x="2315804" y="2153756"/>
             <a:ext cx="7560392" cy="3939540"/>
           </a:xfrm>
           <a:prstGeom prst="rect">
@@ -24976,7 +28042,7 @@
         </p:nvSpPr>
         <p:spPr bwMode="auto">
           <a:xfrm>
-            <a:off x="682625" y="1521983"/>
+            <a:off x="2206626" y="1521983"/>
             <a:ext cx="7705725" cy="523220"/>
           </a:xfrm>
           <a:prstGeom prst="rect">
@@ -25098,7 +28164,7 @@
         </p:blipFill>
         <p:spPr>
           <a:xfrm>
-            <a:off x="1488473" y="2133600"/>
+            <a:off x="3012474" y="2133600"/>
             <a:ext cx="6186309" cy="4064926"/>
           </a:xfrm>
           <a:prstGeom prst="rect">
@@ -25116,7 +28182,7 @@
         </p:nvSpPr>
         <p:spPr bwMode="auto">
           <a:xfrm rot="5400000" flipV="1">
-            <a:off x="7775575" y="946150"/>
+            <a:off x="9299576" y="946151"/>
             <a:ext cx="504825" cy="1006475"/>
           </a:xfrm>
           <a:prstGeom prst="rect">
@@ -25157,8 +28223,8 @@
         </p:nvSpPr>
         <p:spPr bwMode="auto">
           <a:xfrm>
-            <a:off x="0" y="0"/>
-            <a:ext cx="9144000" cy="0"/>
+            <a:off x="1524001" y="-507831"/>
+            <a:ext cx="184731" cy="1015663"/>
           </a:xfrm>
           <a:prstGeom prst="rect">
             <a:avLst/>
@@ -25195,8 +28261,8 @@
         </p:nvSpPr>
         <p:spPr bwMode="auto">
           <a:xfrm>
-            <a:off x="0" y="0"/>
-            <a:ext cx="9144000" cy="0"/>
+            <a:off x="1524001" y="-507831"/>
+            <a:ext cx="184731" cy="1015663"/>
           </a:xfrm>
           <a:prstGeom prst="rect">
             <a:avLst/>
@@ -25233,7 +28299,7 @@
         </p:nvSpPr>
         <p:spPr bwMode="auto">
           <a:xfrm>
-            <a:off x="2771775" y="404813"/>
+            <a:off x="4295776" y="404814"/>
             <a:ext cx="6048375" cy="854075"/>
           </a:xfrm>
           <a:prstGeom prst="rect">
@@ -25286,7 +28352,7 @@
         </p:nvSpPr>
         <p:spPr bwMode="auto">
           <a:xfrm>
-            <a:off x="682625" y="1521983"/>
+            <a:off x="2206626" y="1521983"/>
             <a:ext cx="7705725" cy="523220"/>
           </a:xfrm>
           <a:prstGeom prst="rect">
@@ -25390,7 +28456,7 @@
         </p:nvSpPr>
         <p:spPr bwMode="auto">
           <a:xfrm flipH="1">
-            <a:off x="539552" y="1556792"/>
+            <a:off x="2063552" y="1556792"/>
             <a:ext cx="647700" cy="0"/>
           </a:xfrm>
           <a:prstGeom prst="line">
@@ -25424,7 +28490,7 @@
         </p:nvSpPr>
         <p:spPr bwMode="auto">
           <a:xfrm>
-            <a:off x="1187252" y="1556792"/>
+            <a:off x="2711252" y="1556792"/>
             <a:ext cx="372" cy="2340000"/>
           </a:xfrm>
           <a:prstGeom prst="line">
@@ -25458,7 +28524,7 @@
         </p:nvSpPr>
         <p:spPr bwMode="auto">
           <a:xfrm>
-            <a:off x="1220590" y="1556792"/>
+            <a:off x="2744591" y="1556793"/>
             <a:ext cx="4968875" cy="2323713"/>
           </a:xfrm>
           <a:prstGeom prst="rect">
@@ -25625,7 +28691,7 @@
         </p:nvSpPr>
         <p:spPr bwMode="auto">
           <a:xfrm>
-            <a:off x="2771775" y="404813"/>
+            <a:off x="4295776" y="404814"/>
             <a:ext cx="6048375" cy="854075"/>
           </a:xfrm>
           <a:prstGeom prst="rect">
@@ -25678,7 +28744,7 @@
         </p:nvSpPr>
         <p:spPr bwMode="auto">
           <a:xfrm rot="5400000" flipV="1">
-            <a:off x="7775575" y="946150"/>
+            <a:off x="9299576" y="946151"/>
             <a:ext cx="504825" cy="1006475"/>
           </a:xfrm>
           <a:prstGeom prst="rect">
@@ -25749,7 +28815,7 @@
         </p:nvSpPr>
         <p:spPr bwMode="auto">
           <a:xfrm rot="5400000" flipV="1">
-            <a:off x="7775575" y="946150"/>
+            <a:off x="9299576" y="946151"/>
             <a:ext cx="504825" cy="1006475"/>
           </a:xfrm>
           <a:prstGeom prst="rect">
@@ -25790,8 +28856,8 @@
         </p:nvSpPr>
         <p:spPr bwMode="auto">
           <a:xfrm>
-            <a:off x="0" y="0"/>
-            <a:ext cx="9144000" cy="0"/>
+            <a:off x="1524001" y="-507831"/>
+            <a:ext cx="184731" cy="1015663"/>
           </a:xfrm>
           <a:prstGeom prst="rect">
             <a:avLst/>
@@ -25828,8 +28894,8 @@
         </p:nvSpPr>
         <p:spPr bwMode="auto">
           <a:xfrm>
-            <a:off x="0" y="0"/>
-            <a:ext cx="9144000" cy="0"/>
+            <a:off x="1524001" y="-507831"/>
+            <a:ext cx="184731" cy="1015663"/>
           </a:xfrm>
           <a:prstGeom prst="rect">
             <a:avLst/>
@@ -25866,7 +28932,7 @@
         </p:nvSpPr>
         <p:spPr bwMode="auto">
           <a:xfrm>
-            <a:off x="2771775" y="404813"/>
+            <a:off x="4295776" y="404814"/>
             <a:ext cx="6048375" cy="854075"/>
           </a:xfrm>
           <a:prstGeom prst="rect">
@@ -25919,7 +28985,7 @@
         </p:nvSpPr>
         <p:spPr bwMode="auto">
           <a:xfrm>
-            <a:off x="791804" y="2153756"/>
+            <a:off x="2315804" y="2153756"/>
             <a:ext cx="7560392" cy="3939540"/>
           </a:xfrm>
           <a:prstGeom prst="rect">
@@ -28404,7 +31470,7 @@
         </p:nvSpPr>
         <p:spPr bwMode="auto">
           <a:xfrm>
-            <a:off x="682625" y="1521983"/>
+            <a:off x="2206626" y="1521983"/>
             <a:ext cx="7705725" cy="523220"/>
           </a:xfrm>
           <a:prstGeom prst="rect">
@@ -28526,7 +31592,7 @@
         </p:blipFill>
         <p:spPr>
           <a:xfrm>
-            <a:off x="1482035" y="2133600"/>
+            <a:off x="3006036" y="2133600"/>
             <a:ext cx="6186309" cy="4064926"/>
           </a:xfrm>
           <a:prstGeom prst="rect">
@@ -28544,7 +31610,7 @@
         </p:nvSpPr>
         <p:spPr bwMode="auto">
           <a:xfrm rot="5400000" flipV="1">
-            <a:off x="7775575" y="946150"/>
+            <a:off x="9299576" y="946151"/>
             <a:ext cx="504825" cy="1006475"/>
           </a:xfrm>
           <a:prstGeom prst="rect">
@@ -28585,8 +31651,8 @@
         </p:nvSpPr>
         <p:spPr bwMode="auto">
           <a:xfrm>
-            <a:off x="0" y="0"/>
-            <a:ext cx="9144000" cy="0"/>
+            <a:off x="1524001" y="-507831"/>
+            <a:ext cx="184731" cy="1015663"/>
           </a:xfrm>
           <a:prstGeom prst="rect">
             <a:avLst/>
@@ -28623,8 +31689,8 @@
         </p:nvSpPr>
         <p:spPr bwMode="auto">
           <a:xfrm>
-            <a:off x="0" y="0"/>
-            <a:ext cx="9144000" cy="0"/>
+            <a:off x="1524001" y="-507831"/>
+            <a:ext cx="184731" cy="1015663"/>
           </a:xfrm>
           <a:prstGeom prst="rect">
             <a:avLst/>
@@ -28661,7 +31727,7 @@
         </p:nvSpPr>
         <p:spPr bwMode="auto">
           <a:xfrm>
-            <a:off x="2771775" y="404813"/>
+            <a:off x="4295776" y="404814"/>
             <a:ext cx="6048375" cy="854075"/>
           </a:xfrm>
           <a:prstGeom prst="rect">
@@ -28714,7 +31780,7 @@
         </p:nvSpPr>
         <p:spPr bwMode="auto">
           <a:xfrm>
-            <a:off x="682625" y="1521983"/>
+            <a:off x="2206626" y="1521983"/>
             <a:ext cx="7705725" cy="523220"/>
           </a:xfrm>
           <a:prstGeom prst="rect">
@@ -28818,7 +31884,7 @@
         </p:nvSpPr>
         <p:spPr bwMode="auto">
           <a:xfrm rot="5400000" flipV="1">
-            <a:off x="7775575" y="946150"/>
+            <a:off x="9299576" y="946151"/>
             <a:ext cx="504825" cy="1006475"/>
           </a:xfrm>
           <a:prstGeom prst="rect">
@@ -28859,8 +31925,8 @@
         </p:nvSpPr>
         <p:spPr bwMode="auto">
           <a:xfrm>
-            <a:off x="0" y="0"/>
-            <a:ext cx="9144000" cy="0"/>
+            <a:off x="1524001" y="-507831"/>
+            <a:ext cx="184731" cy="1015663"/>
           </a:xfrm>
           <a:prstGeom prst="rect">
             <a:avLst/>
@@ -28897,8 +31963,8 @@
         </p:nvSpPr>
         <p:spPr bwMode="auto">
           <a:xfrm>
-            <a:off x="0" y="0"/>
-            <a:ext cx="9144000" cy="0"/>
+            <a:off x="1524001" y="-507831"/>
+            <a:ext cx="184731" cy="1015663"/>
           </a:xfrm>
           <a:prstGeom prst="rect">
             <a:avLst/>
@@ -28941,7 +32007,7 @@
         </p:nvSpPr>
         <p:spPr bwMode="auto">
           <a:xfrm>
-            <a:off x="682625" y="1511709"/>
+            <a:off x="2206626" y="1511710"/>
             <a:ext cx="7705725" cy="523875"/>
           </a:xfrm>
           <a:prstGeom prst="rect">
@@ -29021,7 +32087,7 @@
         </p:nvSpPr>
         <p:spPr bwMode="auto">
           <a:xfrm>
-            <a:off x="2771775" y="404813"/>
+            <a:off x="4295776" y="404814"/>
             <a:ext cx="6048375" cy="854075"/>
           </a:xfrm>
           <a:prstGeom prst="rect">
@@ -29074,7 +32140,7 @@
         </p:nvSpPr>
         <p:spPr bwMode="auto">
           <a:xfrm>
-            <a:off x="480710" y="5157192"/>
+            <a:off x="2004710" y="5157193"/>
             <a:ext cx="651140" cy="307777"/>
           </a:xfrm>
           <a:prstGeom prst="rect">
@@ -29124,8 +32190,8 @@
         </p:nvSpPr>
         <p:spPr bwMode="auto">
           <a:xfrm>
-            <a:off x="2784966" y="3356992"/>
-            <a:ext cx="576064" cy="504056"/>
+            <a:off x="4308966" y="3356992"/>
+            <a:ext cx="576064" cy="1153180"/>
           </a:xfrm>
           <a:prstGeom prst="cube">
             <a:avLst/>
@@ -29153,32 +32219,7 @@
           </a:bodyPr>
           <a:lstStyle/>
           <a:p>
-            <a:pPr marL="0" marR="0" indent="0" algn="l" defTabSz="914400" rtl="0" eaLnBrk="1" fontAlgn="base" latinLnBrk="0" hangingPunct="1">
-              <a:lnSpc>
-                <a:spcPct val="100000"/>
-              </a:lnSpc>
-              <a:spcBef>
-                <a:spcPct val="50000"/>
-              </a:spcBef>
-              <a:spcAft>
-                <a:spcPct val="0"/>
-              </a:spcAft>
-              <a:buClrTx/>
-              <a:buSzTx/>
-              <a:buFontTx/>
-              <a:buNone/>
-              <a:tabLst/>
-            </a:pPr>
-            <a:endParaRPr kumimoji="0" lang="pt-PT" sz="6000" b="0" i="0" u="none" strike="noStrike" cap="none" normalizeH="0" baseline="0">
-              <a:ln>
-                <a:noFill/>
-              </a:ln>
-              <a:solidFill>
-                <a:srgbClr val="CC0000"/>
-              </a:solidFill>
-              <a:effectLst/>
-              <a:latin typeface="Humanst521 BT" pitchFamily="34" charset="0"/>
-            </a:endParaRPr>
+            <a:endParaRPr lang="pt-PT"/>
           </a:p>
         </p:txBody>
       </p:sp>
@@ -29196,8 +32237,8 @@
         </p:nvSpPr>
         <p:spPr bwMode="auto">
           <a:xfrm>
-            <a:off x="624726" y="4293096"/>
-            <a:ext cx="450000" cy="900000"/>
+            <a:off x="2148726" y="4293096"/>
+            <a:ext cx="450000" cy="1182648"/>
           </a:xfrm>
           <a:prstGeom prst="can">
             <a:avLst/>
@@ -29225,32 +32266,7 @@
           </a:bodyPr>
           <a:lstStyle/>
           <a:p>
-            <a:pPr marL="0" marR="0" indent="0" algn="l" defTabSz="914400" rtl="0" eaLnBrk="1" fontAlgn="base" latinLnBrk="0" hangingPunct="1">
-              <a:lnSpc>
-                <a:spcPct val="100000"/>
-              </a:lnSpc>
-              <a:spcBef>
-                <a:spcPct val="50000"/>
-              </a:spcBef>
-              <a:spcAft>
-                <a:spcPct val="0"/>
-              </a:spcAft>
-              <a:buClrTx/>
-              <a:buSzTx/>
-              <a:buFontTx/>
-              <a:buNone/>
-              <a:tabLst/>
-            </a:pPr>
-            <a:endParaRPr kumimoji="0" lang="pt-PT" sz="6000" b="0" i="0" u="none" strike="noStrike" cap="none" normalizeH="0" baseline="0">
-              <a:ln>
-                <a:noFill/>
-              </a:ln>
-              <a:solidFill>
-                <a:srgbClr val="CC0000"/>
-              </a:solidFill>
-              <a:effectLst/>
-              <a:latin typeface="Humanst521 BT" pitchFamily="34" charset="0"/>
-            </a:endParaRPr>
+            <a:endParaRPr lang="pt-PT"/>
           </a:p>
         </p:txBody>
       </p:sp>
@@ -29270,7 +32286,7 @@
         </p:nvSpPr>
         <p:spPr bwMode="auto">
           <a:xfrm flipV="1">
-            <a:off x="1992878" y="3789040"/>
+            <a:off x="3516878" y="3789040"/>
             <a:ext cx="720000" cy="360000"/>
           </a:xfrm>
           <a:prstGeom prst="line">
@@ -29310,8 +32326,8 @@
         </p:nvSpPr>
         <p:spPr bwMode="auto">
           <a:xfrm>
-            <a:off x="2483768" y="2420888"/>
-            <a:ext cx="1398140" cy="307777"/>
+            <a:off x="4007768" y="2420889"/>
+            <a:ext cx="1228926" cy="307777"/>
           </a:xfrm>
           <a:prstGeom prst="rect">
             <a:avLst/>
@@ -29362,7 +32378,7 @@
         </p:nvSpPr>
         <p:spPr bwMode="auto">
           <a:xfrm>
-            <a:off x="7185610" y="2113111"/>
+            <a:off x="8709611" y="2113112"/>
             <a:ext cx="1267719" cy="307777"/>
           </a:xfrm>
           <a:prstGeom prst="rect">
@@ -29412,8 +32428,8 @@
         </p:nvSpPr>
         <p:spPr bwMode="auto">
           <a:xfrm>
-            <a:off x="7537494" y="3356992"/>
-            <a:ext cx="576064" cy="504056"/>
+            <a:off x="9061494" y="3356992"/>
+            <a:ext cx="576064" cy="1153180"/>
           </a:xfrm>
           <a:prstGeom prst="cube">
             <a:avLst/>
@@ -29441,32 +32457,7 @@
           </a:bodyPr>
           <a:lstStyle/>
           <a:p>
-            <a:pPr marL="0" marR="0" indent="0" algn="l" defTabSz="914400" rtl="0" eaLnBrk="1" fontAlgn="base" latinLnBrk="0" hangingPunct="1">
-              <a:lnSpc>
-                <a:spcPct val="100000"/>
-              </a:lnSpc>
-              <a:spcBef>
-                <a:spcPct val="50000"/>
-              </a:spcBef>
-              <a:spcAft>
-                <a:spcPct val="0"/>
-              </a:spcAft>
-              <a:buClrTx/>
-              <a:buSzTx/>
-              <a:buFontTx/>
-              <a:buNone/>
-              <a:tabLst/>
-            </a:pPr>
-            <a:endParaRPr kumimoji="0" lang="pt-PT" sz="6000" b="0" i="0" u="none" strike="noStrike" cap="none" normalizeH="0" baseline="0">
-              <a:ln>
-                <a:noFill/>
-              </a:ln>
-              <a:solidFill>
-                <a:srgbClr val="CC0000"/>
-              </a:solidFill>
-              <a:effectLst/>
-              <a:latin typeface="Humanst521 BT" pitchFamily="34" charset="0"/>
-            </a:endParaRPr>
+            <a:endParaRPr lang="pt-PT"/>
           </a:p>
         </p:txBody>
       </p:sp>
@@ -29486,8 +32477,8 @@
         </p:nvSpPr>
         <p:spPr bwMode="auto">
           <a:xfrm>
-            <a:off x="7712268" y="2564904"/>
-            <a:ext cx="225000" cy="450000"/>
+            <a:off x="9236268" y="2564904"/>
+            <a:ext cx="225000" cy="1094244"/>
           </a:xfrm>
           <a:prstGeom prst="can">
             <a:avLst/>
@@ -29515,32 +32506,7 @@
           </a:bodyPr>
           <a:lstStyle/>
           <a:p>
-            <a:pPr marL="0" marR="0" indent="0" algn="l" defTabSz="914400" rtl="0" eaLnBrk="1" fontAlgn="base" latinLnBrk="0" hangingPunct="1">
-              <a:lnSpc>
-                <a:spcPct val="100000"/>
-              </a:lnSpc>
-              <a:spcBef>
-                <a:spcPct val="50000"/>
-              </a:spcBef>
-              <a:spcAft>
-                <a:spcPct val="0"/>
-              </a:spcAft>
-              <a:buClrTx/>
-              <a:buSzTx/>
-              <a:buFontTx/>
-              <a:buNone/>
-              <a:tabLst/>
-            </a:pPr>
-            <a:endParaRPr kumimoji="0" lang="pt-PT" sz="6000" b="0" i="0" u="none" strike="noStrike" cap="none" normalizeH="0" baseline="0">
-              <a:ln>
-                <a:noFill/>
-              </a:ln>
-              <a:solidFill>
-                <a:srgbClr val="CC0000"/>
-              </a:solidFill>
-              <a:effectLst/>
-              <a:latin typeface="Humanst521 BT" pitchFamily="34" charset="0"/>
-            </a:endParaRPr>
+            <a:endParaRPr lang="pt-PT"/>
           </a:p>
         </p:txBody>
       </p:sp>
@@ -29560,7 +32526,7 @@
         </p:nvSpPr>
         <p:spPr bwMode="auto">
           <a:xfrm rot="10800000" flipV="1">
-            <a:off x="7825526" y="3068960"/>
+            <a:off x="9349526" y="3068960"/>
             <a:ext cx="0" cy="270000"/>
           </a:xfrm>
           <a:prstGeom prst="line">
@@ -29600,7 +32566,7 @@
         </p:nvSpPr>
         <p:spPr bwMode="auto">
           <a:xfrm rot="10800000" flipV="1">
-            <a:off x="7825527" y="3933056"/>
+            <a:off x="9349527" y="3933056"/>
             <a:ext cx="0" cy="270000"/>
           </a:xfrm>
           <a:prstGeom prst="line">
@@ -29640,8 +32606,8 @@
         </p:nvSpPr>
         <p:spPr bwMode="auto">
           <a:xfrm>
-            <a:off x="7249462" y="4201343"/>
-            <a:ext cx="1426994" cy="307777"/>
+            <a:off x="8773462" y="4201344"/>
+            <a:ext cx="1264898" cy="307777"/>
           </a:xfrm>
           <a:prstGeom prst="rect">
             <a:avLst/>
@@ -29692,7 +32658,7 @@
         </p:nvSpPr>
         <p:spPr bwMode="auto">
           <a:xfrm>
-            <a:off x="7897534" y="2545740"/>
+            <a:off x="9421535" y="2545740"/>
             <a:ext cx="650563" cy="523220"/>
           </a:xfrm>
           <a:prstGeom prst="rect">
@@ -29759,7 +32725,7 @@
         </p:nvSpPr>
         <p:spPr bwMode="auto">
           <a:xfrm>
-            <a:off x="7580496" y="3429000"/>
+            <a:off x="9104496" y="3429001"/>
             <a:ext cx="338554" cy="461665"/>
           </a:xfrm>
           <a:prstGeom prst="rect">
@@ -29817,7 +32783,7 @@
         </p:nvSpPr>
         <p:spPr bwMode="auto">
           <a:xfrm flipV="1">
-            <a:off x="6673398" y="3645024"/>
+            <a:off x="8197398" y="3645024"/>
             <a:ext cx="720000" cy="0"/>
           </a:xfrm>
           <a:prstGeom prst="line">
@@ -29855,8 +32821,8 @@
         </p:nvSpPr>
         <p:spPr bwMode="auto">
           <a:xfrm>
-            <a:off x="624726" y="2492896"/>
-            <a:ext cx="576064" cy="504056"/>
+            <a:off x="2148726" y="2492896"/>
+            <a:ext cx="576064" cy="1153180"/>
           </a:xfrm>
           <a:prstGeom prst="cube">
             <a:avLst/>
@@ -29884,32 +32850,7 @@
           </a:bodyPr>
           <a:lstStyle/>
           <a:p>
-            <a:pPr marL="0" marR="0" indent="0" algn="l" defTabSz="914400" rtl="0" eaLnBrk="1" fontAlgn="base" latinLnBrk="0" hangingPunct="1">
-              <a:lnSpc>
-                <a:spcPct val="100000"/>
-              </a:lnSpc>
-              <a:spcBef>
-                <a:spcPct val="50000"/>
-              </a:spcBef>
-              <a:spcAft>
-                <a:spcPct val="0"/>
-              </a:spcAft>
-              <a:buClrTx/>
-              <a:buSzTx/>
-              <a:buFontTx/>
-              <a:buNone/>
-              <a:tabLst/>
-            </a:pPr>
-            <a:endParaRPr kumimoji="0" lang="pt-PT" sz="6000" b="0" i="0" u="none" strike="noStrike" cap="none" normalizeH="0" baseline="0">
-              <a:ln>
-                <a:noFill/>
-              </a:ln>
-              <a:solidFill>
-                <a:srgbClr val="CC0000"/>
-              </a:solidFill>
-              <a:effectLst/>
-              <a:latin typeface="Humanst521 BT" pitchFamily="34" charset="0"/>
-            </a:endParaRPr>
+            <a:endParaRPr lang="pt-PT"/>
           </a:p>
         </p:txBody>
       </p:sp>
@@ -29929,8 +32870,8 @@
         </p:nvSpPr>
         <p:spPr bwMode="auto">
           <a:xfrm>
-            <a:off x="480710" y="3284984"/>
-            <a:ext cx="909223" cy="307777"/>
+            <a:off x="2004711" y="3284985"/>
+            <a:ext cx="837089" cy="307777"/>
           </a:xfrm>
           <a:prstGeom prst="rect">
             <a:avLst/>
@@ -29981,7 +32922,7 @@
         </p:nvSpPr>
         <p:spPr bwMode="auto">
           <a:xfrm rot="5400000" flipV="1">
-            <a:off x="2037798" y="2843960"/>
+            <a:off x="3561798" y="2843960"/>
             <a:ext cx="450000" cy="900000"/>
           </a:xfrm>
           <a:prstGeom prst="line">
@@ -30021,7 +32962,7 @@
         </p:nvSpPr>
         <p:spPr bwMode="auto">
           <a:xfrm>
-            <a:off x="2483768" y="2132856"/>
+            <a:off x="4007769" y="2132857"/>
             <a:ext cx="1019703" cy="307777"/>
           </a:xfrm>
           <a:prstGeom prst="rect">
@@ -30097,7 +33038,7 @@
         </p:nvSpPr>
         <p:spPr bwMode="auto">
           <a:xfrm rot="5400000" flipV="1">
-            <a:off x="7775575" y="946150"/>
+            <a:off x="9299576" y="946151"/>
             <a:ext cx="504825" cy="1006475"/>
           </a:xfrm>
           <a:prstGeom prst="rect">
@@ -30138,8 +33079,8 @@
         </p:nvSpPr>
         <p:spPr bwMode="auto">
           <a:xfrm>
-            <a:off x="0" y="0"/>
-            <a:ext cx="9144000" cy="0"/>
+            <a:off x="1524001" y="-507831"/>
+            <a:ext cx="184731" cy="1015663"/>
           </a:xfrm>
           <a:prstGeom prst="rect">
             <a:avLst/>
@@ -30176,8 +33117,8 @@
         </p:nvSpPr>
         <p:spPr bwMode="auto">
           <a:xfrm>
-            <a:off x="0" y="0"/>
-            <a:ext cx="9144000" cy="0"/>
+            <a:off x="1524001" y="-507831"/>
+            <a:ext cx="184731" cy="1015663"/>
           </a:xfrm>
           <a:prstGeom prst="rect">
             <a:avLst/>
@@ -30214,7 +33155,7 @@
         </p:nvSpPr>
         <p:spPr bwMode="auto">
           <a:xfrm>
-            <a:off x="8416999" y="6276920"/>
+            <a:off x="9941000" y="6276921"/>
             <a:ext cx="403151" cy="276999"/>
           </a:xfrm>
           <a:prstGeom prst="rect">
@@ -30262,7 +33203,7 @@
         </p:nvSpPr>
         <p:spPr bwMode="auto">
           <a:xfrm>
-            <a:off x="682625" y="1511709"/>
+            <a:off x="2206626" y="1511710"/>
             <a:ext cx="7705725" cy="523875"/>
           </a:xfrm>
           <a:prstGeom prst="rect">
@@ -30342,7 +33283,7 @@
         </p:nvSpPr>
         <p:spPr bwMode="auto">
           <a:xfrm>
-            <a:off x="2771775" y="404813"/>
+            <a:off x="4295776" y="404814"/>
             <a:ext cx="6048375" cy="854075"/>
           </a:xfrm>
           <a:prstGeom prst="rect">
@@ -30395,7 +33336,7 @@
         </p:nvSpPr>
         <p:spPr bwMode="auto">
           <a:xfrm>
-            <a:off x="480710" y="5157192"/>
+            <a:off x="2004710" y="5157193"/>
             <a:ext cx="651140" cy="307777"/>
           </a:xfrm>
           <a:prstGeom prst="rect">
@@ -30447,8 +33388,8 @@
         </p:nvSpPr>
         <p:spPr bwMode="auto">
           <a:xfrm>
-            <a:off x="1488822" y="4293096"/>
-            <a:ext cx="612668" cy="276999"/>
+            <a:off x="3012822" y="4293097"/>
+            <a:ext cx="572464" cy="276999"/>
           </a:xfrm>
           <a:prstGeom prst="rect">
             <a:avLst/>
@@ -30499,7 +33440,7 @@
         </p:nvSpPr>
         <p:spPr bwMode="auto">
           <a:xfrm flipV="1">
-            <a:off x="1200830" y="4329120"/>
+            <a:off x="2724830" y="4329120"/>
             <a:ext cx="360000" cy="180000"/>
           </a:xfrm>
           <a:prstGeom prst="line">
@@ -30539,7 +33480,7 @@
         </p:nvSpPr>
         <p:spPr bwMode="auto">
           <a:xfrm>
-            <a:off x="1127698" y="4149080"/>
+            <a:off x="2651698" y="4149081"/>
             <a:ext cx="436338" cy="307777"/>
           </a:xfrm>
           <a:prstGeom prst="rect">
@@ -30591,7 +33532,7 @@
         </p:nvSpPr>
         <p:spPr bwMode="auto">
           <a:xfrm rot="5400000" flipV="1">
-            <a:off x="1290830" y="5139200"/>
+            <a:off x="2814830" y="5139200"/>
             <a:ext cx="180000" cy="360000"/>
           </a:xfrm>
           <a:prstGeom prst="line">
@@ -30631,7 +33572,7 @@
         </p:nvSpPr>
         <p:spPr bwMode="auto">
           <a:xfrm>
-            <a:off x="1127698" y="5013176"/>
+            <a:off x="2651698" y="5013177"/>
             <a:ext cx="433132" cy="307777"/>
           </a:xfrm>
           <a:prstGeom prst="rect">
@@ -30683,8 +33624,8 @@
         </p:nvSpPr>
         <p:spPr bwMode="auto">
           <a:xfrm>
-            <a:off x="1488822" y="5816297"/>
-            <a:ext cx="542136" cy="276999"/>
+            <a:off x="3012823" y="5816298"/>
+            <a:ext cx="499817" cy="276999"/>
           </a:xfrm>
           <a:prstGeom prst="rect">
             <a:avLst/>
@@ -30735,7 +33676,7 @@
         </p:nvSpPr>
         <p:spPr bwMode="auto">
           <a:xfrm>
-            <a:off x="2483768" y="2132856"/>
+            <a:off x="4007769" y="2132857"/>
             <a:ext cx="1019703" cy="307777"/>
           </a:xfrm>
           <a:prstGeom prst="rect">
@@ -30787,7 +33728,7 @@
         </p:nvSpPr>
         <p:spPr bwMode="auto">
           <a:xfrm>
-            <a:off x="5709589" y="2132856"/>
+            <a:off x="7233590" y="2132857"/>
             <a:ext cx="934295" cy="307777"/>
           </a:xfrm>
           <a:prstGeom prst="rect">
@@ -30837,8 +33778,8 @@
         </p:nvSpPr>
         <p:spPr bwMode="auto">
           <a:xfrm>
-            <a:off x="2784966" y="3356992"/>
-            <a:ext cx="576064" cy="504056"/>
+            <a:off x="4308966" y="3356992"/>
+            <a:ext cx="576064" cy="1153180"/>
           </a:xfrm>
           <a:prstGeom prst="cube">
             <a:avLst/>
@@ -30866,32 +33807,7 @@
           </a:bodyPr>
           <a:lstStyle/>
           <a:p>
-            <a:pPr marL="0" marR="0" indent="0" algn="l" defTabSz="914400" rtl="0" eaLnBrk="1" fontAlgn="base" latinLnBrk="0" hangingPunct="1">
-              <a:lnSpc>
-                <a:spcPct val="100000"/>
-              </a:lnSpc>
-              <a:spcBef>
-                <a:spcPct val="50000"/>
-              </a:spcBef>
-              <a:spcAft>
-                <a:spcPct val="0"/>
-              </a:spcAft>
-              <a:buClrTx/>
-              <a:buSzTx/>
-              <a:buFontTx/>
-              <a:buNone/>
-              <a:tabLst/>
-            </a:pPr>
-            <a:endParaRPr kumimoji="0" lang="pt-PT" sz="6000" b="0" i="0" u="none" strike="noStrike" cap="none" normalizeH="0" baseline="0">
-              <a:ln>
-                <a:noFill/>
-              </a:ln>
-              <a:solidFill>
-                <a:srgbClr val="CC0000"/>
-              </a:solidFill>
-              <a:effectLst/>
-              <a:latin typeface="Humanst521 BT" pitchFamily="34" charset="0"/>
-            </a:endParaRPr>
+            <a:endParaRPr lang="pt-PT"/>
           </a:p>
         </p:txBody>
       </p:sp>
@@ -30909,8 +33825,8 @@
         </p:nvSpPr>
         <p:spPr bwMode="auto">
           <a:xfrm>
-            <a:off x="624726" y="4293096"/>
-            <a:ext cx="450000" cy="900000"/>
+            <a:off x="2148726" y="4293096"/>
+            <a:ext cx="450000" cy="1182648"/>
           </a:xfrm>
           <a:prstGeom prst="can">
             <a:avLst/>
@@ -30938,32 +33854,7 @@
           </a:bodyPr>
           <a:lstStyle/>
           <a:p>
-            <a:pPr marL="0" marR="0" indent="0" algn="l" defTabSz="914400" rtl="0" eaLnBrk="1" fontAlgn="base" latinLnBrk="0" hangingPunct="1">
-              <a:lnSpc>
-                <a:spcPct val="100000"/>
-              </a:lnSpc>
-              <a:spcBef>
-                <a:spcPct val="50000"/>
-              </a:spcBef>
-              <a:spcAft>
-                <a:spcPct val="0"/>
-              </a:spcAft>
-              <a:buClrTx/>
-              <a:buSzTx/>
-              <a:buFontTx/>
-              <a:buNone/>
-              <a:tabLst/>
-            </a:pPr>
-            <a:endParaRPr kumimoji="0" lang="pt-PT" sz="6000" b="0" i="0" u="none" strike="noStrike" cap="none" normalizeH="0" baseline="0">
-              <a:ln>
-                <a:noFill/>
-              </a:ln>
-              <a:solidFill>
-                <a:srgbClr val="CC0000"/>
-              </a:solidFill>
-              <a:effectLst/>
-              <a:latin typeface="Humanst521 BT" pitchFamily="34" charset="0"/>
-            </a:endParaRPr>
+            <a:endParaRPr lang="pt-PT"/>
           </a:p>
         </p:txBody>
       </p:sp>
@@ -30983,8 +33874,8 @@
         </p:nvSpPr>
         <p:spPr bwMode="auto">
           <a:xfrm>
-            <a:off x="1632838" y="3861048"/>
-            <a:ext cx="225000" cy="450000"/>
+            <a:off x="3156838" y="3861048"/>
+            <a:ext cx="225000" cy="1094244"/>
           </a:xfrm>
           <a:prstGeom prst="can">
             <a:avLst/>
@@ -31012,32 +33903,7 @@
           </a:bodyPr>
           <a:lstStyle/>
           <a:p>
-            <a:pPr marL="0" marR="0" indent="0" algn="l" defTabSz="914400" rtl="0" eaLnBrk="1" fontAlgn="base" latinLnBrk="0" hangingPunct="1">
-              <a:lnSpc>
-                <a:spcPct val="100000"/>
-              </a:lnSpc>
-              <a:spcBef>
-                <a:spcPct val="50000"/>
-              </a:spcBef>
-              <a:spcAft>
-                <a:spcPct val="0"/>
-              </a:spcAft>
-              <a:buClrTx/>
-              <a:buSzTx/>
-              <a:buFontTx/>
-              <a:buNone/>
-              <a:tabLst/>
-            </a:pPr>
-            <a:endParaRPr kumimoji="0" lang="pt-PT" sz="6000" b="0" i="0" u="none" strike="noStrike" cap="none" normalizeH="0" baseline="0">
-              <a:ln>
-                <a:noFill/>
-              </a:ln>
-              <a:solidFill>
-                <a:srgbClr val="CC0000"/>
-              </a:solidFill>
-              <a:effectLst/>
-              <a:latin typeface="Humanst521 BT" pitchFamily="34" charset="0"/>
-            </a:endParaRPr>
+            <a:endParaRPr lang="pt-PT"/>
           </a:p>
         </p:txBody>
       </p:sp>
@@ -31057,8 +33923,8 @@
         </p:nvSpPr>
         <p:spPr bwMode="auto">
           <a:xfrm>
-            <a:off x="1632838" y="5384249"/>
-            <a:ext cx="225000" cy="450000"/>
+            <a:off x="3156838" y="5384249"/>
+            <a:ext cx="225000" cy="1094244"/>
           </a:xfrm>
           <a:prstGeom prst="can">
             <a:avLst/>
@@ -31086,32 +33952,7 @@
           </a:bodyPr>
           <a:lstStyle/>
           <a:p>
-            <a:pPr marL="0" marR="0" indent="0" algn="l" defTabSz="914400" rtl="0" eaLnBrk="1" fontAlgn="base" latinLnBrk="0" hangingPunct="1">
-              <a:lnSpc>
-                <a:spcPct val="100000"/>
-              </a:lnSpc>
-              <a:spcBef>
-                <a:spcPct val="50000"/>
-              </a:spcBef>
-              <a:spcAft>
-                <a:spcPct val="0"/>
-              </a:spcAft>
-              <a:buClrTx/>
-              <a:buSzTx/>
-              <a:buFontTx/>
-              <a:buNone/>
-              <a:tabLst/>
-            </a:pPr>
-            <a:endParaRPr kumimoji="0" lang="pt-PT" sz="6000" b="0" i="0" u="none" strike="noStrike" cap="none" normalizeH="0" baseline="0">
-              <a:ln>
-                <a:noFill/>
-              </a:ln>
-              <a:solidFill>
-                <a:srgbClr val="CC0000"/>
-              </a:solidFill>
-              <a:effectLst/>
-              <a:latin typeface="Humanst521 BT" pitchFamily="34" charset="0"/>
-            </a:endParaRPr>
+            <a:endParaRPr lang="pt-PT"/>
           </a:p>
         </p:txBody>
       </p:sp>
@@ -31131,7 +33972,7 @@
         </p:nvSpPr>
         <p:spPr bwMode="auto">
           <a:xfrm flipV="1">
-            <a:off x="1992878" y="3789040"/>
+            <a:off x="3516878" y="3789040"/>
             <a:ext cx="720000" cy="360000"/>
           </a:xfrm>
           <a:prstGeom prst="line">
@@ -31171,7 +34012,7 @@
         </p:nvSpPr>
         <p:spPr bwMode="auto">
           <a:xfrm flipV="1">
-            <a:off x="1992878" y="3789040"/>
+            <a:off x="3516878" y="3789040"/>
             <a:ext cx="3888000" cy="1944000"/>
           </a:xfrm>
           <a:prstGeom prst="line">
@@ -31209,8 +34050,8 @@
         </p:nvSpPr>
         <p:spPr bwMode="auto">
           <a:xfrm>
-            <a:off x="5953318" y="3356992"/>
-            <a:ext cx="576064" cy="504056"/>
+            <a:off x="7477318" y="3356992"/>
+            <a:ext cx="576064" cy="1153180"/>
           </a:xfrm>
           <a:prstGeom prst="cube">
             <a:avLst/>
@@ -31238,32 +34079,7 @@
           </a:bodyPr>
           <a:lstStyle/>
           <a:p>
-            <a:pPr marL="0" marR="0" indent="0" algn="l" defTabSz="914400" rtl="0" eaLnBrk="1" fontAlgn="base" latinLnBrk="0" hangingPunct="1">
-              <a:lnSpc>
-                <a:spcPct val="100000"/>
-              </a:lnSpc>
-              <a:spcBef>
-                <a:spcPct val="50000"/>
-              </a:spcBef>
-              <a:spcAft>
-                <a:spcPct val="0"/>
-              </a:spcAft>
-              <a:buClrTx/>
-              <a:buSzTx/>
-              <a:buFontTx/>
-              <a:buNone/>
-              <a:tabLst/>
-            </a:pPr>
-            <a:endParaRPr kumimoji="0" lang="pt-PT" sz="6000" b="0" i="0" u="none" strike="noStrike" cap="none" normalizeH="0" baseline="0">
-              <a:ln>
-                <a:noFill/>
-              </a:ln>
-              <a:solidFill>
-                <a:srgbClr val="CC0000"/>
-              </a:solidFill>
-              <a:effectLst/>
-              <a:latin typeface="Humanst521 BT" pitchFamily="34" charset="0"/>
-            </a:endParaRPr>
+            <a:endParaRPr lang="pt-PT"/>
           </a:p>
         </p:txBody>
       </p:sp>
@@ -31283,7 +34099,7 @@
         </p:nvSpPr>
         <p:spPr bwMode="auto">
           <a:xfrm flipV="1">
-            <a:off x="5089222" y="3645024"/>
+            <a:off x="6613222" y="3645024"/>
             <a:ext cx="720000" cy="0"/>
           </a:xfrm>
           <a:prstGeom prst="line">
@@ -31323,7 +34139,7 @@
         </p:nvSpPr>
         <p:spPr bwMode="auto">
           <a:xfrm>
-            <a:off x="5996320" y="3439758"/>
+            <a:off x="7520320" y="3439759"/>
             <a:ext cx="338554" cy="461665"/>
           </a:xfrm>
           <a:prstGeom prst="rect">
@@ -31381,8 +34197,8 @@
         </p:nvSpPr>
         <p:spPr bwMode="auto">
           <a:xfrm>
-            <a:off x="5719078" y="2401143"/>
-            <a:ext cx="1013162" cy="307777"/>
+            <a:off x="7243079" y="2401144"/>
+            <a:ext cx="896399" cy="307777"/>
           </a:xfrm>
           <a:prstGeom prst="rect">
             <a:avLst/>
@@ -31433,8 +34249,8 @@
         </p:nvSpPr>
         <p:spPr bwMode="auto">
           <a:xfrm>
-            <a:off x="2483768" y="2420888"/>
-            <a:ext cx="1398140" cy="307777"/>
+            <a:off x="4007768" y="2420889"/>
+            <a:ext cx="1228926" cy="307777"/>
           </a:xfrm>
           <a:prstGeom prst="rect">
             <a:avLst/>
@@ -31485,7 +34301,7 @@
         </p:nvSpPr>
         <p:spPr bwMode="auto">
           <a:xfrm>
-            <a:off x="7185610" y="2113111"/>
+            <a:off x="8709611" y="2113112"/>
             <a:ext cx="1267719" cy="307777"/>
           </a:xfrm>
           <a:prstGeom prst="rect">
@@ -31535,8 +34351,8 @@
         </p:nvSpPr>
         <p:spPr bwMode="auto">
           <a:xfrm>
-            <a:off x="7537494" y="3356992"/>
-            <a:ext cx="576064" cy="504056"/>
+            <a:off x="9061494" y="3356992"/>
+            <a:ext cx="576064" cy="1153180"/>
           </a:xfrm>
           <a:prstGeom prst="cube">
             <a:avLst/>
@@ -31564,32 +34380,7 @@
           </a:bodyPr>
           <a:lstStyle/>
           <a:p>
-            <a:pPr marL="0" marR="0" indent="0" algn="l" defTabSz="914400" rtl="0" eaLnBrk="1" fontAlgn="base" latinLnBrk="0" hangingPunct="1">
-              <a:lnSpc>
-                <a:spcPct val="100000"/>
-              </a:lnSpc>
-              <a:spcBef>
-                <a:spcPct val="50000"/>
-              </a:spcBef>
-              <a:spcAft>
-                <a:spcPct val="0"/>
-              </a:spcAft>
-              <a:buClrTx/>
-              <a:buSzTx/>
-              <a:buFontTx/>
-              <a:buNone/>
-              <a:tabLst/>
-            </a:pPr>
-            <a:endParaRPr kumimoji="0" lang="pt-PT" sz="6000" b="0" i="0" u="none" strike="noStrike" cap="none" normalizeH="0" baseline="0">
-              <a:ln>
-                <a:noFill/>
-              </a:ln>
-              <a:solidFill>
-                <a:srgbClr val="CC0000"/>
-              </a:solidFill>
-              <a:effectLst/>
-              <a:latin typeface="Humanst521 BT" pitchFamily="34" charset="0"/>
-            </a:endParaRPr>
+            <a:endParaRPr lang="pt-PT"/>
           </a:p>
         </p:txBody>
       </p:sp>
@@ -31609,8 +34400,8 @@
         </p:nvSpPr>
         <p:spPr bwMode="auto">
           <a:xfrm>
-            <a:off x="7712268" y="2564904"/>
-            <a:ext cx="225000" cy="450000"/>
+            <a:off x="9236268" y="2564904"/>
+            <a:ext cx="225000" cy="1094244"/>
           </a:xfrm>
           <a:prstGeom prst="can">
             <a:avLst/>
@@ -31638,32 +34429,7 @@
           </a:bodyPr>
           <a:lstStyle/>
           <a:p>
-            <a:pPr marL="0" marR="0" indent="0" algn="l" defTabSz="914400" rtl="0" eaLnBrk="1" fontAlgn="base" latinLnBrk="0" hangingPunct="1">
-              <a:lnSpc>
-                <a:spcPct val="100000"/>
-              </a:lnSpc>
-              <a:spcBef>
-                <a:spcPct val="50000"/>
-              </a:spcBef>
-              <a:spcAft>
-                <a:spcPct val="0"/>
-              </a:spcAft>
-              <a:buClrTx/>
-              <a:buSzTx/>
-              <a:buFontTx/>
-              <a:buNone/>
-              <a:tabLst/>
-            </a:pPr>
-            <a:endParaRPr kumimoji="0" lang="pt-PT" sz="6000" b="0" i="0" u="none" strike="noStrike" cap="none" normalizeH="0" baseline="0">
-              <a:ln>
-                <a:noFill/>
-              </a:ln>
-              <a:solidFill>
-                <a:srgbClr val="CC0000"/>
-              </a:solidFill>
-              <a:effectLst/>
-              <a:latin typeface="Humanst521 BT" pitchFamily="34" charset="0"/>
-            </a:endParaRPr>
+            <a:endParaRPr lang="pt-PT"/>
           </a:p>
         </p:txBody>
       </p:sp>
@@ -31683,7 +34449,7 @@
         </p:nvSpPr>
         <p:spPr bwMode="auto">
           <a:xfrm rot="10800000" flipV="1">
-            <a:off x="7825526" y="3068960"/>
+            <a:off x="9349526" y="3068960"/>
             <a:ext cx="0" cy="270000"/>
           </a:xfrm>
           <a:prstGeom prst="line">
@@ -31723,7 +34489,7 @@
         </p:nvSpPr>
         <p:spPr bwMode="auto">
           <a:xfrm rot="10800000" flipV="1">
-            <a:off x="7825527" y="3933056"/>
+            <a:off x="9349527" y="3933056"/>
             <a:ext cx="0" cy="270000"/>
           </a:xfrm>
           <a:prstGeom prst="line">
@@ -31763,8 +34529,8 @@
         </p:nvSpPr>
         <p:spPr bwMode="auto">
           <a:xfrm>
-            <a:off x="7249462" y="4201343"/>
-            <a:ext cx="1426994" cy="307777"/>
+            <a:off x="8773462" y="4201344"/>
+            <a:ext cx="1264898" cy="307777"/>
           </a:xfrm>
           <a:prstGeom prst="rect">
             <a:avLst/>
@@ -31815,7 +34581,7 @@
         </p:nvSpPr>
         <p:spPr bwMode="auto">
           <a:xfrm>
-            <a:off x="7897534" y="2545740"/>
+            <a:off x="9421535" y="2545740"/>
             <a:ext cx="650563" cy="523220"/>
           </a:xfrm>
           <a:prstGeom prst="rect">
@@ -31882,7 +34648,7 @@
         </p:nvSpPr>
         <p:spPr bwMode="auto">
           <a:xfrm>
-            <a:off x="7580496" y="3429000"/>
+            <a:off x="9104496" y="3429001"/>
             <a:ext cx="338554" cy="461665"/>
           </a:xfrm>
           <a:prstGeom prst="rect">
@@ -31940,7 +34706,7 @@
         </p:nvSpPr>
         <p:spPr bwMode="auto">
           <a:xfrm flipV="1">
-            <a:off x="6673398" y="3645024"/>
+            <a:off x="8197398" y="3645024"/>
             <a:ext cx="720000" cy="0"/>
           </a:xfrm>
           <a:prstGeom prst="line">
@@ -31980,8 +34746,8 @@
         </p:nvSpPr>
         <p:spPr bwMode="auto">
           <a:xfrm>
-            <a:off x="480710" y="3284984"/>
-            <a:ext cx="909223" cy="307777"/>
+            <a:off x="2004711" y="3284985"/>
+            <a:ext cx="837089" cy="307777"/>
           </a:xfrm>
           <a:prstGeom prst="rect">
             <a:avLst/>
@@ -32032,7 +34798,7 @@
         </p:nvSpPr>
         <p:spPr bwMode="auto">
           <a:xfrm rot="5400000" flipV="1">
-            <a:off x="2037798" y="2843960"/>
+            <a:off x="3561798" y="2843960"/>
             <a:ext cx="450000" cy="900000"/>
           </a:xfrm>
           <a:prstGeom prst="line">
@@ -32070,8 +34836,8 @@
         </p:nvSpPr>
         <p:spPr bwMode="auto">
           <a:xfrm>
-            <a:off x="624726" y="2492896"/>
-            <a:ext cx="576064" cy="504056"/>
+            <a:off x="2148726" y="2492896"/>
+            <a:ext cx="576064" cy="1153180"/>
           </a:xfrm>
           <a:prstGeom prst="cube">
             <a:avLst/>
@@ -32099,32 +34865,7 @@
           </a:bodyPr>
           <a:lstStyle/>
           <a:p>
-            <a:pPr marL="0" marR="0" indent="0" algn="l" defTabSz="914400" rtl="0" eaLnBrk="1" fontAlgn="base" latinLnBrk="0" hangingPunct="1">
-              <a:lnSpc>
-                <a:spcPct val="100000"/>
-              </a:lnSpc>
-              <a:spcBef>
-                <a:spcPct val="50000"/>
-              </a:spcBef>
-              <a:spcAft>
-                <a:spcPct val="0"/>
-              </a:spcAft>
-              <a:buClrTx/>
-              <a:buSzTx/>
-              <a:buFontTx/>
-              <a:buNone/>
-              <a:tabLst/>
-            </a:pPr>
-            <a:endParaRPr kumimoji="0" lang="pt-PT" sz="6000" b="0" i="0" u="none" strike="noStrike" cap="none" normalizeH="0" baseline="0">
-              <a:ln>
-                <a:noFill/>
-              </a:ln>
-              <a:solidFill>
-                <a:srgbClr val="CC0000"/>
-              </a:solidFill>
-              <a:effectLst/>
-              <a:latin typeface="Humanst521 BT" pitchFamily="34" charset="0"/>
-            </a:endParaRPr>
+            <a:endParaRPr lang="pt-PT"/>
           </a:p>
         </p:txBody>
       </p:sp>
@@ -32168,7 +34909,7 @@
         </p:nvSpPr>
         <p:spPr bwMode="auto">
           <a:xfrm rot="5400000" flipV="1">
-            <a:off x="7775575" y="946150"/>
+            <a:off x="9299576" y="946151"/>
             <a:ext cx="504825" cy="1006475"/>
           </a:xfrm>
           <a:prstGeom prst="rect">
@@ -32209,8 +34950,8 @@
         </p:nvSpPr>
         <p:spPr bwMode="auto">
           <a:xfrm>
-            <a:off x="0" y="0"/>
-            <a:ext cx="9144000" cy="0"/>
+            <a:off x="1524001" y="-507831"/>
+            <a:ext cx="184731" cy="1015663"/>
           </a:xfrm>
           <a:prstGeom prst="rect">
             <a:avLst/>
@@ -32247,8 +34988,8 @@
         </p:nvSpPr>
         <p:spPr bwMode="auto">
           <a:xfrm>
-            <a:off x="0" y="0"/>
-            <a:ext cx="9144000" cy="0"/>
+            <a:off x="1524001" y="-507831"/>
+            <a:ext cx="184731" cy="1015663"/>
           </a:xfrm>
           <a:prstGeom prst="rect">
             <a:avLst/>
@@ -32291,7 +35032,7 @@
         </p:nvSpPr>
         <p:spPr bwMode="auto">
           <a:xfrm>
-            <a:off x="682625" y="1511709"/>
+            <a:off x="2206626" y="1511710"/>
             <a:ext cx="7705725" cy="523875"/>
           </a:xfrm>
           <a:prstGeom prst="rect">
@@ -32371,7 +35112,7 @@
         </p:nvSpPr>
         <p:spPr bwMode="auto">
           <a:xfrm>
-            <a:off x="2771775" y="404813"/>
+            <a:off x="4295776" y="404814"/>
             <a:ext cx="6048375" cy="854075"/>
           </a:xfrm>
           <a:prstGeom prst="rect">
@@ -32422,8 +35163,8 @@
         </p:nvSpPr>
         <p:spPr bwMode="auto">
           <a:xfrm>
-            <a:off x="624726" y="2492896"/>
-            <a:ext cx="576064" cy="504056"/>
+            <a:off x="2148726" y="2492896"/>
+            <a:ext cx="576064" cy="1153180"/>
           </a:xfrm>
           <a:prstGeom prst="cube">
             <a:avLst/>
@@ -32451,32 +35192,7 @@
           </a:bodyPr>
           <a:lstStyle/>
           <a:p>
-            <a:pPr marL="0" marR="0" indent="0" algn="l" defTabSz="914400" rtl="0" eaLnBrk="1" fontAlgn="base" latinLnBrk="0" hangingPunct="1">
-              <a:lnSpc>
-                <a:spcPct val="100000"/>
-              </a:lnSpc>
-              <a:spcBef>
-                <a:spcPct val="50000"/>
-              </a:spcBef>
-              <a:spcAft>
-                <a:spcPct val="0"/>
-              </a:spcAft>
-              <a:buClrTx/>
-              <a:buSzTx/>
-              <a:buFontTx/>
-              <a:buNone/>
-              <a:tabLst/>
-            </a:pPr>
-            <a:endParaRPr kumimoji="0" lang="pt-PT" sz="6000" b="0" i="0" u="none" strike="noStrike" cap="none" normalizeH="0" baseline="0">
-              <a:ln>
-                <a:noFill/>
-              </a:ln>
-              <a:solidFill>
-                <a:srgbClr val="CC0000"/>
-              </a:solidFill>
-              <a:effectLst/>
-              <a:latin typeface="Humanst521 BT" pitchFamily="34" charset="0"/>
-            </a:endParaRPr>
+            <a:endParaRPr lang="pt-PT"/>
           </a:p>
         </p:txBody>
       </p:sp>
@@ -32494,8 +35210,8 @@
         </p:nvSpPr>
         <p:spPr bwMode="auto">
           <a:xfrm>
-            <a:off x="1128782" y="2564904"/>
-            <a:ext cx="576064" cy="504056"/>
+            <a:off x="2652782" y="2564904"/>
+            <a:ext cx="576064" cy="1153180"/>
           </a:xfrm>
           <a:prstGeom prst="cube">
             <a:avLst/>
@@ -32523,32 +35239,7 @@
           </a:bodyPr>
           <a:lstStyle/>
           <a:p>
-            <a:pPr marL="0" marR="0" indent="0" algn="l" defTabSz="914400" rtl="0" eaLnBrk="1" fontAlgn="base" latinLnBrk="0" hangingPunct="1">
-              <a:lnSpc>
-                <a:spcPct val="100000"/>
-              </a:lnSpc>
-              <a:spcBef>
-                <a:spcPct val="50000"/>
-              </a:spcBef>
-              <a:spcAft>
-                <a:spcPct val="0"/>
-              </a:spcAft>
-              <a:buClrTx/>
-              <a:buSzTx/>
-              <a:buFontTx/>
-              <a:buNone/>
-              <a:tabLst/>
-            </a:pPr>
-            <a:endParaRPr kumimoji="0" lang="pt-PT" sz="6000" b="0" i="0" u="none" strike="noStrike" cap="none" normalizeH="0" baseline="0">
-              <a:ln>
-                <a:noFill/>
-              </a:ln>
-              <a:solidFill>
-                <a:srgbClr val="CC0000"/>
-              </a:solidFill>
-              <a:effectLst/>
-              <a:latin typeface="Humanst521 BT" pitchFamily="34" charset="0"/>
-            </a:endParaRPr>
+            <a:endParaRPr lang="pt-PT"/>
           </a:p>
         </p:txBody>
       </p:sp>
@@ -32568,7 +35259,7 @@
         </p:nvSpPr>
         <p:spPr bwMode="auto">
           <a:xfrm>
-            <a:off x="480710" y="5157192"/>
+            <a:off x="2004710" y="5157193"/>
             <a:ext cx="651140" cy="307777"/>
           </a:xfrm>
           <a:prstGeom prst="rect">
@@ -32620,8 +35311,8 @@
         </p:nvSpPr>
         <p:spPr bwMode="auto">
           <a:xfrm>
-            <a:off x="1488822" y="4293096"/>
-            <a:ext cx="612668" cy="276999"/>
+            <a:off x="3012822" y="4293097"/>
+            <a:ext cx="572464" cy="276999"/>
           </a:xfrm>
           <a:prstGeom prst="rect">
             <a:avLst/>
@@ -32672,7 +35363,7 @@
         </p:nvSpPr>
         <p:spPr bwMode="auto">
           <a:xfrm flipV="1">
-            <a:off x="1200830" y="4329120"/>
+            <a:off x="2724830" y="4329120"/>
             <a:ext cx="360000" cy="180000"/>
           </a:xfrm>
           <a:prstGeom prst="line">
@@ -32712,7 +35403,7 @@
         </p:nvSpPr>
         <p:spPr bwMode="auto">
           <a:xfrm>
-            <a:off x="1127698" y="4149080"/>
+            <a:off x="2651698" y="4149081"/>
             <a:ext cx="436338" cy="307777"/>
           </a:xfrm>
           <a:prstGeom prst="rect">
@@ -32764,7 +35455,7 @@
         </p:nvSpPr>
         <p:spPr bwMode="auto">
           <a:xfrm rot="5400000" flipV="1">
-            <a:off x="1290830" y="5139200"/>
+            <a:off x="2814830" y="5139200"/>
             <a:ext cx="180000" cy="360000"/>
           </a:xfrm>
           <a:prstGeom prst="line">
@@ -32804,7 +35495,7 @@
         </p:nvSpPr>
         <p:spPr bwMode="auto">
           <a:xfrm>
-            <a:off x="1127698" y="5013176"/>
+            <a:off x="2651698" y="5013177"/>
             <a:ext cx="433132" cy="307777"/>
           </a:xfrm>
           <a:prstGeom prst="rect">
@@ -32856,8 +35547,8 @@
         </p:nvSpPr>
         <p:spPr bwMode="auto">
           <a:xfrm>
-            <a:off x="1488822" y="5816297"/>
-            <a:ext cx="542136" cy="276999"/>
+            <a:off x="3012823" y="5816298"/>
+            <a:ext cx="499817" cy="276999"/>
           </a:xfrm>
           <a:prstGeom prst="rect">
             <a:avLst/>
@@ -32908,7 +35599,7 @@
         </p:nvSpPr>
         <p:spPr bwMode="auto">
           <a:xfrm>
-            <a:off x="2483768" y="2132856"/>
+            <a:off x="4007769" y="2132857"/>
             <a:ext cx="1019703" cy="307777"/>
           </a:xfrm>
           <a:prstGeom prst="rect">
@@ -32960,7 +35651,7 @@
         </p:nvSpPr>
         <p:spPr bwMode="auto">
           <a:xfrm>
-            <a:off x="5709589" y="2132856"/>
+            <a:off x="7233590" y="2132857"/>
             <a:ext cx="934295" cy="307777"/>
           </a:xfrm>
           <a:prstGeom prst="rect">
@@ -33012,7 +35703,7 @@
         </p:nvSpPr>
         <p:spPr bwMode="auto">
           <a:xfrm>
-            <a:off x="7185610" y="2113111"/>
+            <a:off x="8709611" y="2113112"/>
             <a:ext cx="1267719" cy="307777"/>
           </a:xfrm>
           <a:prstGeom prst="rect">
@@ -33062,8 +35753,8 @@
         </p:nvSpPr>
         <p:spPr bwMode="auto">
           <a:xfrm>
-            <a:off x="2784966" y="3356992"/>
-            <a:ext cx="576064" cy="504056"/>
+            <a:off x="4308966" y="3356992"/>
+            <a:ext cx="576064" cy="1153180"/>
           </a:xfrm>
           <a:prstGeom prst="cube">
             <a:avLst/>
@@ -33091,32 +35782,7 @@
           </a:bodyPr>
           <a:lstStyle/>
           <a:p>
-            <a:pPr marL="0" marR="0" indent="0" algn="l" defTabSz="914400" rtl="0" eaLnBrk="1" fontAlgn="base" latinLnBrk="0" hangingPunct="1">
-              <a:lnSpc>
-                <a:spcPct val="100000"/>
-              </a:lnSpc>
-              <a:spcBef>
-                <a:spcPct val="50000"/>
-              </a:spcBef>
-              <a:spcAft>
-                <a:spcPct val="0"/>
-              </a:spcAft>
-              <a:buClrTx/>
-              <a:buSzTx/>
-              <a:buFontTx/>
-              <a:buNone/>
-              <a:tabLst/>
-            </a:pPr>
-            <a:endParaRPr kumimoji="0" lang="pt-PT" sz="6000" b="0" i="0" u="none" strike="noStrike" cap="none" normalizeH="0" baseline="0">
-              <a:ln>
-                <a:noFill/>
-              </a:ln>
-              <a:solidFill>
-                <a:srgbClr val="CC0000"/>
-              </a:solidFill>
-              <a:effectLst/>
-              <a:latin typeface="Humanst521 BT" pitchFamily="34" charset="0"/>
-            </a:endParaRPr>
+            <a:endParaRPr lang="pt-PT"/>
           </a:p>
         </p:txBody>
       </p:sp>
@@ -33134,8 +35800,8 @@
         </p:nvSpPr>
         <p:spPr bwMode="auto">
           <a:xfrm>
-            <a:off x="624726" y="4293096"/>
-            <a:ext cx="450000" cy="900000"/>
+            <a:off x="2148726" y="4293096"/>
+            <a:ext cx="450000" cy="1182648"/>
           </a:xfrm>
           <a:prstGeom prst="can">
             <a:avLst/>
@@ -33163,32 +35829,7 @@
           </a:bodyPr>
           <a:lstStyle/>
           <a:p>
-            <a:pPr marL="0" marR="0" indent="0" algn="l" defTabSz="914400" rtl="0" eaLnBrk="1" fontAlgn="base" latinLnBrk="0" hangingPunct="1">
-              <a:lnSpc>
-                <a:spcPct val="100000"/>
-              </a:lnSpc>
-              <a:spcBef>
-                <a:spcPct val="50000"/>
-              </a:spcBef>
-              <a:spcAft>
-                <a:spcPct val="0"/>
-              </a:spcAft>
-              <a:buClrTx/>
-              <a:buSzTx/>
-              <a:buFontTx/>
-              <a:buNone/>
-              <a:tabLst/>
-            </a:pPr>
-            <a:endParaRPr kumimoji="0" lang="pt-PT" sz="6000" b="0" i="0" u="none" strike="noStrike" cap="none" normalizeH="0" baseline="0">
-              <a:ln>
-                <a:noFill/>
-              </a:ln>
-              <a:solidFill>
-                <a:srgbClr val="CC0000"/>
-              </a:solidFill>
-              <a:effectLst/>
-              <a:latin typeface="Humanst521 BT" pitchFamily="34" charset="0"/>
-            </a:endParaRPr>
+            <a:endParaRPr lang="pt-PT"/>
           </a:p>
         </p:txBody>
       </p:sp>
@@ -33208,8 +35849,8 @@
         </p:nvSpPr>
         <p:spPr bwMode="auto">
           <a:xfrm>
-            <a:off x="1632838" y="3861048"/>
-            <a:ext cx="225000" cy="450000"/>
+            <a:off x="3156838" y="3861048"/>
+            <a:ext cx="225000" cy="1094244"/>
           </a:xfrm>
           <a:prstGeom prst="can">
             <a:avLst/>
@@ -33237,32 +35878,7 @@
           </a:bodyPr>
           <a:lstStyle/>
           <a:p>
-            <a:pPr marL="0" marR="0" indent="0" algn="l" defTabSz="914400" rtl="0" eaLnBrk="1" fontAlgn="base" latinLnBrk="0" hangingPunct="1">
-              <a:lnSpc>
-                <a:spcPct val="100000"/>
-              </a:lnSpc>
-              <a:spcBef>
-                <a:spcPct val="50000"/>
-              </a:spcBef>
-              <a:spcAft>
-                <a:spcPct val="0"/>
-              </a:spcAft>
-              <a:buClrTx/>
-              <a:buSzTx/>
-              <a:buFontTx/>
-              <a:buNone/>
-              <a:tabLst/>
-            </a:pPr>
-            <a:endParaRPr kumimoji="0" lang="pt-PT" sz="6000" b="0" i="0" u="none" strike="noStrike" cap="none" normalizeH="0" baseline="0">
-              <a:ln>
-                <a:noFill/>
-              </a:ln>
-              <a:solidFill>
-                <a:srgbClr val="CC0000"/>
-              </a:solidFill>
-              <a:effectLst/>
-              <a:latin typeface="Humanst521 BT" pitchFamily="34" charset="0"/>
-            </a:endParaRPr>
+            <a:endParaRPr lang="pt-PT"/>
           </a:p>
         </p:txBody>
       </p:sp>
@@ -33282,8 +35898,8 @@
         </p:nvSpPr>
         <p:spPr bwMode="auto">
           <a:xfrm>
-            <a:off x="1632838" y="5384249"/>
-            <a:ext cx="225000" cy="450000"/>
+            <a:off x="3156838" y="5384249"/>
+            <a:ext cx="225000" cy="1094244"/>
           </a:xfrm>
           <a:prstGeom prst="can">
             <a:avLst/>
@@ -33311,32 +35927,7 @@
           </a:bodyPr>
           <a:lstStyle/>
           <a:p>
-            <a:pPr marL="0" marR="0" indent="0" algn="l" defTabSz="914400" rtl="0" eaLnBrk="1" fontAlgn="base" latinLnBrk="0" hangingPunct="1">
-              <a:lnSpc>
-                <a:spcPct val="100000"/>
-              </a:lnSpc>
-              <a:spcBef>
-                <a:spcPct val="50000"/>
-              </a:spcBef>
-              <a:spcAft>
-                <a:spcPct val="0"/>
-              </a:spcAft>
-              <a:buClrTx/>
-              <a:buSzTx/>
-              <a:buFontTx/>
-              <a:buNone/>
-              <a:tabLst/>
-            </a:pPr>
-            <a:endParaRPr kumimoji="0" lang="pt-PT" sz="6000" b="0" i="0" u="none" strike="noStrike" cap="none" normalizeH="0" baseline="0">
-              <a:ln>
-                <a:noFill/>
-              </a:ln>
-              <a:solidFill>
-                <a:srgbClr val="CC0000"/>
-              </a:solidFill>
-              <a:effectLst/>
-              <a:latin typeface="Humanst521 BT" pitchFamily="34" charset="0"/>
-            </a:endParaRPr>
+            <a:endParaRPr lang="pt-PT"/>
           </a:p>
         </p:txBody>
       </p:sp>
@@ -33356,8 +35947,8 @@
         </p:nvSpPr>
         <p:spPr bwMode="auto">
           <a:xfrm>
-            <a:off x="480710" y="3284984"/>
-            <a:ext cx="909223" cy="307777"/>
+            <a:off x="2004711" y="3284985"/>
+            <a:ext cx="837089" cy="307777"/>
           </a:xfrm>
           <a:prstGeom prst="rect">
             <a:avLst/>
@@ -33408,7 +35999,7 @@
         </p:nvSpPr>
         <p:spPr bwMode="auto">
           <a:xfrm flipV="1">
-            <a:off x="1992878" y="3789040"/>
+            <a:off x="3516878" y="3789040"/>
             <a:ext cx="720000" cy="360000"/>
           </a:xfrm>
           <a:prstGeom prst="line">
@@ -33448,7 +36039,7 @@
         </p:nvSpPr>
         <p:spPr bwMode="auto">
           <a:xfrm rot="5400000" flipV="1">
-            <a:off x="2037798" y="2843960"/>
+            <a:off x="3561798" y="2843960"/>
             <a:ext cx="450000" cy="900000"/>
           </a:xfrm>
           <a:prstGeom prst="line">
@@ -33488,7 +36079,7 @@
         </p:nvSpPr>
         <p:spPr bwMode="auto">
           <a:xfrm flipV="1">
-            <a:off x="1992878" y="3789040"/>
+            <a:off x="3516878" y="3789040"/>
             <a:ext cx="3888000" cy="1944000"/>
           </a:xfrm>
           <a:prstGeom prst="line">
@@ -33526,8 +36117,8 @@
         </p:nvSpPr>
         <p:spPr bwMode="auto">
           <a:xfrm>
-            <a:off x="5953318" y="3356992"/>
-            <a:ext cx="576064" cy="504056"/>
+            <a:off x="7477318" y="3356992"/>
+            <a:ext cx="576064" cy="1153180"/>
           </a:xfrm>
           <a:prstGeom prst="cube">
             <a:avLst/>
@@ -33555,32 +36146,7 @@
           </a:bodyPr>
           <a:lstStyle/>
           <a:p>
-            <a:pPr marL="0" marR="0" indent="0" algn="l" defTabSz="914400" rtl="0" eaLnBrk="1" fontAlgn="base" latinLnBrk="0" hangingPunct="1">
-              <a:lnSpc>
-                <a:spcPct val="100000"/>
-              </a:lnSpc>
-              <a:spcBef>
-                <a:spcPct val="50000"/>
-              </a:spcBef>
-              <a:spcAft>
-                <a:spcPct val="0"/>
-              </a:spcAft>
-              <a:buClrTx/>
-              <a:buSzTx/>
-              <a:buFontTx/>
-              <a:buNone/>
-              <a:tabLst/>
-            </a:pPr>
-            <a:endParaRPr kumimoji="0" lang="pt-PT" sz="6000" b="0" i="0" u="none" strike="noStrike" cap="none" normalizeH="0" baseline="0">
-              <a:ln>
-                <a:noFill/>
-              </a:ln>
-              <a:solidFill>
-                <a:srgbClr val="CC0000"/>
-              </a:solidFill>
-              <a:effectLst/>
-              <a:latin typeface="Humanst521 BT" pitchFamily="34" charset="0"/>
-            </a:endParaRPr>
+            <a:endParaRPr lang="pt-PT"/>
           </a:p>
         </p:txBody>
       </p:sp>
@@ -33598,8 +36164,8 @@
         </p:nvSpPr>
         <p:spPr bwMode="auto">
           <a:xfrm>
-            <a:off x="7537494" y="3356992"/>
-            <a:ext cx="576064" cy="504056"/>
+            <a:off x="9061494" y="3356992"/>
+            <a:ext cx="576064" cy="1153180"/>
           </a:xfrm>
           <a:prstGeom prst="cube">
             <a:avLst/>
@@ -33627,32 +36193,7 @@
           </a:bodyPr>
           <a:lstStyle/>
           <a:p>
-            <a:pPr marL="0" marR="0" indent="0" algn="l" defTabSz="914400" rtl="0" eaLnBrk="1" fontAlgn="base" latinLnBrk="0" hangingPunct="1">
-              <a:lnSpc>
-                <a:spcPct val="100000"/>
-              </a:lnSpc>
-              <a:spcBef>
-                <a:spcPct val="50000"/>
-              </a:spcBef>
-              <a:spcAft>
-                <a:spcPct val="0"/>
-              </a:spcAft>
-              <a:buClrTx/>
-              <a:buSzTx/>
-              <a:buFontTx/>
-              <a:buNone/>
-              <a:tabLst/>
-            </a:pPr>
-            <a:endParaRPr kumimoji="0" lang="pt-PT" sz="6000" b="0" i="0" u="none" strike="noStrike" cap="none" normalizeH="0" baseline="0">
-              <a:ln>
-                <a:noFill/>
-              </a:ln>
-              <a:solidFill>
-                <a:srgbClr val="CC0000"/>
-              </a:solidFill>
-              <a:effectLst/>
-              <a:latin typeface="Humanst521 BT" pitchFamily="34" charset="0"/>
-            </a:endParaRPr>
+            <a:endParaRPr lang="pt-PT"/>
           </a:p>
         </p:txBody>
       </p:sp>
@@ -33672,7 +36213,7 @@
         </p:nvSpPr>
         <p:spPr bwMode="auto">
           <a:xfrm flipV="1">
-            <a:off x="3433038" y="3573016"/>
+            <a:off x="4957038" y="3573016"/>
             <a:ext cx="720000" cy="0"/>
           </a:xfrm>
           <a:prstGeom prst="line">
@@ -33712,7 +36253,7 @@
         </p:nvSpPr>
         <p:spPr bwMode="auto">
           <a:xfrm flipV="1">
-            <a:off x="5089222" y="3645024"/>
+            <a:off x="6613222" y="3645024"/>
             <a:ext cx="720000" cy="0"/>
           </a:xfrm>
           <a:prstGeom prst="line">
@@ -33752,8 +36293,8 @@
         </p:nvSpPr>
         <p:spPr bwMode="auto">
           <a:xfrm>
-            <a:off x="7712268" y="2564904"/>
-            <a:ext cx="225000" cy="450000"/>
+            <a:off x="9236268" y="2564904"/>
+            <a:ext cx="225000" cy="1094244"/>
           </a:xfrm>
           <a:prstGeom prst="can">
             <a:avLst/>
@@ -33781,32 +36322,7 @@
           </a:bodyPr>
           <a:lstStyle/>
           <a:p>
-            <a:pPr marL="0" marR="0" indent="0" algn="l" defTabSz="914400" rtl="0" eaLnBrk="1" fontAlgn="base" latinLnBrk="0" hangingPunct="1">
-              <a:lnSpc>
-                <a:spcPct val="100000"/>
-              </a:lnSpc>
-              <a:spcBef>
-                <a:spcPct val="50000"/>
-              </a:spcBef>
-              <a:spcAft>
-                <a:spcPct val="0"/>
-              </a:spcAft>
-              <a:buClrTx/>
-              <a:buSzTx/>
-              <a:buFontTx/>
-              <a:buNone/>
-              <a:tabLst/>
-            </a:pPr>
-            <a:endParaRPr kumimoji="0" lang="pt-PT" sz="6000" b="0" i="0" u="none" strike="noStrike" cap="none" normalizeH="0" baseline="0">
-              <a:ln>
-                <a:noFill/>
-              </a:ln>
-              <a:solidFill>
-                <a:srgbClr val="CC0000"/>
-              </a:solidFill>
-              <a:effectLst/>
-              <a:latin typeface="Humanst521 BT" pitchFamily="34" charset="0"/>
-            </a:endParaRPr>
+            <a:endParaRPr lang="pt-PT"/>
           </a:p>
         </p:txBody>
       </p:sp>
@@ -33826,7 +36342,7 @@
         </p:nvSpPr>
         <p:spPr bwMode="auto">
           <a:xfrm rot="10800000" flipV="1">
-            <a:off x="7825526" y="3068960"/>
+            <a:off x="9349526" y="3068960"/>
             <a:ext cx="0" cy="270000"/>
           </a:xfrm>
           <a:prstGeom prst="line">
@@ -33866,7 +36382,7 @@
         </p:nvSpPr>
         <p:spPr bwMode="auto">
           <a:xfrm rot="10800000" flipV="1">
-            <a:off x="7825527" y="3933056"/>
+            <a:off x="9349527" y="3933056"/>
             <a:ext cx="0" cy="270000"/>
           </a:xfrm>
           <a:prstGeom prst="line">
@@ -33906,8 +36422,8 @@
         </p:nvSpPr>
         <p:spPr bwMode="auto">
           <a:xfrm>
-            <a:off x="7249462" y="4201343"/>
-            <a:ext cx="1426994" cy="307777"/>
+            <a:off x="8773462" y="4201344"/>
+            <a:ext cx="1264898" cy="307777"/>
           </a:xfrm>
           <a:prstGeom prst="rect">
             <a:avLst/>
@@ -33958,7 +36474,7 @@
         </p:nvSpPr>
         <p:spPr bwMode="auto">
           <a:xfrm>
-            <a:off x="7897534" y="2545740"/>
+            <a:off x="9421535" y="2545740"/>
             <a:ext cx="650563" cy="523220"/>
           </a:xfrm>
           <a:prstGeom prst="rect">
@@ -34025,7 +36541,7 @@
         </p:nvSpPr>
         <p:spPr bwMode="auto">
           <a:xfrm rot="10800000" flipV="1">
-            <a:off x="3433038" y="3717032"/>
+            <a:off x="4957038" y="3717032"/>
             <a:ext cx="720000" cy="0"/>
           </a:xfrm>
           <a:prstGeom prst="line">
@@ -34065,7 +36581,7 @@
         </p:nvSpPr>
         <p:spPr bwMode="auto">
           <a:xfrm>
-            <a:off x="5996320" y="3439758"/>
+            <a:off x="7520320" y="3439759"/>
             <a:ext cx="338554" cy="461665"/>
           </a:xfrm>
           <a:prstGeom prst="rect">
@@ -34123,7 +36639,7 @@
         </p:nvSpPr>
         <p:spPr bwMode="auto">
           <a:xfrm>
-            <a:off x="7580496" y="3429000"/>
+            <a:off x="9104496" y="3429001"/>
             <a:ext cx="338554" cy="461665"/>
           </a:xfrm>
           <a:prstGeom prst="rect">
@@ -34181,7 +36697,7 @@
         </p:nvSpPr>
         <p:spPr bwMode="auto">
           <a:xfrm>
-            <a:off x="4041801" y="2132856"/>
+            <a:off x="5565802" y="2132857"/>
             <a:ext cx="1204625" cy="307777"/>
           </a:xfrm>
           <a:prstGeom prst="rect">
@@ -34233,8 +36749,8 @@
         </p:nvSpPr>
         <p:spPr bwMode="auto">
           <a:xfrm>
-            <a:off x="1488822" y="5085184"/>
-            <a:ext cx="885179" cy="276999"/>
+            <a:off x="3012822" y="5085185"/>
+            <a:ext cx="787460" cy="276999"/>
           </a:xfrm>
           <a:prstGeom prst="rect">
             <a:avLst/>
@@ -34285,8 +36801,8 @@
         </p:nvSpPr>
         <p:spPr bwMode="auto">
           <a:xfrm>
-            <a:off x="1632838" y="4653136"/>
-            <a:ext cx="225000" cy="450000"/>
+            <a:off x="3156838" y="4653136"/>
+            <a:ext cx="225000" cy="1094244"/>
           </a:xfrm>
           <a:prstGeom prst="can">
             <a:avLst/>
@@ -34314,32 +36830,7 @@
           </a:bodyPr>
           <a:lstStyle/>
           <a:p>
-            <a:pPr marL="0" marR="0" indent="0" algn="l" defTabSz="914400" rtl="0" eaLnBrk="1" fontAlgn="base" latinLnBrk="0" hangingPunct="1">
-              <a:lnSpc>
-                <a:spcPct val="100000"/>
-              </a:lnSpc>
-              <a:spcBef>
-                <a:spcPct val="50000"/>
-              </a:spcBef>
-              <a:spcAft>
-                <a:spcPct val="0"/>
-              </a:spcAft>
-              <a:buClrTx/>
-              <a:buSzTx/>
-              <a:buFontTx/>
-              <a:buNone/>
-              <a:tabLst/>
-            </a:pPr>
-            <a:endParaRPr kumimoji="0" lang="pt-PT" sz="6000" b="0" i="0" u="none" strike="noStrike" cap="none" normalizeH="0" baseline="0">
-              <a:ln>
-                <a:noFill/>
-              </a:ln>
-              <a:solidFill>
-                <a:srgbClr val="CC0000"/>
-              </a:solidFill>
-              <a:effectLst/>
-              <a:latin typeface="Humanst521 BT" pitchFamily="34" charset="0"/>
-            </a:endParaRPr>
+            <a:endParaRPr lang="pt-PT"/>
           </a:p>
         </p:txBody>
       </p:sp>
@@ -34359,7 +36850,7 @@
         </p:nvSpPr>
         <p:spPr bwMode="auto">
           <a:xfrm flipV="1">
-            <a:off x="1200790" y="4869160"/>
+            <a:off x="2724790" y="4869160"/>
             <a:ext cx="360000" cy="0"/>
           </a:xfrm>
           <a:prstGeom prst="line">
@@ -34399,7 +36890,7 @@
         </p:nvSpPr>
         <p:spPr bwMode="auto">
           <a:xfrm>
-            <a:off x="1128782" y="4581128"/>
+            <a:off x="2652782" y="4581129"/>
             <a:ext cx="433132" cy="307777"/>
           </a:xfrm>
           <a:prstGeom prst="rect">
@@ -34451,7 +36942,7 @@
         </p:nvSpPr>
         <p:spPr bwMode="auto">
           <a:xfrm flipV="1">
-            <a:off x="1992878" y="3789040"/>
+            <a:off x="3516878" y="3789040"/>
             <a:ext cx="2304000" cy="1152000"/>
           </a:xfrm>
           <a:prstGeom prst="line">
@@ -34489,8 +36980,8 @@
         </p:nvSpPr>
         <p:spPr bwMode="auto">
           <a:xfrm>
-            <a:off x="4369142" y="3356992"/>
-            <a:ext cx="576064" cy="504056"/>
+            <a:off x="5893142" y="3356992"/>
+            <a:ext cx="576064" cy="1153180"/>
           </a:xfrm>
           <a:prstGeom prst="cube">
             <a:avLst/>
@@ -34518,32 +37009,7 @@
           </a:bodyPr>
           <a:lstStyle/>
           <a:p>
-            <a:pPr marL="0" marR="0" indent="0" algn="l" defTabSz="914400" rtl="0" eaLnBrk="1" fontAlgn="base" latinLnBrk="0" hangingPunct="1">
-              <a:lnSpc>
-                <a:spcPct val="100000"/>
-              </a:lnSpc>
-              <a:spcBef>
-                <a:spcPct val="50000"/>
-              </a:spcBef>
-              <a:spcAft>
-                <a:spcPct val="0"/>
-              </a:spcAft>
-              <a:buClrTx/>
-              <a:buSzTx/>
-              <a:buFontTx/>
-              <a:buNone/>
-              <a:tabLst/>
-            </a:pPr>
-            <a:endParaRPr kumimoji="0" lang="pt-PT" sz="6000" b="0" i="0" u="none" strike="noStrike" cap="none" normalizeH="0" baseline="0">
-              <a:ln>
-                <a:noFill/>
-              </a:ln>
-              <a:solidFill>
-                <a:srgbClr val="CC0000"/>
-              </a:solidFill>
-              <a:effectLst/>
-              <a:latin typeface="Humanst521 BT" pitchFamily="34" charset="0"/>
-            </a:endParaRPr>
+            <a:endParaRPr lang="pt-PT"/>
           </a:p>
         </p:txBody>
       </p:sp>
@@ -34561,8 +37027,8 @@
         </p:nvSpPr>
         <p:spPr bwMode="auto">
           <a:xfrm>
-            <a:off x="768742" y="2780928"/>
-            <a:ext cx="576064" cy="504056"/>
+            <a:off x="2292742" y="2780928"/>
+            <a:ext cx="576064" cy="1153180"/>
           </a:xfrm>
           <a:prstGeom prst="cube">
             <a:avLst/>
@@ -34590,32 +37056,7 @@
           </a:bodyPr>
           <a:lstStyle/>
           <a:p>
-            <a:pPr marL="0" marR="0" indent="0" algn="l" defTabSz="914400" rtl="0" eaLnBrk="1" fontAlgn="base" latinLnBrk="0" hangingPunct="1">
-              <a:lnSpc>
-                <a:spcPct val="100000"/>
-              </a:lnSpc>
-              <a:spcBef>
-                <a:spcPct val="50000"/>
-              </a:spcBef>
-              <a:spcAft>
-                <a:spcPct val="0"/>
-              </a:spcAft>
-              <a:buClrTx/>
-              <a:buSzTx/>
-              <a:buFontTx/>
-              <a:buNone/>
-              <a:tabLst/>
-            </a:pPr>
-            <a:endParaRPr kumimoji="0" lang="pt-PT" sz="6000" b="0" i="0" u="none" strike="noStrike" cap="none" normalizeH="0" baseline="0">
-              <a:ln>
-                <a:noFill/>
-              </a:ln>
-              <a:solidFill>
-                <a:srgbClr val="CC0000"/>
-              </a:solidFill>
-              <a:effectLst/>
-              <a:latin typeface="Humanst521 BT" pitchFamily="34" charset="0"/>
-            </a:endParaRPr>
+            <a:endParaRPr lang="pt-PT"/>
           </a:p>
         </p:txBody>
       </p:sp>
@@ -34635,7 +37076,7 @@
         </p:nvSpPr>
         <p:spPr bwMode="auto">
           <a:xfrm flipV="1">
-            <a:off x="6673398" y="3645024"/>
+            <a:off x="8197398" y="3645024"/>
             <a:ext cx="720000" cy="0"/>
           </a:xfrm>
           <a:prstGeom prst="line">
@@ -34675,8 +37116,8 @@
         </p:nvSpPr>
         <p:spPr bwMode="auto">
           <a:xfrm>
-            <a:off x="5719078" y="2401143"/>
-            <a:ext cx="1013162" cy="307777"/>
+            <a:off x="7243079" y="2401144"/>
+            <a:ext cx="896399" cy="307777"/>
           </a:xfrm>
           <a:prstGeom prst="rect">
             <a:avLst/>
@@ -34727,8 +37168,8 @@
         </p:nvSpPr>
         <p:spPr bwMode="auto">
           <a:xfrm>
-            <a:off x="2483768" y="2420888"/>
-            <a:ext cx="1398140" cy="307777"/>
+            <a:off x="4007768" y="2420889"/>
+            <a:ext cx="1228926" cy="307777"/>
           </a:xfrm>
           <a:prstGeom prst="rect">
             <a:avLst/>
@@ -34793,8 +37234,8 @@
           <a:chExt cx="0" cy="0"/>
         </a:xfrm>
       </p:grpSpPr>
-      <mc:AlternateContent xmlns:mc="http://schemas.openxmlformats.org/markup-compatibility/2006" xmlns:a14="http://schemas.microsoft.com/office/drawing/2010/main">
-        <mc:Choice Requires="a14">
+      <mc:AlternateContent xmlns:mc="http://schemas.openxmlformats.org/markup-compatibility/2006">
+        <mc:Choice xmlns:a14="http://schemas.microsoft.com/office/drawing/2010/main" Requires="a14">
           <p:sp>
             <p:nvSpPr>
               <p:cNvPr id="5" name="Text Box 13">
@@ -34811,7 +37252,7 @@
             </p:nvSpPr>
             <p:spPr bwMode="auto">
               <a:xfrm>
-                <a:off x="539552" y="2077767"/>
+                <a:off x="2063552" y="2077767"/>
                 <a:ext cx="7920432" cy="1697644"/>
               </a:xfrm>
               <a:prstGeom prst="rect">
@@ -34896,7 +37337,7 @@
                 <a14:m>
                   <m:oMath xmlns:m="http://schemas.openxmlformats.org/officeDocument/2006/math">
                     <m:r>
-                      <a:rPr lang="pt-PT" sz="2000" b="0" i="1" smtClean="0">
+                      <a:rPr lang="pt-PT" sz="2000" i="1">
                         <a:solidFill>
                           <a:schemeClr val="tx1"/>
                         </a:solidFill>
@@ -34908,7 +37349,7 @@
                       <m:radPr>
                         <m:degHide m:val="on"/>
                         <m:ctrlPr>
-                          <a:rPr lang="pt-PT" sz="2000" b="0" i="1" smtClean="0">
+                          <a:rPr lang="pt-PT" sz="2000" i="1">
                             <a:solidFill>
                               <a:schemeClr val="tx1"/>
                             </a:solidFill>
@@ -34923,7 +37364,7 @@
                             <m:chr m:val="∑"/>
                             <m:limLoc m:val="subSup"/>
                             <m:ctrlPr>
-                              <a:rPr lang="pt-PT" sz="2000" b="0" i="1" smtClean="0">
+                              <a:rPr lang="pt-PT" sz="2000" i="1">
                                 <a:solidFill>
                                   <a:schemeClr val="tx1"/>
                                 </a:solidFill>
@@ -34936,7 +37377,7 @@
                               <m:rPr>
                                 <m:brk m:alnAt="25"/>
                               </m:rPr>
-                              <a:rPr lang="pt-PT" sz="2000" b="0" i="1" smtClean="0">
+                              <a:rPr lang="pt-PT" sz="2000" i="1">
                                 <a:solidFill>
                                   <a:schemeClr val="tx1"/>
                                 </a:solidFill>
@@ -34945,7 +37386,7 @@
                               <m:t>𝑖</m:t>
                             </m:r>
                             <m:r>
-                              <a:rPr lang="pt-PT" sz="2000" b="0" i="1" smtClean="0">
+                              <a:rPr lang="pt-PT" sz="2000" i="1">
                                 <a:solidFill>
                                   <a:schemeClr val="tx1"/>
                                 </a:solidFill>
@@ -34956,7 +37397,7 @@
                           </m:sub>
                           <m:sup>
                             <m:r>
-                              <a:rPr lang="pt-PT" sz="2000" b="0" i="1" smtClean="0">
+                              <a:rPr lang="pt-PT" sz="2000" i="1">
                                 <a:solidFill>
                                   <a:schemeClr val="tx1"/>
                                 </a:solidFill>
@@ -34970,7 +37411,7 @@
                               <m:fPr>
                                 <m:type m:val="lin"/>
                                 <m:ctrlPr>
-                                  <a:rPr lang="pt-PT" sz="2000" b="0" i="1" smtClean="0">
+                                  <a:rPr lang="pt-PT" sz="2000" i="1">
                                     <a:solidFill>
                                       <a:schemeClr val="tx1"/>
                                     </a:solidFill>
@@ -34982,7 +37423,7 @@
                                 <m:sSup>
                                   <m:sSupPr>
                                     <m:ctrlPr>
-                                      <a:rPr lang="pt-PT" sz="2000" b="0" i="1" smtClean="0">
+                                      <a:rPr lang="pt-PT" sz="2000" i="1">
                                         <a:solidFill>
                                           <a:schemeClr val="tx1"/>
                                         </a:solidFill>
@@ -34994,7 +37435,7 @@
                                     <m:d>
                                       <m:dPr>
                                         <m:ctrlPr>
-                                          <a:rPr lang="pt-PT" sz="2000" b="0" i="1" smtClean="0">
+                                          <a:rPr lang="pt-PT" sz="2000" i="1">
                                             <a:solidFill>
                                               <a:schemeClr val="tx1"/>
                                             </a:solidFill>
@@ -35007,7 +37448,7 @@
                                           <m:accPr>
                                             <m:chr m:val="̂"/>
                                             <m:ctrlPr>
-                                              <a:rPr lang="pt-PT" sz="2000" b="0" i="1" smtClean="0">
+                                              <a:rPr lang="pt-PT" sz="2000" i="1">
                                                 <a:solidFill>
                                                   <a:schemeClr val="tx1"/>
                                                 </a:solidFill>
@@ -35017,7 +37458,7 @@
                                           </m:accPr>
                                           <m:e>
                                             <m:r>
-                                              <a:rPr lang="pt-PT" sz="2000" b="0" i="1" smtClean="0">
+                                              <a:rPr lang="pt-PT" sz="2000" i="1">
                                                 <a:solidFill>
                                                   <a:schemeClr val="tx1"/>
                                                 </a:solidFill>
@@ -35028,7 +37469,7 @@
                                           </m:e>
                                         </m:acc>
                                         <m:r>
-                                          <a:rPr lang="pt-PT" sz="2000" b="0" i="1" smtClean="0">
+                                          <a:rPr lang="pt-PT" sz="2000" i="1">
                                             <a:solidFill>
                                               <a:schemeClr val="tx1"/>
                                             </a:solidFill>
@@ -35037,7 +37478,7 @@
                                           <m:t>−</m:t>
                                         </m:r>
                                         <m:r>
-                                          <a:rPr lang="pt-PT" sz="2000" b="0" i="1" smtClean="0">
+                                          <a:rPr lang="pt-PT" sz="2000" i="1">
                                             <a:solidFill>
                                               <a:schemeClr val="tx1"/>
                                             </a:solidFill>
@@ -35050,7 +37491,7 @@
                                   </m:e>
                                   <m:sup>
                                     <m:r>
-                                      <a:rPr lang="pt-PT" sz="2000" b="0" i="1" smtClean="0">
+                                      <a:rPr lang="pt-PT" sz="2000" i="1">
                                         <a:solidFill>
                                           <a:schemeClr val="tx1"/>
                                         </a:solidFill>
@@ -35063,7 +37504,7 @@
                               </m:num>
                               <m:den>
                                 <m:r>
-                                  <a:rPr lang="pt-PT" sz="2000" b="0" i="1" smtClean="0">
+                                  <a:rPr lang="pt-PT" sz="2000" i="1">
                                     <a:solidFill>
                                       <a:schemeClr val="tx1"/>
                                     </a:solidFill>
@@ -35143,7 +37584,7 @@
                 <a14:m>
                   <m:oMath xmlns:m="http://schemas.openxmlformats.org/officeDocument/2006/math">
                     <m:r>
-                      <a:rPr lang="pt-PT" sz="2000" b="0" i="1" smtClean="0">
+                      <a:rPr lang="pt-PT" sz="2000" i="1">
                         <a:solidFill>
                           <a:schemeClr val="tx1"/>
                         </a:solidFill>
@@ -35156,7 +37597,7 @@
                         <m:chr m:val="∑"/>
                         <m:limLoc m:val="subSup"/>
                         <m:ctrlPr>
-                          <a:rPr lang="pt-PT" sz="2000" b="0" i="1" smtClean="0">
+                          <a:rPr lang="pt-PT" sz="2000" i="1">
                             <a:solidFill>
                               <a:schemeClr val="tx1"/>
                             </a:solidFill>
@@ -35169,7 +37610,7 @@
                           <m:rPr>
                             <m:brk m:alnAt="25"/>
                           </m:rPr>
-                          <a:rPr lang="pt-PT" sz="2000" b="0" i="1" smtClean="0">
+                          <a:rPr lang="pt-PT" sz="2000" i="1">
                             <a:solidFill>
                               <a:schemeClr val="tx1"/>
                             </a:solidFill>
@@ -35178,7 +37619,7 @@
                           <m:t>𝑖</m:t>
                         </m:r>
                         <m:r>
-                          <a:rPr lang="pt-PT" sz="2000" b="0" i="1" smtClean="0">
+                          <a:rPr lang="pt-PT" sz="2000" i="1">
                             <a:solidFill>
                               <a:schemeClr val="tx1"/>
                             </a:solidFill>
@@ -35189,7 +37630,7 @@
                       </m:sub>
                       <m:sup>
                         <m:r>
-                          <a:rPr lang="pt-PT" sz="2000" b="0" i="1" smtClean="0">
+                          <a:rPr lang="pt-PT" sz="2000" i="1">
                             <a:solidFill>
                               <a:schemeClr val="tx1"/>
                             </a:solidFill>
@@ -35203,7 +37644,7 @@
                           <m:fPr>
                             <m:type m:val="lin"/>
                             <m:ctrlPr>
-                              <a:rPr lang="pt-PT" sz="2000" b="0" i="1" smtClean="0">
+                              <a:rPr lang="pt-PT" sz="2000" i="1">
                                 <a:solidFill>
                                   <a:schemeClr val="tx1"/>
                                 </a:solidFill>
@@ -35217,7 +37658,7 @@
                                 <m:begChr m:val="|"/>
                                 <m:endChr m:val="|"/>
                                 <m:ctrlPr>
-                                  <a:rPr lang="pt-PT" sz="2000" b="0" i="1" smtClean="0">
+                                  <a:rPr lang="pt-PT" sz="2000" i="1">
                                     <a:solidFill>
                                       <a:schemeClr val="tx1"/>
                                     </a:solidFill>
@@ -35230,7 +37671,7 @@
                                   <m:accPr>
                                     <m:chr m:val="̂"/>
                                     <m:ctrlPr>
-                                      <a:rPr lang="pt-PT" sz="2000" b="0" i="1" smtClean="0">
+                                      <a:rPr lang="pt-PT" sz="2000" i="1">
                                         <a:solidFill>
                                           <a:schemeClr val="tx1"/>
                                         </a:solidFill>
@@ -35240,7 +37681,7 @@
                                   </m:accPr>
                                   <m:e>
                                     <m:r>
-                                      <a:rPr lang="pt-PT" sz="2000" b="0" i="1" smtClean="0">
+                                      <a:rPr lang="pt-PT" sz="2000" i="1">
                                         <a:solidFill>
                                           <a:schemeClr val="tx1"/>
                                         </a:solidFill>
@@ -35251,7 +37692,7 @@
                                   </m:e>
                                 </m:acc>
                                 <m:r>
-                                  <a:rPr lang="pt-PT" sz="2000" b="0" i="1" smtClean="0">
+                                  <a:rPr lang="pt-PT" sz="2000" i="1">
                                     <a:solidFill>
                                       <a:schemeClr val="tx1"/>
                                     </a:solidFill>
@@ -35260,7 +37701,7 @@
                                   <m:t>−</m:t>
                                 </m:r>
                                 <m:r>
-                                  <a:rPr lang="pt-PT" sz="2000" b="0" i="1" smtClean="0">
+                                  <a:rPr lang="pt-PT" sz="2000" i="1">
                                     <a:solidFill>
                                       <a:schemeClr val="tx1"/>
                                     </a:solidFill>
@@ -35273,7 +37714,7 @@
                           </m:num>
                           <m:den>
                             <m:r>
-                              <a:rPr lang="pt-PT" sz="2000" b="0" i="1" smtClean="0">
+                              <a:rPr lang="pt-PT" sz="2000" i="1">
                                 <a:solidFill>
                                   <a:schemeClr val="tx1"/>
                                 </a:solidFill>
@@ -35297,7 +37738,7 @@
             </p:txBody>
           </p:sp>
         </mc:Choice>
-        <mc:Fallback xmlns="">
+        <mc:Fallback>
           <p:sp>
             <p:nvSpPr>
               <p:cNvPr id="5" name="Text Box 13">
@@ -35314,7 +37755,7 @@
             </p:nvSpPr>
             <p:spPr bwMode="auto">
               <a:xfrm>
-                <a:off x="539552" y="2077767"/>
+                <a:off x="2063552" y="2077767"/>
                 <a:ext cx="7920432" cy="1697644"/>
               </a:xfrm>
               <a:prstGeom prst="rect">
@@ -35358,7 +37799,7 @@
         </p:nvSpPr>
         <p:spPr bwMode="auto">
           <a:xfrm rot="5400000" flipV="1">
-            <a:off x="7775575" y="946150"/>
+            <a:off x="9299576" y="946151"/>
             <a:ext cx="504825" cy="1006475"/>
           </a:xfrm>
           <a:prstGeom prst="rect">
@@ -35399,8 +37840,8 @@
         </p:nvSpPr>
         <p:spPr bwMode="auto">
           <a:xfrm>
-            <a:off x="0" y="0"/>
-            <a:ext cx="9144000" cy="0"/>
+            <a:off x="1524001" y="-507831"/>
+            <a:ext cx="184731" cy="1015663"/>
           </a:xfrm>
           <a:prstGeom prst="rect">
             <a:avLst/>
@@ -35437,8 +37878,8 @@
         </p:nvSpPr>
         <p:spPr bwMode="auto">
           <a:xfrm>
-            <a:off x="0" y="0"/>
-            <a:ext cx="9144000" cy="0"/>
+            <a:off x="1524001" y="-507831"/>
+            <a:ext cx="184731" cy="1015663"/>
           </a:xfrm>
           <a:prstGeom prst="rect">
             <a:avLst/>
@@ -35481,7 +37922,7 @@
         </p:nvSpPr>
         <p:spPr bwMode="auto">
           <a:xfrm>
-            <a:off x="682625" y="1511709"/>
+            <a:off x="2206626" y="1511709"/>
             <a:ext cx="7705725" cy="523220"/>
           </a:xfrm>
           <a:prstGeom prst="rect">
@@ -35561,7 +38002,7 @@
         </p:nvSpPr>
         <p:spPr bwMode="auto">
           <a:xfrm>
-            <a:off x="2771775" y="404813"/>
+            <a:off x="4295776" y="404814"/>
             <a:ext cx="6048375" cy="854075"/>
           </a:xfrm>
           <a:prstGeom prst="rect">
@@ -35614,7 +38055,7 @@
         </p:nvSpPr>
         <p:spPr bwMode="auto">
           <a:xfrm>
-            <a:off x="682625" y="3985245"/>
+            <a:off x="2206626" y="3985246"/>
             <a:ext cx="7705725" cy="523875"/>
           </a:xfrm>
           <a:prstGeom prst="rect">
@@ -35678,8 +38119,8 @@
           </a:p>
         </p:txBody>
       </p:sp>
-      <mc:AlternateContent xmlns:mc="http://schemas.openxmlformats.org/markup-compatibility/2006" xmlns:a14="http://schemas.microsoft.com/office/drawing/2010/main">
-        <mc:Choice Requires="a14">
+      <mc:AlternateContent xmlns:mc="http://schemas.openxmlformats.org/markup-compatibility/2006">
+        <mc:Choice xmlns:a14="http://schemas.microsoft.com/office/drawing/2010/main" Requires="a14">
           <p:sp>
             <p:nvSpPr>
               <p:cNvPr id="53" name="Text Box 13">
@@ -35696,7 +38137,7 @@
             </p:nvSpPr>
             <p:spPr bwMode="auto">
               <a:xfrm>
-                <a:off x="539552" y="4508593"/>
+                <a:off x="2063552" y="4508593"/>
                 <a:ext cx="8136906" cy="1477328"/>
               </a:xfrm>
               <a:prstGeom prst="rect">
@@ -35744,7 +38185,7 @@
                   </a:rPr>
                   <a:t>)</a:t>
                 </a:r>
-                <a:endParaRPr lang="pt-PT" sz="2000" b="0" i="1" dirty="0">
+                <a:endParaRPr lang="pt-PT" sz="2000" i="1" dirty="0">
                   <a:solidFill>
                     <a:schemeClr val="tx1"/>
                   </a:solidFill>
@@ -35760,7 +38201,7 @@
                     </m:oMathParaPr>
                     <m:oMath xmlns:m="http://schemas.openxmlformats.org/officeDocument/2006/math">
                       <m:r>
-                        <a:rPr lang="pt-PT" sz="2000" b="0" i="1" smtClean="0">
+                        <a:rPr lang="pt-PT" sz="2000" i="1">
                           <a:solidFill>
                             <a:schemeClr val="tx1"/>
                           </a:solidFill>
@@ -35772,7 +38213,7 @@
                         <m:fPr>
                           <m:type m:val="lin"/>
                           <m:ctrlPr>
-                            <a:rPr lang="pt-PT" sz="2000" b="0" i="1" smtClean="0">
+                            <a:rPr lang="pt-PT" sz="2000" i="1">
                               <a:solidFill>
                                 <a:schemeClr val="tx1"/>
                               </a:solidFill>
@@ -35785,7 +38226,7 @@
                             <m:rPr>
                               <m:nor/>
                             </m:rPr>
-                            <a:rPr lang="pt-PT" sz="2000" b="0" i="0" smtClean="0">
+                            <a:rPr lang="pt-PT" sz="2000">
                               <a:solidFill>
                                 <a:schemeClr val="tx1"/>
                               </a:solidFill>
@@ -35799,7 +38240,7 @@
                             <m:rPr>
                               <m:nor/>
                             </m:rPr>
-                            <a:rPr lang="pt-PT" sz="2000" b="0" i="0" smtClean="0">
+                            <a:rPr lang="pt-PT" sz="2000">
                               <a:solidFill>
                                 <a:schemeClr val="tx1"/>
                               </a:solidFill>
@@ -35848,7 +38289,7 @@
                   </a:rPr>
                   <a:t>)</a:t>
                 </a:r>
-                <a:endParaRPr lang="pt-PT" sz="2000" b="0" i="1" dirty="0">
+                <a:endParaRPr lang="pt-PT" sz="2000" i="1" dirty="0">
                   <a:solidFill>
                     <a:schemeClr val="tx1"/>
                   </a:solidFill>
@@ -35864,7 +38305,7 @@
                     </m:oMathParaPr>
                     <m:oMath xmlns:m="http://schemas.openxmlformats.org/officeDocument/2006/math">
                       <m:r>
-                        <a:rPr lang="pt-PT" sz="2000" b="0" i="1" smtClean="0">
+                        <a:rPr lang="pt-PT" sz="2000" i="1">
                           <a:solidFill>
                             <a:schemeClr val="tx1"/>
                           </a:solidFill>
@@ -35876,7 +38317,7 @@
                         <m:fPr>
                           <m:type m:val="lin"/>
                           <m:ctrlPr>
-                            <a:rPr lang="pt-PT" sz="2000" b="0" i="1" smtClean="0">
+                            <a:rPr lang="pt-PT" sz="2000" i="1">
                               <a:solidFill>
                                 <a:schemeClr val="tx1"/>
                               </a:solidFill>
@@ -35889,7 +38330,7 @@
                             <m:rPr>
                               <m:nor/>
                             </m:rPr>
-                            <a:rPr lang="pt-PT" sz="2000" b="0" i="0" smtClean="0">
+                            <a:rPr lang="pt-PT" sz="2000">
                               <a:solidFill>
                                 <a:schemeClr val="tx1"/>
                               </a:solidFill>
@@ -35903,7 +38344,7 @@
                             <m:rPr>
                               <m:nor/>
                             </m:rPr>
-                            <a:rPr lang="pt-PT" sz="2000" b="0" i="0" smtClean="0">
+                            <a:rPr lang="pt-PT" sz="2000">
                               <a:solidFill>
                                 <a:schemeClr val="tx1"/>
                               </a:solidFill>
@@ -35914,7 +38355,7 @@
                         </m:den>
                       </m:f>
                       <m:r>
-                        <a:rPr lang="pt-PT" sz="2000" b="0" i="1" smtClean="0">
+                        <a:rPr lang="pt-PT" sz="2000" i="1">
                           <a:solidFill>
                             <a:schemeClr val="tx1"/>
                           </a:solidFill>
@@ -35926,7 +38367,7 @@
                         <m:fPr>
                           <m:type m:val="lin"/>
                           <m:ctrlPr>
-                            <a:rPr lang="pt-PT" sz="2000" b="0" i="1" smtClean="0">
+                            <a:rPr lang="pt-PT" sz="2000" i="1">
                               <a:solidFill>
                                 <a:schemeClr val="tx1"/>
                               </a:solidFill>
@@ -35939,7 +38380,7 @@
                             <m:rPr>
                               <m:nor/>
                             </m:rPr>
-                            <a:rPr lang="pt-PT" sz="2000" b="0" i="0" smtClean="0">
+                            <a:rPr lang="pt-PT" sz="2000">
                               <a:solidFill>
                                 <a:schemeClr val="tx1"/>
                               </a:solidFill>
@@ -35953,7 +38394,7 @@
                             <m:rPr>
                               <m:nor/>
                             </m:rPr>
-                            <a:rPr lang="pt-PT" sz="2000" b="0" i="0" smtClean="0">
+                            <a:rPr lang="pt-PT" sz="2000">
                               <a:solidFill>
                                 <a:schemeClr val="tx1"/>
                               </a:solidFill>
@@ -35976,7 +38417,7 @@
             </p:txBody>
           </p:sp>
         </mc:Choice>
-        <mc:Fallback xmlns="">
+        <mc:Fallback>
           <p:sp>
             <p:nvSpPr>
               <p:cNvPr id="53" name="Text Box 13">
@@ -35993,7 +38434,7 @@
             </p:nvSpPr>
             <p:spPr bwMode="auto">
               <a:xfrm>
-                <a:off x="539552" y="4508593"/>
+                <a:off x="2063552" y="4508593"/>
                 <a:ext cx="8136906" cy="1477328"/>
               </a:xfrm>
               <a:prstGeom prst="rect">
@@ -36048,7 +38489,7 @@
           </p:nvPr>
         </p:nvGraphicFramePr>
         <p:xfrm>
-          <a:off x="4572314" y="4506069"/>
+          <a:off x="6096314" y="4506069"/>
           <a:ext cx="4104144" cy="1479852"/>
         </p:xfrm>
         <a:graphic>
@@ -36770,7 +39211,7 @@
         </p:nvSpPr>
         <p:spPr bwMode="auto">
           <a:xfrm rot="5400000" flipV="1">
-            <a:off x="7775575" y="946150"/>
+            <a:off x="9299576" y="946151"/>
             <a:ext cx="504825" cy="1006475"/>
           </a:xfrm>
           <a:prstGeom prst="rect">
@@ -36811,8 +39252,8 @@
         </p:nvSpPr>
         <p:spPr bwMode="auto">
           <a:xfrm>
-            <a:off x="0" y="0"/>
-            <a:ext cx="9144000" cy="0"/>
+            <a:off x="1524001" y="-507831"/>
+            <a:ext cx="184731" cy="1015663"/>
           </a:xfrm>
           <a:prstGeom prst="rect">
             <a:avLst/>
@@ -36849,8 +39290,8 @@
         </p:nvSpPr>
         <p:spPr bwMode="auto">
           <a:xfrm>
-            <a:off x="0" y="0"/>
-            <a:ext cx="9144000" cy="0"/>
+            <a:off x="1524001" y="-507831"/>
+            <a:ext cx="184731" cy="1015663"/>
           </a:xfrm>
           <a:prstGeom prst="rect">
             <a:avLst/>
@@ -36893,7 +39334,7 @@
         </p:nvSpPr>
         <p:spPr bwMode="auto">
           <a:xfrm>
-            <a:off x="682625" y="1511709"/>
+            <a:off x="2206626" y="1511710"/>
             <a:ext cx="7705725" cy="523875"/>
           </a:xfrm>
           <a:prstGeom prst="rect">
@@ -37039,7 +39480,7 @@
         </p:nvSpPr>
         <p:spPr bwMode="auto">
           <a:xfrm>
-            <a:off x="2771775" y="404813"/>
+            <a:off x="4295776" y="404814"/>
             <a:ext cx="6048375" cy="854075"/>
           </a:xfrm>
           <a:prstGeom prst="rect">
@@ -37104,7 +39545,7 @@
         </p:blipFill>
         <p:spPr>
           <a:xfrm>
-            <a:off x="4283968" y="1988840"/>
+            <a:off x="5807968" y="1988840"/>
             <a:ext cx="4114800" cy="4114800"/>
           </a:xfrm>
           <a:prstGeom prst="rect">
@@ -37126,7 +39567,7 @@
         </p:nvSpPr>
         <p:spPr>
           <a:xfrm rot="-5400000">
-            <a:off x="6659153" y="4133545"/>
+            <a:off x="8183153" y="4133545"/>
             <a:ext cx="3619852" cy="338554"/>
           </a:xfrm>
           <a:prstGeom prst="rect">
@@ -37171,7 +39612,7 @@
         </p:nvSpPr>
         <p:spPr bwMode="auto">
           <a:xfrm>
-            <a:off x="539552" y="2138477"/>
+            <a:off x="2063552" y="2138477"/>
             <a:ext cx="7920432" cy="861774"/>
           </a:xfrm>
           <a:prstGeom prst="rect">
@@ -37249,8 +39690,8 @@
           </a:p>
         </p:txBody>
       </p:sp>
-      <mc:AlternateContent xmlns:mc="http://schemas.openxmlformats.org/markup-compatibility/2006" xmlns:a14="http://schemas.microsoft.com/office/drawing/2010/main">
-        <mc:Choice Requires="a14">
+      <mc:AlternateContent xmlns:mc="http://schemas.openxmlformats.org/markup-compatibility/2006">
+        <mc:Choice xmlns:a14="http://schemas.microsoft.com/office/drawing/2010/main" Requires="a14">
           <p:sp>
             <p:nvSpPr>
               <p:cNvPr id="6" name="Text Box 13">
@@ -37267,7 +39708,7 @@
             </p:nvSpPr>
             <p:spPr bwMode="auto">
               <a:xfrm>
-                <a:off x="539552" y="4508593"/>
+                <a:off x="2063552" y="4508593"/>
                 <a:ext cx="8136906" cy="1477328"/>
               </a:xfrm>
               <a:prstGeom prst="rect">
@@ -37315,7 +39756,7 @@
                   </a:rPr>
                   <a:t>)</a:t>
                 </a:r>
-                <a:endParaRPr lang="pt-PT" sz="2000" b="0" i="1" dirty="0">
+                <a:endParaRPr lang="pt-PT" sz="2000" i="1" dirty="0">
                   <a:solidFill>
                     <a:schemeClr val="tx1"/>
                   </a:solidFill>
@@ -37331,7 +39772,7 @@
                     </m:oMathParaPr>
                     <m:oMath xmlns:m="http://schemas.openxmlformats.org/officeDocument/2006/math">
                       <m:r>
-                        <a:rPr lang="pt-PT" sz="2000" b="0" i="1" smtClean="0">
+                        <a:rPr lang="pt-PT" sz="2000" i="1">
                           <a:solidFill>
                             <a:schemeClr val="tx1"/>
                           </a:solidFill>
@@ -37343,7 +39784,7 @@
                         <m:fPr>
                           <m:type m:val="lin"/>
                           <m:ctrlPr>
-                            <a:rPr lang="pt-PT" sz="2000" b="0" i="1" smtClean="0">
+                            <a:rPr lang="pt-PT" sz="2000" i="1">
                               <a:solidFill>
                                 <a:schemeClr val="tx1"/>
                               </a:solidFill>
@@ -37356,7 +39797,7 @@
                             <m:rPr>
                               <m:nor/>
                             </m:rPr>
-                            <a:rPr lang="pt-PT" sz="2000" b="0" i="0" smtClean="0">
+                            <a:rPr lang="pt-PT" sz="2000">
                               <a:solidFill>
                                 <a:schemeClr val="tx1"/>
                               </a:solidFill>
@@ -37370,7 +39811,7 @@
                             <m:rPr>
                               <m:nor/>
                             </m:rPr>
-                            <a:rPr lang="pt-PT" sz="2000" b="0" i="0" smtClean="0">
+                            <a:rPr lang="pt-PT" sz="2000">
                               <a:solidFill>
                                 <a:schemeClr val="tx1"/>
                               </a:solidFill>
@@ -37419,7 +39860,7 @@
                   </a:rPr>
                   <a:t>)</a:t>
                 </a:r>
-                <a:endParaRPr lang="pt-PT" sz="2000" b="0" i="1" dirty="0">
+                <a:endParaRPr lang="pt-PT" sz="2000" i="1" dirty="0">
                   <a:solidFill>
                     <a:schemeClr val="tx1"/>
                   </a:solidFill>
@@ -37435,7 +39876,7 @@
                     </m:oMathParaPr>
                     <m:oMath xmlns:m="http://schemas.openxmlformats.org/officeDocument/2006/math">
                       <m:r>
-                        <a:rPr lang="pt-PT" sz="2000" b="0" i="1" smtClean="0">
+                        <a:rPr lang="pt-PT" sz="2000" i="1">
                           <a:solidFill>
                             <a:schemeClr val="tx1"/>
                           </a:solidFill>
@@ -37447,7 +39888,7 @@
                         <m:fPr>
                           <m:type m:val="lin"/>
                           <m:ctrlPr>
-                            <a:rPr lang="pt-PT" sz="2000" b="0" i="1" smtClean="0">
+                            <a:rPr lang="pt-PT" sz="2000" i="1">
                               <a:solidFill>
                                 <a:schemeClr val="tx1"/>
                               </a:solidFill>
@@ -37460,7 +39901,7 @@
                             <m:rPr>
                               <m:nor/>
                             </m:rPr>
-                            <a:rPr lang="pt-PT" sz="2000" b="0" i="0" smtClean="0">
+                            <a:rPr lang="pt-PT" sz="2000">
                               <a:solidFill>
                                 <a:schemeClr val="tx1"/>
                               </a:solidFill>
@@ -37474,7 +39915,7 @@
                             <m:rPr>
                               <m:nor/>
                             </m:rPr>
-                            <a:rPr lang="pt-PT" sz="2000" b="0" i="0" smtClean="0">
+                            <a:rPr lang="pt-PT" sz="2000">
                               <a:solidFill>
                                 <a:schemeClr val="tx1"/>
                               </a:solidFill>
@@ -37485,7 +39926,7 @@
                         </m:den>
                       </m:f>
                       <m:r>
-                        <a:rPr lang="pt-PT" sz="2000" b="0" i="1" smtClean="0">
+                        <a:rPr lang="pt-PT" sz="2000" i="1">
                           <a:solidFill>
                             <a:schemeClr val="tx1"/>
                           </a:solidFill>
@@ -37497,7 +39938,7 @@
                         <m:fPr>
                           <m:type m:val="lin"/>
                           <m:ctrlPr>
-                            <a:rPr lang="pt-PT" sz="2000" b="0" i="1" smtClean="0">
+                            <a:rPr lang="pt-PT" sz="2000" i="1">
                               <a:solidFill>
                                 <a:schemeClr val="tx1"/>
                               </a:solidFill>
@@ -37510,7 +39951,7 @@
                             <m:rPr>
                               <m:nor/>
                             </m:rPr>
-                            <a:rPr lang="pt-PT" sz="2000" b="0" i="0" smtClean="0">
+                            <a:rPr lang="pt-PT" sz="2000">
                               <a:solidFill>
                                 <a:schemeClr val="tx1"/>
                               </a:solidFill>
@@ -37524,7 +39965,7 @@
                             <m:rPr>
                               <m:nor/>
                             </m:rPr>
-                            <a:rPr lang="pt-PT" sz="2000" b="0" i="0" smtClean="0">
+                            <a:rPr lang="pt-PT" sz="2000">
                               <a:solidFill>
                                 <a:schemeClr val="tx1"/>
                               </a:solidFill>
@@ -37547,7 +39988,7 @@
             </p:txBody>
           </p:sp>
         </mc:Choice>
-        <mc:Fallback xmlns="">
+        <mc:Fallback>
           <p:sp>
             <p:nvSpPr>
               <p:cNvPr id="6" name="Text Box 13">
@@ -37564,7 +40005,7 @@
             </p:nvSpPr>
             <p:spPr bwMode="auto">
               <a:xfrm>
-                <a:off x="539552" y="4508593"/>
+                <a:off x="2063552" y="4508593"/>
                 <a:ext cx="8136906" cy="1477328"/>
               </a:xfrm>
               <a:prstGeom prst="rect">
@@ -37638,7 +40079,7 @@
         </p:nvSpPr>
         <p:spPr bwMode="auto">
           <a:xfrm rot="5400000" flipV="1">
-            <a:off x="7775575" y="946150"/>
+            <a:off x="9299576" y="946151"/>
             <a:ext cx="504825" cy="1006475"/>
           </a:xfrm>
           <a:prstGeom prst="rect">
@@ -37679,8 +40120,8 @@
         </p:nvSpPr>
         <p:spPr bwMode="auto">
           <a:xfrm>
-            <a:off x="0" y="0"/>
-            <a:ext cx="9144000" cy="0"/>
+            <a:off x="1524001" y="-507831"/>
+            <a:ext cx="184731" cy="1015663"/>
           </a:xfrm>
           <a:prstGeom prst="rect">
             <a:avLst/>
@@ -37717,8 +40158,8 @@
         </p:nvSpPr>
         <p:spPr bwMode="auto">
           <a:xfrm>
-            <a:off x="0" y="0"/>
-            <a:ext cx="9144000" cy="0"/>
+            <a:off x="1524001" y="-507831"/>
+            <a:ext cx="184731" cy="1015663"/>
           </a:xfrm>
           <a:prstGeom prst="rect">
             <a:avLst/>
@@ -37755,7 +40196,7 @@
         </p:nvSpPr>
         <p:spPr bwMode="auto">
           <a:xfrm>
-            <a:off x="2771775" y="404813"/>
+            <a:off x="4295776" y="404814"/>
             <a:ext cx="6048375" cy="854075"/>
           </a:xfrm>
           <a:prstGeom prst="rect">
@@ -37830,7 +40271,7 @@
         </p:nvSpPr>
         <p:spPr bwMode="auto">
           <a:xfrm rot="5400000" flipV="1">
-            <a:off x="7775575" y="946150"/>
+            <a:off x="9299576" y="946151"/>
             <a:ext cx="504825" cy="1006475"/>
           </a:xfrm>
           <a:prstGeom prst="rect">
@@ -37871,8 +40312,8 @@
         </p:nvSpPr>
         <p:spPr bwMode="auto">
           <a:xfrm>
-            <a:off x="0" y="0"/>
-            <a:ext cx="9144000" cy="0"/>
+            <a:off x="1524001" y="-507831"/>
+            <a:ext cx="184731" cy="1015663"/>
           </a:xfrm>
           <a:prstGeom prst="rect">
             <a:avLst/>
@@ -37909,8 +40350,8 @@
         </p:nvSpPr>
         <p:spPr bwMode="auto">
           <a:xfrm>
-            <a:off x="0" y="0"/>
-            <a:ext cx="9144000" cy="0"/>
+            <a:off x="1524001" y="-507831"/>
+            <a:ext cx="184731" cy="1015663"/>
           </a:xfrm>
           <a:prstGeom prst="rect">
             <a:avLst/>
@@ -37947,7 +40388,7 @@
         </p:nvSpPr>
         <p:spPr bwMode="auto">
           <a:xfrm>
-            <a:off x="682625" y="1513787"/>
+            <a:off x="2206626" y="1513787"/>
             <a:ext cx="7705725" cy="523220"/>
           </a:xfrm>
           <a:prstGeom prst="rect">
@@ -38017,7 +40458,7 @@
         </p:nvSpPr>
         <p:spPr bwMode="auto">
           <a:xfrm>
-            <a:off x="540000" y="2160000"/>
+            <a:off x="2064000" y="2160001"/>
             <a:ext cx="8064000" cy="1323439"/>
           </a:xfrm>
           <a:prstGeom prst="rect">
@@ -38099,7 +40540,7 @@
         </p:nvSpPr>
         <p:spPr bwMode="auto">
           <a:xfrm>
-            <a:off x="2771775" y="404813"/>
+            <a:off x="4295776" y="404814"/>
             <a:ext cx="6048375" cy="854075"/>
           </a:xfrm>
           <a:prstGeom prst="rect">
@@ -38192,7 +40633,7 @@
         </p:blipFill>
         <p:spPr>
           <a:xfrm>
-            <a:off x="1385716" y="2133600"/>
+            <a:off x="2909716" y="2133600"/>
             <a:ext cx="6411220" cy="3991532"/>
           </a:xfrm>
           <a:prstGeom prst="rect">
@@ -38210,7 +40651,7 @@
         </p:nvSpPr>
         <p:spPr bwMode="auto">
           <a:xfrm rot="5400000" flipV="1">
-            <a:off x="7775575" y="946150"/>
+            <a:off x="9299576" y="946151"/>
             <a:ext cx="504825" cy="1006475"/>
           </a:xfrm>
           <a:prstGeom prst="rect">
@@ -38251,8 +40692,8 @@
         </p:nvSpPr>
         <p:spPr bwMode="auto">
           <a:xfrm>
-            <a:off x="0" y="0"/>
-            <a:ext cx="9144000" cy="0"/>
+            <a:off x="1524001" y="-507831"/>
+            <a:ext cx="184731" cy="1015663"/>
           </a:xfrm>
           <a:prstGeom prst="rect">
             <a:avLst/>
@@ -38289,8 +40730,8 @@
         </p:nvSpPr>
         <p:spPr bwMode="auto">
           <a:xfrm>
-            <a:off x="0" y="0"/>
-            <a:ext cx="9144000" cy="0"/>
+            <a:off x="1524001" y="-507831"/>
+            <a:ext cx="184731" cy="1015663"/>
           </a:xfrm>
           <a:prstGeom prst="rect">
             <a:avLst/>
@@ -38327,7 +40768,7 @@
         </p:nvSpPr>
         <p:spPr bwMode="auto">
           <a:xfrm>
-            <a:off x="682625" y="1513787"/>
+            <a:off x="2206626" y="1513787"/>
             <a:ext cx="7705725" cy="523220"/>
           </a:xfrm>
           <a:prstGeom prst="rect">
@@ -38394,7 +40835,7 @@
         </p:nvSpPr>
         <p:spPr bwMode="auto">
           <a:xfrm>
-            <a:off x="2771775" y="404813"/>
+            <a:off x="4295776" y="404814"/>
             <a:ext cx="6048375" cy="854075"/>
           </a:xfrm>
           <a:prstGeom prst="rect">
@@ -38469,7 +40910,7 @@
         </p:nvSpPr>
         <p:spPr bwMode="auto">
           <a:xfrm>
-            <a:off x="1187624" y="1557338"/>
+            <a:off x="2711625" y="1557338"/>
             <a:ext cx="4968875" cy="4616648"/>
           </a:xfrm>
           <a:prstGeom prst="rect">
@@ -38845,7 +41286,7 @@
         </p:nvSpPr>
         <p:spPr bwMode="auto">
           <a:xfrm>
-            <a:off x="2771775" y="404813"/>
+            <a:off x="4295776" y="404814"/>
             <a:ext cx="6048375" cy="854075"/>
           </a:xfrm>
           <a:prstGeom prst="rect">
@@ -38898,7 +41339,7 @@
         </p:nvSpPr>
         <p:spPr bwMode="auto">
           <a:xfrm flipH="1">
-            <a:off x="541214" y="1557338"/>
+            <a:off x="2065214" y="1557338"/>
             <a:ext cx="647700" cy="0"/>
           </a:xfrm>
           <a:prstGeom prst="line">
@@ -38938,7 +41379,7 @@
         </p:nvSpPr>
         <p:spPr bwMode="auto">
           <a:xfrm>
-            <a:off x="1188914" y="1557338"/>
+            <a:off x="2712914" y="1557338"/>
             <a:ext cx="372" cy="4500000"/>
           </a:xfrm>
           <a:prstGeom prst="line">
@@ -38978,7 +41419,7 @@
         </p:nvSpPr>
         <p:spPr bwMode="auto">
           <a:xfrm rot="5400000" flipV="1">
-            <a:off x="7775575" y="946150"/>
+            <a:off x="9299576" y="946151"/>
             <a:ext cx="504825" cy="1006475"/>
           </a:xfrm>
           <a:prstGeom prst="rect">
@@ -39049,7 +41490,7 @@
         </p:nvSpPr>
         <p:spPr bwMode="auto">
           <a:xfrm rot="5400000" flipV="1">
-            <a:off x="7775575" y="946150"/>
+            <a:off x="9299576" y="946151"/>
             <a:ext cx="504825" cy="1006475"/>
           </a:xfrm>
           <a:prstGeom prst="rect">
@@ -39090,8 +41531,8 @@
         </p:nvSpPr>
         <p:spPr bwMode="auto">
           <a:xfrm>
-            <a:off x="0" y="0"/>
-            <a:ext cx="9144000" cy="0"/>
+            <a:off x="1524001" y="-507831"/>
+            <a:ext cx="184731" cy="1015663"/>
           </a:xfrm>
           <a:prstGeom prst="rect">
             <a:avLst/>
@@ -39128,8 +41569,8 @@
         </p:nvSpPr>
         <p:spPr bwMode="auto">
           <a:xfrm>
-            <a:off x="0" y="0"/>
-            <a:ext cx="9144000" cy="0"/>
+            <a:off x="1524001" y="-507831"/>
+            <a:ext cx="184731" cy="1015663"/>
           </a:xfrm>
           <a:prstGeom prst="rect">
             <a:avLst/>
@@ -39166,7 +41607,7 @@
         </p:nvSpPr>
         <p:spPr bwMode="auto">
           <a:xfrm>
-            <a:off x="682625" y="1519327"/>
+            <a:off x="2206626" y="1519327"/>
             <a:ext cx="7705725" cy="523220"/>
           </a:xfrm>
           <a:prstGeom prst="rect">
@@ -39227,7 +41668,7 @@
         </p:nvSpPr>
         <p:spPr bwMode="auto">
           <a:xfrm>
-            <a:off x="540000" y="2138367"/>
+            <a:off x="2064000" y="2138367"/>
             <a:ext cx="8064000" cy="3970318"/>
           </a:xfrm>
           <a:prstGeom prst="rect">
@@ -39752,7 +42193,7 @@
         </p:nvSpPr>
         <p:spPr bwMode="auto">
           <a:xfrm>
-            <a:off x="2771775" y="404813"/>
+            <a:off x="4295776" y="404814"/>
             <a:ext cx="6048375" cy="854075"/>
           </a:xfrm>
           <a:prstGeom prst="rect">
@@ -39827,7 +42268,7 @@
         </p:nvSpPr>
         <p:spPr bwMode="auto">
           <a:xfrm rot="5400000" flipV="1">
-            <a:off x="7775575" y="946150"/>
+            <a:off x="9299576" y="946151"/>
             <a:ext cx="504825" cy="1006475"/>
           </a:xfrm>
           <a:prstGeom prst="rect">
@@ -39868,8 +42309,8 @@
         </p:nvSpPr>
         <p:spPr bwMode="auto">
           <a:xfrm>
-            <a:off x="0" y="0"/>
-            <a:ext cx="9144000" cy="0"/>
+            <a:off x="1524001" y="-507831"/>
+            <a:ext cx="184731" cy="1015663"/>
           </a:xfrm>
           <a:prstGeom prst="rect">
             <a:avLst/>
@@ -39906,8 +42347,8 @@
         </p:nvSpPr>
         <p:spPr bwMode="auto">
           <a:xfrm>
-            <a:off x="0" y="0"/>
-            <a:ext cx="9144000" cy="0"/>
+            <a:off x="1524001" y="-507831"/>
+            <a:ext cx="184731" cy="1015663"/>
           </a:xfrm>
           <a:prstGeom prst="rect">
             <a:avLst/>
@@ -39944,7 +42385,7 @@
         </p:nvSpPr>
         <p:spPr bwMode="auto">
           <a:xfrm>
-            <a:off x="682625" y="1519327"/>
+            <a:off x="2206626" y="1519327"/>
             <a:ext cx="7705725" cy="523220"/>
           </a:xfrm>
           <a:prstGeom prst="rect">
@@ -40011,7 +42452,7 @@
         </p:nvSpPr>
         <p:spPr bwMode="auto">
           <a:xfrm>
-            <a:off x="2771775" y="404813"/>
+            <a:off x="4295776" y="404814"/>
             <a:ext cx="6048375" cy="854075"/>
           </a:xfrm>
           <a:prstGeom prst="rect">
@@ -40074,7 +42515,7 @@
         </p:blipFill>
         <p:spPr>
           <a:xfrm>
-            <a:off x="682625" y="2133600"/>
+            <a:off x="2206625" y="2133600"/>
             <a:ext cx="7973538" cy="4039164"/>
           </a:xfrm>
           <a:prstGeom prst="rect">
@@ -40122,7 +42563,7 @@
         </p:nvSpPr>
         <p:spPr bwMode="auto">
           <a:xfrm rot="5400000" flipV="1">
-            <a:off x="7775575" y="946150"/>
+            <a:off x="9299576" y="946151"/>
             <a:ext cx="504825" cy="1006475"/>
           </a:xfrm>
           <a:prstGeom prst="rect">
@@ -40163,8 +42604,8 @@
         </p:nvSpPr>
         <p:spPr bwMode="auto">
           <a:xfrm>
-            <a:off x="0" y="0"/>
-            <a:ext cx="9144000" cy="0"/>
+            <a:off x="1524001" y="-507831"/>
+            <a:ext cx="184731" cy="1015663"/>
           </a:xfrm>
           <a:prstGeom prst="rect">
             <a:avLst/>
@@ -40201,8 +42642,8 @@
         </p:nvSpPr>
         <p:spPr bwMode="auto">
           <a:xfrm>
-            <a:off x="0" y="0"/>
-            <a:ext cx="9144000" cy="0"/>
+            <a:off x="1524001" y="-507831"/>
+            <a:ext cx="184731" cy="1015663"/>
           </a:xfrm>
           <a:prstGeom prst="rect">
             <a:avLst/>
@@ -40239,7 +42680,7 @@
         </p:nvSpPr>
         <p:spPr bwMode="auto">
           <a:xfrm>
-            <a:off x="2771775" y="404813"/>
+            <a:off x="4295776" y="404814"/>
             <a:ext cx="6048375" cy="854075"/>
           </a:xfrm>
           <a:prstGeom prst="rect">
@@ -40284,7 +42725,7 @@
         </p:nvSpPr>
         <p:spPr bwMode="auto">
           <a:xfrm>
-            <a:off x="682625" y="1520687"/>
+            <a:off x="2206626" y="1520687"/>
             <a:ext cx="7705725" cy="523220"/>
           </a:xfrm>
           <a:prstGeom prst="rect">
@@ -40345,7 +42786,7 @@
         </p:nvSpPr>
         <p:spPr bwMode="auto">
           <a:xfrm>
-            <a:off x="540000" y="2160000"/>
+            <a:off x="2064000" y="2160001"/>
             <a:ext cx="8064000" cy="3631763"/>
           </a:xfrm>
           <a:prstGeom prst="rect">
@@ -40604,7 +43045,7 @@
         </p:blipFill>
         <p:spPr>
           <a:xfrm>
-            <a:off x="2915816" y="5157192"/>
+            <a:off x="4439817" y="5157192"/>
             <a:ext cx="941163" cy="923098"/>
           </a:xfrm>
           <a:prstGeom prst="rect">
@@ -40652,7 +43093,7 @@
         </p:nvSpPr>
         <p:spPr bwMode="auto">
           <a:xfrm rot="5400000" flipV="1">
-            <a:off x="7775575" y="946150"/>
+            <a:off x="9299576" y="946151"/>
             <a:ext cx="504825" cy="1006475"/>
           </a:xfrm>
           <a:prstGeom prst="rect">
@@ -40693,8 +43134,8 @@
         </p:nvSpPr>
         <p:spPr bwMode="auto">
           <a:xfrm>
-            <a:off x="0" y="0"/>
-            <a:ext cx="9144000" cy="0"/>
+            <a:off x="1524001" y="-507831"/>
+            <a:ext cx="184731" cy="1015663"/>
           </a:xfrm>
           <a:prstGeom prst="rect">
             <a:avLst/>
@@ -40731,8 +43172,8 @@
         </p:nvSpPr>
         <p:spPr bwMode="auto">
           <a:xfrm>
-            <a:off x="0" y="0"/>
-            <a:ext cx="9144000" cy="0"/>
+            <a:off x="1524001" y="-507831"/>
+            <a:ext cx="184731" cy="1015663"/>
           </a:xfrm>
           <a:prstGeom prst="rect">
             <a:avLst/>
@@ -40769,7 +43210,7 @@
         </p:nvSpPr>
         <p:spPr bwMode="auto">
           <a:xfrm>
-            <a:off x="2771775" y="404813"/>
+            <a:off x="4295776" y="404814"/>
             <a:ext cx="6048375" cy="854075"/>
           </a:xfrm>
           <a:prstGeom prst="rect">
@@ -40816,7 +43257,7 @@
         </p:nvSpPr>
         <p:spPr bwMode="auto">
           <a:xfrm>
-            <a:off x="540000" y="2132856"/>
+            <a:off x="2064000" y="2132856"/>
             <a:ext cx="8064000" cy="2308324"/>
           </a:xfrm>
           <a:prstGeom prst="rect">
@@ -41141,7 +43582,7 @@
         </p:nvSpPr>
         <p:spPr bwMode="auto">
           <a:xfrm>
-            <a:off x="539552" y="1506792"/>
+            <a:off x="2063552" y="1506793"/>
             <a:ext cx="0" cy="4514495"/>
           </a:xfrm>
           <a:prstGeom prst="line">
@@ -41181,7 +43622,7 @@
         </p:nvSpPr>
         <p:spPr bwMode="auto">
           <a:xfrm>
-            <a:off x="682625" y="1520687"/>
+            <a:off x="2206626" y="1520687"/>
             <a:ext cx="7705725" cy="523220"/>
           </a:xfrm>
           <a:prstGeom prst="rect">
@@ -41272,7 +43713,7 @@
         </p:nvSpPr>
         <p:spPr bwMode="auto">
           <a:xfrm rot="5400000" flipV="1">
-            <a:off x="7775575" y="946150"/>
+            <a:off x="9299576" y="946151"/>
             <a:ext cx="504825" cy="1006475"/>
           </a:xfrm>
           <a:prstGeom prst="rect">
@@ -41313,7 +43754,7 @@
         </p:nvSpPr>
         <p:spPr bwMode="auto">
           <a:xfrm>
-            <a:off x="2771775" y="404813"/>
+            <a:off x="4295776" y="404814"/>
             <a:ext cx="6048375" cy="854075"/>
           </a:xfrm>
           <a:prstGeom prst="rect">
@@ -41358,7 +43799,7 @@
         </p:nvSpPr>
         <p:spPr>
           <a:xfrm>
-            <a:off x="901934" y="4941168"/>
+            <a:off x="2425934" y="4941168"/>
             <a:ext cx="4935448" cy="338554"/>
           </a:xfrm>
           <a:prstGeom prst="rect">
@@ -41415,7 +43856,7 @@
         </p:blipFill>
         <p:spPr>
           <a:xfrm>
-            <a:off x="904639" y="2132617"/>
+            <a:off x="2428639" y="2132618"/>
             <a:ext cx="7334722" cy="2477419"/>
           </a:xfrm>
           <a:prstGeom prst="rect">
@@ -41439,7 +43880,7 @@
         </p:nvSpPr>
         <p:spPr bwMode="auto">
           <a:xfrm>
-            <a:off x="682625" y="1508731"/>
+            <a:off x="2206626" y="1508732"/>
             <a:ext cx="7705725" cy="523875"/>
           </a:xfrm>
           <a:prstGeom prst="rect">
@@ -41543,7 +43984,7 @@
         </p:nvSpPr>
         <p:spPr bwMode="auto">
           <a:xfrm>
-            <a:off x="2771775" y="404813"/>
+            <a:off x="4295776" y="404814"/>
             <a:ext cx="6048375" cy="854075"/>
           </a:xfrm>
           <a:prstGeom prst="rect">
@@ -41596,7 +44037,7 @@
         </p:nvSpPr>
         <p:spPr bwMode="auto">
           <a:xfrm rot="5400000" flipV="1">
-            <a:off x="7775575" y="946150"/>
+            <a:off x="9299576" y="946151"/>
             <a:ext cx="504825" cy="1006475"/>
           </a:xfrm>
           <a:prstGeom prst="rect">
@@ -41667,7 +44108,7 @@
         </p:nvSpPr>
         <p:spPr bwMode="auto">
           <a:xfrm>
-            <a:off x="1187624" y="1557338"/>
+            <a:off x="2711625" y="1557339"/>
             <a:ext cx="4968875" cy="4683333"/>
           </a:xfrm>
           <a:prstGeom prst="rect">
@@ -42049,7 +44490,7 @@
         </p:nvSpPr>
         <p:spPr bwMode="auto">
           <a:xfrm>
-            <a:off x="2771775" y="404813"/>
+            <a:off x="4295776" y="404814"/>
             <a:ext cx="6048375" cy="854075"/>
           </a:xfrm>
           <a:prstGeom prst="rect">
@@ -42102,7 +44543,7 @@
         </p:nvSpPr>
         <p:spPr bwMode="auto">
           <a:xfrm flipH="1">
-            <a:off x="541214" y="1557338"/>
+            <a:off x="2065214" y="1557338"/>
             <a:ext cx="647700" cy="0"/>
           </a:xfrm>
           <a:prstGeom prst="line">
@@ -42142,7 +44583,7 @@
         </p:nvSpPr>
         <p:spPr bwMode="auto">
           <a:xfrm>
-            <a:off x="1188914" y="1557338"/>
+            <a:off x="2712914" y="1557338"/>
             <a:ext cx="372" cy="4500000"/>
           </a:xfrm>
           <a:prstGeom prst="line">
@@ -42182,7 +44623,7 @@
         </p:nvSpPr>
         <p:spPr bwMode="auto">
           <a:xfrm>
-            <a:off x="5724128" y="1557338"/>
+            <a:off x="7248128" y="1557339"/>
             <a:ext cx="2606414" cy="4683333"/>
           </a:xfrm>
           <a:prstGeom prst="rect">
@@ -42468,7 +44909,7 @@
         </p:nvSpPr>
         <p:spPr bwMode="auto">
           <a:xfrm rot="5400000" flipV="1">
-            <a:off x="7775575" y="946150"/>
+            <a:off x="9299576" y="946151"/>
             <a:ext cx="504825" cy="1006475"/>
           </a:xfrm>
           <a:prstGeom prst="rect">
@@ -42513,7 +44954,7 @@
         </p:nvCxnSpPr>
         <p:spPr bwMode="auto">
           <a:xfrm>
-            <a:off x="3131840" y="1719858"/>
+            <a:off x="4655840" y="1719858"/>
             <a:ext cx="2520280" cy="0"/>
           </a:xfrm>
           <a:prstGeom prst="line">
@@ -42546,7 +44987,7 @@
         </p:nvCxnSpPr>
         <p:spPr bwMode="auto">
           <a:xfrm>
-            <a:off x="2195736" y="3265934"/>
+            <a:off x="3719736" y="3265934"/>
             <a:ext cx="4752528" cy="0"/>
           </a:xfrm>
           <a:prstGeom prst="line">
@@ -42579,7 +45020,7 @@
         </p:nvCxnSpPr>
         <p:spPr bwMode="auto">
           <a:xfrm>
-            <a:off x="2915816" y="4797152"/>
+            <a:off x="4439816" y="4797152"/>
             <a:ext cx="4032448" cy="0"/>
           </a:xfrm>
           <a:prstGeom prst="line">
@@ -42638,7 +45079,7 @@
         </p:nvSpPr>
         <p:spPr bwMode="auto">
           <a:xfrm rot="5400000" flipV="1">
-            <a:off x="7775575" y="946150"/>
+            <a:off x="9299576" y="946151"/>
             <a:ext cx="504825" cy="1006475"/>
           </a:xfrm>
           <a:prstGeom prst="rect">
@@ -42679,8 +45120,8 @@
         </p:nvSpPr>
         <p:spPr bwMode="auto">
           <a:xfrm>
-            <a:off x="0" y="0"/>
-            <a:ext cx="9144000" cy="0"/>
+            <a:off x="1524001" y="-507831"/>
+            <a:ext cx="184731" cy="1015663"/>
           </a:xfrm>
           <a:prstGeom prst="rect">
             <a:avLst/>
@@ -42717,8 +45158,8 @@
         </p:nvSpPr>
         <p:spPr bwMode="auto">
           <a:xfrm>
-            <a:off x="0" y="0"/>
-            <a:ext cx="9144000" cy="0"/>
+            <a:off x="1524001" y="-507831"/>
+            <a:ext cx="184731" cy="1015663"/>
           </a:xfrm>
           <a:prstGeom prst="rect">
             <a:avLst/>
@@ -42755,7 +45196,7 @@
         </p:nvSpPr>
         <p:spPr bwMode="auto">
           <a:xfrm>
-            <a:off x="2771775" y="404813"/>
+            <a:off x="4295776" y="404814"/>
             <a:ext cx="6048375" cy="854075"/>
           </a:xfrm>
           <a:prstGeom prst="rect">
@@ -42802,7 +45243,7 @@
         </p:nvSpPr>
         <p:spPr bwMode="auto">
           <a:xfrm>
-            <a:off x="540000" y="2160000"/>
+            <a:off x="2064000" y="2160000"/>
             <a:ext cx="8064000" cy="4093428"/>
           </a:xfrm>
           <a:prstGeom prst="rect">
@@ -43192,7 +45633,7 @@
         </p:nvSpPr>
         <p:spPr bwMode="auto">
           <a:xfrm>
-            <a:off x="682625" y="1521983"/>
+            <a:off x="2206626" y="1521984"/>
             <a:ext cx="7705725" cy="523875"/>
           </a:xfrm>
           <a:prstGeom prst="rect">
@@ -43308,7 +45749,7 @@
         </p:nvSpPr>
         <p:spPr bwMode="auto">
           <a:xfrm rot="5400000" flipV="1">
-            <a:off x="7775575" y="946150"/>
+            <a:off x="9299576" y="946151"/>
             <a:ext cx="504825" cy="1006475"/>
           </a:xfrm>
           <a:prstGeom prst="rect">
@@ -43349,8 +45790,8 @@
         </p:nvSpPr>
         <p:spPr bwMode="auto">
           <a:xfrm>
-            <a:off x="0" y="0"/>
-            <a:ext cx="9144000" cy="0"/>
+            <a:off x="1524001" y="-507831"/>
+            <a:ext cx="184731" cy="1015663"/>
           </a:xfrm>
           <a:prstGeom prst="rect">
             <a:avLst/>
@@ -43387,8 +45828,8 @@
         </p:nvSpPr>
         <p:spPr bwMode="auto">
           <a:xfrm>
-            <a:off x="0" y="0"/>
-            <a:ext cx="9144000" cy="0"/>
+            <a:off x="1524001" y="-507831"/>
+            <a:ext cx="184731" cy="1015663"/>
           </a:xfrm>
           <a:prstGeom prst="rect">
             <a:avLst/>
@@ -43425,7 +45866,7 @@
         </p:nvSpPr>
         <p:spPr bwMode="auto">
           <a:xfrm>
-            <a:off x="2771775" y="404813"/>
+            <a:off x="4295776" y="404814"/>
             <a:ext cx="6048375" cy="854075"/>
           </a:xfrm>
           <a:prstGeom prst="rect">
@@ -43478,7 +45919,7 @@
         </p:nvSpPr>
         <p:spPr bwMode="auto">
           <a:xfrm>
-            <a:off x="682625" y="1521983"/>
+            <a:off x="2206626" y="1521984"/>
             <a:ext cx="7705725" cy="523875"/>
           </a:xfrm>
           <a:prstGeom prst="rect">
@@ -43570,7 +46011,7 @@
         </p:nvSpPr>
         <p:spPr bwMode="auto">
           <a:xfrm>
-            <a:off x="791804" y="2153756"/>
+            <a:off x="2315804" y="2153756"/>
             <a:ext cx="7560392" cy="3939540"/>
           </a:xfrm>
           <a:prstGeom prst="rect">
@@ -46007,54 +48448,54 @@
 </file>
 
 <file path=ppt/theme/theme3.xml><?xml version="1.0" encoding="utf-8"?>
-<a:theme xmlns:a="http://schemas.openxmlformats.org/drawingml/2006/main" name="Office Theme">
+<a:theme xmlns:a="http://schemas.openxmlformats.org/drawingml/2006/main" name="Office 2013 - 2022 Theme">
   <a:themeElements>
-    <a:clrScheme name="">
+    <a:clrScheme name="Office 2013 - 2022 Theme">
       <a:dk1>
-        <a:srgbClr val="000000"/>
+        <a:sysClr val="windowText" lastClr="000000"/>
       </a:dk1>
       <a:lt1>
-        <a:srgbClr val="FFFFFF"/>
+        <a:sysClr val="window" lastClr="FFFFFF"/>
       </a:lt1>
       <a:dk2>
-        <a:srgbClr val="000000"/>
+        <a:srgbClr val="44546A"/>
       </a:dk2>
       <a:lt2>
-        <a:srgbClr val="808080"/>
+        <a:srgbClr val="E7E6E6"/>
       </a:lt2>
       <a:accent1>
-        <a:srgbClr val="BBE0E3"/>
+        <a:srgbClr val="4472C4"/>
       </a:accent1>
       <a:accent2>
-        <a:srgbClr val="333399"/>
+        <a:srgbClr val="ED7D31"/>
       </a:accent2>
       <a:accent3>
-        <a:srgbClr val="FFFFFF"/>
+        <a:srgbClr val="A5A5A5"/>
       </a:accent3>
       <a:accent4>
-        <a:srgbClr val="000000"/>
+        <a:srgbClr val="FFC000"/>
       </a:accent4>
       <a:accent5>
-        <a:srgbClr val="DAEDEF"/>
+        <a:srgbClr val="5B9BD5"/>
       </a:accent5>
       <a:accent6>
-        <a:srgbClr val="2D2D8A"/>
+        <a:srgbClr val="70AD47"/>
       </a:accent6>
       <a:hlink>
-        <a:srgbClr val="009999"/>
+        <a:srgbClr val="0563C1"/>
       </a:hlink>
       <a:folHlink>
-        <a:srgbClr val="99CC00"/>
+        <a:srgbClr val="954F72"/>
       </a:folHlink>
     </a:clrScheme>
-    <a:fontScheme name="Office">
+    <a:fontScheme name="Office 2013 - 2022 Theme">
       <a:majorFont>
-        <a:latin typeface="Calibri"/>
+        <a:latin typeface="Calibri Light" panose="020F0302020204030204"/>
         <a:ea typeface=""/>
         <a:cs typeface=""/>
-        <a:font script="Jpan" typeface="ＭＳ Ｐゴシック"/>
+        <a:font script="Jpan" typeface="游ゴシック Light"/>
         <a:font script="Hang" typeface="맑은 고딕"/>
-        <a:font script="Hans" typeface="宋体"/>
+        <a:font script="Hans" typeface="等线 Light"/>
         <a:font script="Hant" typeface="新細明體"/>
         <a:font script="Arab" typeface="Times New Roman"/>
         <a:font script="Hebr" typeface="Times New Roman"/>
@@ -46081,14 +48522,15 @@
         <a:font script="Mong" typeface="Mongolian Baiti"/>
         <a:font script="Viet" typeface="Times New Roman"/>
         <a:font script="Uigh" typeface="Microsoft Uighur"/>
+        <a:font script="Geor" typeface="Sylfaen"/>
       </a:majorFont>
       <a:minorFont>
-        <a:latin typeface="Calibri"/>
+        <a:latin typeface="Calibri" panose="020F0502020204030204"/>
         <a:ea typeface=""/>
         <a:cs typeface=""/>
-        <a:font script="Jpan" typeface="ＭＳ Ｐゴシック"/>
+        <a:font script="Jpan" typeface="游ゴシック"/>
         <a:font script="Hang" typeface="맑은 고딕"/>
-        <a:font script="Hans" typeface="宋体"/>
+        <a:font script="Hans" typeface="等线"/>
         <a:font script="Hant" typeface="新細明體"/>
         <a:font script="Arab" typeface="Arial"/>
         <a:font script="Hebr" typeface="Arial"/>
@@ -46115,9 +48557,10 @@
         <a:font script="Mong" typeface="Mongolian Baiti"/>
         <a:font script="Viet" typeface="Arial"/>
         <a:font script="Uigh" typeface="Microsoft Uighur"/>
+        <a:font script="Geor" typeface="Sylfaen"/>
       </a:minorFont>
     </a:fontScheme>
-    <a:fmtScheme name="Office">
+    <a:fmtScheme name="Office 2013 - 2022 Theme">
       <a:fillStyleLst>
         <a:solidFill>
           <a:schemeClr val="phClr"/>
@@ -46126,166 +48569,142 @@
           <a:gsLst>
             <a:gs pos="0">
               <a:schemeClr val="phClr">
-                <a:tint val="50000"/>
-                <a:satMod val="300000"/>
+                <a:lumMod val="110000"/>
+                <a:satMod val="105000"/>
+                <a:tint val="67000"/>
               </a:schemeClr>
             </a:gs>
-            <a:gs pos="35000">
+            <a:gs pos="50000">
               <a:schemeClr val="phClr">
-                <a:tint val="37000"/>
-                <a:satMod val="300000"/>
+                <a:lumMod val="105000"/>
+                <a:satMod val="103000"/>
+                <a:tint val="73000"/>
               </a:schemeClr>
             </a:gs>
             <a:gs pos="100000">
               <a:schemeClr val="phClr">
-                <a:tint val="15000"/>
-                <a:satMod val="350000"/>
+                <a:lumMod val="105000"/>
+                <a:satMod val="109000"/>
+                <a:tint val="81000"/>
               </a:schemeClr>
             </a:gs>
           </a:gsLst>
-          <a:lin ang="16200000" scaled="1"/>
+          <a:lin ang="5400000" scaled="0"/>
         </a:gradFill>
         <a:gradFill rotWithShape="1">
           <a:gsLst>
             <a:gs pos="0">
               <a:schemeClr val="phClr">
-                <a:shade val="51000"/>
-                <a:satMod val="130000"/>
+                <a:satMod val="103000"/>
+                <a:lumMod val="102000"/>
+                <a:tint val="94000"/>
               </a:schemeClr>
             </a:gs>
-            <a:gs pos="80000">
+            <a:gs pos="50000">
               <a:schemeClr val="phClr">
-                <a:shade val="93000"/>
-                <a:satMod val="130000"/>
+                <a:satMod val="110000"/>
+                <a:lumMod val="100000"/>
+                <a:shade val="100000"/>
               </a:schemeClr>
             </a:gs>
             <a:gs pos="100000">
               <a:schemeClr val="phClr">
-                <a:shade val="94000"/>
-                <a:satMod val="135000"/>
+                <a:lumMod val="99000"/>
+                <a:satMod val="120000"/>
+                <a:shade val="78000"/>
               </a:schemeClr>
             </a:gs>
           </a:gsLst>
-          <a:lin ang="16200000" scaled="0"/>
+          <a:lin ang="5400000" scaled="0"/>
         </a:gradFill>
       </a:fillStyleLst>
       <a:lnStyleLst>
-        <a:ln w="9525" cap="flat" cmpd="sng" algn="ctr">
-          <a:solidFill>
-            <a:schemeClr val="phClr">
-              <a:shade val="95000"/>
-              <a:satMod val="105000"/>
-            </a:schemeClr>
-          </a:solidFill>
-          <a:prstDash val="solid"/>
-        </a:ln>
-        <a:ln w="25400" cap="flat" cmpd="sng" algn="ctr">
+        <a:ln w="6350" cap="flat" cmpd="sng" algn="ctr">
           <a:solidFill>
             <a:schemeClr val="phClr"/>
           </a:solidFill>
           <a:prstDash val="solid"/>
+          <a:miter lim="800000"/>
         </a:ln>
-        <a:ln w="38100" cap="flat" cmpd="sng" algn="ctr">
+        <a:ln w="12700" cap="flat" cmpd="sng" algn="ctr">
           <a:solidFill>
             <a:schemeClr val="phClr"/>
           </a:solidFill>
           <a:prstDash val="solid"/>
+          <a:miter lim="800000"/>
+        </a:ln>
+        <a:ln w="19050" cap="flat" cmpd="sng" algn="ctr">
+          <a:solidFill>
+            <a:schemeClr val="phClr"/>
+          </a:solidFill>
+          <a:prstDash val="solid"/>
+          <a:miter lim="800000"/>
         </a:ln>
       </a:lnStyleLst>
       <a:effectStyleLst>
         <a:effectStyle>
+          <a:effectLst/>
+        </a:effectStyle>
+        <a:effectStyle>
+          <a:effectLst/>
+        </a:effectStyle>
+        <a:effectStyle>
           <a:effectLst>
-            <a:outerShdw blurRad="40000" dist="20000" dir="5400000" rotWithShape="0">
+            <a:outerShdw blurRad="57150" dist="19050" dir="5400000" algn="ctr" rotWithShape="0">
               <a:srgbClr val="000000">
-                <a:alpha val="38000"/>
+                <a:alpha val="63000"/>
               </a:srgbClr>
             </a:outerShdw>
           </a:effectLst>
-        </a:effectStyle>
-        <a:effectStyle>
-          <a:effectLst>
-            <a:outerShdw blurRad="40000" dist="23000" dir="5400000" rotWithShape="0">
-              <a:srgbClr val="000000">
-                <a:alpha val="35000"/>
-              </a:srgbClr>
-            </a:outerShdw>
-          </a:effectLst>
-        </a:effectStyle>
-        <a:effectStyle>
-          <a:effectLst>
-            <a:outerShdw blurRad="40000" dist="23000" dir="5400000" rotWithShape="0">
-              <a:srgbClr val="000000">
-                <a:alpha val="35000"/>
-              </a:srgbClr>
-            </a:outerShdw>
-          </a:effectLst>
-          <a:scene3d>
-            <a:camera prst="orthographicFront">
-              <a:rot lat="0" lon="0" rev="0"/>
-            </a:camera>
-            <a:lightRig rig="threePt" dir="t">
-              <a:rot lat="0" lon="0" rev="1200000"/>
-            </a:lightRig>
-          </a:scene3d>
-          <a:sp3d>
-            <a:bevelT w="63500" h="25400"/>
-          </a:sp3d>
         </a:effectStyle>
       </a:effectStyleLst>
       <a:bgFillStyleLst>
         <a:solidFill>
           <a:schemeClr val="phClr"/>
         </a:solidFill>
+        <a:solidFill>
+          <a:schemeClr val="phClr">
+            <a:tint val="95000"/>
+            <a:satMod val="170000"/>
+          </a:schemeClr>
+        </a:solidFill>
         <a:gradFill rotWithShape="1">
           <a:gsLst>
             <a:gs pos="0">
               <a:schemeClr val="phClr">
-                <a:tint val="40000"/>
-                <a:satMod val="350000"/>
+                <a:tint val="93000"/>
+                <a:satMod val="150000"/>
+                <a:shade val="98000"/>
+                <a:lumMod val="102000"/>
               </a:schemeClr>
             </a:gs>
-            <a:gs pos="40000">
+            <a:gs pos="50000">
               <a:schemeClr val="phClr">
-                <a:tint val="45000"/>
-                <a:shade val="99000"/>
-                <a:satMod val="350000"/>
+                <a:tint val="98000"/>
+                <a:satMod val="130000"/>
+                <a:shade val="90000"/>
+                <a:lumMod val="103000"/>
               </a:schemeClr>
             </a:gs>
             <a:gs pos="100000">
               <a:schemeClr val="phClr">
-                <a:shade val="20000"/>
-                <a:satMod val="255000"/>
+                <a:shade val="63000"/>
+                <a:satMod val="120000"/>
               </a:schemeClr>
             </a:gs>
           </a:gsLst>
-          <a:path path="circle">
-            <a:fillToRect l="50000" t="-80000" r="50000" b="180000"/>
-          </a:path>
-        </a:gradFill>
-        <a:gradFill rotWithShape="1">
-          <a:gsLst>
-            <a:gs pos="0">
-              <a:schemeClr val="phClr">
-                <a:tint val="80000"/>
-                <a:satMod val="300000"/>
-              </a:schemeClr>
-            </a:gs>
-            <a:gs pos="100000">
-              <a:schemeClr val="phClr">
-                <a:shade val="30000"/>
-                <a:satMod val="200000"/>
-              </a:schemeClr>
-            </a:gs>
-          </a:gsLst>
-          <a:path path="circle">
-            <a:fillToRect l="50000" t="50000" r="50000" b="50000"/>
-          </a:path>
+          <a:lin ang="5400000" scaled="0"/>
         </a:gradFill>
       </a:bgFillStyleLst>
     </a:fmtScheme>
   </a:themeElements>
   <a:objectDefaults/>
   <a:extraClrSchemeLst/>
+  <a:extLst>
+    <a:ext uri="{05A4C25C-085E-4340-85A3-A5531E510DB2}">
+      <thm15:themeFamily xmlns:thm15="http://schemas.microsoft.com/office/thememl/2012/main" name="Office 2013 - 2022 Theme" id="{62F939B6-93AF-4DB8-9C6B-D6C7DFDC589F}" vid="{4A3C46E8-61CC-4603-A589-7422A47A8E4A}"/>
+    </a:ext>
+  </a:extLst>
 </a:theme>
 </file>
 
@@ -46570,4 +48989,287 @@
   <a:objectDefaults/>
   <a:extraClrSchemeLst/>
 </a:theme>
+</file>
+
+<file path=ppt/theme/theme5.xml><?xml version="1.0" encoding="utf-8"?>
+<a:theme xmlns:a="http://schemas.openxmlformats.org/drawingml/2006/main" name="Office Theme">
+  <a:themeElements>
+    <a:clrScheme name="">
+      <a:dk1>
+        <a:srgbClr val="000000"/>
+      </a:dk1>
+      <a:lt1>
+        <a:srgbClr val="FFFFFF"/>
+      </a:lt1>
+      <a:dk2>
+        <a:srgbClr val="000000"/>
+      </a:dk2>
+      <a:lt2>
+        <a:srgbClr val="808080"/>
+      </a:lt2>
+      <a:accent1>
+        <a:srgbClr val="BBE0E3"/>
+      </a:accent1>
+      <a:accent2>
+        <a:srgbClr val="333399"/>
+      </a:accent2>
+      <a:accent3>
+        <a:srgbClr val="FFFFFF"/>
+      </a:accent3>
+      <a:accent4>
+        <a:srgbClr val="000000"/>
+      </a:accent4>
+      <a:accent5>
+        <a:srgbClr val="DAEDEF"/>
+      </a:accent5>
+      <a:accent6>
+        <a:srgbClr val="2D2D8A"/>
+      </a:accent6>
+      <a:hlink>
+        <a:srgbClr val="009999"/>
+      </a:hlink>
+      <a:folHlink>
+        <a:srgbClr val="99CC00"/>
+      </a:folHlink>
+    </a:clrScheme>
+    <a:fontScheme name="Office">
+      <a:majorFont>
+        <a:latin typeface="Calibri"/>
+        <a:ea typeface=""/>
+        <a:cs typeface=""/>
+        <a:font script="Jpan" typeface="ＭＳ Ｐゴシック"/>
+        <a:font script="Hang" typeface="맑은 고딕"/>
+        <a:font script="Hans" typeface="宋体"/>
+        <a:font script="Hant" typeface="新細明體"/>
+        <a:font script="Arab" typeface="Times New Roman"/>
+        <a:font script="Hebr" typeface="Times New Roman"/>
+        <a:font script="Thai" typeface="Angsana New"/>
+        <a:font script="Ethi" typeface="Nyala"/>
+        <a:font script="Beng" typeface="Vrinda"/>
+        <a:font script="Gujr" typeface="Shruti"/>
+        <a:font script="Khmr" typeface="MoolBoran"/>
+        <a:font script="Knda" typeface="Tunga"/>
+        <a:font script="Guru" typeface="Raavi"/>
+        <a:font script="Cans" typeface="Euphemia"/>
+        <a:font script="Cher" typeface="Plantagenet Cherokee"/>
+        <a:font script="Yiii" typeface="Microsoft Yi Baiti"/>
+        <a:font script="Tibt" typeface="Microsoft Himalaya"/>
+        <a:font script="Thaa" typeface="MV Boli"/>
+        <a:font script="Deva" typeface="Mangal"/>
+        <a:font script="Telu" typeface="Gautami"/>
+        <a:font script="Taml" typeface="Latha"/>
+        <a:font script="Syrc" typeface="Estrangelo Edessa"/>
+        <a:font script="Orya" typeface="Kalinga"/>
+        <a:font script="Mlym" typeface="Kartika"/>
+        <a:font script="Laoo" typeface="DokChampa"/>
+        <a:font script="Sinh" typeface="Iskoola Pota"/>
+        <a:font script="Mong" typeface="Mongolian Baiti"/>
+        <a:font script="Viet" typeface="Times New Roman"/>
+        <a:font script="Uigh" typeface="Microsoft Uighur"/>
+      </a:majorFont>
+      <a:minorFont>
+        <a:latin typeface="Calibri"/>
+        <a:ea typeface=""/>
+        <a:cs typeface=""/>
+        <a:font script="Jpan" typeface="ＭＳ Ｐゴシック"/>
+        <a:font script="Hang" typeface="맑은 고딕"/>
+        <a:font script="Hans" typeface="宋体"/>
+        <a:font script="Hant" typeface="新細明體"/>
+        <a:font script="Arab" typeface="Arial"/>
+        <a:font script="Hebr" typeface="Arial"/>
+        <a:font script="Thai" typeface="Cordia New"/>
+        <a:font script="Ethi" typeface="Nyala"/>
+        <a:font script="Beng" typeface="Vrinda"/>
+        <a:font script="Gujr" typeface="Shruti"/>
+        <a:font script="Khmr" typeface="DaunPenh"/>
+        <a:font script="Knda" typeface="Tunga"/>
+        <a:font script="Guru" typeface="Raavi"/>
+        <a:font script="Cans" typeface="Euphemia"/>
+        <a:font script="Cher" typeface="Plantagenet Cherokee"/>
+        <a:font script="Yiii" typeface="Microsoft Yi Baiti"/>
+        <a:font script="Tibt" typeface="Microsoft Himalaya"/>
+        <a:font script="Thaa" typeface="MV Boli"/>
+        <a:font script="Deva" typeface="Mangal"/>
+        <a:font script="Telu" typeface="Gautami"/>
+        <a:font script="Taml" typeface="Latha"/>
+        <a:font script="Syrc" typeface="Estrangelo Edessa"/>
+        <a:font script="Orya" typeface="Kalinga"/>
+        <a:font script="Mlym" typeface="Kartika"/>
+        <a:font script="Laoo" typeface="DokChampa"/>
+        <a:font script="Sinh" typeface="Iskoola Pota"/>
+        <a:font script="Mong" typeface="Mongolian Baiti"/>
+        <a:font script="Viet" typeface="Arial"/>
+        <a:font script="Uigh" typeface="Microsoft Uighur"/>
+      </a:minorFont>
+    </a:fontScheme>
+    <a:fmtScheme name="Office">
+      <a:fillStyleLst>
+        <a:solidFill>
+          <a:schemeClr val="phClr"/>
+        </a:solidFill>
+        <a:gradFill rotWithShape="1">
+          <a:gsLst>
+            <a:gs pos="0">
+              <a:schemeClr val="phClr">
+                <a:tint val="50000"/>
+                <a:satMod val="300000"/>
+              </a:schemeClr>
+            </a:gs>
+            <a:gs pos="35000">
+              <a:schemeClr val="phClr">
+                <a:tint val="37000"/>
+                <a:satMod val="300000"/>
+              </a:schemeClr>
+            </a:gs>
+            <a:gs pos="100000">
+              <a:schemeClr val="phClr">
+                <a:tint val="15000"/>
+                <a:satMod val="350000"/>
+              </a:schemeClr>
+            </a:gs>
+          </a:gsLst>
+          <a:lin ang="16200000" scaled="1"/>
+        </a:gradFill>
+        <a:gradFill rotWithShape="1">
+          <a:gsLst>
+            <a:gs pos="0">
+              <a:schemeClr val="phClr">
+                <a:shade val="51000"/>
+                <a:satMod val="130000"/>
+              </a:schemeClr>
+            </a:gs>
+            <a:gs pos="80000">
+              <a:schemeClr val="phClr">
+                <a:shade val="93000"/>
+                <a:satMod val="130000"/>
+              </a:schemeClr>
+            </a:gs>
+            <a:gs pos="100000">
+              <a:schemeClr val="phClr">
+                <a:shade val="94000"/>
+                <a:satMod val="135000"/>
+              </a:schemeClr>
+            </a:gs>
+          </a:gsLst>
+          <a:lin ang="16200000" scaled="0"/>
+        </a:gradFill>
+      </a:fillStyleLst>
+      <a:lnStyleLst>
+        <a:ln w="9525" cap="flat" cmpd="sng" algn="ctr">
+          <a:solidFill>
+            <a:schemeClr val="phClr">
+              <a:shade val="95000"/>
+              <a:satMod val="105000"/>
+            </a:schemeClr>
+          </a:solidFill>
+          <a:prstDash val="solid"/>
+        </a:ln>
+        <a:ln w="25400" cap="flat" cmpd="sng" algn="ctr">
+          <a:solidFill>
+            <a:schemeClr val="phClr"/>
+          </a:solidFill>
+          <a:prstDash val="solid"/>
+        </a:ln>
+        <a:ln w="38100" cap="flat" cmpd="sng" algn="ctr">
+          <a:solidFill>
+            <a:schemeClr val="phClr"/>
+          </a:solidFill>
+          <a:prstDash val="solid"/>
+        </a:ln>
+      </a:lnStyleLst>
+      <a:effectStyleLst>
+        <a:effectStyle>
+          <a:effectLst>
+            <a:outerShdw blurRad="40000" dist="20000" dir="5400000" rotWithShape="0">
+              <a:srgbClr val="000000">
+                <a:alpha val="38000"/>
+              </a:srgbClr>
+            </a:outerShdw>
+          </a:effectLst>
+        </a:effectStyle>
+        <a:effectStyle>
+          <a:effectLst>
+            <a:outerShdw blurRad="40000" dist="23000" dir="5400000" rotWithShape="0">
+              <a:srgbClr val="000000">
+                <a:alpha val="35000"/>
+              </a:srgbClr>
+            </a:outerShdw>
+          </a:effectLst>
+        </a:effectStyle>
+        <a:effectStyle>
+          <a:effectLst>
+            <a:outerShdw blurRad="40000" dist="23000" dir="5400000" rotWithShape="0">
+              <a:srgbClr val="000000">
+                <a:alpha val="35000"/>
+              </a:srgbClr>
+            </a:outerShdw>
+          </a:effectLst>
+          <a:scene3d>
+            <a:camera prst="orthographicFront">
+              <a:rot lat="0" lon="0" rev="0"/>
+            </a:camera>
+            <a:lightRig rig="threePt" dir="t">
+              <a:rot lat="0" lon="0" rev="1200000"/>
+            </a:lightRig>
+          </a:scene3d>
+          <a:sp3d>
+            <a:bevelT w="63500" h="25400"/>
+          </a:sp3d>
+        </a:effectStyle>
+      </a:effectStyleLst>
+      <a:bgFillStyleLst>
+        <a:solidFill>
+          <a:schemeClr val="phClr"/>
+        </a:solidFill>
+        <a:gradFill rotWithShape="1">
+          <a:gsLst>
+            <a:gs pos="0">
+              <a:schemeClr val="phClr">
+                <a:tint val="40000"/>
+                <a:satMod val="350000"/>
+              </a:schemeClr>
+            </a:gs>
+            <a:gs pos="40000">
+              <a:schemeClr val="phClr">
+                <a:tint val="45000"/>
+                <a:shade val="99000"/>
+                <a:satMod val="350000"/>
+              </a:schemeClr>
+            </a:gs>
+            <a:gs pos="100000">
+              <a:schemeClr val="phClr">
+                <a:shade val="20000"/>
+                <a:satMod val="255000"/>
+              </a:schemeClr>
+            </a:gs>
+          </a:gsLst>
+          <a:path path="circle">
+            <a:fillToRect l="50000" t="-80000" r="50000" b="180000"/>
+          </a:path>
+        </a:gradFill>
+        <a:gradFill rotWithShape="1">
+          <a:gsLst>
+            <a:gs pos="0">
+              <a:schemeClr val="phClr">
+                <a:tint val="80000"/>
+                <a:satMod val="300000"/>
+              </a:schemeClr>
+            </a:gs>
+            <a:gs pos="100000">
+              <a:schemeClr val="phClr">
+                <a:shade val="30000"/>
+                <a:satMod val="200000"/>
+              </a:schemeClr>
+            </a:gs>
+          </a:gsLst>
+          <a:path path="circle">
+            <a:fillToRect l="50000" t="50000" r="50000" b="50000"/>
+          </a:path>
+        </a:gradFill>
+      </a:bgFillStyleLst>
+    </a:fmtScheme>
+  </a:themeElements>
+  <a:objectDefaults/>
+  <a:extraClrSchemeLst/>
+</a:theme>
 </file>
--- a/docs/DSR-II2025_JL_slides.pptx
+++ b/docs/DSR-II2025_JL_slides.pptx
@@ -7431,7 +7431,7 @@
                 <a:latin typeface="Courier New" panose="02070309020205020404" pitchFamily="49" charset="0"/>
                 <a:cs typeface="Courier New" panose="02070309020205020404" pitchFamily="49" charset="0"/>
               </a:rPr>
-              <a:t>dplyer</a:t>
+              <a:t>dplyr</a:t>
             </a:r>
             <a:endParaRPr lang="pt-PT" sz="2800" b="1" i="1" dirty="0">
               <a:solidFill>
@@ -31876,6 +31876,368 @@
       </p:grpSpPr>
       <p:sp>
         <p:nvSpPr>
+          <p:cNvPr id="13" name="Cube 12">
+            <a:extLst>
+              <a:ext uri="{FF2B5EF4-FFF2-40B4-BE49-F238E27FC236}">
+                <a16:creationId xmlns:a16="http://schemas.microsoft.com/office/drawing/2014/main" id="{F41FDECD-15AC-1F6A-CEDB-69E821E6E17F}"/>
+              </a:ext>
+            </a:extLst>
+          </p:cNvPr>
+          <p:cNvSpPr/>
+          <p:nvPr/>
+        </p:nvSpPr>
+        <p:spPr bwMode="auto">
+          <a:xfrm>
+            <a:off x="2119902" y="2492897"/>
+            <a:ext cx="576064" cy="504056"/>
+          </a:xfrm>
+          <a:prstGeom prst="cube">
+            <a:avLst/>
+          </a:prstGeom>
+          <a:solidFill>
+            <a:schemeClr val="bg1"/>
+          </a:solidFill>
+          <a:ln w="9525" cap="flat" cmpd="sng" algn="ctr">
+            <a:solidFill>
+              <a:schemeClr val="tx1"/>
+            </a:solidFill>
+            <a:prstDash val="solid"/>
+            <a:round/>
+            <a:headEnd type="none" w="med" len="med"/>
+            <a:tailEnd type="none" w="med" len="med"/>
+          </a:ln>
+          <a:effectLst/>
+        </p:spPr>
+        <p:txBody>
+          <a:bodyPr vert="horz" wrap="square" lIns="91440" tIns="45720" rIns="91440" bIns="45720" numCol="1" rtlCol="0" anchor="t" anchorCtr="0" compatLnSpc="1">
+            <a:prstTxWarp prst="textNoShape">
+              <a:avLst/>
+            </a:prstTxWarp>
+            <a:spAutoFit/>
+          </a:bodyPr>
+          <a:lstStyle/>
+          <a:p>
+            <a:pPr marL="0" marR="0" indent="0" algn="l" defTabSz="914400" rtl="0" eaLnBrk="1" fontAlgn="base" latinLnBrk="0" hangingPunct="1">
+              <a:lnSpc>
+                <a:spcPct val="100000"/>
+              </a:lnSpc>
+              <a:spcBef>
+                <a:spcPct val="50000"/>
+              </a:spcBef>
+              <a:spcAft>
+                <a:spcPct val="0"/>
+              </a:spcAft>
+              <a:buClrTx/>
+              <a:buSzTx/>
+              <a:buFontTx/>
+              <a:buNone/>
+              <a:tabLst/>
+            </a:pPr>
+            <a:endParaRPr kumimoji="0" lang="pt-PT" sz="6000" b="0" i="0" u="none" strike="noStrike" cap="none" normalizeH="0" baseline="0">
+              <a:ln>
+                <a:noFill/>
+              </a:ln>
+              <a:solidFill>
+                <a:srgbClr val="CC0000"/>
+              </a:solidFill>
+              <a:effectLst/>
+              <a:latin typeface="Humanst521 BT" pitchFamily="34" charset="0"/>
+            </a:endParaRPr>
+          </a:p>
+        </p:txBody>
+      </p:sp>
+      <p:sp>
+        <p:nvSpPr>
+          <p:cNvPr id="14" name="Cube 13">
+            <a:extLst>
+              <a:ext uri="{FF2B5EF4-FFF2-40B4-BE49-F238E27FC236}">
+                <a16:creationId xmlns:a16="http://schemas.microsoft.com/office/drawing/2014/main" id="{1A273E0E-B5D1-AD94-C079-552E2A3907AF}"/>
+              </a:ext>
+            </a:extLst>
+          </p:cNvPr>
+          <p:cNvSpPr/>
+          <p:nvPr/>
+        </p:nvSpPr>
+        <p:spPr bwMode="auto">
+          <a:xfrm>
+            <a:off x="4280142" y="3356993"/>
+            <a:ext cx="576064" cy="504056"/>
+          </a:xfrm>
+          <a:prstGeom prst="cube">
+            <a:avLst/>
+          </a:prstGeom>
+          <a:solidFill>
+            <a:schemeClr val="accent1"/>
+          </a:solidFill>
+          <a:ln w="9525" cap="flat" cmpd="sng" algn="ctr">
+            <a:solidFill>
+              <a:schemeClr val="tx1"/>
+            </a:solidFill>
+            <a:prstDash val="solid"/>
+            <a:round/>
+            <a:headEnd type="none" w="med" len="med"/>
+            <a:tailEnd type="none" w="med" len="med"/>
+          </a:ln>
+          <a:effectLst/>
+        </p:spPr>
+        <p:txBody>
+          <a:bodyPr vert="horz" wrap="square" lIns="91440" tIns="45720" rIns="91440" bIns="45720" numCol="1" rtlCol="0" anchor="t" anchorCtr="0" compatLnSpc="1">
+            <a:prstTxWarp prst="textNoShape">
+              <a:avLst/>
+            </a:prstTxWarp>
+            <a:spAutoFit/>
+          </a:bodyPr>
+          <a:lstStyle/>
+          <a:p>
+            <a:pPr marL="0" marR="0" indent="0" algn="l" defTabSz="914400" rtl="0" eaLnBrk="1" fontAlgn="base" latinLnBrk="0" hangingPunct="1">
+              <a:lnSpc>
+                <a:spcPct val="100000"/>
+              </a:lnSpc>
+              <a:spcBef>
+                <a:spcPct val="50000"/>
+              </a:spcBef>
+              <a:spcAft>
+                <a:spcPct val="0"/>
+              </a:spcAft>
+              <a:buClrTx/>
+              <a:buSzTx/>
+              <a:buFontTx/>
+              <a:buNone/>
+              <a:tabLst/>
+            </a:pPr>
+            <a:endParaRPr kumimoji="0" lang="pt-PT" sz="6000" b="0" i="0" u="none" strike="noStrike" cap="none" normalizeH="0" baseline="0">
+              <a:ln>
+                <a:noFill/>
+              </a:ln>
+              <a:solidFill>
+                <a:srgbClr val="CC0000"/>
+              </a:solidFill>
+              <a:effectLst/>
+              <a:latin typeface="Humanst521 BT" pitchFamily="34" charset="0"/>
+            </a:endParaRPr>
+          </a:p>
+        </p:txBody>
+      </p:sp>
+      <p:sp>
+        <p:nvSpPr>
+          <p:cNvPr id="15" name="Can 39">
+            <a:extLst>
+              <a:ext uri="{FF2B5EF4-FFF2-40B4-BE49-F238E27FC236}">
+                <a16:creationId xmlns:a16="http://schemas.microsoft.com/office/drawing/2014/main" id="{B8DD30A2-B473-A0D7-F390-0E0D4EDBF49D}"/>
+              </a:ext>
+            </a:extLst>
+          </p:cNvPr>
+          <p:cNvSpPr/>
+          <p:nvPr/>
+        </p:nvSpPr>
+        <p:spPr bwMode="auto">
+          <a:xfrm>
+            <a:off x="2119902" y="4293097"/>
+            <a:ext cx="450000" cy="900000"/>
+          </a:xfrm>
+          <a:prstGeom prst="can">
+            <a:avLst/>
+          </a:prstGeom>
+          <a:solidFill>
+            <a:schemeClr val="accent1"/>
+          </a:solidFill>
+          <a:ln w="9525" cap="flat" cmpd="sng" algn="ctr">
+            <a:solidFill>
+              <a:schemeClr val="tx1"/>
+            </a:solidFill>
+            <a:prstDash val="solid"/>
+            <a:round/>
+            <a:headEnd type="none" w="med" len="med"/>
+            <a:tailEnd type="none" w="med" len="med"/>
+          </a:ln>
+          <a:effectLst/>
+        </p:spPr>
+        <p:txBody>
+          <a:bodyPr vert="horz" wrap="square" lIns="91440" tIns="45720" rIns="91440" bIns="45720" numCol="1" rtlCol="0" anchor="t" anchorCtr="0" compatLnSpc="1">
+            <a:prstTxWarp prst="textNoShape">
+              <a:avLst/>
+            </a:prstTxWarp>
+            <a:spAutoFit/>
+          </a:bodyPr>
+          <a:lstStyle/>
+          <a:p>
+            <a:pPr marL="0" marR="0" indent="0" algn="l" defTabSz="914400" rtl="0" eaLnBrk="1" fontAlgn="base" latinLnBrk="0" hangingPunct="1">
+              <a:lnSpc>
+                <a:spcPct val="100000"/>
+              </a:lnSpc>
+              <a:spcBef>
+                <a:spcPct val="50000"/>
+              </a:spcBef>
+              <a:spcAft>
+                <a:spcPct val="0"/>
+              </a:spcAft>
+              <a:buClrTx/>
+              <a:buSzTx/>
+              <a:buFontTx/>
+              <a:buNone/>
+              <a:tabLst/>
+            </a:pPr>
+            <a:endParaRPr kumimoji="0" lang="pt-PT" sz="6000" b="0" i="0" u="none" strike="noStrike" cap="none" normalizeH="0" baseline="0">
+              <a:ln>
+                <a:noFill/>
+              </a:ln>
+              <a:solidFill>
+                <a:srgbClr val="CC0000"/>
+              </a:solidFill>
+              <a:effectLst/>
+              <a:latin typeface="Humanst521 BT" pitchFamily="34" charset="0"/>
+            </a:endParaRPr>
+          </a:p>
+        </p:txBody>
+      </p:sp>
+      <p:sp>
+        <p:nvSpPr>
+          <p:cNvPr id="22" name="Cube 21">
+            <a:extLst>
+              <a:ext uri="{FF2B5EF4-FFF2-40B4-BE49-F238E27FC236}">
+                <a16:creationId xmlns:a16="http://schemas.microsoft.com/office/drawing/2014/main" id="{BFE324C8-0F5B-FD29-C409-001FDFE5991A}"/>
+              </a:ext>
+            </a:extLst>
+          </p:cNvPr>
+          <p:cNvSpPr/>
+          <p:nvPr/>
+        </p:nvSpPr>
+        <p:spPr bwMode="auto">
+          <a:xfrm>
+            <a:off x="9032670" y="3356993"/>
+            <a:ext cx="576064" cy="504056"/>
+          </a:xfrm>
+          <a:prstGeom prst="cube">
+            <a:avLst/>
+          </a:prstGeom>
+          <a:solidFill>
+            <a:schemeClr val="accent1"/>
+          </a:solidFill>
+          <a:ln w="9525" cap="flat" cmpd="sng" algn="ctr">
+            <a:solidFill>
+              <a:schemeClr val="tx1"/>
+            </a:solidFill>
+            <a:prstDash val="solid"/>
+            <a:round/>
+            <a:headEnd type="none" w="med" len="med"/>
+            <a:tailEnd type="none" w="med" len="med"/>
+          </a:ln>
+          <a:effectLst/>
+        </p:spPr>
+        <p:txBody>
+          <a:bodyPr vert="horz" wrap="square" lIns="91440" tIns="45720" rIns="91440" bIns="45720" numCol="1" rtlCol="0" anchor="t" anchorCtr="0" compatLnSpc="1">
+            <a:prstTxWarp prst="textNoShape">
+              <a:avLst/>
+            </a:prstTxWarp>
+            <a:spAutoFit/>
+          </a:bodyPr>
+          <a:lstStyle/>
+          <a:p>
+            <a:pPr marL="0" marR="0" indent="0" algn="l" defTabSz="914400" rtl="0" eaLnBrk="1" fontAlgn="base" latinLnBrk="0" hangingPunct="1">
+              <a:lnSpc>
+                <a:spcPct val="100000"/>
+              </a:lnSpc>
+              <a:spcBef>
+                <a:spcPct val="50000"/>
+              </a:spcBef>
+              <a:spcAft>
+                <a:spcPct val="0"/>
+              </a:spcAft>
+              <a:buClrTx/>
+              <a:buSzTx/>
+              <a:buFontTx/>
+              <a:buNone/>
+              <a:tabLst/>
+            </a:pPr>
+            <a:endParaRPr kumimoji="0" lang="pt-PT" sz="6000" b="0" i="0" u="none" strike="noStrike" cap="none" normalizeH="0" baseline="0">
+              <a:ln>
+                <a:noFill/>
+              </a:ln>
+              <a:solidFill>
+                <a:srgbClr val="CC0000"/>
+              </a:solidFill>
+              <a:effectLst/>
+              <a:latin typeface="Humanst521 BT" pitchFamily="34" charset="0"/>
+            </a:endParaRPr>
+          </a:p>
+        </p:txBody>
+      </p:sp>
+      <p:sp>
+        <p:nvSpPr>
+          <p:cNvPr id="25" name="Can 53">
+            <a:extLst>
+              <a:ext uri="{FF2B5EF4-FFF2-40B4-BE49-F238E27FC236}">
+                <a16:creationId xmlns:a16="http://schemas.microsoft.com/office/drawing/2014/main" id="{5A59376F-6579-4FA8-0540-A3BA24D0F73B}"/>
+              </a:ext>
+            </a:extLst>
+          </p:cNvPr>
+          <p:cNvSpPr>
+            <a:spLocks noChangeAspect="1"/>
+          </p:cNvSpPr>
+          <p:nvPr/>
+        </p:nvSpPr>
+        <p:spPr bwMode="auto">
+          <a:xfrm>
+            <a:off x="9207444" y="2564905"/>
+            <a:ext cx="225000" cy="450000"/>
+          </a:xfrm>
+          <a:prstGeom prst="can">
+            <a:avLst/>
+          </a:prstGeom>
+          <a:solidFill>
+            <a:schemeClr val="accent1"/>
+          </a:solidFill>
+          <a:ln w="9525" cap="flat" cmpd="sng" algn="ctr">
+            <a:solidFill>
+              <a:schemeClr val="tx1"/>
+            </a:solidFill>
+            <a:prstDash val="solid"/>
+            <a:round/>
+            <a:headEnd type="none" w="med" len="med"/>
+            <a:tailEnd type="none" w="med" len="med"/>
+          </a:ln>
+          <a:effectLst/>
+        </p:spPr>
+        <p:txBody>
+          <a:bodyPr vert="horz" wrap="square" lIns="91440" tIns="45720" rIns="91440" bIns="45720" numCol="1" rtlCol="0" anchor="t" anchorCtr="0" compatLnSpc="1">
+            <a:prstTxWarp prst="textNoShape">
+              <a:avLst/>
+            </a:prstTxWarp>
+            <a:spAutoFit/>
+          </a:bodyPr>
+          <a:lstStyle/>
+          <a:p>
+            <a:pPr marL="0" marR="0" indent="0" algn="l" defTabSz="914400" rtl="0" eaLnBrk="1" fontAlgn="base" latinLnBrk="0" hangingPunct="1">
+              <a:lnSpc>
+                <a:spcPct val="100000"/>
+              </a:lnSpc>
+              <a:spcBef>
+                <a:spcPct val="50000"/>
+              </a:spcBef>
+              <a:spcAft>
+                <a:spcPct val="0"/>
+              </a:spcAft>
+              <a:buClrTx/>
+              <a:buSzTx/>
+              <a:buFontTx/>
+              <a:buNone/>
+              <a:tabLst/>
+            </a:pPr>
+            <a:endParaRPr kumimoji="0" lang="pt-PT" sz="6000" b="0" i="0" u="none" strike="noStrike" cap="none" normalizeH="0" baseline="0">
+              <a:ln>
+                <a:noFill/>
+              </a:ln>
+              <a:solidFill>
+                <a:srgbClr val="CC0000"/>
+              </a:solidFill>
+              <a:effectLst/>
+              <a:latin typeface="Humanst521 BT" pitchFamily="34" charset="0"/>
+            </a:endParaRPr>
+          </a:p>
+        </p:txBody>
+      </p:sp>
+      <p:sp>
+        <p:nvSpPr>
           <p:cNvPr id="17413" name="Text Box 39"/>
           <p:cNvSpPr txBox="1">
             <a:spLocks noChangeArrowheads="1"/>
@@ -32178,10 +32540,625 @@
       </p:sp>
       <p:sp>
         <p:nvSpPr>
-          <p:cNvPr id="19" name="Cube 18">
+          <p:cNvPr id="24" name="Line 31">
             <a:extLst>
               <a:ext uri="{FF2B5EF4-FFF2-40B4-BE49-F238E27FC236}">
-                <a16:creationId xmlns:a16="http://schemas.microsoft.com/office/drawing/2014/main" id="{040E1F8D-2F15-9C26-D2F4-50F7431DD571}"/>
+                <a16:creationId xmlns:a16="http://schemas.microsoft.com/office/drawing/2014/main" id="{707763E0-71F9-25F8-D523-802FEBD03563}"/>
+              </a:ext>
+            </a:extLst>
+          </p:cNvPr>
+          <p:cNvSpPr>
+            <a:spLocks noChangeShapeType="1"/>
+          </p:cNvSpPr>
+          <p:nvPr/>
+        </p:nvSpPr>
+        <p:spPr bwMode="auto">
+          <a:xfrm flipV="1">
+            <a:off x="3516878" y="3789040"/>
+            <a:ext cx="720000" cy="360000"/>
+          </a:xfrm>
+          <a:prstGeom prst="line">
+            <a:avLst/>
+          </a:prstGeom>
+          <a:noFill/>
+          <a:ln w="9525">
+            <a:solidFill>
+              <a:schemeClr val="tx1"/>
+            </a:solidFill>
+            <a:round/>
+            <a:headEnd/>
+            <a:tailEnd type="triangle" w="med" len="med"/>
+          </a:ln>
+        </p:spPr>
+        <p:txBody>
+          <a:bodyPr/>
+          <a:lstStyle/>
+          <a:p>
+            <a:endParaRPr lang="pt-PT"/>
+          </a:p>
+        </p:txBody>
+      </p:sp>
+      <p:sp>
+        <p:nvSpPr>
+          <p:cNvPr id="50" name="Text Box 6">
+            <a:extLst>
+              <a:ext uri="{FF2B5EF4-FFF2-40B4-BE49-F238E27FC236}">
+                <a16:creationId xmlns:a16="http://schemas.microsoft.com/office/drawing/2014/main" id="{62A5E17B-12B6-6AE5-8198-C704F1DB01FA}"/>
+              </a:ext>
+            </a:extLst>
+          </p:cNvPr>
+          <p:cNvSpPr txBox="1">
+            <a:spLocks noChangeArrowheads="1"/>
+          </p:cNvSpPr>
+          <p:nvPr/>
+        </p:nvSpPr>
+        <p:spPr bwMode="auto">
+          <a:xfrm>
+            <a:off x="4007768" y="2420889"/>
+            <a:ext cx="1228926" cy="307777"/>
+          </a:xfrm>
+          <a:prstGeom prst="rect">
+            <a:avLst/>
+          </a:prstGeom>
+          <a:noFill/>
+          <a:ln w="9525">
+            <a:noFill/>
+            <a:miter lim="800000"/>
+            <a:headEnd/>
+            <a:tailEnd/>
+          </a:ln>
+        </p:spPr>
+        <p:txBody>
+          <a:bodyPr wrap="none">
+            <a:spAutoFit/>
+          </a:bodyPr>
+          <a:lstStyle/>
+          <a:p>
+            <a:pPr>
+              <a:spcBef>
+                <a:spcPts val="0"/>
+              </a:spcBef>
+            </a:pPr>
+            <a:r>
+              <a:rPr lang="pt-PT" sz="1400" b="1" dirty="0">
+                <a:solidFill>
+                  <a:schemeClr val="tx1"/>
+                </a:solidFill>
+              </a:rPr>
+              <a:t>Generalização</a:t>
+            </a:r>
+          </a:p>
+        </p:txBody>
+      </p:sp>
+      <p:sp>
+        <p:nvSpPr>
+          <p:cNvPr id="8" name="Text Box 29">
+            <a:extLst>
+              <a:ext uri="{FF2B5EF4-FFF2-40B4-BE49-F238E27FC236}">
+                <a16:creationId xmlns:a16="http://schemas.microsoft.com/office/drawing/2014/main" id="{CC2C16EB-A380-74AB-6859-6EE7531E10E6}"/>
+              </a:ext>
+            </a:extLst>
+          </p:cNvPr>
+          <p:cNvSpPr txBox="1">
+            <a:spLocks noChangeArrowheads="1"/>
+          </p:cNvSpPr>
+          <p:nvPr/>
+        </p:nvSpPr>
+        <p:spPr bwMode="auto">
+          <a:xfrm>
+            <a:off x="8709611" y="2113112"/>
+            <a:ext cx="1267719" cy="307777"/>
+          </a:xfrm>
+          <a:prstGeom prst="rect">
+            <a:avLst/>
+          </a:prstGeom>
+          <a:noFill/>
+          <a:ln w="9525">
+            <a:noFill/>
+            <a:miter lim="800000"/>
+            <a:headEnd/>
+            <a:tailEnd/>
+          </a:ln>
+        </p:spPr>
+        <p:txBody>
+          <a:bodyPr wrap="none">
+            <a:spAutoFit/>
+          </a:bodyPr>
+          <a:lstStyle/>
+          <a:p>
+            <a:pPr>
+              <a:spcBef>
+                <a:spcPts val="0"/>
+              </a:spcBef>
+            </a:pPr>
+            <a:r>
+              <a:rPr lang="pt-PT" sz="1400" b="1" dirty="0">
+                <a:solidFill>
+                  <a:srgbClr val="003E6C"/>
+                </a:solidFill>
+              </a:rPr>
+              <a:t>Fase Aplicação</a:t>
+            </a:r>
+          </a:p>
+        </p:txBody>
+      </p:sp>
+      <p:sp>
+        <p:nvSpPr>
+          <p:cNvPr id="52" name="Line 31">
+            <a:extLst>
+              <a:ext uri="{FF2B5EF4-FFF2-40B4-BE49-F238E27FC236}">
+                <a16:creationId xmlns:a16="http://schemas.microsoft.com/office/drawing/2014/main" id="{BF13A75D-FDE8-A64A-95D6-90041EECA0C0}"/>
+              </a:ext>
+            </a:extLst>
+          </p:cNvPr>
+          <p:cNvSpPr>
+            <a:spLocks noChangeShapeType="1"/>
+          </p:cNvSpPr>
+          <p:nvPr/>
+        </p:nvSpPr>
+        <p:spPr bwMode="auto">
+          <a:xfrm rot="10800000" flipV="1">
+            <a:off x="9349526" y="3068960"/>
+            <a:ext cx="0" cy="270000"/>
+          </a:xfrm>
+          <a:prstGeom prst="line">
+            <a:avLst/>
+          </a:prstGeom>
+          <a:noFill/>
+          <a:ln w="9525">
+            <a:solidFill>
+              <a:schemeClr val="tx1"/>
+            </a:solidFill>
+            <a:round/>
+            <a:headEnd/>
+            <a:tailEnd type="triangle" w="med" len="med"/>
+          </a:ln>
+        </p:spPr>
+        <p:txBody>
+          <a:bodyPr/>
+          <a:lstStyle/>
+          <a:p>
+            <a:endParaRPr lang="pt-PT"/>
+          </a:p>
+        </p:txBody>
+      </p:sp>
+      <p:sp>
+        <p:nvSpPr>
+          <p:cNvPr id="53" name="Line 31">
+            <a:extLst>
+              <a:ext uri="{FF2B5EF4-FFF2-40B4-BE49-F238E27FC236}">
+                <a16:creationId xmlns:a16="http://schemas.microsoft.com/office/drawing/2014/main" id="{56253411-EDAF-256B-0F23-4C0E55755090}"/>
+              </a:ext>
+            </a:extLst>
+          </p:cNvPr>
+          <p:cNvSpPr>
+            <a:spLocks noChangeShapeType="1"/>
+          </p:cNvSpPr>
+          <p:nvPr/>
+        </p:nvSpPr>
+        <p:spPr bwMode="auto">
+          <a:xfrm rot="10800000" flipV="1">
+            <a:off x="9349527" y="3933056"/>
+            <a:ext cx="0" cy="270000"/>
+          </a:xfrm>
+          <a:prstGeom prst="line">
+            <a:avLst/>
+          </a:prstGeom>
+          <a:noFill/>
+          <a:ln w="9525">
+            <a:solidFill>
+              <a:schemeClr val="tx1"/>
+            </a:solidFill>
+            <a:round/>
+            <a:headEnd/>
+            <a:tailEnd type="triangle" w="med" len="med"/>
+          </a:ln>
+        </p:spPr>
+        <p:txBody>
+          <a:bodyPr/>
+          <a:lstStyle/>
+          <a:p>
+            <a:endParaRPr lang="pt-PT"/>
+          </a:p>
+        </p:txBody>
+      </p:sp>
+      <p:sp>
+        <p:nvSpPr>
+          <p:cNvPr id="54" name="Text Box 6">
+            <a:extLst>
+              <a:ext uri="{FF2B5EF4-FFF2-40B4-BE49-F238E27FC236}">
+                <a16:creationId xmlns:a16="http://schemas.microsoft.com/office/drawing/2014/main" id="{691259C9-7F85-FE58-7AE4-A574D4FD97BD}"/>
+              </a:ext>
+            </a:extLst>
+          </p:cNvPr>
+          <p:cNvSpPr txBox="1">
+            <a:spLocks noChangeArrowheads="1"/>
+          </p:cNvSpPr>
+          <p:nvPr/>
+        </p:nvSpPr>
+        <p:spPr bwMode="auto">
+          <a:xfrm>
+            <a:off x="8773462" y="4201344"/>
+            <a:ext cx="1264898" cy="307777"/>
+          </a:xfrm>
+          <a:prstGeom prst="rect">
+            <a:avLst/>
+          </a:prstGeom>
+          <a:noFill/>
+          <a:ln w="9525">
+            <a:noFill/>
+            <a:miter lim="800000"/>
+            <a:headEnd/>
+            <a:tailEnd/>
+          </a:ln>
+        </p:spPr>
+        <p:txBody>
+          <a:bodyPr wrap="none">
+            <a:spAutoFit/>
+          </a:bodyPr>
+          <a:lstStyle/>
+          <a:p>
+            <a:pPr>
+              <a:spcBef>
+                <a:spcPts val="0"/>
+              </a:spcBef>
+            </a:pPr>
+            <a:r>
+              <a:rPr lang="pt-PT" sz="1400" b="1" dirty="0">
+                <a:solidFill>
+                  <a:schemeClr val="tx1"/>
+                </a:solidFill>
+              </a:rPr>
+              <a:t>Conhecimento</a:t>
+            </a:r>
+          </a:p>
+        </p:txBody>
+      </p:sp>
+      <p:sp>
+        <p:nvSpPr>
+          <p:cNvPr id="55" name="Text Box 6">
+            <a:extLst>
+              <a:ext uri="{FF2B5EF4-FFF2-40B4-BE49-F238E27FC236}">
+                <a16:creationId xmlns:a16="http://schemas.microsoft.com/office/drawing/2014/main" id="{B83F4A44-B0A3-5C0D-5B88-F9A07C8AD7F2}"/>
+              </a:ext>
+            </a:extLst>
+          </p:cNvPr>
+          <p:cNvSpPr txBox="1">
+            <a:spLocks noChangeArrowheads="1"/>
+          </p:cNvSpPr>
+          <p:nvPr/>
+        </p:nvSpPr>
+        <p:spPr bwMode="auto">
+          <a:xfrm>
+            <a:off x="9421535" y="2545740"/>
+            <a:ext cx="650563" cy="523220"/>
+          </a:xfrm>
+          <a:prstGeom prst="rect">
+            <a:avLst/>
+          </a:prstGeom>
+          <a:noFill/>
+          <a:ln w="9525">
+            <a:noFill/>
+            <a:miter lim="800000"/>
+            <a:headEnd/>
+            <a:tailEnd/>
+          </a:ln>
+        </p:spPr>
+        <p:txBody>
+          <a:bodyPr wrap="none">
+            <a:spAutoFit/>
+          </a:bodyPr>
+          <a:lstStyle/>
+          <a:p>
+            <a:pPr>
+              <a:spcBef>
+                <a:spcPts val="0"/>
+              </a:spcBef>
+            </a:pPr>
+            <a:r>
+              <a:rPr lang="pt-PT" sz="1400" b="1" dirty="0">
+                <a:solidFill>
+                  <a:schemeClr val="tx1"/>
+                </a:solidFill>
+              </a:rPr>
+              <a:t>Novos</a:t>
+            </a:r>
+          </a:p>
+          <a:p>
+            <a:pPr>
+              <a:spcBef>
+                <a:spcPts val="0"/>
+              </a:spcBef>
+            </a:pPr>
+            <a:r>
+              <a:rPr lang="pt-PT" sz="1400" b="1" dirty="0">
+                <a:solidFill>
+                  <a:schemeClr val="tx1"/>
+                </a:solidFill>
+              </a:rPr>
+              <a:t>dados</a:t>
+            </a:r>
+          </a:p>
+        </p:txBody>
+      </p:sp>
+      <p:sp>
+        <p:nvSpPr>
+          <p:cNvPr id="56" name="Text Box 29">
+            <a:extLst>
+              <a:ext uri="{FF2B5EF4-FFF2-40B4-BE49-F238E27FC236}">
+                <a16:creationId xmlns:a16="http://schemas.microsoft.com/office/drawing/2014/main" id="{F8C0A46A-B5B1-C3EC-3332-98A1B48139C2}"/>
+              </a:ext>
+            </a:extLst>
+          </p:cNvPr>
+          <p:cNvSpPr txBox="1">
+            <a:spLocks noChangeArrowheads="1"/>
+          </p:cNvSpPr>
+          <p:nvPr/>
+        </p:nvSpPr>
+        <p:spPr bwMode="auto">
+          <a:xfrm>
+            <a:off x="9104496" y="3429001"/>
+            <a:ext cx="338554" cy="461665"/>
+          </a:xfrm>
+          <a:prstGeom prst="rect">
+            <a:avLst/>
+          </a:prstGeom>
+          <a:noFill/>
+          <a:ln w="9525">
+            <a:noFill/>
+            <a:miter lim="800000"/>
+            <a:headEnd/>
+            <a:tailEnd/>
+          </a:ln>
+        </p:spPr>
+        <p:txBody>
+          <a:bodyPr wrap="none">
+            <a:spAutoFit/>
+          </a:bodyPr>
+          <a:lstStyle/>
+          <a:p>
+            <a:pPr>
+              <a:spcBef>
+                <a:spcPts val="0"/>
+              </a:spcBef>
+            </a:pPr>
+            <a:r>
+              <a:rPr lang="pt-PT" sz="2400" b="1" dirty="0">
+                <a:solidFill>
+                  <a:srgbClr val="00B050"/>
+                </a:solidFill>
+                <a:latin typeface="Calibri"/>
+              </a:rPr>
+              <a:t>√</a:t>
+            </a:r>
+            <a:endParaRPr lang="pt-PT" sz="2400" b="1" dirty="0">
+              <a:solidFill>
+                <a:srgbClr val="00B050"/>
+              </a:solidFill>
+            </a:endParaRPr>
+          </a:p>
+        </p:txBody>
+      </p:sp>
+      <p:sp>
+        <p:nvSpPr>
+          <p:cNvPr id="57" name="Line 31">
+            <a:extLst>
+              <a:ext uri="{FF2B5EF4-FFF2-40B4-BE49-F238E27FC236}">
+                <a16:creationId xmlns:a16="http://schemas.microsoft.com/office/drawing/2014/main" id="{2B6F87E5-49DD-59E7-7801-339BDB7072A1}"/>
+              </a:ext>
+            </a:extLst>
+          </p:cNvPr>
+          <p:cNvSpPr>
+            <a:spLocks noChangeShapeType="1"/>
+          </p:cNvSpPr>
+          <p:nvPr/>
+        </p:nvSpPr>
+        <p:spPr bwMode="auto">
+          <a:xfrm flipV="1">
+            <a:off x="8197398" y="3645024"/>
+            <a:ext cx="720000" cy="0"/>
+          </a:xfrm>
+          <a:prstGeom prst="line">
+            <a:avLst/>
+          </a:prstGeom>
+          <a:noFill/>
+          <a:ln w="9525">
+            <a:solidFill>
+              <a:schemeClr val="tx1"/>
+            </a:solidFill>
+            <a:round/>
+            <a:headEnd/>
+            <a:tailEnd type="triangle" w="med" len="med"/>
+          </a:ln>
+        </p:spPr>
+        <p:txBody>
+          <a:bodyPr/>
+          <a:lstStyle/>
+          <a:p>
+            <a:endParaRPr lang="pt-PT"/>
+          </a:p>
+        </p:txBody>
+      </p:sp>
+      <p:sp>
+        <p:nvSpPr>
+          <p:cNvPr id="18" name="Text Box 6">
+            <a:extLst>
+              <a:ext uri="{FF2B5EF4-FFF2-40B4-BE49-F238E27FC236}">
+                <a16:creationId xmlns:a16="http://schemas.microsoft.com/office/drawing/2014/main" id="{64695BA4-B2BB-2A3D-715C-4E6EB740FE7F}"/>
+              </a:ext>
+            </a:extLst>
+          </p:cNvPr>
+          <p:cNvSpPr txBox="1">
+            <a:spLocks noChangeArrowheads="1"/>
+          </p:cNvSpPr>
+          <p:nvPr/>
+        </p:nvSpPr>
+        <p:spPr bwMode="auto">
+          <a:xfrm>
+            <a:off x="2004711" y="3284985"/>
+            <a:ext cx="837089" cy="307777"/>
+          </a:xfrm>
+          <a:prstGeom prst="rect">
+            <a:avLst/>
+          </a:prstGeom>
+          <a:noFill/>
+          <a:ln w="9525">
+            <a:noFill/>
+            <a:miter lim="800000"/>
+            <a:headEnd/>
+            <a:tailEnd/>
+          </a:ln>
+        </p:spPr>
+        <p:txBody>
+          <a:bodyPr wrap="none">
+            <a:spAutoFit/>
+          </a:bodyPr>
+          <a:lstStyle/>
+          <a:p>
+            <a:pPr>
+              <a:spcBef>
+                <a:spcPts val="0"/>
+              </a:spcBef>
+            </a:pPr>
+            <a:r>
+              <a:rPr lang="pt-PT" sz="1400" b="1" dirty="0">
+                <a:solidFill>
+                  <a:schemeClr val="tx1"/>
+                </a:solidFill>
+              </a:rPr>
+              <a:t>Modelos</a:t>
+            </a:r>
+          </a:p>
+        </p:txBody>
+      </p:sp>
+      <p:sp>
+        <p:nvSpPr>
+          <p:cNvPr id="23" name="Line 31">
+            <a:extLst>
+              <a:ext uri="{FF2B5EF4-FFF2-40B4-BE49-F238E27FC236}">
+                <a16:creationId xmlns:a16="http://schemas.microsoft.com/office/drawing/2014/main" id="{AAA4715D-A574-6E0E-622D-E30EC344B233}"/>
+              </a:ext>
+            </a:extLst>
+          </p:cNvPr>
+          <p:cNvSpPr>
+            <a:spLocks noChangeShapeType="1"/>
+          </p:cNvSpPr>
+          <p:nvPr/>
+        </p:nvSpPr>
+        <p:spPr bwMode="auto">
+          <a:xfrm rot="5400000" flipV="1">
+            <a:off x="3561798" y="2843960"/>
+            <a:ext cx="450000" cy="900000"/>
+          </a:xfrm>
+          <a:prstGeom prst="line">
+            <a:avLst/>
+          </a:prstGeom>
+          <a:noFill/>
+          <a:ln w="9525">
+            <a:solidFill>
+              <a:schemeClr val="tx1"/>
+            </a:solidFill>
+            <a:round/>
+            <a:headEnd/>
+            <a:tailEnd type="triangle" w="med" len="med"/>
+          </a:ln>
+        </p:spPr>
+        <p:txBody>
+          <a:bodyPr/>
+          <a:lstStyle/>
+          <a:p>
+            <a:endParaRPr lang="pt-PT"/>
+          </a:p>
+        </p:txBody>
+      </p:sp>
+      <p:sp>
+        <p:nvSpPr>
+          <p:cNvPr id="28" name="Text Box 29">
+            <a:extLst>
+              <a:ext uri="{FF2B5EF4-FFF2-40B4-BE49-F238E27FC236}">
+                <a16:creationId xmlns:a16="http://schemas.microsoft.com/office/drawing/2014/main" id="{B92F4A4A-A680-00B0-8C4B-B0C7B2D8F856}"/>
+              </a:ext>
+            </a:extLst>
+          </p:cNvPr>
+          <p:cNvSpPr txBox="1">
+            <a:spLocks noChangeArrowheads="1"/>
+          </p:cNvSpPr>
+          <p:nvPr/>
+        </p:nvSpPr>
+        <p:spPr bwMode="auto">
+          <a:xfrm>
+            <a:off x="4007769" y="2132857"/>
+            <a:ext cx="1019703" cy="307777"/>
+          </a:xfrm>
+          <a:prstGeom prst="rect">
+            <a:avLst/>
+          </a:prstGeom>
+          <a:noFill/>
+          <a:ln w="9525">
+            <a:noFill/>
+            <a:miter lim="800000"/>
+            <a:headEnd/>
+            <a:tailEnd/>
+          </a:ln>
+        </p:spPr>
+        <p:txBody>
+          <a:bodyPr wrap="none">
+            <a:spAutoFit/>
+          </a:bodyPr>
+          <a:lstStyle/>
+          <a:p>
+            <a:pPr>
+              <a:spcBef>
+                <a:spcPts val="0"/>
+              </a:spcBef>
+            </a:pPr>
+            <a:r>
+              <a:rPr lang="pt-PT" sz="1400" b="1" dirty="0">
+                <a:solidFill>
+                  <a:srgbClr val="003E6C"/>
+                </a:solidFill>
+              </a:rPr>
+              <a:t>Fase Treino</a:t>
+            </a:r>
+          </a:p>
+        </p:txBody>
+      </p:sp>
+    </p:spTree>
+    <p:extLst>
+      <p:ext uri="{BB962C8B-B14F-4D97-AF65-F5344CB8AC3E}">
+        <p14:creationId xmlns:p14="http://schemas.microsoft.com/office/powerpoint/2010/main" val="1897189039"/>
+      </p:ext>
+    </p:extLst>
+  </p:cSld>
+  <p:clrMapOvr>
+    <a:masterClrMapping/>
+  </p:clrMapOvr>
+</p:sld>
+</file>
+
+<file path=ppt/slides/slide33.xml><?xml version="1.0" encoding="utf-8"?>
+<p:sld xmlns:a="http://schemas.openxmlformats.org/drawingml/2006/main" xmlns:r="http://schemas.openxmlformats.org/officeDocument/2006/relationships" xmlns:p="http://schemas.openxmlformats.org/presentationml/2006/main">
+  <p:cSld>
+    <p:spTree>
+      <p:nvGrpSpPr>
+        <p:cNvPr id="1" name=""/>
+        <p:cNvGrpSpPr/>
+        <p:nvPr/>
+      </p:nvGrpSpPr>
+      <p:grpSpPr>
+        <a:xfrm>
+          <a:off x="0" y="0"/>
+          <a:ext cx="0" cy="0"/>
+          <a:chOff x="0" y="0"/>
+          <a:chExt cx="0" cy="0"/>
+        </a:xfrm>
+      </p:grpSpPr>
+      <p:sp>
+        <p:nvSpPr>
+          <p:cNvPr id="4" name="Cube 3">
+            <a:extLst>
+              <a:ext uri="{FF2B5EF4-FFF2-40B4-BE49-F238E27FC236}">
+                <a16:creationId xmlns:a16="http://schemas.microsoft.com/office/drawing/2014/main" id="{C10E5280-ED05-CC2D-B920-8A1677718BEF}"/>
               </a:ext>
             </a:extLst>
           </p:cNvPr>
@@ -32190,8 +33167,80 @@
         </p:nvSpPr>
         <p:spPr bwMode="auto">
           <a:xfrm>
-            <a:off x="4308966" y="3356992"/>
-            <a:ext cx="576064" cy="1153180"/>
+            <a:off x="2119902" y="2492897"/>
+            <a:ext cx="576064" cy="504056"/>
+          </a:xfrm>
+          <a:prstGeom prst="cube">
+            <a:avLst/>
+          </a:prstGeom>
+          <a:solidFill>
+            <a:schemeClr val="bg1"/>
+          </a:solidFill>
+          <a:ln w="9525" cap="flat" cmpd="sng" algn="ctr">
+            <a:solidFill>
+              <a:schemeClr val="tx1"/>
+            </a:solidFill>
+            <a:prstDash val="solid"/>
+            <a:round/>
+            <a:headEnd type="none" w="med" len="med"/>
+            <a:tailEnd type="none" w="med" len="med"/>
+          </a:ln>
+          <a:effectLst/>
+        </p:spPr>
+        <p:txBody>
+          <a:bodyPr vert="horz" wrap="square" lIns="91440" tIns="45720" rIns="91440" bIns="45720" numCol="1" rtlCol="0" anchor="t" anchorCtr="0" compatLnSpc="1">
+            <a:prstTxWarp prst="textNoShape">
+              <a:avLst/>
+            </a:prstTxWarp>
+            <a:spAutoFit/>
+          </a:bodyPr>
+          <a:lstStyle/>
+          <a:p>
+            <a:pPr marL="0" marR="0" indent="0" algn="l" defTabSz="914400" rtl="0" eaLnBrk="1" fontAlgn="base" latinLnBrk="0" hangingPunct="1">
+              <a:lnSpc>
+                <a:spcPct val="100000"/>
+              </a:lnSpc>
+              <a:spcBef>
+                <a:spcPct val="50000"/>
+              </a:spcBef>
+              <a:spcAft>
+                <a:spcPct val="0"/>
+              </a:spcAft>
+              <a:buClrTx/>
+              <a:buSzTx/>
+              <a:buFontTx/>
+              <a:buNone/>
+              <a:tabLst/>
+            </a:pPr>
+            <a:endParaRPr kumimoji="0" lang="pt-PT" sz="6000" b="0" i="0" u="none" strike="noStrike" cap="none" normalizeH="0" baseline="0">
+              <a:ln>
+                <a:noFill/>
+              </a:ln>
+              <a:solidFill>
+                <a:srgbClr val="CC0000"/>
+              </a:solidFill>
+              <a:effectLst/>
+              <a:latin typeface="Humanst521 BT" pitchFamily="34" charset="0"/>
+            </a:endParaRPr>
+          </a:p>
+        </p:txBody>
+      </p:sp>
+      <p:sp>
+        <p:nvSpPr>
+          <p:cNvPr id="5" name="Cube 4">
+            <a:extLst>
+              <a:ext uri="{FF2B5EF4-FFF2-40B4-BE49-F238E27FC236}">
+                <a16:creationId xmlns:a16="http://schemas.microsoft.com/office/drawing/2014/main" id="{3E314FB0-B419-E1D3-B40C-CD7C3B02FDE1}"/>
+              </a:ext>
+            </a:extLst>
+          </p:cNvPr>
+          <p:cNvSpPr/>
+          <p:nvPr/>
+        </p:nvSpPr>
+        <p:spPr bwMode="auto">
+          <a:xfrm>
+            <a:off x="4280142" y="3356993"/>
+            <a:ext cx="576064" cy="504056"/>
           </a:xfrm>
           <a:prstGeom prst="cube">
             <a:avLst/>
@@ -32219,16 +33268,41 @@
           </a:bodyPr>
           <a:lstStyle/>
           <a:p>
-            <a:endParaRPr lang="pt-PT"/>
+            <a:pPr marL="0" marR="0" indent="0" algn="l" defTabSz="914400" rtl="0" eaLnBrk="1" fontAlgn="base" latinLnBrk="0" hangingPunct="1">
+              <a:lnSpc>
+                <a:spcPct val="100000"/>
+              </a:lnSpc>
+              <a:spcBef>
+                <a:spcPct val="50000"/>
+              </a:spcBef>
+              <a:spcAft>
+                <a:spcPct val="0"/>
+              </a:spcAft>
+              <a:buClrTx/>
+              <a:buSzTx/>
+              <a:buFontTx/>
+              <a:buNone/>
+              <a:tabLst/>
+            </a:pPr>
+            <a:endParaRPr kumimoji="0" lang="pt-PT" sz="6000" b="0" i="0" u="none" strike="noStrike" cap="none" normalizeH="0" baseline="0">
+              <a:ln>
+                <a:noFill/>
+              </a:ln>
+              <a:solidFill>
+                <a:srgbClr val="CC0000"/>
+              </a:solidFill>
+              <a:effectLst/>
+              <a:latin typeface="Humanst521 BT" pitchFamily="34" charset="0"/>
+            </a:endParaRPr>
           </a:p>
         </p:txBody>
       </p:sp>
       <p:sp>
         <p:nvSpPr>
-          <p:cNvPr id="20" name="Can 39">
+          <p:cNvPr id="25" name="Can 39">
             <a:extLst>
               <a:ext uri="{FF2B5EF4-FFF2-40B4-BE49-F238E27FC236}">
-                <a16:creationId xmlns:a16="http://schemas.microsoft.com/office/drawing/2014/main" id="{BED22CE5-DCB8-6ECF-4C5D-CAC41F6152A7}"/>
+                <a16:creationId xmlns:a16="http://schemas.microsoft.com/office/drawing/2014/main" id="{99BA0C8F-9524-6111-550C-75768D38E139}"/>
               </a:ext>
             </a:extLst>
           </p:cNvPr>
@@ -32237,8 +33311,8 @@
         </p:nvSpPr>
         <p:spPr bwMode="auto">
           <a:xfrm>
-            <a:off x="2148726" y="4293096"/>
-            <a:ext cx="450000" cy="1182648"/>
+            <a:off x="2119902" y="4293097"/>
+            <a:ext cx="450000" cy="900000"/>
           </a:xfrm>
           <a:prstGeom prst="can">
             <a:avLst/>
@@ -32266,7 +33340,1134 @@
           </a:bodyPr>
           <a:lstStyle/>
           <a:p>
+            <a:pPr marL="0" marR="0" indent="0" algn="l" defTabSz="914400" rtl="0" eaLnBrk="1" fontAlgn="base" latinLnBrk="0" hangingPunct="1">
+              <a:lnSpc>
+                <a:spcPct val="100000"/>
+              </a:lnSpc>
+              <a:spcBef>
+                <a:spcPct val="50000"/>
+              </a:spcBef>
+              <a:spcAft>
+                <a:spcPct val="0"/>
+              </a:spcAft>
+              <a:buClrTx/>
+              <a:buSzTx/>
+              <a:buFontTx/>
+              <a:buNone/>
+              <a:tabLst/>
+            </a:pPr>
+            <a:endParaRPr kumimoji="0" lang="pt-PT" sz="6000" b="0" i="0" u="none" strike="noStrike" cap="none" normalizeH="0" baseline="0">
+              <a:ln>
+                <a:noFill/>
+              </a:ln>
+              <a:solidFill>
+                <a:srgbClr val="CC0000"/>
+              </a:solidFill>
+              <a:effectLst/>
+              <a:latin typeface="Humanst521 BT" pitchFamily="34" charset="0"/>
+            </a:endParaRPr>
+          </a:p>
+        </p:txBody>
+      </p:sp>
+      <p:sp>
+        <p:nvSpPr>
+          <p:cNvPr id="29" name="Can 40">
+            <a:extLst>
+              <a:ext uri="{FF2B5EF4-FFF2-40B4-BE49-F238E27FC236}">
+                <a16:creationId xmlns:a16="http://schemas.microsoft.com/office/drawing/2014/main" id="{E1288199-A21B-83C3-D3F4-A232AEDD74C4}"/>
+              </a:ext>
+            </a:extLst>
+          </p:cNvPr>
+          <p:cNvSpPr>
+            <a:spLocks noChangeAspect="1"/>
+          </p:cNvSpPr>
+          <p:nvPr/>
+        </p:nvSpPr>
+        <p:spPr bwMode="auto">
+          <a:xfrm>
+            <a:off x="3128014" y="3861049"/>
+            <a:ext cx="225000" cy="450000"/>
+          </a:xfrm>
+          <a:prstGeom prst="can">
+            <a:avLst/>
+          </a:prstGeom>
+          <a:solidFill>
+            <a:schemeClr val="accent1"/>
+          </a:solidFill>
+          <a:ln w="9525" cap="flat" cmpd="sng" algn="ctr">
+            <a:solidFill>
+              <a:schemeClr val="tx1"/>
+            </a:solidFill>
+            <a:prstDash val="solid"/>
+            <a:round/>
+            <a:headEnd type="none" w="med" len="med"/>
+            <a:tailEnd type="none" w="med" len="med"/>
+          </a:ln>
+          <a:effectLst/>
+        </p:spPr>
+        <p:txBody>
+          <a:bodyPr vert="horz" wrap="square" lIns="91440" tIns="45720" rIns="91440" bIns="45720" numCol="1" rtlCol="0" anchor="t" anchorCtr="0" compatLnSpc="1">
+            <a:prstTxWarp prst="textNoShape">
+              <a:avLst/>
+            </a:prstTxWarp>
+            <a:spAutoFit/>
+          </a:bodyPr>
+          <a:lstStyle/>
+          <a:p>
+            <a:pPr marL="0" marR="0" indent="0" algn="l" defTabSz="914400" rtl="0" eaLnBrk="1" fontAlgn="base" latinLnBrk="0" hangingPunct="1">
+              <a:lnSpc>
+                <a:spcPct val="100000"/>
+              </a:lnSpc>
+              <a:spcBef>
+                <a:spcPct val="50000"/>
+              </a:spcBef>
+              <a:spcAft>
+                <a:spcPct val="0"/>
+              </a:spcAft>
+              <a:buClrTx/>
+              <a:buSzTx/>
+              <a:buFontTx/>
+              <a:buNone/>
+              <a:tabLst/>
+            </a:pPr>
+            <a:endParaRPr kumimoji="0" lang="pt-PT" sz="6000" b="0" i="0" u="none" strike="noStrike" cap="none" normalizeH="0" baseline="0">
+              <a:ln>
+                <a:noFill/>
+              </a:ln>
+              <a:solidFill>
+                <a:srgbClr val="CC0000"/>
+              </a:solidFill>
+              <a:effectLst/>
+              <a:latin typeface="Humanst521 BT" pitchFamily="34" charset="0"/>
+            </a:endParaRPr>
+          </a:p>
+        </p:txBody>
+      </p:sp>
+      <p:sp>
+        <p:nvSpPr>
+          <p:cNvPr id="31" name="Can 42">
+            <a:extLst>
+              <a:ext uri="{FF2B5EF4-FFF2-40B4-BE49-F238E27FC236}">
+                <a16:creationId xmlns:a16="http://schemas.microsoft.com/office/drawing/2014/main" id="{7F720B6E-A228-8D56-7C6B-D110C549E3B5}"/>
+              </a:ext>
+            </a:extLst>
+          </p:cNvPr>
+          <p:cNvSpPr>
+            <a:spLocks noChangeAspect="1"/>
+          </p:cNvSpPr>
+          <p:nvPr/>
+        </p:nvSpPr>
+        <p:spPr bwMode="auto">
+          <a:xfrm>
+            <a:off x="3128014" y="5384250"/>
+            <a:ext cx="225000" cy="450000"/>
+          </a:xfrm>
+          <a:prstGeom prst="can">
+            <a:avLst/>
+          </a:prstGeom>
+          <a:solidFill>
+            <a:schemeClr val="accent1"/>
+          </a:solidFill>
+          <a:ln w="9525" cap="flat" cmpd="sng" algn="ctr">
+            <a:solidFill>
+              <a:schemeClr val="tx1"/>
+            </a:solidFill>
+            <a:prstDash val="solid"/>
+            <a:round/>
+            <a:headEnd type="none" w="med" len="med"/>
+            <a:tailEnd type="none" w="med" len="med"/>
+          </a:ln>
+          <a:effectLst/>
+        </p:spPr>
+        <p:txBody>
+          <a:bodyPr vert="horz" wrap="square" lIns="91440" tIns="45720" rIns="91440" bIns="45720" numCol="1" rtlCol="0" anchor="t" anchorCtr="0" compatLnSpc="1">
+            <a:prstTxWarp prst="textNoShape">
+              <a:avLst/>
+            </a:prstTxWarp>
+            <a:spAutoFit/>
+          </a:bodyPr>
+          <a:lstStyle/>
+          <a:p>
+            <a:pPr marL="0" marR="0" indent="0" algn="l" defTabSz="914400" rtl="0" eaLnBrk="1" fontAlgn="base" latinLnBrk="0" hangingPunct="1">
+              <a:lnSpc>
+                <a:spcPct val="100000"/>
+              </a:lnSpc>
+              <a:spcBef>
+                <a:spcPct val="50000"/>
+              </a:spcBef>
+              <a:spcAft>
+                <a:spcPct val="0"/>
+              </a:spcAft>
+              <a:buClrTx/>
+              <a:buSzTx/>
+              <a:buFontTx/>
+              <a:buNone/>
+              <a:tabLst/>
+            </a:pPr>
+            <a:endParaRPr kumimoji="0" lang="pt-PT" sz="6000" b="0" i="0" u="none" strike="noStrike" cap="none" normalizeH="0" baseline="0">
+              <a:ln>
+                <a:noFill/>
+              </a:ln>
+              <a:solidFill>
+                <a:srgbClr val="CC0000"/>
+              </a:solidFill>
+              <a:effectLst/>
+              <a:latin typeface="Humanst521 BT" pitchFamily="34" charset="0"/>
+            </a:endParaRPr>
+          </a:p>
+        </p:txBody>
+      </p:sp>
+      <p:sp>
+        <p:nvSpPr>
+          <p:cNvPr id="32" name="Cube 31">
+            <a:extLst>
+              <a:ext uri="{FF2B5EF4-FFF2-40B4-BE49-F238E27FC236}">
+                <a16:creationId xmlns:a16="http://schemas.microsoft.com/office/drawing/2014/main" id="{52464193-AE09-B4A7-2942-5F42E39E55EE}"/>
+              </a:ext>
+            </a:extLst>
+          </p:cNvPr>
+          <p:cNvSpPr/>
+          <p:nvPr/>
+        </p:nvSpPr>
+        <p:spPr bwMode="auto">
+          <a:xfrm>
+            <a:off x="7448494" y="3356993"/>
+            <a:ext cx="576064" cy="504056"/>
+          </a:xfrm>
+          <a:prstGeom prst="cube">
+            <a:avLst/>
+          </a:prstGeom>
+          <a:solidFill>
+            <a:schemeClr val="accent1"/>
+          </a:solidFill>
+          <a:ln w="9525" cap="flat" cmpd="sng" algn="ctr">
+            <a:solidFill>
+              <a:schemeClr val="tx1"/>
+            </a:solidFill>
+            <a:prstDash val="solid"/>
+            <a:round/>
+            <a:headEnd type="none" w="med" len="med"/>
+            <a:tailEnd type="none" w="med" len="med"/>
+          </a:ln>
+          <a:effectLst/>
+        </p:spPr>
+        <p:txBody>
+          <a:bodyPr vert="horz" wrap="square" lIns="91440" tIns="45720" rIns="91440" bIns="45720" numCol="1" rtlCol="0" anchor="t" anchorCtr="0" compatLnSpc="1">
+            <a:prstTxWarp prst="textNoShape">
+              <a:avLst/>
+            </a:prstTxWarp>
+            <a:spAutoFit/>
+          </a:bodyPr>
+          <a:lstStyle/>
+          <a:p>
+            <a:pPr marL="0" marR="0" indent="0" algn="l" defTabSz="914400" rtl="0" eaLnBrk="1" fontAlgn="base" latinLnBrk="0" hangingPunct="1">
+              <a:lnSpc>
+                <a:spcPct val="100000"/>
+              </a:lnSpc>
+              <a:spcBef>
+                <a:spcPct val="50000"/>
+              </a:spcBef>
+              <a:spcAft>
+                <a:spcPct val="0"/>
+              </a:spcAft>
+              <a:buClrTx/>
+              <a:buSzTx/>
+              <a:buFontTx/>
+              <a:buNone/>
+              <a:tabLst/>
+            </a:pPr>
+            <a:endParaRPr kumimoji="0" lang="pt-PT" sz="6000" b="0" i="0" u="none" strike="noStrike" cap="none" normalizeH="0" baseline="0">
+              <a:ln>
+                <a:noFill/>
+              </a:ln>
+              <a:solidFill>
+                <a:srgbClr val="CC0000"/>
+              </a:solidFill>
+              <a:effectLst/>
+              <a:latin typeface="Humanst521 BT" pitchFamily="34" charset="0"/>
+            </a:endParaRPr>
+          </a:p>
+        </p:txBody>
+      </p:sp>
+      <p:sp>
+        <p:nvSpPr>
+          <p:cNvPr id="33" name="Cube 32">
+            <a:extLst>
+              <a:ext uri="{FF2B5EF4-FFF2-40B4-BE49-F238E27FC236}">
+                <a16:creationId xmlns:a16="http://schemas.microsoft.com/office/drawing/2014/main" id="{2409168C-FBED-06FD-1D1D-8CB5C641CC1F}"/>
+              </a:ext>
+            </a:extLst>
+          </p:cNvPr>
+          <p:cNvSpPr/>
+          <p:nvPr/>
+        </p:nvSpPr>
+        <p:spPr bwMode="auto">
+          <a:xfrm>
+            <a:off x="9032670" y="3356993"/>
+            <a:ext cx="576064" cy="504056"/>
+          </a:xfrm>
+          <a:prstGeom prst="cube">
+            <a:avLst/>
+          </a:prstGeom>
+          <a:solidFill>
+            <a:schemeClr val="accent1"/>
+          </a:solidFill>
+          <a:ln w="9525" cap="flat" cmpd="sng" algn="ctr">
+            <a:solidFill>
+              <a:schemeClr val="tx1"/>
+            </a:solidFill>
+            <a:prstDash val="solid"/>
+            <a:round/>
+            <a:headEnd type="none" w="med" len="med"/>
+            <a:tailEnd type="none" w="med" len="med"/>
+          </a:ln>
+          <a:effectLst/>
+        </p:spPr>
+        <p:txBody>
+          <a:bodyPr vert="horz" wrap="square" lIns="91440" tIns="45720" rIns="91440" bIns="45720" numCol="1" rtlCol="0" anchor="t" anchorCtr="0" compatLnSpc="1">
+            <a:prstTxWarp prst="textNoShape">
+              <a:avLst/>
+            </a:prstTxWarp>
+            <a:spAutoFit/>
+          </a:bodyPr>
+          <a:lstStyle/>
+          <a:p>
+            <a:pPr marL="0" marR="0" indent="0" algn="l" defTabSz="914400" rtl="0" eaLnBrk="1" fontAlgn="base" latinLnBrk="0" hangingPunct="1">
+              <a:lnSpc>
+                <a:spcPct val="100000"/>
+              </a:lnSpc>
+              <a:spcBef>
+                <a:spcPct val="50000"/>
+              </a:spcBef>
+              <a:spcAft>
+                <a:spcPct val="0"/>
+              </a:spcAft>
+              <a:buClrTx/>
+              <a:buSzTx/>
+              <a:buFontTx/>
+              <a:buNone/>
+              <a:tabLst/>
+            </a:pPr>
+            <a:endParaRPr kumimoji="0" lang="pt-PT" sz="6000" b="0" i="0" u="none" strike="noStrike" cap="none" normalizeH="0" baseline="0">
+              <a:ln>
+                <a:noFill/>
+              </a:ln>
+              <a:solidFill>
+                <a:srgbClr val="CC0000"/>
+              </a:solidFill>
+              <a:effectLst/>
+              <a:latin typeface="Humanst521 BT" pitchFamily="34" charset="0"/>
+            </a:endParaRPr>
+          </a:p>
+        </p:txBody>
+      </p:sp>
+      <p:sp>
+        <p:nvSpPr>
+          <p:cNvPr id="34" name="Can 53">
+            <a:extLst>
+              <a:ext uri="{FF2B5EF4-FFF2-40B4-BE49-F238E27FC236}">
+                <a16:creationId xmlns:a16="http://schemas.microsoft.com/office/drawing/2014/main" id="{C1B47498-69DC-A815-983C-7AAA78C5245E}"/>
+              </a:ext>
+            </a:extLst>
+          </p:cNvPr>
+          <p:cNvSpPr>
+            <a:spLocks noChangeAspect="1"/>
+          </p:cNvSpPr>
+          <p:nvPr/>
+        </p:nvSpPr>
+        <p:spPr bwMode="auto">
+          <a:xfrm>
+            <a:off x="9207444" y="2564905"/>
+            <a:ext cx="225000" cy="450000"/>
+          </a:xfrm>
+          <a:prstGeom prst="can">
+            <a:avLst/>
+          </a:prstGeom>
+          <a:solidFill>
+            <a:schemeClr val="accent1"/>
+          </a:solidFill>
+          <a:ln w="9525" cap="flat" cmpd="sng" algn="ctr">
+            <a:solidFill>
+              <a:schemeClr val="tx1"/>
+            </a:solidFill>
+            <a:prstDash val="solid"/>
+            <a:round/>
+            <a:headEnd type="none" w="med" len="med"/>
+            <a:tailEnd type="none" w="med" len="med"/>
+          </a:ln>
+          <a:effectLst/>
+        </p:spPr>
+        <p:txBody>
+          <a:bodyPr vert="horz" wrap="square" lIns="91440" tIns="45720" rIns="91440" bIns="45720" numCol="1" rtlCol="0" anchor="t" anchorCtr="0" compatLnSpc="1">
+            <a:prstTxWarp prst="textNoShape">
+              <a:avLst/>
+            </a:prstTxWarp>
+            <a:spAutoFit/>
+          </a:bodyPr>
+          <a:lstStyle/>
+          <a:p>
+            <a:pPr marL="0" marR="0" indent="0" algn="l" defTabSz="914400" rtl="0" eaLnBrk="1" fontAlgn="base" latinLnBrk="0" hangingPunct="1">
+              <a:lnSpc>
+                <a:spcPct val="100000"/>
+              </a:lnSpc>
+              <a:spcBef>
+                <a:spcPct val="50000"/>
+              </a:spcBef>
+              <a:spcAft>
+                <a:spcPct val="0"/>
+              </a:spcAft>
+              <a:buClrTx/>
+              <a:buSzTx/>
+              <a:buFontTx/>
+              <a:buNone/>
+              <a:tabLst/>
+            </a:pPr>
+            <a:endParaRPr kumimoji="0" lang="pt-PT" sz="6000" b="0" i="0" u="none" strike="noStrike" cap="none" normalizeH="0" baseline="0">
+              <a:ln>
+                <a:noFill/>
+              </a:ln>
+              <a:solidFill>
+                <a:srgbClr val="CC0000"/>
+              </a:solidFill>
+              <a:effectLst/>
+              <a:latin typeface="Humanst521 BT" pitchFamily="34" charset="0"/>
+            </a:endParaRPr>
+          </a:p>
+        </p:txBody>
+      </p:sp>
+      <p:sp>
+        <p:nvSpPr>
+          <p:cNvPr id="17413" name="Text Box 39"/>
+          <p:cNvSpPr txBox="1">
+            <a:spLocks noChangeArrowheads="1"/>
+          </p:cNvSpPr>
+          <p:nvPr/>
+        </p:nvSpPr>
+        <p:spPr bwMode="auto">
+          <a:xfrm rot="5400000" flipV="1">
+            <a:off x="9299576" y="946151"/>
+            <a:ext cx="504825" cy="1006475"/>
+          </a:xfrm>
+          <a:prstGeom prst="rect">
+            <a:avLst/>
+          </a:prstGeom>
+          <a:noFill/>
+          <a:ln w="9525">
+            <a:noFill/>
+            <a:miter lim="800000"/>
+            <a:headEnd/>
+            <a:tailEnd/>
+          </a:ln>
+        </p:spPr>
+        <p:txBody>
+          <a:bodyPr>
+            <a:spAutoFit/>
+          </a:bodyPr>
+          <a:lstStyle/>
+          <a:p>
+            <a:r>
+              <a:rPr lang="pt-PT">
+                <a:solidFill>
+                  <a:srgbClr val="CC301F"/>
+                </a:solidFill>
+              </a:rPr>
+              <a:t>«</a:t>
+            </a:r>
+          </a:p>
+        </p:txBody>
+      </p:sp>
+      <p:sp>
+        <p:nvSpPr>
+          <p:cNvPr id="8194" name="Rectangle 2"/>
+          <p:cNvSpPr>
+            <a:spLocks noChangeArrowheads="1"/>
+          </p:cNvSpPr>
+          <p:nvPr/>
+        </p:nvSpPr>
+        <p:spPr bwMode="auto">
+          <a:xfrm>
+            <a:off x="1524001" y="-507831"/>
+            <a:ext cx="184731" cy="1015663"/>
+          </a:xfrm>
+          <a:prstGeom prst="rect">
+            <a:avLst/>
+          </a:prstGeom>
+          <a:noFill/>
+          <a:ln w="9525">
+            <a:noFill/>
+            <a:miter lim="800000"/>
+            <a:headEnd/>
+            <a:tailEnd/>
+          </a:ln>
+          <a:effectLst/>
+        </p:spPr>
+        <p:txBody>
+          <a:bodyPr vert="horz" wrap="none" lIns="91440" tIns="45720" rIns="91440" bIns="45720" numCol="1" anchor="ctr" anchorCtr="0" compatLnSpc="1">
+            <a:prstTxWarp prst="textNoShape">
+              <a:avLst/>
+            </a:prstTxWarp>
+            <a:spAutoFit/>
+          </a:bodyPr>
+          <a:lstStyle/>
+          <a:p>
+            <a:endParaRPr lang="en-US"/>
+          </a:p>
+        </p:txBody>
+      </p:sp>
+      <p:sp>
+        <p:nvSpPr>
+          <p:cNvPr id="8196" name="Rectangle 4"/>
+          <p:cNvSpPr>
+            <a:spLocks noChangeArrowheads="1"/>
+          </p:cNvSpPr>
+          <p:nvPr/>
+        </p:nvSpPr>
+        <p:spPr bwMode="auto">
+          <a:xfrm>
+            <a:off x="1524001" y="-507831"/>
+            <a:ext cx="184731" cy="1015663"/>
+          </a:xfrm>
+          <a:prstGeom prst="rect">
+            <a:avLst/>
+          </a:prstGeom>
+          <a:noFill/>
+          <a:ln w="9525">
+            <a:noFill/>
+            <a:miter lim="800000"/>
+            <a:headEnd/>
+            <a:tailEnd/>
+          </a:ln>
+          <a:effectLst/>
+        </p:spPr>
+        <p:txBody>
+          <a:bodyPr vert="horz" wrap="none" lIns="91440" tIns="45720" rIns="91440" bIns="45720" numCol="1" anchor="ctr" anchorCtr="0" compatLnSpc="1">
+            <a:prstTxWarp prst="textNoShape">
+              <a:avLst/>
+            </a:prstTxWarp>
+            <a:spAutoFit/>
+          </a:bodyPr>
+          <a:lstStyle/>
+          <a:p>
+            <a:endParaRPr lang="en-US"/>
+          </a:p>
+        </p:txBody>
+      </p:sp>
+      <p:sp>
+        <p:nvSpPr>
+          <p:cNvPr id="11" name="Text Box 13"/>
+          <p:cNvSpPr txBox="1">
+            <a:spLocks noChangeArrowheads="1"/>
+          </p:cNvSpPr>
+          <p:nvPr/>
+        </p:nvSpPr>
+        <p:spPr bwMode="auto">
+          <a:xfrm>
+            <a:off x="9941000" y="6276921"/>
+            <a:ext cx="403151" cy="276999"/>
+          </a:xfrm>
+          <a:prstGeom prst="rect">
+            <a:avLst/>
+          </a:prstGeom>
+          <a:noFill/>
+          <a:ln w="9525">
+            <a:noFill/>
+            <a:miter lim="800000"/>
+            <a:headEnd/>
+            <a:tailEnd/>
+          </a:ln>
+        </p:spPr>
+        <p:txBody>
+          <a:bodyPr wrap="square">
+            <a:spAutoFit/>
+          </a:bodyPr>
+          <a:lstStyle/>
+          <a:p>
+            <a:r>
+              <a:rPr lang="pt-PT" sz="1200" dirty="0">
+                <a:solidFill>
+                  <a:srgbClr val="808080"/>
+                </a:solidFill>
+                <a:latin typeface="Humnst777 BT" pitchFamily="34" charset="0"/>
+              </a:rPr>
+              <a:t>20</a:t>
+            </a:r>
+          </a:p>
+        </p:txBody>
+      </p:sp>
+      <p:sp>
+        <p:nvSpPr>
+          <p:cNvPr id="2" name="Text Box 376">
+            <a:extLst>
+              <a:ext uri="{FF2B5EF4-FFF2-40B4-BE49-F238E27FC236}">
+                <a16:creationId xmlns:a16="http://schemas.microsoft.com/office/drawing/2014/main" id="{EB6B6BB2-6F69-BEBB-9BFD-CD4095E03018}"/>
+              </a:ext>
+            </a:extLst>
+          </p:cNvPr>
+          <p:cNvSpPr txBox="1">
+            <a:spLocks noChangeArrowheads="1"/>
+          </p:cNvSpPr>
+          <p:nvPr/>
+        </p:nvSpPr>
+        <p:spPr bwMode="auto">
+          <a:xfrm>
+            <a:off x="2206626" y="1511710"/>
+            <a:ext cx="7705725" cy="523875"/>
+          </a:xfrm>
+          <a:prstGeom prst="rect">
+            <a:avLst/>
+          </a:prstGeom>
+          <a:noFill/>
+          <a:ln w="9525">
+            <a:noFill/>
+            <a:miter lim="800000"/>
+            <a:headEnd/>
+            <a:tailEnd/>
+          </a:ln>
+        </p:spPr>
+        <p:txBody>
+          <a:bodyPr>
+            <a:spAutoFit/>
+          </a:bodyPr>
+          <a:lstStyle/>
+          <a:p>
+            <a:pPr>
+              <a:spcBef>
+                <a:spcPct val="0"/>
+              </a:spcBef>
+            </a:pPr>
+            <a:r>
+              <a:rPr lang="pt-PT" sz="2800" b="1" dirty="0">
+                <a:solidFill>
+                  <a:srgbClr val="CC301F"/>
+                </a:solidFill>
+              </a:rPr>
+              <a:t>»</a:t>
+            </a:r>
+            <a:r>
+              <a:rPr lang="pt-PT" sz="2800" dirty="0">
+                <a:solidFill>
+                  <a:schemeClr val="bg2"/>
+                </a:solidFill>
+                <a:latin typeface="Humnst777 BT" pitchFamily="34" charset="0"/>
+              </a:rPr>
+              <a:t> </a:t>
+            </a:r>
+            <a:r>
+              <a:rPr lang="pt-PT" sz="2800" dirty="0">
+                <a:solidFill>
+                  <a:schemeClr val="bg1">
+                    <a:lumMod val="50000"/>
+                  </a:schemeClr>
+                </a:solidFill>
+                <a:latin typeface="Humnst777 BT" pitchFamily="34" charset="0"/>
+              </a:rPr>
+              <a:t>Visão Geral</a:t>
+            </a:r>
+            <a:endParaRPr lang="pt-PT" sz="2800" b="1" i="1" dirty="0">
+              <a:solidFill>
+                <a:schemeClr val="bg1">
+                  <a:lumMod val="50000"/>
+                </a:schemeClr>
+              </a:solidFill>
+              <a:latin typeface="Humnst777 BT" pitchFamily="34" charset="0"/>
+            </a:endParaRPr>
+          </a:p>
+        </p:txBody>
+      </p:sp>
+      <p:sp>
+        <p:nvSpPr>
+          <p:cNvPr id="3" name="Rectangle 38">
+            <a:extLst>
+              <a:ext uri="{FF2B5EF4-FFF2-40B4-BE49-F238E27FC236}">
+                <a16:creationId xmlns:a16="http://schemas.microsoft.com/office/drawing/2014/main" id="{EA09A705-6330-F9C2-57C5-4CD7AE9AFE4E}"/>
+              </a:ext>
+            </a:extLst>
+          </p:cNvPr>
+          <p:cNvSpPr>
+            <a:spLocks noChangeArrowheads="1"/>
+          </p:cNvSpPr>
+          <p:nvPr/>
+        </p:nvSpPr>
+        <p:spPr bwMode="auto">
+          <a:xfrm>
+            <a:off x="4295776" y="404814"/>
+            <a:ext cx="6048375" cy="854075"/>
+          </a:xfrm>
+          <a:prstGeom prst="rect">
+            <a:avLst/>
+          </a:prstGeom>
+          <a:noFill/>
+          <a:ln w="9525">
+            <a:noFill/>
+            <a:miter lim="800000"/>
+            <a:headEnd/>
+            <a:tailEnd/>
+          </a:ln>
+        </p:spPr>
+        <p:txBody>
+          <a:bodyPr anchor="ctr"/>
+          <a:lstStyle/>
+          <a:p>
+            <a:pPr algn="r">
+              <a:spcBef>
+                <a:spcPct val="0"/>
+              </a:spcBef>
+            </a:pPr>
+            <a:r>
+              <a:rPr lang="pt-PT" sz="3800" dirty="0">
+                <a:solidFill>
+                  <a:schemeClr val="bg1">
+                    <a:lumMod val="50000"/>
+                  </a:schemeClr>
+                </a:solidFill>
+                <a:latin typeface="Humnst777 BT" pitchFamily="34" charset="0"/>
+              </a:rPr>
+              <a:t>Avaliação de modelos</a:t>
+            </a:r>
+          </a:p>
+        </p:txBody>
+      </p:sp>
+      <p:sp>
+        <p:nvSpPr>
+          <p:cNvPr id="6" name="Text Box 6">
+            <a:extLst>
+              <a:ext uri="{FF2B5EF4-FFF2-40B4-BE49-F238E27FC236}">
+                <a16:creationId xmlns:a16="http://schemas.microsoft.com/office/drawing/2014/main" id="{3A619511-069C-CE8C-A9E6-F5D13899867C}"/>
+              </a:ext>
+            </a:extLst>
+          </p:cNvPr>
+          <p:cNvSpPr txBox="1">
+            <a:spLocks noChangeArrowheads="1"/>
+          </p:cNvSpPr>
+          <p:nvPr/>
+        </p:nvSpPr>
+        <p:spPr bwMode="auto">
+          <a:xfrm>
+            <a:off x="2004710" y="5157193"/>
+            <a:ext cx="651140" cy="307777"/>
+          </a:xfrm>
+          <a:prstGeom prst="rect">
+            <a:avLst/>
+          </a:prstGeom>
+          <a:noFill/>
+          <a:ln w="9525">
+            <a:noFill/>
+            <a:miter lim="800000"/>
+            <a:headEnd/>
+            <a:tailEnd/>
+          </a:ln>
+        </p:spPr>
+        <p:txBody>
+          <a:bodyPr wrap="none">
+            <a:spAutoFit/>
+          </a:bodyPr>
+          <a:lstStyle/>
+          <a:p>
+            <a:pPr>
+              <a:spcBef>
+                <a:spcPts val="0"/>
+              </a:spcBef>
+            </a:pPr>
+            <a:r>
+              <a:rPr lang="pt-PT" sz="1400" b="1" dirty="0">
+                <a:solidFill>
+                  <a:schemeClr val="tx1"/>
+                </a:solidFill>
+              </a:rPr>
+              <a:t>Dados</a:t>
+            </a:r>
+          </a:p>
+        </p:txBody>
+      </p:sp>
+      <p:sp>
+        <p:nvSpPr>
+          <p:cNvPr id="7" name="Text Box 29">
+            <a:extLst>
+              <a:ext uri="{FF2B5EF4-FFF2-40B4-BE49-F238E27FC236}">
+                <a16:creationId xmlns:a16="http://schemas.microsoft.com/office/drawing/2014/main" id="{0ECE434C-3A76-1B9A-2D21-109834274A29}"/>
+              </a:ext>
+            </a:extLst>
+          </p:cNvPr>
+          <p:cNvSpPr txBox="1">
+            <a:spLocks noChangeArrowheads="1"/>
+          </p:cNvSpPr>
+          <p:nvPr/>
+        </p:nvSpPr>
+        <p:spPr bwMode="auto">
+          <a:xfrm>
+            <a:off x="3012822" y="4293097"/>
+            <a:ext cx="572464" cy="276999"/>
+          </a:xfrm>
+          <a:prstGeom prst="rect">
+            <a:avLst/>
+          </a:prstGeom>
+          <a:noFill/>
+          <a:ln w="9525">
+            <a:noFill/>
+            <a:miter lim="800000"/>
+            <a:headEnd/>
+            <a:tailEnd/>
+          </a:ln>
+        </p:spPr>
+        <p:txBody>
+          <a:bodyPr wrap="none">
+            <a:spAutoFit/>
+          </a:bodyPr>
+          <a:lstStyle/>
+          <a:p>
+            <a:pPr>
+              <a:spcBef>
+                <a:spcPts val="0"/>
+              </a:spcBef>
+            </a:pPr>
+            <a:r>
+              <a:rPr lang="pt-PT" sz="1200" b="1" dirty="0">
+                <a:solidFill>
+                  <a:schemeClr val="tx1"/>
+                </a:solidFill>
+              </a:rPr>
+              <a:t>treino</a:t>
+            </a:r>
+          </a:p>
+        </p:txBody>
+      </p:sp>
+      <p:sp>
+        <p:nvSpPr>
+          <p:cNvPr id="10" name="Line 31">
+            <a:extLst>
+              <a:ext uri="{FF2B5EF4-FFF2-40B4-BE49-F238E27FC236}">
+                <a16:creationId xmlns:a16="http://schemas.microsoft.com/office/drawing/2014/main" id="{13114C4A-E9F6-769B-4808-561F0D77E19D}"/>
+              </a:ext>
+            </a:extLst>
+          </p:cNvPr>
+          <p:cNvSpPr>
+            <a:spLocks noChangeShapeType="1"/>
+          </p:cNvSpPr>
+          <p:nvPr/>
+        </p:nvSpPr>
+        <p:spPr bwMode="auto">
+          <a:xfrm flipV="1">
+            <a:off x="2724830" y="4329120"/>
+            <a:ext cx="360000" cy="180000"/>
+          </a:xfrm>
+          <a:prstGeom prst="line">
+            <a:avLst/>
+          </a:prstGeom>
+          <a:noFill/>
+          <a:ln w="9525">
+            <a:solidFill>
+              <a:schemeClr val="tx1"/>
+            </a:solidFill>
+            <a:round/>
+            <a:headEnd/>
+            <a:tailEnd type="triangle" w="med" len="med"/>
+          </a:ln>
+        </p:spPr>
+        <p:txBody>
+          <a:bodyPr/>
+          <a:lstStyle/>
+          <a:p>
             <a:endParaRPr lang="pt-PT"/>
+          </a:p>
+        </p:txBody>
+      </p:sp>
+      <p:sp>
+        <p:nvSpPr>
+          <p:cNvPr id="12" name="Text Box 26">
+            <a:extLst>
+              <a:ext uri="{FF2B5EF4-FFF2-40B4-BE49-F238E27FC236}">
+                <a16:creationId xmlns:a16="http://schemas.microsoft.com/office/drawing/2014/main" id="{D65E235C-FEBD-1232-1F7B-8FD15AE519A5}"/>
+              </a:ext>
+            </a:extLst>
+          </p:cNvPr>
+          <p:cNvSpPr txBox="1">
+            <a:spLocks noChangeArrowheads="1"/>
+          </p:cNvSpPr>
+          <p:nvPr/>
+        </p:nvSpPr>
+        <p:spPr bwMode="auto">
+          <a:xfrm>
+            <a:off x="2651698" y="4149081"/>
+            <a:ext cx="436338" cy="307777"/>
+          </a:xfrm>
+          <a:prstGeom prst="rect">
+            <a:avLst/>
+          </a:prstGeom>
+          <a:noFill/>
+          <a:ln w="9525">
+            <a:noFill/>
+            <a:miter lim="800000"/>
+            <a:headEnd/>
+            <a:tailEnd/>
+          </a:ln>
+        </p:spPr>
+        <p:txBody>
+          <a:bodyPr wrap="none">
+            <a:spAutoFit/>
+          </a:bodyPr>
+          <a:lstStyle/>
+          <a:p>
+            <a:pPr>
+              <a:spcBef>
+                <a:spcPts val="0"/>
+              </a:spcBef>
+            </a:pPr>
+            <a:r>
+              <a:rPr lang="pt-PT" sz="1400" dirty="0">
+                <a:solidFill>
+                  <a:srgbClr val="003E6C"/>
+                </a:solidFill>
+              </a:rPr>
+              <a:t>3/4</a:t>
+            </a:r>
+          </a:p>
+        </p:txBody>
+      </p:sp>
+      <p:sp>
+        <p:nvSpPr>
+          <p:cNvPr id="13" name="Line 31">
+            <a:extLst>
+              <a:ext uri="{FF2B5EF4-FFF2-40B4-BE49-F238E27FC236}">
+                <a16:creationId xmlns:a16="http://schemas.microsoft.com/office/drawing/2014/main" id="{FA53B61B-5B40-629A-D00D-908ED88CF33C}"/>
+              </a:ext>
+            </a:extLst>
+          </p:cNvPr>
+          <p:cNvSpPr>
+            <a:spLocks noChangeShapeType="1"/>
+          </p:cNvSpPr>
+          <p:nvPr/>
+        </p:nvSpPr>
+        <p:spPr bwMode="auto">
+          <a:xfrm rot="5400000" flipV="1">
+            <a:off x="2814830" y="5139200"/>
+            <a:ext cx="180000" cy="360000"/>
+          </a:xfrm>
+          <a:prstGeom prst="line">
+            <a:avLst/>
+          </a:prstGeom>
+          <a:noFill/>
+          <a:ln w="9525">
+            <a:solidFill>
+              <a:schemeClr val="tx1"/>
+            </a:solidFill>
+            <a:round/>
+            <a:headEnd/>
+            <a:tailEnd type="triangle" w="med" len="med"/>
+          </a:ln>
+        </p:spPr>
+        <p:txBody>
+          <a:bodyPr/>
+          <a:lstStyle/>
+          <a:p>
+            <a:endParaRPr lang="pt-PT"/>
+          </a:p>
+        </p:txBody>
+      </p:sp>
+      <p:sp>
+        <p:nvSpPr>
+          <p:cNvPr id="14" name="Text Box 26">
+            <a:extLst>
+              <a:ext uri="{FF2B5EF4-FFF2-40B4-BE49-F238E27FC236}">
+                <a16:creationId xmlns:a16="http://schemas.microsoft.com/office/drawing/2014/main" id="{DA8E19DA-7D48-DED6-54F7-ECA920171657}"/>
+              </a:ext>
+            </a:extLst>
+          </p:cNvPr>
+          <p:cNvSpPr txBox="1">
+            <a:spLocks noChangeArrowheads="1"/>
+          </p:cNvSpPr>
+          <p:nvPr/>
+        </p:nvSpPr>
+        <p:spPr bwMode="auto">
+          <a:xfrm>
+            <a:off x="2651698" y="5013177"/>
+            <a:ext cx="433132" cy="307777"/>
+          </a:xfrm>
+          <a:prstGeom prst="rect">
+            <a:avLst/>
+          </a:prstGeom>
+          <a:noFill/>
+          <a:ln w="9525">
+            <a:noFill/>
+            <a:miter lim="800000"/>
+            <a:headEnd/>
+            <a:tailEnd/>
+          </a:ln>
+        </p:spPr>
+        <p:txBody>
+          <a:bodyPr wrap="none">
+            <a:spAutoFit/>
+          </a:bodyPr>
+          <a:lstStyle/>
+          <a:p>
+            <a:pPr>
+              <a:spcBef>
+                <a:spcPts val="0"/>
+              </a:spcBef>
+            </a:pPr>
+            <a:r>
+              <a:rPr lang="pt-PT" sz="1400" dirty="0">
+                <a:solidFill>
+                  <a:srgbClr val="003E6C"/>
+                </a:solidFill>
+              </a:rPr>
+              <a:t>1/4</a:t>
+            </a:r>
+          </a:p>
+        </p:txBody>
+      </p:sp>
+      <p:sp>
+        <p:nvSpPr>
+          <p:cNvPr id="15" name="Text Box 29">
+            <a:extLst>
+              <a:ext uri="{FF2B5EF4-FFF2-40B4-BE49-F238E27FC236}">
+                <a16:creationId xmlns:a16="http://schemas.microsoft.com/office/drawing/2014/main" id="{6DC5D463-E163-2F45-3F76-9156FDE607B3}"/>
+              </a:ext>
+            </a:extLst>
+          </p:cNvPr>
+          <p:cNvSpPr txBox="1">
+            <a:spLocks noChangeArrowheads="1"/>
+          </p:cNvSpPr>
+          <p:nvPr/>
+        </p:nvSpPr>
+        <p:spPr bwMode="auto">
+          <a:xfrm>
+            <a:off x="3012823" y="5816298"/>
+            <a:ext cx="499817" cy="276999"/>
+          </a:xfrm>
+          <a:prstGeom prst="rect">
+            <a:avLst/>
+          </a:prstGeom>
+          <a:noFill/>
+          <a:ln w="9525">
+            <a:noFill/>
+            <a:miter lim="800000"/>
+            <a:headEnd/>
+            <a:tailEnd/>
+          </a:ln>
+        </p:spPr>
+        <p:txBody>
+          <a:bodyPr wrap="none">
+            <a:spAutoFit/>
+          </a:bodyPr>
+          <a:lstStyle/>
+          <a:p>
+            <a:pPr>
+              <a:spcBef>
+                <a:spcPts val="0"/>
+              </a:spcBef>
+            </a:pPr>
+            <a:r>
+              <a:rPr lang="pt-PT" sz="1200" b="1" dirty="0">
+                <a:solidFill>
+                  <a:schemeClr val="tx1"/>
+                </a:solidFill>
+              </a:rPr>
+              <a:t>teste</a:t>
+            </a:r>
+          </a:p>
+        </p:txBody>
+      </p:sp>
+      <p:sp>
+        <p:nvSpPr>
+          <p:cNvPr id="16" name="Text Box 29">
+            <a:extLst>
+              <a:ext uri="{FF2B5EF4-FFF2-40B4-BE49-F238E27FC236}">
+                <a16:creationId xmlns:a16="http://schemas.microsoft.com/office/drawing/2014/main" id="{AA057A22-F2CE-E2A7-232A-5DDB9335D9AB}"/>
+              </a:ext>
+            </a:extLst>
+          </p:cNvPr>
+          <p:cNvSpPr txBox="1">
+            <a:spLocks noChangeArrowheads="1"/>
+          </p:cNvSpPr>
+          <p:nvPr/>
+        </p:nvSpPr>
+        <p:spPr bwMode="auto">
+          <a:xfrm>
+            <a:off x="4007769" y="2132857"/>
+            <a:ext cx="1019703" cy="307777"/>
+          </a:xfrm>
+          <a:prstGeom prst="rect">
+            <a:avLst/>
+          </a:prstGeom>
+          <a:noFill/>
+          <a:ln w="9525">
+            <a:noFill/>
+            <a:miter lim="800000"/>
+            <a:headEnd/>
+            <a:tailEnd/>
+          </a:ln>
+        </p:spPr>
+        <p:txBody>
+          <a:bodyPr wrap="none">
+            <a:spAutoFit/>
+          </a:bodyPr>
+          <a:lstStyle/>
+          <a:p>
+            <a:pPr>
+              <a:spcBef>
+                <a:spcPts val="0"/>
+              </a:spcBef>
+            </a:pPr>
+            <a:r>
+              <a:rPr lang="pt-PT" sz="1400" b="1" dirty="0">
+                <a:solidFill>
+                  <a:srgbClr val="003E6C"/>
+                </a:solidFill>
+              </a:rPr>
+              <a:t>Fase Treino</a:t>
+            </a:r>
+          </a:p>
+        </p:txBody>
+      </p:sp>
+      <p:sp>
+        <p:nvSpPr>
+          <p:cNvPr id="17" name="Text Box 29">
+            <a:extLst>
+              <a:ext uri="{FF2B5EF4-FFF2-40B4-BE49-F238E27FC236}">
+                <a16:creationId xmlns:a16="http://schemas.microsoft.com/office/drawing/2014/main" id="{ABA72F21-AEAE-3591-5E3C-C499B85B99D2}"/>
+              </a:ext>
+            </a:extLst>
+          </p:cNvPr>
+          <p:cNvSpPr txBox="1">
+            <a:spLocks noChangeArrowheads="1"/>
+          </p:cNvSpPr>
+          <p:nvPr/>
+        </p:nvSpPr>
+        <p:spPr bwMode="auto">
+          <a:xfrm>
+            <a:off x="7233590" y="2132857"/>
+            <a:ext cx="934295" cy="307777"/>
+          </a:xfrm>
+          <a:prstGeom prst="rect">
+            <a:avLst/>
+          </a:prstGeom>
+          <a:noFill/>
+          <a:ln w="9525">
+            <a:noFill/>
+            <a:miter lim="800000"/>
+            <a:headEnd/>
+            <a:tailEnd/>
+          </a:ln>
+        </p:spPr>
+        <p:txBody>
+          <a:bodyPr wrap="none">
+            <a:spAutoFit/>
+          </a:bodyPr>
+          <a:lstStyle/>
+          <a:p>
+            <a:pPr>
+              <a:spcBef>
+                <a:spcPts val="0"/>
+              </a:spcBef>
+            </a:pPr>
+            <a:r>
+              <a:rPr lang="pt-PT" sz="1400" b="1" dirty="0">
+                <a:solidFill>
+                  <a:srgbClr val="003E6C"/>
+                </a:solidFill>
+              </a:rPr>
+              <a:t>Fase Teste</a:t>
+            </a:r>
           </a:p>
         </p:txBody>
       </p:sp>
@@ -32312,6 +34513,196 @@
       </p:sp>
       <p:sp>
         <p:nvSpPr>
+          <p:cNvPr id="26" name="Line 31">
+            <a:extLst>
+              <a:ext uri="{FF2B5EF4-FFF2-40B4-BE49-F238E27FC236}">
+                <a16:creationId xmlns:a16="http://schemas.microsoft.com/office/drawing/2014/main" id="{5C5844A7-288D-F57D-C4C8-3257C51F591A}"/>
+              </a:ext>
+            </a:extLst>
+          </p:cNvPr>
+          <p:cNvSpPr>
+            <a:spLocks noChangeShapeType="1"/>
+          </p:cNvSpPr>
+          <p:nvPr/>
+        </p:nvSpPr>
+        <p:spPr bwMode="auto">
+          <a:xfrm flipV="1">
+            <a:off x="3516878" y="3789040"/>
+            <a:ext cx="3888000" cy="1944000"/>
+          </a:xfrm>
+          <a:prstGeom prst="line">
+            <a:avLst/>
+          </a:prstGeom>
+          <a:noFill/>
+          <a:ln w="9525">
+            <a:solidFill>
+              <a:schemeClr val="tx1"/>
+            </a:solidFill>
+            <a:round/>
+            <a:headEnd/>
+            <a:tailEnd type="triangle" w="med" len="med"/>
+          </a:ln>
+        </p:spPr>
+        <p:txBody>
+          <a:bodyPr/>
+          <a:lstStyle/>
+          <a:p>
+            <a:endParaRPr lang="pt-PT"/>
+          </a:p>
+        </p:txBody>
+      </p:sp>
+      <p:sp>
+        <p:nvSpPr>
+          <p:cNvPr id="30" name="Line 31">
+            <a:extLst>
+              <a:ext uri="{FF2B5EF4-FFF2-40B4-BE49-F238E27FC236}">
+                <a16:creationId xmlns:a16="http://schemas.microsoft.com/office/drawing/2014/main" id="{E17D6B00-FF38-0FC9-4434-E45F0FD41549}"/>
+              </a:ext>
+            </a:extLst>
+          </p:cNvPr>
+          <p:cNvSpPr>
+            <a:spLocks noChangeShapeType="1"/>
+          </p:cNvSpPr>
+          <p:nvPr/>
+        </p:nvSpPr>
+        <p:spPr bwMode="auto">
+          <a:xfrm flipV="1">
+            <a:off x="6613222" y="3645024"/>
+            <a:ext cx="720000" cy="0"/>
+          </a:xfrm>
+          <a:prstGeom prst="line">
+            <a:avLst/>
+          </a:prstGeom>
+          <a:noFill/>
+          <a:ln w="9525">
+            <a:solidFill>
+              <a:schemeClr val="tx1"/>
+            </a:solidFill>
+            <a:round/>
+            <a:headEnd/>
+            <a:tailEnd type="triangle" w="med" len="med"/>
+          </a:ln>
+        </p:spPr>
+        <p:txBody>
+          <a:bodyPr/>
+          <a:lstStyle/>
+          <a:p>
+            <a:endParaRPr lang="pt-PT"/>
+          </a:p>
+        </p:txBody>
+      </p:sp>
+      <p:sp>
+        <p:nvSpPr>
+          <p:cNvPr id="37" name="Text Box 29">
+            <a:extLst>
+              <a:ext uri="{FF2B5EF4-FFF2-40B4-BE49-F238E27FC236}">
+                <a16:creationId xmlns:a16="http://schemas.microsoft.com/office/drawing/2014/main" id="{6DD38017-796C-6493-6A52-C622B99BCB04}"/>
+              </a:ext>
+            </a:extLst>
+          </p:cNvPr>
+          <p:cNvSpPr txBox="1">
+            <a:spLocks noChangeArrowheads="1"/>
+          </p:cNvSpPr>
+          <p:nvPr/>
+        </p:nvSpPr>
+        <p:spPr bwMode="auto">
+          <a:xfrm>
+            <a:off x="7520320" y="3439759"/>
+            <a:ext cx="338554" cy="461665"/>
+          </a:xfrm>
+          <a:prstGeom prst="rect">
+            <a:avLst/>
+          </a:prstGeom>
+          <a:noFill/>
+          <a:ln w="9525">
+            <a:noFill/>
+            <a:miter lim="800000"/>
+            <a:headEnd/>
+            <a:tailEnd/>
+          </a:ln>
+        </p:spPr>
+        <p:txBody>
+          <a:bodyPr wrap="none">
+            <a:spAutoFit/>
+          </a:bodyPr>
+          <a:lstStyle/>
+          <a:p>
+            <a:pPr>
+              <a:spcBef>
+                <a:spcPts val="0"/>
+              </a:spcBef>
+            </a:pPr>
+            <a:r>
+              <a:rPr lang="pt-PT" sz="2400" b="1" dirty="0">
+                <a:solidFill>
+                  <a:srgbClr val="00B050"/>
+                </a:solidFill>
+                <a:latin typeface="Calibri"/>
+              </a:rPr>
+              <a:t>√</a:t>
+            </a:r>
+            <a:endParaRPr lang="pt-PT" sz="2400" b="1" dirty="0">
+              <a:solidFill>
+                <a:srgbClr val="00B050"/>
+              </a:solidFill>
+            </a:endParaRPr>
+          </a:p>
+        </p:txBody>
+      </p:sp>
+      <p:sp>
+        <p:nvSpPr>
+          <p:cNvPr id="49" name="Text Box 6">
+            <a:extLst>
+              <a:ext uri="{FF2B5EF4-FFF2-40B4-BE49-F238E27FC236}">
+                <a16:creationId xmlns:a16="http://schemas.microsoft.com/office/drawing/2014/main" id="{EA646E43-7F2C-47ED-75A2-280DA3A29D12}"/>
+              </a:ext>
+            </a:extLst>
+          </p:cNvPr>
+          <p:cNvSpPr txBox="1">
+            <a:spLocks noChangeArrowheads="1"/>
+          </p:cNvSpPr>
+          <p:nvPr/>
+        </p:nvSpPr>
+        <p:spPr bwMode="auto">
+          <a:xfrm>
+            <a:off x="7243079" y="2401144"/>
+            <a:ext cx="896399" cy="307777"/>
+          </a:xfrm>
+          <a:prstGeom prst="rect">
+            <a:avLst/>
+          </a:prstGeom>
+          <a:noFill/>
+          <a:ln w="9525">
+            <a:noFill/>
+            <a:miter lim="800000"/>
+            <a:headEnd/>
+            <a:tailEnd/>
+          </a:ln>
+        </p:spPr>
+        <p:txBody>
+          <a:bodyPr wrap="none">
+            <a:spAutoFit/>
+          </a:bodyPr>
+          <a:lstStyle/>
+          <a:p>
+            <a:pPr>
+              <a:spcBef>
+                <a:spcPts val="0"/>
+              </a:spcBef>
+            </a:pPr>
+            <a:r>
+              <a:rPr lang="pt-PT" sz="1400" b="1" dirty="0">
+                <a:solidFill>
+                  <a:schemeClr val="tx1"/>
+                </a:solidFill>
+              </a:rPr>
+              <a:t>Avaliação</a:t>
+            </a:r>
+          </a:p>
+        </p:txBody>
+      </p:sp>
+      <p:sp>
+        <p:nvSpPr>
           <p:cNvPr id="50" name="Text Box 6">
             <a:extLst>
               <a:ext uri="{FF2B5EF4-FFF2-40B4-BE49-F238E27FC236}">
@@ -32416,102 +34807,6 @@
       </p:sp>
       <p:sp>
         <p:nvSpPr>
-          <p:cNvPr id="9" name="Cube 8">
-            <a:extLst>
-              <a:ext uri="{FF2B5EF4-FFF2-40B4-BE49-F238E27FC236}">
-                <a16:creationId xmlns:a16="http://schemas.microsoft.com/office/drawing/2014/main" id="{36E2297F-3215-B168-BAC9-496B869C99A0}"/>
-              </a:ext>
-            </a:extLst>
-          </p:cNvPr>
-          <p:cNvSpPr/>
-          <p:nvPr/>
-        </p:nvSpPr>
-        <p:spPr bwMode="auto">
-          <a:xfrm>
-            <a:off x="9061494" y="3356992"/>
-            <a:ext cx="576064" cy="1153180"/>
-          </a:xfrm>
-          <a:prstGeom prst="cube">
-            <a:avLst/>
-          </a:prstGeom>
-          <a:solidFill>
-            <a:schemeClr val="accent1"/>
-          </a:solidFill>
-          <a:ln w="9525" cap="flat" cmpd="sng" algn="ctr">
-            <a:solidFill>
-              <a:schemeClr val="tx1"/>
-            </a:solidFill>
-            <a:prstDash val="solid"/>
-            <a:round/>
-            <a:headEnd type="none" w="med" len="med"/>
-            <a:tailEnd type="none" w="med" len="med"/>
-          </a:ln>
-          <a:effectLst/>
-        </p:spPr>
-        <p:txBody>
-          <a:bodyPr vert="horz" wrap="square" lIns="91440" tIns="45720" rIns="91440" bIns="45720" numCol="1" rtlCol="0" anchor="t" anchorCtr="0" compatLnSpc="1">
-            <a:prstTxWarp prst="textNoShape">
-              <a:avLst/>
-            </a:prstTxWarp>
-            <a:spAutoFit/>
-          </a:bodyPr>
-          <a:lstStyle/>
-          <a:p>
-            <a:endParaRPr lang="pt-PT"/>
-          </a:p>
-        </p:txBody>
-      </p:sp>
-      <p:sp>
-        <p:nvSpPr>
-          <p:cNvPr id="51" name="Can 53">
-            <a:extLst>
-              <a:ext uri="{FF2B5EF4-FFF2-40B4-BE49-F238E27FC236}">
-                <a16:creationId xmlns:a16="http://schemas.microsoft.com/office/drawing/2014/main" id="{9B00B881-E7A5-8513-8F2D-B4E6961F4478}"/>
-              </a:ext>
-            </a:extLst>
-          </p:cNvPr>
-          <p:cNvSpPr>
-            <a:spLocks noChangeAspect="1"/>
-          </p:cNvSpPr>
-          <p:nvPr/>
-        </p:nvSpPr>
-        <p:spPr bwMode="auto">
-          <a:xfrm>
-            <a:off x="9236268" y="2564904"/>
-            <a:ext cx="225000" cy="1094244"/>
-          </a:xfrm>
-          <a:prstGeom prst="can">
-            <a:avLst/>
-          </a:prstGeom>
-          <a:solidFill>
-            <a:schemeClr val="accent1"/>
-          </a:solidFill>
-          <a:ln w="9525" cap="flat" cmpd="sng" algn="ctr">
-            <a:solidFill>
-              <a:schemeClr val="tx1"/>
-            </a:solidFill>
-            <a:prstDash val="solid"/>
-            <a:round/>
-            <a:headEnd type="none" w="med" len="med"/>
-            <a:tailEnd type="none" w="med" len="med"/>
-          </a:ln>
-          <a:effectLst/>
-        </p:spPr>
-        <p:txBody>
-          <a:bodyPr vert="horz" wrap="square" lIns="91440" tIns="45720" rIns="91440" bIns="45720" numCol="1" rtlCol="0" anchor="t" anchorCtr="0" compatLnSpc="1">
-            <a:prstTxWarp prst="textNoShape">
-              <a:avLst/>
-            </a:prstTxWarp>
-            <a:spAutoFit/>
-          </a:bodyPr>
-          <a:lstStyle/>
-          <a:p>
-            <a:endParaRPr lang="pt-PT"/>
-          </a:p>
-        </p:txBody>
-      </p:sp>
-      <p:sp>
-        <p:nvSpPr>
           <p:cNvPr id="52" name="Line 31">
             <a:extLst>
               <a:ext uri="{FF2B5EF4-FFF2-40B4-BE49-F238E27FC236}">
@@ -32809,57 +35104,10 @@
       </p:sp>
       <p:sp>
         <p:nvSpPr>
-          <p:cNvPr id="4" name="Cube 3">
-            <a:extLst>
-              <a:ext uri="{FF2B5EF4-FFF2-40B4-BE49-F238E27FC236}">
-                <a16:creationId xmlns:a16="http://schemas.microsoft.com/office/drawing/2014/main" id="{F242DD4D-F83A-C232-0DF7-4F9E4C8A479D}"/>
-              </a:ext>
-            </a:extLst>
-          </p:cNvPr>
-          <p:cNvSpPr/>
-          <p:nvPr/>
-        </p:nvSpPr>
-        <p:spPr bwMode="auto">
-          <a:xfrm>
-            <a:off x="2148726" y="2492896"/>
-            <a:ext cx="576064" cy="1153180"/>
-          </a:xfrm>
-          <a:prstGeom prst="cube">
-            <a:avLst/>
-          </a:prstGeom>
-          <a:solidFill>
-            <a:schemeClr val="bg1"/>
-          </a:solidFill>
-          <a:ln w="9525" cap="flat" cmpd="sng" algn="ctr">
-            <a:solidFill>
-              <a:schemeClr val="tx1"/>
-            </a:solidFill>
-            <a:prstDash val="solid"/>
-            <a:round/>
-            <a:headEnd type="none" w="med" len="med"/>
-            <a:tailEnd type="none" w="med" len="med"/>
-          </a:ln>
-          <a:effectLst/>
-        </p:spPr>
-        <p:txBody>
-          <a:bodyPr vert="horz" wrap="square" lIns="91440" tIns="45720" rIns="91440" bIns="45720" numCol="1" rtlCol="0" anchor="t" anchorCtr="0" compatLnSpc="1">
-            <a:prstTxWarp prst="textNoShape">
-              <a:avLst/>
-            </a:prstTxWarp>
-            <a:spAutoFit/>
-          </a:bodyPr>
-          <a:lstStyle/>
-          <a:p>
-            <a:endParaRPr lang="pt-PT"/>
-          </a:p>
-        </p:txBody>
-      </p:sp>
-      <p:sp>
-        <p:nvSpPr>
           <p:cNvPr id="18" name="Text Box 6">
             <a:extLst>
               <a:ext uri="{FF2B5EF4-FFF2-40B4-BE49-F238E27FC236}">
-                <a16:creationId xmlns:a16="http://schemas.microsoft.com/office/drawing/2014/main" id="{64695BA4-B2BB-2A3D-715C-4E6EB740FE7F}"/>
+                <a16:creationId xmlns:a16="http://schemas.microsoft.com/office/drawing/2014/main" id="{D0A47A3A-CE2D-550C-3B05-B90C118A97B2}"/>
               </a:ext>
             </a:extLst>
           </p:cNvPr>
@@ -32911,7 +35159,7 @@
           <p:cNvPr id="23" name="Line 31">
             <a:extLst>
               <a:ext uri="{FF2B5EF4-FFF2-40B4-BE49-F238E27FC236}">
-                <a16:creationId xmlns:a16="http://schemas.microsoft.com/office/drawing/2014/main" id="{AAA4715D-A574-6E0E-622D-E30EC344B233}"/>
+                <a16:creationId xmlns:a16="http://schemas.microsoft.com/office/drawing/2014/main" id="{E605F218-E992-B973-F010-51972182FE59}"/>
               </a:ext>
             </a:extLst>
           </p:cNvPr>
@@ -32946,62 +35194,10 @@
           </a:p>
         </p:txBody>
       </p:sp>
-      <p:sp>
-        <p:nvSpPr>
-          <p:cNvPr id="28" name="Text Box 29">
-            <a:extLst>
-              <a:ext uri="{FF2B5EF4-FFF2-40B4-BE49-F238E27FC236}">
-                <a16:creationId xmlns:a16="http://schemas.microsoft.com/office/drawing/2014/main" id="{B92F4A4A-A680-00B0-8C4B-B0C7B2D8F856}"/>
-              </a:ext>
-            </a:extLst>
-          </p:cNvPr>
-          <p:cNvSpPr txBox="1">
-            <a:spLocks noChangeArrowheads="1"/>
-          </p:cNvSpPr>
-          <p:nvPr/>
-        </p:nvSpPr>
-        <p:spPr bwMode="auto">
-          <a:xfrm>
-            <a:off x="4007769" y="2132857"/>
-            <a:ext cx="1019703" cy="307777"/>
-          </a:xfrm>
-          <a:prstGeom prst="rect">
-            <a:avLst/>
-          </a:prstGeom>
-          <a:noFill/>
-          <a:ln w="9525">
-            <a:noFill/>
-            <a:miter lim="800000"/>
-            <a:headEnd/>
-            <a:tailEnd/>
-          </a:ln>
-        </p:spPr>
-        <p:txBody>
-          <a:bodyPr wrap="none">
-            <a:spAutoFit/>
-          </a:bodyPr>
-          <a:lstStyle/>
-          <a:p>
-            <a:pPr>
-              <a:spcBef>
-                <a:spcPts val="0"/>
-              </a:spcBef>
-            </a:pPr>
-            <a:r>
-              <a:rPr lang="pt-PT" sz="1400" b="1" dirty="0">
-                <a:solidFill>
-                  <a:srgbClr val="003E6C"/>
-                </a:solidFill>
-              </a:rPr>
-              <a:t>Fase Treino</a:t>
-            </a:r>
-          </a:p>
-        </p:txBody>
-      </p:sp>
     </p:spTree>
     <p:extLst>
       <p:ext uri="{BB962C8B-B14F-4D97-AF65-F5344CB8AC3E}">
-        <p14:creationId xmlns:p14="http://schemas.microsoft.com/office/powerpoint/2010/main" val="1897189039"/>
+        <p14:creationId xmlns:p14="http://schemas.microsoft.com/office/powerpoint/2010/main" val="1530934277"/>
       </p:ext>
     </p:extLst>
   </p:cSld>
@@ -33011,7 +35207,7 @@
 </p:sld>
 </file>
 
-<file path=ppt/slides/slide33.xml><?xml version="1.0" encoding="utf-8"?>
+<file path=ppt/slides/slide34.xml><?xml version="1.0" encoding="utf-8"?>
 <p:sld xmlns:a="http://schemas.openxmlformats.org/drawingml/2006/main" xmlns:r="http://schemas.openxmlformats.org/officeDocument/2006/relationships" xmlns:p="http://schemas.openxmlformats.org/presentationml/2006/main">
   <p:cSld>
     <p:spTree>
@@ -33028,6 +35224,878 @@
           <a:chExt cx="0" cy="0"/>
         </a:xfrm>
       </p:grpSpPr>
+      <p:sp>
+        <p:nvSpPr>
+          <p:cNvPr id="8" name="Cube 7">
+            <a:extLst>
+              <a:ext uri="{FF2B5EF4-FFF2-40B4-BE49-F238E27FC236}">
+                <a16:creationId xmlns:a16="http://schemas.microsoft.com/office/drawing/2014/main" id="{A5BC395B-E5C4-BBBA-24C0-D423B4C4CE49}"/>
+              </a:ext>
+            </a:extLst>
+          </p:cNvPr>
+          <p:cNvSpPr/>
+          <p:nvPr/>
+        </p:nvSpPr>
+        <p:spPr bwMode="auto">
+          <a:xfrm>
+            <a:off x="2119902" y="2492897"/>
+            <a:ext cx="576064" cy="504056"/>
+          </a:xfrm>
+          <a:prstGeom prst="cube">
+            <a:avLst/>
+          </a:prstGeom>
+          <a:solidFill>
+            <a:schemeClr val="bg1"/>
+          </a:solidFill>
+          <a:ln w="9525" cap="flat" cmpd="sng" algn="ctr">
+            <a:solidFill>
+              <a:schemeClr val="tx1"/>
+            </a:solidFill>
+            <a:prstDash val="solid"/>
+            <a:round/>
+            <a:headEnd type="none" w="med" len="med"/>
+            <a:tailEnd type="none" w="med" len="med"/>
+          </a:ln>
+          <a:effectLst/>
+        </p:spPr>
+        <p:txBody>
+          <a:bodyPr vert="horz" wrap="square" lIns="91440" tIns="45720" rIns="91440" bIns="45720" numCol="1" rtlCol="0" anchor="t" anchorCtr="0" compatLnSpc="1">
+            <a:prstTxWarp prst="textNoShape">
+              <a:avLst/>
+            </a:prstTxWarp>
+            <a:spAutoFit/>
+          </a:bodyPr>
+          <a:lstStyle/>
+          <a:p>
+            <a:pPr marL="0" marR="0" indent="0" algn="l" defTabSz="914400" rtl="0" eaLnBrk="1" fontAlgn="base" latinLnBrk="0" hangingPunct="1">
+              <a:lnSpc>
+                <a:spcPct val="100000"/>
+              </a:lnSpc>
+              <a:spcBef>
+                <a:spcPct val="50000"/>
+              </a:spcBef>
+              <a:spcAft>
+                <a:spcPct val="0"/>
+              </a:spcAft>
+              <a:buClrTx/>
+              <a:buSzTx/>
+              <a:buFontTx/>
+              <a:buNone/>
+              <a:tabLst/>
+            </a:pPr>
+            <a:endParaRPr kumimoji="0" lang="pt-PT" sz="6000" b="0" i="0" u="none" strike="noStrike" cap="none" normalizeH="0" baseline="0">
+              <a:ln>
+                <a:noFill/>
+              </a:ln>
+              <a:solidFill>
+                <a:srgbClr val="CC0000"/>
+              </a:solidFill>
+              <a:effectLst/>
+              <a:latin typeface="Humanst521 BT" pitchFamily="34" charset="0"/>
+            </a:endParaRPr>
+          </a:p>
+        </p:txBody>
+      </p:sp>
+      <p:sp>
+        <p:nvSpPr>
+          <p:cNvPr id="9" name="Cube 8">
+            <a:extLst>
+              <a:ext uri="{FF2B5EF4-FFF2-40B4-BE49-F238E27FC236}">
+                <a16:creationId xmlns:a16="http://schemas.microsoft.com/office/drawing/2014/main" id="{5D7B3A50-365A-2F22-BBA7-5FC7C422F8AA}"/>
+              </a:ext>
+            </a:extLst>
+          </p:cNvPr>
+          <p:cNvSpPr/>
+          <p:nvPr/>
+        </p:nvSpPr>
+        <p:spPr bwMode="auto">
+          <a:xfrm>
+            <a:off x="2623958" y="2564905"/>
+            <a:ext cx="576064" cy="504056"/>
+          </a:xfrm>
+          <a:prstGeom prst="cube">
+            <a:avLst/>
+          </a:prstGeom>
+          <a:solidFill>
+            <a:schemeClr val="bg1"/>
+          </a:solidFill>
+          <a:ln w="9525" cap="flat" cmpd="sng" algn="ctr">
+            <a:solidFill>
+              <a:schemeClr val="tx1"/>
+            </a:solidFill>
+            <a:prstDash val="solid"/>
+            <a:round/>
+            <a:headEnd type="none" w="med" len="med"/>
+            <a:tailEnd type="none" w="med" len="med"/>
+          </a:ln>
+          <a:effectLst/>
+        </p:spPr>
+        <p:txBody>
+          <a:bodyPr vert="horz" wrap="square" lIns="91440" tIns="45720" rIns="91440" bIns="45720" numCol="1" rtlCol="0" anchor="t" anchorCtr="0" compatLnSpc="1">
+            <a:prstTxWarp prst="textNoShape">
+              <a:avLst/>
+            </a:prstTxWarp>
+            <a:spAutoFit/>
+          </a:bodyPr>
+          <a:lstStyle/>
+          <a:p>
+            <a:pPr marL="0" marR="0" indent="0" algn="l" defTabSz="914400" rtl="0" eaLnBrk="1" fontAlgn="base" latinLnBrk="0" hangingPunct="1">
+              <a:lnSpc>
+                <a:spcPct val="100000"/>
+              </a:lnSpc>
+              <a:spcBef>
+                <a:spcPct val="50000"/>
+              </a:spcBef>
+              <a:spcAft>
+                <a:spcPct val="0"/>
+              </a:spcAft>
+              <a:buClrTx/>
+              <a:buSzTx/>
+              <a:buFontTx/>
+              <a:buNone/>
+              <a:tabLst/>
+            </a:pPr>
+            <a:endParaRPr kumimoji="0" lang="pt-PT" sz="6000" b="0" i="0" u="none" strike="noStrike" cap="none" normalizeH="0" baseline="0">
+              <a:ln>
+                <a:noFill/>
+              </a:ln>
+              <a:solidFill>
+                <a:srgbClr val="CC0000"/>
+              </a:solidFill>
+              <a:effectLst/>
+              <a:latin typeface="Humanst521 BT" pitchFamily="34" charset="0"/>
+            </a:endParaRPr>
+          </a:p>
+        </p:txBody>
+      </p:sp>
+      <p:sp>
+        <p:nvSpPr>
+          <p:cNvPr id="11" name="Cube 10">
+            <a:extLst>
+              <a:ext uri="{FF2B5EF4-FFF2-40B4-BE49-F238E27FC236}">
+                <a16:creationId xmlns:a16="http://schemas.microsoft.com/office/drawing/2014/main" id="{83AF88CE-680D-7825-C17F-C6BBF45982C7}"/>
+              </a:ext>
+            </a:extLst>
+          </p:cNvPr>
+          <p:cNvSpPr/>
+          <p:nvPr/>
+        </p:nvSpPr>
+        <p:spPr bwMode="auto">
+          <a:xfrm>
+            <a:off x="4280142" y="3356993"/>
+            <a:ext cx="576064" cy="504056"/>
+          </a:xfrm>
+          <a:prstGeom prst="cube">
+            <a:avLst/>
+          </a:prstGeom>
+          <a:solidFill>
+            <a:schemeClr val="accent1"/>
+          </a:solidFill>
+          <a:ln w="9525" cap="flat" cmpd="sng" algn="ctr">
+            <a:solidFill>
+              <a:schemeClr val="tx1"/>
+            </a:solidFill>
+            <a:prstDash val="solid"/>
+            <a:round/>
+            <a:headEnd type="none" w="med" len="med"/>
+            <a:tailEnd type="none" w="med" len="med"/>
+          </a:ln>
+          <a:effectLst/>
+        </p:spPr>
+        <p:txBody>
+          <a:bodyPr vert="horz" wrap="square" lIns="91440" tIns="45720" rIns="91440" bIns="45720" numCol="1" rtlCol="0" anchor="t" anchorCtr="0" compatLnSpc="1">
+            <a:prstTxWarp prst="textNoShape">
+              <a:avLst/>
+            </a:prstTxWarp>
+            <a:spAutoFit/>
+          </a:bodyPr>
+          <a:lstStyle/>
+          <a:p>
+            <a:pPr marL="0" marR="0" indent="0" algn="l" defTabSz="914400" rtl="0" eaLnBrk="1" fontAlgn="base" latinLnBrk="0" hangingPunct="1">
+              <a:lnSpc>
+                <a:spcPct val="100000"/>
+              </a:lnSpc>
+              <a:spcBef>
+                <a:spcPct val="50000"/>
+              </a:spcBef>
+              <a:spcAft>
+                <a:spcPct val="0"/>
+              </a:spcAft>
+              <a:buClrTx/>
+              <a:buSzTx/>
+              <a:buFontTx/>
+              <a:buNone/>
+              <a:tabLst/>
+            </a:pPr>
+            <a:endParaRPr kumimoji="0" lang="pt-PT" sz="6000" b="0" i="0" u="none" strike="noStrike" cap="none" normalizeH="0" baseline="0">
+              <a:ln>
+                <a:noFill/>
+              </a:ln>
+              <a:solidFill>
+                <a:srgbClr val="CC0000"/>
+              </a:solidFill>
+              <a:effectLst/>
+              <a:latin typeface="Humanst521 BT" pitchFamily="34" charset="0"/>
+            </a:endParaRPr>
+          </a:p>
+        </p:txBody>
+      </p:sp>
+      <p:sp>
+        <p:nvSpPr>
+          <p:cNvPr id="39" name="Can 39">
+            <a:extLst>
+              <a:ext uri="{FF2B5EF4-FFF2-40B4-BE49-F238E27FC236}">
+                <a16:creationId xmlns:a16="http://schemas.microsoft.com/office/drawing/2014/main" id="{3F723FB2-F26C-45FD-637D-24A861870746}"/>
+              </a:ext>
+            </a:extLst>
+          </p:cNvPr>
+          <p:cNvSpPr/>
+          <p:nvPr/>
+        </p:nvSpPr>
+        <p:spPr bwMode="auto">
+          <a:xfrm>
+            <a:off x="2119902" y="4293097"/>
+            <a:ext cx="450000" cy="900000"/>
+          </a:xfrm>
+          <a:prstGeom prst="can">
+            <a:avLst/>
+          </a:prstGeom>
+          <a:solidFill>
+            <a:schemeClr val="accent1"/>
+          </a:solidFill>
+          <a:ln w="9525" cap="flat" cmpd="sng" algn="ctr">
+            <a:solidFill>
+              <a:schemeClr val="tx1"/>
+            </a:solidFill>
+            <a:prstDash val="solid"/>
+            <a:round/>
+            <a:headEnd type="none" w="med" len="med"/>
+            <a:tailEnd type="none" w="med" len="med"/>
+          </a:ln>
+          <a:effectLst/>
+        </p:spPr>
+        <p:txBody>
+          <a:bodyPr vert="horz" wrap="square" lIns="91440" tIns="45720" rIns="91440" bIns="45720" numCol="1" rtlCol="0" anchor="t" anchorCtr="0" compatLnSpc="1">
+            <a:prstTxWarp prst="textNoShape">
+              <a:avLst/>
+            </a:prstTxWarp>
+            <a:spAutoFit/>
+          </a:bodyPr>
+          <a:lstStyle/>
+          <a:p>
+            <a:pPr marL="0" marR="0" indent="0" algn="l" defTabSz="914400" rtl="0" eaLnBrk="1" fontAlgn="base" latinLnBrk="0" hangingPunct="1">
+              <a:lnSpc>
+                <a:spcPct val="100000"/>
+              </a:lnSpc>
+              <a:spcBef>
+                <a:spcPct val="50000"/>
+              </a:spcBef>
+              <a:spcAft>
+                <a:spcPct val="0"/>
+              </a:spcAft>
+              <a:buClrTx/>
+              <a:buSzTx/>
+              <a:buFontTx/>
+              <a:buNone/>
+              <a:tabLst/>
+            </a:pPr>
+            <a:endParaRPr kumimoji="0" lang="pt-PT" sz="6000" b="0" i="0" u="none" strike="noStrike" cap="none" normalizeH="0" baseline="0">
+              <a:ln>
+                <a:noFill/>
+              </a:ln>
+              <a:solidFill>
+                <a:srgbClr val="CC0000"/>
+              </a:solidFill>
+              <a:effectLst/>
+              <a:latin typeface="Humanst521 BT" pitchFamily="34" charset="0"/>
+            </a:endParaRPr>
+          </a:p>
+        </p:txBody>
+      </p:sp>
+      <p:sp>
+        <p:nvSpPr>
+          <p:cNvPr id="51" name="Can 40">
+            <a:extLst>
+              <a:ext uri="{FF2B5EF4-FFF2-40B4-BE49-F238E27FC236}">
+                <a16:creationId xmlns:a16="http://schemas.microsoft.com/office/drawing/2014/main" id="{5EE9E2E8-FA71-2E35-BE63-E18DA3F03A3C}"/>
+              </a:ext>
+            </a:extLst>
+          </p:cNvPr>
+          <p:cNvSpPr>
+            <a:spLocks noChangeAspect="1"/>
+          </p:cNvSpPr>
+          <p:nvPr/>
+        </p:nvSpPr>
+        <p:spPr bwMode="auto">
+          <a:xfrm>
+            <a:off x="3128014" y="3861049"/>
+            <a:ext cx="225000" cy="450000"/>
+          </a:xfrm>
+          <a:prstGeom prst="can">
+            <a:avLst/>
+          </a:prstGeom>
+          <a:solidFill>
+            <a:schemeClr val="accent1"/>
+          </a:solidFill>
+          <a:ln w="9525" cap="flat" cmpd="sng" algn="ctr">
+            <a:solidFill>
+              <a:schemeClr val="tx1"/>
+            </a:solidFill>
+            <a:prstDash val="solid"/>
+            <a:round/>
+            <a:headEnd type="none" w="med" len="med"/>
+            <a:tailEnd type="none" w="med" len="med"/>
+          </a:ln>
+          <a:effectLst/>
+        </p:spPr>
+        <p:txBody>
+          <a:bodyPr vert="horz" wrap="square" lIns="91440" tIns="45720" rIns="91440" bIns="45720" numCol="1" rtlCol="0" anchor="t" anchorCtr="0" compatLnSpc="1">
+            <a:prstTxWarp prst="textNoShape">
+              <a:avLst/>
+            </a:prstTxWarp>
+            <a:spAutoFit/>
+          </a:bodyPr>
+          <a:lstStyle/>
+          <a:p>
+            <a:pPr marL="0" marR="0" indent="0" algn="l" defTabSz="914400" rtl="0" eaLnBrk="1" fontAlgn="base" latinLnBrk="0" hangingPunct="1">
+              <a:lnSpc>
+                <a:spcPct val="100000"/>
+              </a:lnSpc>
+              <a:spcBef>
+                <a:spcPct val="50000"/>
+              </a:spcBef>
+              <a:spcAft>
+                <a:spcPct val="0"/>
+              </a:spcAft>
+              <a:buClrTx/>
+              <a:buSzTx/>
+              <a:buFontTx/>
+              <a:buNone/>
+              <a:tabLst/>
+            </a:pPr>
+            <a:endParaRPr kumimoji="0" lang="pt-PT" sz="6000" b="0" i="0" u="none" strike="noStrike" cap="none" normalizeH="0" baseline="0">
+              <a:ln>
+                <a:noFill/>
+              </a:ln>
+              <a:solidFill>
+                <a:srgbClr val="CC0000"/>
+              </a:solidFill>
+              <a:effectLst/>
+              <a:latin typeface="Humanst521 BT" pitchFamily="34" charset="0"/>
+            </a:endParaRPr>
+          </a:p>
+        </p:txBody>
+      </p:sp>
+      <p:sp>
+        <p:nvSpPr>
+          <p:cNvPr id="52" name="Can 42">
+            <a:extLst>
+              <a:ext uri="{FF2B5EF4-FFF2-40B4-BE49-F238E27FC236}">
+                <a16:creationId xmlns:a16="http://schemas.microsoft.com/office/drawing/2014/main" id="{EC5828D2-E1F9-E32B-99FA-5D081C1DC67D}"/>
+              </a:ext>
+            </a:extLst>
+          </p:cNvPr>
+          <p:cNvSpPr>
+            <a:spLocks noChangeAspect="1"/>
+          </p:cNvSpPr>
+          <p:nvPr/>
+        </p:nvSpPr>
+        <p:spPr bwMode="auto">
+          <a:xfrm>
+            <a:off x="3128014" y="5384250"/>
+            <a:ext cx="225000" cy="450000"/>
+          </a:xfrm>
+          <a:prstGeom prst="can">
+            <a:avLst/>
+          </a:prstGeom>
+          <a:solidFill>
+            <a:schemeClr val="accent1"/>
+          </a:solidFill>
+          <a:ln w="9525" cap="flat" cmpd="sng" algn="ctr">
+            <a:solidFill>
+              <a:schemeClr val="tx1"/>
+            </a:solidFill>
+            <a:prstDash val="solid"/>
+            <a:round/>
+            <a:headEnd type="none" w="med" len="med"/>
+            <a:tailEnd type="none" w="med" len="med"/>
+          </a:ln>
+          <a:effectLst/>
+        </p:spPr>
+        <p:txBody>
+          <a:bodyPr vert="horz" wrap="square" lIns="91440" tIns="45720" rIns="91440" bIns="45720" numCol="1" rtlCol="0" anchor="t" anchorCtr="0" compatLnSpc="1">
+            <a:prstTxWarp prst="textNoShape">
+              <a:avLst/>
+            </a:prstTxWarp>
+            <a:spAutoFit/>
+          </a:bodyPr>
+          <a:lstStyle/>
+          <a:p>
+            <a:pPr marL="0" marR="0" indent="0" algn="l" defTabSz="914400" rtl="0" eaLnBrk="1" fontAlgn="base" latinLnBrk="0" hangingPunct="1">
+              <a:lnSpc>
+                <a:spcPct val="100000"/>
+              </a:lnSpc>
+              <a:spcBef>
+                <a:spcPct val="50000"/>
+              </a:spcBef>
+              <a:spcAft>
+                <a:spcPct val="0"/>
+              </a:spcAft>
+              <a:buClrTx/>
+              <a:buSzTx/>
+              <a:buFontTx/>
+              <a:buNone/>
+              <a:tabLst/>
+            </a:pPr>
+            <a:endParaRPr kumimoji="0" lang="pt-PT" sz="6000" b="0" i="0" u="none" strike="noStrike" cap="none" normalizeH="0" baseline="0">
+              <a:ln>
+                <a:noFill/>
+              </a:ln>
+              <a:solidFill>
+                <a:srgbClr val="CC0000"/>
+              </a:solidFill>
+              <a:effectLst/>
+              <a:latin typeface="Humanst521 BT" pitchFamily="34" charset="0"/>
+            </a:endParaRPr>
+          </a:p>
+        </p:txBody>
+      </p:sp>
+      <p:sp>
+        <p:nvSpPr>
+          <p:cNvPr id="53" name="Cube 52">
+            <a:extLst>
+              <a:ext uri="{FF2B5EF4-FFF2-40B4-BE49-F238E27FC236}">
+                <a16:creationId xmlns:a16="http://schemas.microsoft.com/office/drawing/2014/main" id="{D67260BC-0EA0-95BC-FFBF-D60DE0B2FD8F}"/>
+              </a:ext>
+            </a:extLst>
+          </p:cNvPr>
+          <p:cNvSpPr/>
+          <p:nvPr/>
+        </p:nvSpPr>
+        <p:spPr bwMode="auto">
+          <a:xfrm>
+            <a:off x="7448494" y="3356993"/>
+            <a:ext cx="576064" cy="504056"/>
+          </a:xfrm>
+          <a:prstGeom prst="cube">
+            <a:avLst/>
+          </a:prstGeom>
+          <a:solidFill>
+            <a:schemeClr val="accent1"/>
+          </a:solidFill>
+          <a:ln w="9525" cap="flat" cmpd="sng" algn="ctr">
+            <a:solidFill>
+              <a:schemeClr val="tx1"/>
+            </a:solidFill>
+            <a:prstDash val="solid"/>
+            <a:round/>
+            <a:headEnd type="none" w="med" len="med"/>
+            <a:tailEnd type="none" w="med" len="med"/>
+          </a:ln>
+          <a:effectLst/>
+        </p:spPr>
+        <p:txBody>
+          <a:bodyPr vert="horz" wrap="square" lIns="91440" tIns="45720" rIns="91440" bIns="45720" numCol="1" rtlCol="0" anchor="t" anchorCtr="0" compatLnSpc="1">
+            <a:prstTxWarp prst="textNoShape">
+              <a:avLst/>
+            </a:prstTxWarp>
+            <a:spAutoFit/>
+          </a:bodyPr>
+          <a:lstStyle/>
+          <a:p>
+            <a:pPr marL="0" marR="0" indent="0" algn="l" defTabSz="914400" rtl="0" eaLnBrk="1" fontAlgn="base" latinLnBrk="0" hangingPunct="1">
+              <a:lnSpc>
+                <a:spcPct val="100000"/>
+              </a:lnSpc>
+              <a:spcBef>
+                <a:spcPct val="50000"/>
+              </a:spcBef>
+              <a:spcAft>
+                <a:spcPct val="0"/>
+              </a:spcAft>
+              <a:buClrTx/>
+              <a:buSzTx/>
+              <a:buFontTx/>
+              <a:buNone/>
+              <a:tabLst/>
+            </a:pPr>
+            <a:endParaRPr kumimoji="0" lang="pt-PT" sz="6000" b="0" i="0" u="none" strike="noStrike" cap="none" normalizeH="0" baseline="0">
+              <a:ln>
+                <a:noFill/>
+              </a:ln>
+              <a:solidFill>
+                <a:srgbClr val="CC0000"/>
+              </a:solidFill>
+              <a:effectLst/>
+              <a:latin typeface="Humanst521 BT" pitchFamily="34" charset="0"/>
+            </a:endParaRPr>
+          </a:p>
+        </p:txBody>
+      </p:sp>
+      <p:sp>
+        <p:nvSpPr>
+          <p:cNvPr id="54" name="Cube 53">
+            <a:extLst>
+              <a:ext uri="{FF2B5EF4-FFF2-40B4-BE49-F238E27FC236}">
+                <a16:creationId xmlns:a16="http://schemas.microsoft.com/office/drawing/2014/main" id="{169653E7-7A12-8167-A406-BA40918A0CBA}"/>
+              </a:ext>
+            </a:extLst>
+          </p:cNvPr>
+          <p:cNvSpPr/>
+          <p:nvPr/>
+        </p:nvSpPr>
+        <p:spPr bwMode="auto">
+          <a:xfrm>
+            <a:off x="9032670" y="3356993"/>
+            <a:ext cx="576064" cy="504056"/>
+          </a:xfrm>
+          <a:prstGeom prst="cube">
+            <a:avLst/>
+          </a:prstGeom>
+          <a:solidFill>
+            <a:schemeClr val="accent1"/>
+          </a:solidFill>
+          <a:ln w="9525" cap="flat" cmpd="sng" algn="ctr">
+            <a:solidFill>
+              <a:schemeClr val="tx1"/>
+            </a:solidFill>
+            <a:prstDash val="solid"/>
+            <a:round/>
+            <a:headEnd type="none" w="med" len="med"/>
+            <a:tailEnd type="none" w="med" len="med"/>
+          </a:ln>
+          <a:effectLst/>
+        </p:spPr>
+        <p:txBody>
+          <a:bodyPr vert="horz" wrap="square" lIns="91440" tIns="45720" rIns="91440" bIns="45720" numCol="1" rtlCol="0" anchor="t" anchorCtr="0" compatLnSpc="1">
+            <a:prstTxWarp prst="textNoShape">
+              <a:avLst/>
+            </a:prstTxWarp>
+            <a:spAutoFit/>
+          </a:bodyPr>
+          <a:lstStyle/>
+          <a:p>
+            <a:pPr marL="0" marR="0" indent="0" algn="l" defTabSz="914400" rtl="0" eaLnBrk="1" fontAlgn="base" latinLnBrk="0" hangingPunct="1">
+              <a:lnSpc>
+                <a:spcPct val="100000"/>
+              </a:lnSpc>
+              <a:spcBef>
+                <a:spcPct val="50000"/>
+              </a:spcBef>
+              <a:spcAft>
+                <a:spcPct val="0"/>
+              </a:spcAft>
+              <a:buClrTx/>
+              <a:buSzTx/>
+              <a:buFontTx/>
+              <a:buNone/>
+              <a:tabLst/>
+            </a:pPr>
+            <a:endParaRPr kumimoji="0" lang="pt-PT" sz="6000" b="0" i="0" u="none" strike="noStrike" cap="none" normalizeH="0" baseline="0">
+              <a:ln>
+                <a:noFill/>
+              </a:ln>
+              <a:solidFill>
+                <a:srgbClr val="CC0000"/>
+              </a:solidFill>
+              <a:effectLst/>
+              <a:latin typeface="Humanst521 BT" pitchFamily="34" charset="0"/>
+            </a:endParaRPr>
+          </a:p>
+        </p:txBody>
+      </p:sp>
+      <p:sp>
+        <p:nvSpPr>
+          <p:cNvPr id="55" name="Can 53">
+            <a:extLst>
+              <a:ext uri="{FF2B5EF4-FFF2-40B4-BE49-F238E27FC236}">
+                <a16:creationId xmlns:a16="http://schemas.microsoft.com/office/drawing/2014/main" id="{D4168E84-D4FB-043D-96F1-24273F32142D}"/>
+              </a:ext>
+            </a:extLst>
+          </p:cNvPr>
+          <p:cNvSpPr>
+            <a:spLocks noChangeAspect="1"/>
+          </p:cNvSpPr>
+          <p:nvPr/>
+        </p:nvSpPr>
+        <p:spPr bwMode="auto">
+          <a:xfrm>
+            <a:off x="9207444" y="2564905"/>
+            <a:ext cx="225000" cy="450000"/>
+          </a:xfrm>
+          <a:prstGeom prst="can">
+            <a:avLst/>
+          </a:prstGeom>
+          <a:solidFill>
+            <a:schemeClr val="accent1"/>
+          </a:solidFill>
+          <a:ln w="9525" cap="flat" cmpd="sng" algn="ctr">
+            <a:solidFill>
+              <a:schemeClr val="tx1"/>
+            </a:solidFill>
+            <a:prstDash val="solid"/>
+            <a:round/>
+            <a:headEnd type="none" w="med" len="med"/>
+            <a:tailEnd type="none" w="med" len="med"/>
+          </a:ln>
+          <a:effectLst/>
+        </p:spPr>
+        <p:txBody>
+          <a:bodyPr vert="horz" wrap="square" lIns="91440" tIns="45720" rIns="91440" bIns="45720" numCol="1" rtlCol="0" anchor="t" anchorCtr="0" compatLnSpc="1">
+            <a:prstTxWarp prst="textNoShape">
+              <a:avLst/>
+            </a:prstTxWarp>
+            <a:spAutoFit/>
+          </a:bodyPr>
+          <a:lstStyle/>
+          <a:p>
+            <a:pPr marL="0" marR="0" indent="0" algn="l" defTabSz="914400" rtl="0" eaLnBrk="1" fontAlgn="base" latinLnBrk="0" hangingPunct="1">
+              <a:lnSpc>
+                <a:spcPct val="100000"/>
+              </a:lnSpc>
+              <a:spcBef>
+                <a:spcPct val="50000"/>
+              </a:spcBef>
+              <a:spcAft>
+                <a:spcPct val="0"/>
+              </a:spcAft>
+              <a:buClrTx/>
+              <a:buSzTx/>
+              <a:buFontTx/>
+              <a:buNone/>
+              <a:tabLst/>
+            </a:pPr>
+            <a:endParaRPr kumimoji="0" lang="pt-PT" sz="6000" b="0" i="0" u="none" strike="noStrike" cap="none" normalizeH="0" baseline="0">
+              <a:ln>
+                <a:noFill/>
+              </a:ln>
+              <a:solidFill>
+                <a:srgbClr val="CC0000"/>
+              </a:solidFill>
+              <a:effectLst/>
+              <a:latin typeface="Humanst521 BT" pitchFamily="34" charset="0"/>
+            </a:endParaRPr>
+          </a:p>
+        </p:txBody>
+      </p:sp>
+      <p:sp>
+        <p:nvSpPr>
+          <p:cNvPr id="56" name="Can 64">
+            <a:extLst>
+              <a:ext uri="{FF2B5EF4-FFF2-40B4-BE49-F238E27FC236}">
+                <a16:creationId xmlns:a16="http://schemas.microsoft.com/office/drawing/2014/main" id="{78D3C331-3C5C-CD84-2231-A3F46799C620}"/>
+              </a:ext>
+            </a:extLst>
+          </p:cNvPr>
+          <p:cNvSpPr>
+            <a:spLocks noChangeAspect="1"/>
+          </p:cNvSpPr>
+          <p:nvPr/>
+        </p:nvSpPr>
+        <p:spPr bwMode="auto">
+          <a:xfrm>
+            <a:off x="3128014" y="4653137"/>
+            <a:ext cx="225000" cy="450000"/>
+          </a:xfrm>
+          <a:prstGeom prst="can">
+            <a:avLst/>
+          </a:prstGeom>
+          <a:solidFill>
+            <a:schemeClr val="accent1"/>
+          </a:solidFill>
+          <a:ln w="9525" cap="flat" cmpd="sng" algn="ctr">
+            <a:solidFill>
+              <a:schemeClr val="tx1"/>
+            </a:solidFill>
+            <a:prstDash val="solid"/>
+            <a:round/>
+            <a:headEnd type="none" w="med" len="med"/>
+            <a:tailEnd type="none" w="med" len="med"/>
+          </a:ln>
+          <a:effectLst/>
+        </p:spPr>
+        <p:txBody>
+          <a:bodyPr vert="horz" wrap="square" lIns="91440" tIns="45720" rIns="91440" bIns="45720" numCol="1" rtlCol="0" anchor="t" anchorCtr="0" compatLnSpc="1">
+            <a:prstTxWarp prst="textNoShape">
+              <a:avLst/>
+            </a:prstTxWarp>
+            <a:spAutoFit/>
+          </a:bodyPr>
+          <a:lstStyle/>
+          <a:p>
+            <a:pPr marL="0" marR="0" indent="0" algn="l" defTabSz="914400" rtl="0" eaLnBrk="1" fontAlgn="base" latinLnBrk="0" hangingPunct="1">
+              <a:lnSpc>
+                <a:spcPct val="100000"/>
+              </a:lnSpc>
+              <a:spcBef>
+                <a:spcPct val="50000"/>
+              </a:spcBef>
+              <a:spcAft>
+                <a:spcPct val="0"/>
+              </a:spcAft>
+              <a:buClrTx/>
+              <a:buSzTx/>
+              <a:buFontTx/>
+              <a:buNone/>
+              <a:tabLst/>
+            </a:pPr>
+            <a:endParaRPr kumimoji="0" lang="pt-PT" sz="6000" b="0" i="0" u="none" strike="noStrike" cap="none" normalizeH="0" baseline="0">
+              <a:ln>
+                <a:noFill/>
+              </a:ln>
+              <a:solidFill>
+                <a:srgbClr val="CC0000"/>
+              </a:solidFill>
+              <a:effectLst/>
+              <a:latin typeface="Humanst521 BT" pitchFamily="34" charset="0"/>
+            </a:endParaRPr>
+          </a:p>
+        </p:txBody>
+      </p:sp>
+      <p:sp>
+        <p:nvSpPr>
+          <p:cNvPr id="57" name="Cube 56">
+            <a:extLst>
+              <a:ext uri="{FF2B5EF4-FFF2-40B4-BE49-F238E27FC236}">
+                <a16:creationId xmlns:a16="http://schemas.microsoft.com/office/drawing/2014/main" id="{D9F9AC5C-1F18-C5B5-AD54-3BD9702E9CE3}"/>
+              </a:ext>
+            </a:extLst>
+          </p:cNvPr>
+          <p:cNvSpPr/>
+          <p:nvPr/>
+        </p:nvSpPr>
+        <p:spPr bwMode="auto">
+          <a:xfrm>
+            <a:off x="5864318" y="3356993"/>
+            <a:ext cx="576064" cy="504056"/>
+          </a:xfrm>
+          <a:prstGeom prst="cube">
+            <a:avLst/>
+          </a:prstGeom>
+          <a:solidFill>
+            <a:schemeClr val="accent1"/>
+          </a:solidFill>
+          <a:ln w="9525" cap="flat" cmpd="sng" algn="ctr">
+            <a:solidFill>
+              <a:schemeClr val="tx1"/>
+            </a:solidFill>
+            <a:prstDash val="solid"/>
+            <a:round/>
+            <a:headEnd type="none" w="med" len="med"/>
+            <a:tailEnd type="none" w="med" len="med"/>
+          </a:ln>
+          <a:effectLst/>
+        </p:spPr>
+        <p:txBody>
+          <a:bodyPr vert="horz" wrap="square" lIns="91440" tIns="45720" rIns="91440" bIns="45720" numCol="1" rtlCol="0" anchor="t" anchorCtr="0" compatLnSpc="1">
+            <a:prstTxWarp prst="textNoShape">
+              <a:avLst/>
+            </a:prstTxWarp>
+            <a:spAutoFit/>
+          </a:bodyPr>
+          <a:lstStyle/>
+          <a:p>
+            <a:pPr marL="0" marR="0" indent="0" algn="l" defTabSz="914400" rtl="0" eaLnBrk="1" fontAlgn="base" latinLnBrk="0" hangingPunct="1">
+              <a:lnSpc>
+                <a:spcPct val="100000"/>
+              </a:lnSpc>
+              <a:spcBef>
+                <a:spcPct val="50000"/>
+              </a:spcBef>
+              <a:spcAft>
+                <a:spcPct val="0"/>
+              </a:spcAft>
+              <a:buClrTx/>
+              <a:buSzTx/>
+              <a:buFontTx/>
+              <a:buNone/>
+              <a:tabLst/>
+            </a:pPr>
+            <a:endParaRPr kumimoji="0" lang="pt-PT" sz="6000" b="0" i="0" u="none" strike="noStrike" cap="none" normalizeH="0" baseline="0">
+              <a:ln>
+                <a:noFill/>
+              </a:ln>
+              <a:solidFill>
+                <a:srgbClr val="CC0000"/>
+              </a:solidFill>
+              <a:effectLst/>
+              <a:latin typeface="Humanst521 BT" pitchFamily="34" charset="0"/>
+            </a:endParaRPr>
+          </a:p>
+        </p:txBody>
+      </p:sp>
+      <p:sp>
+        <p:nvSpPr>
+          <p:cNvPr id="58" name="Cube 57">
+            <a:extLst>
+              <a:ext uri="{FF2B5EF4-FFF2-40B4-BE49-F238E27FC236}">
+                <a16:creationId xmlns:a16="http://schemas.microsoft.com/office/drawing/2014/main" id="{2E41C0BB-9F5C-41B6-07DB-328D3E438061}"/>
+              </a:ext>
+            </a:extLst>
+          </p:cNvPr>
+          <p:cNvSpPr/>
+          <p:nvPr/>
+        </p:nvSpPr>
+        <p:spPr bwMode="auto">
+          <a:xfrm>
+            <a:off x="2263918" y="2780929"/>
+            <a:ext cx="576064" cy="504056"/>
+          </a:xfrm>
+          <a:prstGeom prst="cube">
+            <a:avLst/>
+          </a:prstGeom>
+          <a:solidFill>
+            <a:schemeClr val="bg1"/>
+          </a:solidFill>
+          <a:ln w="9525" cap="flat" cmpd="sng" algn="ctr">
+            <a:solidFill>
+              <a:schemeClr val="tx1"/>
+            </a:solidFill>
+            <a:prstDash val="solid"/>
+            <a:round/>
+            <a:headEnd type="none" w="med" len="med"/>
+            <a:tailEnd type="none" w="med" len="med"/>
+          </a:ln>
+          <a:effectLst/>
+        </p:spPr>
+        <p:txBody>
+          <a:bodyPr vert="horz" wrap="square" lIns="91440" tIns="45720" rIns="91440" bIns="45720" numCol="1" rtlCol="0" anchor="t" anchorCtr="0" compatLnSpc="1">
+            <a:prstTxWarp prst="textNoShape">
+              <a:avLst/>
+            </a:prstTxWarp>
+            <a:spAutoFit/>
+          </a:bodyPr>
+          <a:lstStyle/>
+          <a:p>
+            <a:pPr marL="0" marR="0" indent="0" algn="l" defTabSz="914400" rtl="0" eaLnBrk="1" fontAlgn="base" latinLnBrk="0" hangingPunct="1">
+              <a:lnSpc>
+                <a:spcPct val="100000"/>
+              </a:lnSpc>
+              <a:spcBef>
+                <a:spcPct val="50000"/>
+              </a:spcBef>
+              <a:spcAft>
+                <a:spcPct val="0"/>
+              </a:spcAft>
+              <a:buClrTx/>
+              <a:buSzTx/>
+              <a:buFontTx/>
+              <a:buNone/>
+              <a:tabLst/>
+            </a:pPr>
+            <a:endParaRPr kumimoji="0" lang="pt-PT" sz="6000" b="0" i="0" u="none" strike="noStrike" cap="none" normalizeH="0" baseline="0">
+              <a:ln>
+                <a:noFill/>
+              </a:ln>
+              <a:solidFill>
+                <a:srgbClr val="CC0000"/>
+              </a:solidFill>
+              <a:effectLst/>
+              <a:latin typeface="Humanst521 BT" pitchFamily="34" charset="0"/>
+            </a:endParaRPr>
+          </a:p>
+        </p:txBody>
+      </p:sp>
       <p:sp>
         <p:nvSpPr>
           <p:cNvPr id="17413" name="Text Box 39"/>
@@ -33142,48 +36210,6 @@
           <a:lstStyle/>
           <a:p>
             <a:endParaRPr lang="en-US"/>
-          </a:p>
-        </p:txBody>
-      </p:sp>
-      <p:sp>
-        <p:nvSpPr>
-          <p:cNvPr id="11" name="Text Box 13"/>
-          <p:cNvSpPr txBox="1">
-            <a:spLocks noChangeArrowheads="1"/>
-          </p:cNvSpPr>
-          <p:nvPr/>
-        </p:nvSpPr>
-        <p:spPr bwMode="auto">
-          <a:xfrm>
-            <a:off x="9941000" y="6276921"/>
-            <a:ext cx="403151" cy="276999"/>
-          </a:xfrm>
-          <a:prstGeom prst="rect">
-            <a:avLst/>
-          </a:prstGeom>
-          <a:noFill/>
-          <a:ln w="9525">
-            <a:noFill/>
-            <a:miter lim="800000"/>
-            <a:headEnd/>
-            <a:tailEnd/>
-          </a:ln>
-        </p:spPr>
-        <p:txBody>
-          <a:bodyPr wrap="square">
-            <a:spAutoFit/>
-          </a:bodyPr>
-          <a:lstStyle/>
-          <a:p>
-            <a:r>
-              <a:rPr lang="pt-PT" sz="1200" dirty="0">
-                <a:solidFill>
-                  <a:srgbClr val="808080"/>
-                </a:solidFill>
-                <a:latin typeface="Humnst777 BT" pitchFamily="34" charset="0"/>
-              </a:rPr>
-              <a:t>20</a:t>
-            </a:r>
           </a:p>
         </p:txBody>
       </p:sp>
@@ -33511,7 +36537,7 @@
                   <a:srgbClr val="003E6C"/>
                 </a:solidFill>
               </a:rPr>
-              <a:t>3/4</a:t>
+              <a:t>2/4</a:t>
             </a:r>
           </a:p>
         </p:txBody>
@@ -33766,193 +36792,105 @@
       </p:sp>
       <p:sp>
         <p:nvSpPr>
-          <p:cNvPr id="19" name="Cube 18">
+          <p:cNvPr id="18" name="Text Box 29">
             <a:extLst>
               <a:ext uri="{FF2B5EF4-FFF2-40B4-BE49-F238E27FC236}">
-                <a16:creationId xmlns:a16="http://schemas.microsoft.com/office/drawing/2014/main" id="{040E1F8D-2F15-9C26-D2F4-50F7431DD571}"/>
+                <a16:creationId xmlns:a16="http://schemas.microsoft.com/office/drawing/2014/main" id="{B41A5F79-8C90-9F58-62AB-A63B8D7977FD}"/>
               </a:ext>
             </a:extLst>
           </p:cNvPr>
-          <p:cNvSpPr/>
-          <p:nvPr/>
-        </p:nvSpPr>
-        <p:spPr bwMode="auto">
-          <a:xfrm>
-            <a:off x="4308966" y="3356992"/>
-            <a:ext cx="576064" cy="1153180"/>
-          </a:xfrm>
-          <a:prstGeom prst="cube">
-            <a:avLst/>
-          </a:prstGeom>
-          <a:solidFill>
-            <a:schemeClr val="accent1"/>
-          </a:solidFill>
-          <a:ln w="9525" cap="flat" cmpd="sng" algn="ctr">
-            <a:solidFill>
-              <a:schemeClr val="tx1"/>
-            </a:solidFill>
-            <a:prstDash val="solid"/>
-            <a:round/>
-            <a:headEnd type="none" w="med" len="med"/>
-            <a:tailEnd type="none" w="med" len="med"/>
-          </a:ln>
-          <a:effectLst/>
-        </p:spPr>
-        <p:txBody>
-          <a:bodyPr vert="horz" wrap="square" lIns="91440" tIns="45720" rIns="91440" bIns="45720" numCol="1" rtlCol="0" anchor="t" anchorCtr="0" compatLnSpc="1">
-            <a:prstTxWarp prst="textNoShape">
-              <a:avLst/>
-            </a:prstTxWarp>
-            <a:spAutoFit/>
-          </a:bodyPr>
-          <a:lstStyle/>
-          <a:p>
-            <a:endParaRPr lang="pt-PT"/>
-          </a:p>
-        </p:txBody>
-      </p:sp>
-      <p:sp>
-        <p:nvSpPr>
-          <p:cNvPr id="20" name="Can 39">
-            <a:extLst>
-              <a:ext uri="{FF2B5EF4-FFF2-40B4-BE49-F238E27FC236}">
-                <a16:creationId xmlns:a16="http://schemas.microsoft.com/office/drawing/2014/main" id="{BED22CE5-DCB8-6ECF-4C5D-CAC41F6152A7}"/>
-              </a:ext>
-            </a:extLst>
-          </p:cNvPr>
-          <p:cNvSpPr/>
-          <p:nvPr/>
-        </p:nvSpPr>
-        <p:spPr bwMode="auto">
-          <a:xfrm>
-            <a:off x="2148726" y="4293096"/>
-            <a:ext cx="450000" cy="1182648"/>
-          </a:xfrm>
-          <a:prstGeom prst="can">
-            <a:avLst/>
-          </a:prstGeom>
-          <a:solidFill>
-            <a:schemeClr val="accent1"/>
-          </a:solidFill>
-          <a:ln w="9525" cap="flat" cmpd="sng" algn="ctr">
-            <a:solidFill>
-              <a:schemeClr val="tx1"/>
-            </a:solidFill>
-            <a:prstDash val="solid"/>
-            <a:round/>
-            <a:headEnd type="none" w="med" len="med"/>
-            <a:tailEnd type="none" w="med" len="med"/>
-          </a:ln>
-          <a:effectLst/>
-        </p:spPr>
-        <p:txBody>
-          <a:bodyPr vert="horz" wrap="square" lIns="91440" tIns="45720" rIns="91440" bIns="45720" numCol="1" rtlCol="0" anchor="t" anchorCtr="0" compatLnSpc="1">
-            <a:prstTxWarp prst="textNoShape">
-              <a:avLst/>
-            </a:prstTxWarp>
-            <a:spAutoFit/>
-          </a:bodyPr>
-          <a:lstStyle/>
-          <a:p>
-            <a:endParaRPr lang="pt-PT"/>
-          </a:p>
-        </p:txBody>
-      </p:sp>
-      <p:sp>
-        <p:nvSpPr>
-          <p:cNvPr id="21" name="Can 40">
-            <a:extLst>
-              <a:ext uri="{FF2B5EF4-FFF2-40B4-BE49-F238E27FC236}">
-                <a16:creationId xmlns:a16="http://schemas.microsoft.com/office/drawing/2014/main" id="{72299155-0C96-F7DB-56EA-247745DEDA45}"/>
-              </a:ext>
-            </a:extLst>
-          </p:cNvPr>
-          <p:cNvSpPr>
-            <a:spLocks noChangeAspect="1"/>
+          <p:cNvSpPr txBox="1">
+            <a:spLocks noChangeArrowheads="1"/>
           </p:cNvSpPr>
           <p:nvPr/>
         </p:nvSpPr>
         <p:spPr bwMode="auto">
           <a:xfrm>
-            <a:off x="3156838" y="3861048"/>
-            <a:ext cx="225000" cy="1094244"/>
+            <a:off x="8709611" y="2113112"/>
+            <a:ext cx="1267719" cy="307777"/>
           </a:xfrm>
-          <a:prstGeom prst="can">
+          <a:prstGeom prst="rect">
             <a:avLst/>
           </a:prstGeom>
-          <a:solidFill>
-            <a:schemeClr val="accent1"/>
-          </a:solidFill>
-          <a:ln w="9525" cap="flat" cmpd="sng" algn="ctr">
-            <a:solidFill>
-              <a:schemeClr val="tx1"/>
-            </a:solidFill>
-            <a:prstDash val="solid"/>
-            <a:round/>
-            <a:headEnd type="none" w="med" len="med"/>
-            <a:tailEnd type="none" w="med" len="med"/>
+          <a:noFill/>
+          <a:ln w="9525">
+            <a:noFill/>
+            <a:miter lim="800000"/>
+            <a:headEnd/>
+            <a:tailEnd/>
           </a:ln>
-          <a:effectLst/>
         </p:spPr>
         <p:txBody>
-          <a:bodyPr vert="horz" wrap="square" lIns="91440" tIns="45720" rIns="91440" bIns="45720" numCol="1" rtlCol="0" anchor="t" anchorCtr="0" compatLnSpc="1">
-            <a:prstTxWarp prst="textNoShape">
-              <a:avLst/>
-            </a:prstTxWarp>
+          <a:bodyPr wrap="none">
             <a:spAutoFit/>
           </a:bodyPr>
           <a:lstStyle/>
           <a:p>
-            <a:endParaRPr lang="pt-PT"/>
+            <a:pPr>
+              <a:spcBef>
+                <a:spcPts val="0"/>
+              </a:spcBef>
+            </a:pPr>
+            <a:r>
+              <a:rPr lang="pt-PT" sz="1400" b="1" dirty="0">
+                <a:solidFill>
+                  <a:srgbClr val="003E6C"/>
+                </a:solidFill>
+              </a:rPr>
+              <a:t>Fase Aplicação</a:t>
+            </a:r>
           </a:p>
         </p:txBody>
       </p:sp>
       <p:sp>
         <p:nvSpPr>
-          <p:cNvPr id="22" name="Can 42">
+          <p:cNvPr id="23" name="Text Box 6">
             <a:extLst>
               <a:ext uri="{FF2B5EF4-FFF2-40B4-BE49-F238E27FC236}">
-                <a16:creationId xmlns:a16="http://schemas.microsoft.com/office/drawing/2014/main" id="{1A4B3FF6-7DA6-7B67-73A1-37A259E643A1}"/>
+                <a16:creationId xmlns:a16="http://schemas.microsoft.com/office/drawing/2014/main" id="{344AECC9-D6E1-CAD0-9B33-E727BD767478}"/>
               </a:ext>
             </a:extLst>
           </p:cNvPr>
-          <p:cNvSpPr>
-            <a:spLocks noChangeAspect="1"/>
+          <p:cNvSpPr txBox="1">
+            <a:spLocks noChangeArrowheads="1"/>
           </p:cNvSpPr>
           <p:nvPr/>
         </p:nvSpPr>
         <p:spPr bwMode="auto">
           <a:xfrm>
-            <a:off x="3156838" y="5384249"/>
-            <a:ext cx="225000" cy="1094244"/>
+            <a:off x="2004711" y="3284985"/>
+            <a:ext cx="837089" cy="307777"/>
           </a:xfrm>
-          <a:prstGeom prst="can">
+          <a:prstGeom prst="rect">
             <a:avLst/>
           </a:prstGeom>
-          <a:solidFill>
-            <a:schemeClr val="accent1"/>
-          </a:solidFill>
-          <a:ln w="9525" cap="flat" cmpd="sng" algn="ctr">
-            <a:solidFill>
-              <a:schemeClr val="tx1"/>
-            </a:solidFill>
-            <a:prstDash val="solid"/>
-            <a:round/>
-            <a:headEnd type="none" w="med" len="med"/>
-            <a:tailEnd type="none" w="med" len="med"/>
+          <a:noFill/>
+          <a:ln w="9525">
+            <a:noFill/>
+            <a:miter lim="800000"/>
+            <a:headEnd/>
+            <a:tailEnd/>
           </a:ln>
-          <a:effectLst/>
         </p:spPr>
         <p:txBody>
-          <a:bodyPr vert="horz" wrap="square" lIns="91440" tIns="45720" rIns="91440" bIns="45720" numCol="1" rtlCol="0" anchor="t" anchorCtr="0" compatLnSpc="1">
-            <a:prstTxWarp prst="textNoShape">
-              <a:avLst/>
-            </a:prstTxWarp>
+          <a:bodyPr wrap="none">
             <a:spAutoFit/>
           </a:bodyPr>
           <a:lstStyle/>
           <a:p>
-            <a:endParaRPr lang="pt-PT"/>
+            <a:pPr>
+              <a:spcBef>
+                <a:spcPts val="0"/>
+              </a:spcBef>
+            </a:pPr>
+            <a:r>
+              <a:rPr lang="pt-PT" sz="1400" b="1" dirty="0">
+                <a:solidFill>
+                  <a:schemeClr val="tx1"/>
+                </a:solidFill>
+              </a:rPr>
+              <a:t>Modelos</a:t>
+            </a:r>
           </a:p>
         </p:txBody>
       </p:sp>
@@ -33998,6 +36936,46 @@
       </p:sp>
       <p:sp>
         <p:nvSpPr>
+          <p:cNvPr id="25" name="Line 31">
+            <a:extLst>
+              <a:ext uri="{FF2B5EF4-FFF2-40B4-BE49-F238E27FC236}">
+                <a16:creationId xmlns:a16="http://schemas.microsoft.com/office/drawing/2014/main" id="{B19F5C67-08C8-319F-4165-BC6D2A66B37A}"/>
+              </a:ext>
+            </a:extLst>
+          </p:cNvPr>
+          <p:cNvSpPr>
+            <a:spLocks noChangeShapeType="1"/>
+          </p:cNvSpPr>
+          <p:nvPr/>
+        </p:nvSpPr>
+        <p:spPr bwMode="auto">
+          <a:xfrm rot="5400000" flipV="1">
+            <a:off x="3561798" y="2843960"/>
+            <a:ext cx="450000" cy="900000"/>
+          </a:xfrm>
+          <a:prstGeom prst="line">
+            <a:avLst/>
+          </a:prstGeom>
+          <a:noFill/>
+          <a:ln w="9525">
+            <a:solidFill>
+              <a:schemeClr val="tx1"/>
+            </a:solidFill>
+            <a:round/>
+            <a:headEnd/>
+            <a:tailEnd type="triangle" w="med" len="med"/>
+          </a:ln>
+        </p:spPr>
+        <p:txBody>
+          <a:bodyPr/>
+          <a:lstStyle/>
+          <a:p>
+            <a:endParaRPr lang="pt-PT"/>
+          </a:p>
+        </p:txBody>
+      </p:sp>
+      <p:sp>
+        <p:nvSpPr>
           <p:cNvPr id="26" name="Line 31">
             <a:extLst>
               <a:ext uri="{FF2B5EF4-FFF2-40B4-BE49-F238E27FC236}">
@@ -34038,45 +37016,38 @@
       </p:sp>
       <p:sp>
         <p:nvSpPr>
-          <p:cNvPr id="27" name="Cube 26">
+          <p:cNvPr id="29" name="Line 31">
             <a:extLst>
               <a:ext uri="{FF2B5EF4-FFF2-40B4-BE49-F238E27FC236}">
-                <a16:creationId xmlns:a16="http://schemas.microsoft.com/office/drawing/2014/main" id="{791B3B77-D984-BCA7-08A7-6C684AAD8909}"/>
+                <a16:creationId xmlns:a16="http://schemas.microsoft.com/office/drawing/2014/main" id="{BDD0B19B-E52D-7B6D-089C-D0A79C122F31}"/>
               </a:ext>
             </a:extLst>
           </p:cNvPr>
-          <p:cNvSpPr/>
+          <p:cNvSpPr>
+            <a:spLocks noChangeShapeType="1"/>
+          </p:cNvSpPr>
           <p:nvPr/>
         </p:nvSpPr>
         <p:spPr bwMode="auto">
-          <a:xfrm>
-            <a:off x="7477318" y="3356992"/>
-            <a:ext cx="576064" cy="1153180"/>
+          <a:xfrm flipV="1">
+            <a:off x="4957038" y="3573016"/>
+            <a:ext cx="720000" cy="0"/>
           </a:xfrm>
-          <a:prstGeom prst="cube">
+          <a:prstGeom prst="line">
             <a:avLst/>
           </a:prstGeom>
-          <a:solidFill>
-            <a:schemeClr val="accent1"/>
-          </a:solidFill>
-          <a:ln w="9525" cap="flat" cmpd="sng" algn="ctr">
+          <a:noFill/>
+          <a:ln w="9525">
             <a:solidFill>
               <a:schemeClr val="tx1"/>
             </a:solidFill>
-            <a:prstDash val="solid"/>
             <a:round/>
-            <a:headEnd type="none" w="med" len="med"/>
-            <a:tailEnd type="none" w="med" len="med"/>
+            <a:headEnd/>
+            <a:tailEnd type="triangle" w="med" len="med"/>
           </a:ln>
-          <a:effectLst/>
         </p:spPr>
         <p:txBody>
-          <a:bodyPr vert="horz" wrap="square" lIns="91440" tIns="45720" rIns="91440" bIns="45720" numCol="1" rtlCol="0" anchor="t" anchorCtr="0" compatLnSpc="1">
-            <a:prstTxWarp prst="textNoShape">
-              <a:avLst/>
-            </a:prstTxWarp>
-            <a:spAutoFit/>
-          </a:bodyPr>
+          <a:bodyPr/>
           <a:lstStyle/>
           <a:p>
             <a:endParaRPr lang="pt-PT"/>
@@ -34125,6 +37096,245 @@
       </p:sp>
       <p:sp>
         <p:nvSpPr>
+          <p:cNvPr id="32" name="Line 31">
+            <a:extLst>
+              <a:ext uri="{FF2B5EF4-FFF2-40B4-BE49-F238E27FC236}">
+                <a16:creationId xmlns:a16="http://schemas.microsoft.com/office/drawing/2014/main" id="{E0FF1C8A-9FFF-6DDF-9688-C92C47BCF60C}"/>
+              </a:ext>
+            </a:extLst>
+          </p:cNvPr>
+          <p:cNvSpPr>
+            <a:spLocks noChangeShapeType="1"/>
+          </p:cNvSpPr>
+          <p:nvPr/>
+        </p:nvSpPr>
+        <p:spPr bwMode="auto">
+          <a:xfrm rot="10800000" flipV="1">
+            <a:off x="9349526" y="3068960"/>
+            <a:ext cx="0" cy="270000"/>
+          </a:xfrm>
+          <a:prstGeom prst="line">
+            <a:avLst/>
+          </a:prstGeom>
+          <a:noFill/>
+          <a:ln w="9525">
+            <a:solidFill>
+              <a:schemeClr val="tx1"/>
+            </a:solidFill>
+            <a:round/>
+            <a:headEnd/>
+            <a:tailEnd type="triangle" w="med" len="med"/>
+          </a:ln>
+        </p:spPr>
+        <p:txBody>
+          <a:bodyPr/>
+          <a:lstStyle/>
+          <a:p>
+            <a:endParaRPr lang="pt-PT"/>
+          </a:p>
+        </p:txBody>
+      </p:sp>
+      <p:sp>
+        <p:nvSpPr>
+          <p:cNvPr id="33" name="Line 31">
+            <a:extLst>
+              <a:ext uri="{FF2B5EF4-FFF2-40B4-BE49-F238E27FC236}">
+                <a16:creationId xmlns:a16="http://schemas.microsoft.com/office/drawing/2014/main" id="{F866C931-6E0D-F5B6-CDE2-5D11EA0D9527}"/>
+              </a:ext>
+            </a:extLst>
+          </p:cNvPr>
+          <p:cNvSpPr>
+            <a:spLocks noChangeShapeType="1"/>
+          </p:cNvSpPr>
+          <p:nvPr/>
+        </p:nvSpPr>
+        <p:spPr bwMode="auto">
+          <a:xfrm rot="10800000" flipV="1">
+            <a:off x="9349527" y="3933056"/>
+            <a:ext cx="0" cy="270000"/>
+          </a:xfrm>
+          <a:prstGeom prst="line">
+            <a:avLst/>
+          </a:prstGeom>
+          <a:noFill/>
+          <a:ln w="9525">
+            <a:solidFill>
+              <a:schemeClr val="tx1"/>
+            </a:solidFill>
+            <a:round/>
+            <a:headEnd/>
+            <a:tailEnd type="triangle" w="med" len="med"/>
+          </a:ln>
+        </p:spPr>
+        <p:txBody>
+          <a:bodyPr/>
+          <a:lstStyle/>
+          <a:p>
+            <a:endParaRPr lang="pt-PT"/>
+          </a:p>
+        </p:txBody>
+      </p:sp>
+      <p:sp>
+        <p:nvSpPr>
+          <p:cNvPr id="34" name="Text Box 6">
+            <a:extLst>
+              <a:ext uri="{FF2B5EF4-FFF2-40B4-BE49-F238E27FC236}">
+                <a16:creationId xmlns:a16="http://schemas.microsoft.com/office/drawing/2014/main" id="{EFA1D60F-ACD2-6094-4E43-0C8DBD52E217}"/>
+              </a:ext>
+            </a:extLst>
+          </p:cNvPr>
+          <p:cNvSpPr txBox="1">
+            <a:spLocks noChangeArrowheads="1"/>
+          </p:cNvSpPr>
+          <p:nvPr/>
+        </p:nvSpPr>
+        <p:spPr bwMode="auto">
+          <a:xfrm>
+            <a:off x="8773462" y="4201344"/>
+            <a:ext cx="1264898" cy="307777"/>
+          </a:xfrm>
+          <a:prstGeom prst="rect">
+            <a:avLst/>
+          </a:prstGeom>
+          <a:noFill/>
+          <a:ln w="9525">
+            <a:noFill/>
+            <a:miter lim="800000"/>
+            <a:headEnd/>
+            <a:tailEnd/>
+          </a:ln>
+        </p:spPr>
+        <p:txBody>
+          <a:bodyPr wrap="none">
+            <a:spAutoFit/>
+          </a:bodyPr>
+          <a:lstStyle/>
+          <a:p>
+            <a:pPr>
+              <a:spcBef>
+                <a:spcPts val="0"/>
+              </a:spcBef>
+            </a:pPr>
+            <a:r>
+              <a:rPr lang="pt-PT" sz="1400" b="1" dirty="0">
+                <a:solidFill>
+                  <a:schemeClr val="tx1"/>
+                </a:solidFill>
+              </a:rPr>
+              <a:t>Conhecimento</a:t>
+            </a:r>
+          </a:p>
+        </p:txBody>
+      </p:sp>
+      <p:sp>
+        <p:nvSpPr>
+          <p:cNvPr id="35" name="Text Box 6">
+            <a:extLst>
+              <a:ext uri="{FF2B5EF4-FFF2-40B4-BE49-F238E27FC236}">
+                <a16:creationId xmlns:a16="http://schemas.microsoft.com/office/drawing/2014/main" id="{EAB0F8CB-C056-2ED0-7E7F-2C564C484B38}"/>
+              </a:ext>
+            </a:extLst>
+          </p:cNvPr>
+          <p:cNvSpPr txBox="1">
+            <a:spLocks noChangeArrowheads="1"/>
+          </p:cNvSpPr>
+          <p:nvPr/>
+        </p:nvSpPr>
+        <p:spPr bwMode="auto">
+          <a:xfrm>
+            <a:off x="9421535" y="2545740"/>
+            <a:ext cx="650563" cy="523220"/>
+          </a:xfrm>
+          <a:prstGeom prst="rect">
+            <a:avLst/>
+          </a:prstGeom>
+          <a:noFill/>
+          <a:ln w="9525">
+            <a:noFill/>
+            <a:miter lim="800000"/>
+            <a:headEnd/>
+            <a:tailEnd/>
+          </a:ln>
+        </p:spPr>
+        <p:txBody>
+          <a:bodyPr wrap="none">
+            <a:spAutoFit/>
+          </a:bodyPr>
+          <a:lstStyle/>
+          <a:p>
+            <a:pPr>
+              <a:spcBef>
+                <a:spcPts val="0"/>
+              </a:spcBef>
+            </a:pPr>
+            <a:r>
+              <a:rPr lang="pt-PT" sz="1400" b="1" dirty="0">
+                <a:solidFill>
+                  <a:schemeClr val="tx1"/>
+                </a:solidFill>
+              </a:rPr>
+              <a:t>Novos</a:t>
+            </a:r>
+          </a:p>
+          <a:p>
+            <a:pPr>
+              <a:spcBef>
+                <a:spcPts val="0"/>
+              </a:spcBef>
+            </a:pPr>
+            <a:r>
+              <a:rPr lang="pt-PT" sz="1400" b="1" dirty="0">
+                <a:solidFill>
+                  <a:schemeClr val="tx1"/>
+                </a:solidFill>
+              </a:rPr>
+              <a:t>dados</a:t>
+            </a:r>
+          </a:p>
+        </p:txBody>
+      </p:sp>
+      <p:sp>
+        <p:nvSpPr>
+          <p:cNvPr id="36" name="Line 31">
+            <a:extLst>
+              <a:ext uri="{FF2B5EF4-FFF2-40B4-BE49-F238E27FC236}">
+                <a16:creationId xmlns:a16="http://schemas.microsoft.com/office/drawing/2014/main" id="{CE70F70C-E00A-5EAE-8819-239A52BD7719}"/>
+              </a:ext>
+            </a:extLst>
+          </p:cNvPr>
+          <p:cNvSpPr>
+            <a:spLocks noChangeShapeType="1"/>
+          </p:cNvSpPr>
+          <p:nvPr/>
+        </p:nvSpPr>
+        <p:spPr bwMode="auto">
+          <a:xfrm rot="10800000" flipV="1">
+            <a:off x="4957038" y="3717032"/>
+            <a:ext cx="720000" cy="0"/>
+          </a:xfrm>
+          <a:prstGeom prst="line">
+            <a:avLst/>
+          </a:prstGeom>
+          <a:noFill/>
+          <a:ln w="9525">
+            <a:solidFill>
+              <a:schemeClr val="tx1"/>
+            </a:solidFill>
+            <a:round/>
+            <a:headEnd/>
+            <a:tailEnd type="triangle" w="med" len="med"/>
+          </a:ln>
+        </p:spPr>
+        <p:txBody>
+          <a:bodyPr/>
+          <a:lstStyle/>
+          <a:p>
+            <a:endParaRPr lang="pt-PT"/>
+          </a:p>
+        </p:txBody>
+      </p:sp>
+      <p:sp>
+        <p:nvSpPr>
           <p:cNvPr id="37" name="Text Box 29">
             <a:extLst>
               <a:ext uri="{FF2B5EF4-FFF2-40B4-BE49-F238E27FC236}">
@@ -34178,6 +37388,340 @@
                 <a:srgbClr val="00B050"/>
               </a:solidFill>
             </a:endParaRPr>
+          </a:p>
+        </p:txBody>
+      </p:sp>
+      <p:sp>
+        <p:nvSpPr>
+          <p:cNvPr id="38" name="Text Box 29">
+            <a:extLst>
+              <a:ext uri="{FF2B5EF4-FFF2-40B4-BE49-F238E27FC236}">
+                <a16:creationId xmlns:a16="http://schemas.microsoft.com/office/drawing/2014/main" id="{7670ADD0-9CB7-3FE8-F83E-EA37F9D29122}"/>
+              </a:ext>
+            </a:extLst>
+          </p:cNvPr>
+          <p:cNvSpPr txBox="1">
+            <a:spLocks noChangeArrowheads="1"/>
+          </p:cNvSpPr>
+          <p:nvPr/>
+        </p:nvSpPr>
+        <p:spPr bwMode="auto">
+          <a:xfrm>
+            <a:off x="9104496" y="3429001"/>
+            <a:ext cx="338554" cy="461665"/>
+          </a:xfrm>
+          <a:prstGeom prst="rect">
+            <a:avLst/>
+          </a:prstGeom>
+          <a:noFill/>
+          <a:ln w="9525">
+            <a:noFill/>
+            <a:miter lim="800000"/>
+            <a:headEnd/>
+            <a:tailEnd/>
+          </a:ln>
+        </p:spPr>
+        <p:txBody>
+          <a:bodyPr wrap="none">
+            <a:spAutoFit/>
+          </a:bodyPr>
+          <a:lstStyle/>
+          <a:p>
+            <a:pPr>
+              <a:spcBef>
+                <a:spcPts val="0"/>
+              </a:spcBef>
+            </a:pPr>
+            <a:r>
+              <a:rPr lang="pt-PT" sz="2400" b="1" dirty="0">
+                <a:solidFill>
+                  <a:srgbClr val="00B050"/>
+                </a:solidFill>
+                <a:latin typeface="Calibri"/>
+              </a:rPr>
+              <a:t>√</a:t>
+            </a:r>
+            <a:endParaRPr lang="pt-PT" sz="2400" b="1" dirty="0">
+              <a:solidFill>
+                <a:srgbClr val="00B050"/>
+              </a:solidFill>
+            </a:endParaRPr>
+          </a:p>
+        </p:txBody>
+      </p:sp>
+      <p:sp>
+        <p:nvSpPr>
+          <p:cNvPr id="40" name="Text Box 29">
+            <a:extLst>
+              <a:ext uri="{FF2B5EF4-FFF2-40B4-BE49-F238E27FC236}">
+                <a16:creationId xmlns:a16="http://schemas.microsoft.com/office/drawing/2014/main" id="{ACCB09BC-7D92-EF3D-62BA-F3F5C888EABB}"/>
+              </a:ext>
+            </a:extLst>
+          </p:cNvPr>
+          <p:cNvSpPr txBox="1">
+            <a:spLocks noChangeArrowheads="1"/>
+          </p:cNvSpPr>
+          <p:nvPr/>
+        </p:nvSpPr>
+        <p:spPr bwMode="auto">
+          <a:xfrm>
+            <a:off x="5565802" y="2132857"/>
+            <a:ext cx="1204625" cy="307777"/>
+          </a:xfrm>
+          <a:prstGeom prst="rect">
+            <a:avLst/>
+          </a:prstGeom>
+          <a:noFill/>
+          <a:ln w="9525">
+            <a:noFill/>
+            <a:miter lim="800000"/>
+            <a:headEnd/>
+            <a:tailEnd/>
+          </a:ln>
+        </p:spPr>
+        <p:txBody>
+          <a:bodyPr wrap="none">
+            <a:spAutoFit/>
+          </a:bodyPr>
+          <a:lstStyle/>
+          <a:p>
+            <a:pPr>
+              <a:spcBef>
+                <a:spcPts val="0"/>
+              </a:spcBef>
+            </a:pPr>
+            <a:r>
+              <a:rPr lang="pt-PT" sz="1400" b="1" dirty="0">
+                <a:solidFill>
+                  <a:srgbClr val="003E6C"/>
+                </a:solidFill>
+              </a:rPr>
+              <a:t>Fase Afinação</a:t>
+            </a:r>
+          </a:p>
+        </p:txBody>
+      </p:sp>
+      <p:sp>
+        <p:nvSpPr>
+          <p:cNvPr id="41" name="Text Box 29">
+            <a:extLst>
+              <a:ext uri="{FF2B5EF4-FFF2-40B4-BE49-F238E27FC236}">
+                <a16:creationId xmlns:a16="http://schemas.microsoft.com/office/drawing/2014/main" id="{FB0029D4-6753-F597-575A-41BD503F1914}"/>
+              </a:ext>
+            </a:extLst>
+          </p:cNvPr>
+          <p:cNvSpPr txBox="1">
+            <a:spLocks noChangeArrowheads="1"/>
+          </p:cNvSpPr>
+          <p:nvPr/>
+        </p:nvSpPr>
+        <p:spPr bwMode="auto">
+          <a:xfrm>
+            <a:off x="3012822" y="5085185"/>
+            <a:ext cx="787460" cy="276999"/>
+          </a:xfrm>
+          <a:prstGeom prst="rect">
+            <a:avLst/>
+          </a:prstGeom>
+          <a:noFill/>
+          <a:ln w="9525">
+            <a:noFill/>
+            <a:miter lim="800000"/>
+            <a:headEnd/>
+            <a:tailEnd/>
+          </a:ln>
+        </p:spPr>
+        <p:txBody>
+          <a:bodyPr wrap="none">
+            <a:spAutoFit/>
+          </a:bodyPr>
+          <a:lstStyle/>
+          <a:p>
+            <a:pPr>
+              <a:spcBef>
+                <a:spcPts val="0"/>
+              </a:spcBef>
+            </a:pPr>
+            <a:r>
+              <a:rPr lang="pt-PT" sz="1200" b="1" dirty="0">
+                <a:solidFill>
+                  <a:schemeClr val="tx1"/>
+                </a:solidFill>
+              </a:rPr>
+              <a:t>validação</a:t>
+            </a:r>
+          </a:p>
+        </p:txBody>
+      </p:sp>
+      <p:sp>
+        <p:nvSpPr>
+          <p:cNvPr id="43" name="Line 31">
+            <a:extLst>
+              <a:ext uri="{FF2B5EF4-FFF2-40B4-BE49-F238E27FC236}">
+                <a16:creationId xmlns:a16="http://schemas.microsoft.com/office/drawing/2014/main" id="{29DF4926-8DD5-2248-E3F7-C253B2F09DFA}"/>
+              </a:ext>
+            </a:extLst>
+          </p:cNvPr>
+          <p:cNvSpPr>
+            <a:spLocks noChangeShapeType="1"/>
+          </p:cNvSpPr>
+          <p:nvPr/>
+        </p:nvSpPr>
+        <p:spPr bwMode="auto">
+          <a:xfrm flipV="1">
+            <a:off x="2724790" y="4869160"/>
+            <a:ext cx="360000" cy="0"/>
+          </a:xfrm>
+          <a:prstGeom prst="line">
+            <a:avLst/>
+          </a:prstGeom>
+          <a:noFill/>
+          <a:ln w="9525">
+            <a:solidFill>
+              <a:schemeClr val="tx1"/>
+            </a:solidFill>
+            <a:round/>
+            <a:headEnd/>
+            <a:tailEnd type="triangle" w="med" len="med"/>
+          </a:ln>
+        </p:spPr>
+        <p:txBody>
+          <a:bodyPr/>
+          <a:lstStyle/>
+          <a:p>
+            <a:endParaRPr lang="pt-PT"/>
+          </a:p>
+        </p:txBody>
+      </p:sp>
+      <p:sp>
+        <p:nvSpPr>
+          <p:cNvPr id="44" name="Text Box 26">
+            <a:extLst>
+              <a:ext uri="{FF2B5EF4-FFF2-40B4-BE49-F238E27FC236}">
+                <a16:creationId xmlns:a16="http://schemas.microsoft.com/office/drawing/2014/main" id="{2714D106-CF56-EF1F-A6C1-35E87B99BA0F}"/>
+              </a:ext>
+            </a:extLst>
+          </p:cNvPr>
+          <p:cNvSpPr txBox="1">
+            <a:spLocks noChangeArrowheads="1"/>
+          </p:cNvSpPr>
+          <p:nvPr/>
+        </p:nvSpPr>
+        <p:spPr bwMode="auto">
+          <a:xfrm>
+            <a:off x="2652782" y="4581129"/>
+            <a:ext cx="433132" cy="307777"/>
+          </a:xfrm>
+          <a:prstGeom prst="rect">
+            <a:avLst/>
+          </a:prstGeom>
+          <a:noFill/>
+          <a:ln w="9525">
+            <a:noFill/>
+            <a:miter lim="800000"/>
+            <a:headEnd/>
+            <a:tailEnd/>
+          </a:ln>
+        </p:spPr>
+        <p:txBody>
+          <a:bodyPr wrap="none">
+            <a:spAutoFit/>
+          </a:bodyPr>
+          <a:lstStyle/>
+          <a:p>
+            <a:pPr>
+              <a:spcBef>
+                <a:spcPts val="0"/>
+              </a:spcBef>
+            </a:pPr>
+            <a:r>
+              <a:rPr lang="pt-PT" sz="1400" dirty="0">
+                <a:solidFill>
+                  <a:srgbClr val="003E6C"/>
+                </a:solidFill>
+              </a:rPr>
+              <a:t>1/4</a:t>
+            </a:r>
+          </a:p>
+        </p:txBody>
+      </p:sp>
+      <p:sp>
+        <p:nvSpPr>
+          <p:cNvPr id="45" name="Line 31">
+            <a:extLst>
+              <a:ext uri="{FF2B5EF4-FFF2-40B4-BE49-F238E27FC236}">
+                <a16:creationId xmlns:a16="http://schemas.microsoft.com/office/drawing/2014/main" id="{0378890F-E4D2-EB6D-BD05-9C2B7B13DA36}"/>
+              </a:ext>
+            </a:extLst>
+          </p:cNvPr>
+          <p:cNvSpPr>
+            <a:spLocks noChangeShapeType="1"/>
+          </p:cNvSpPr>
+          <p:nvPr/>
+        </p:nvSpPr>
+        <p:spPr bwMode="auto">
+          <a:xfrm flipV="1">
+            <a:off x="3516878" y="3789040"/>
+            <a:ext cx="2304000" cy="1152000"/>
+          </a:xfrm>
+          <a:prstGeom prst="line">
+            <a:avLst/>
+          </a:prstGeom>
+          <a:noFill/>
+          <a:ln w="9525">
+            <a:solidFill>
+              <a:schemeClr val="tx1"/>
+            </a:solidFill>
+            <a:round/>
+            <a:headEnd/>
+            <a:tailEnd type="triangle" w="med" len="med"/>
+          </a:ln>
+        </p:spPr>
+        <p:txBody>
+          <a:bodyPr/>
+          <a:lstStyle/>
+          <a:p>
+            <a:endParaRPr lang="pt-PT"/>
+          </a:p>
+        </p:txBody>
+      </p:sp>
+      <p:sp>
+        <p:nvSpPr>
+          <p:cNvPr id="48" name="Line 31">
+            <a:extLst>
+              <a:ext uri="{FF2B5EF4-FFF2-40B4-BE49-F238E27FC236}">
+                <a16:creationId xmlns:a16="http://schemas.microsoft.com/office/drawing/2014/main" id="{DF5A9C51-BE11-D37F-5A92-448B1ACAEE46}"/>
+              </a:ext>
+            </a:extLst>
+          </p:cNvPr>
+          <p:cNvSpPr>
+            <a:spLocks noChangeShapeType="1"/>
+          </p:cNvSpPr>
+          <p:nvPr/>
+        </p:nvSpPr>
+        <p:spPr bwMode="auto">
+          <a:xfrm flipV="1">
+            <a:off x="8197398" y="3645024"/>
+            <a:ext cx="720000" cy="0"/>
+          </a:xfrm>
+          <a:prstGeom prst="line">
+            <a:avLst/>
+          </a:prstGeom>
+          <a:noFill/>
+          <a:ln w="9525">
+            <a:solidFill>
+              <a:schemeClr val="tx1"/>
+            </a:solidFill>
+            <a:round/>
+            <a:headEnd/>
+            <a:tailEnd type="triangle" w="med" len="med"/>
+          </a:ln>
+        </p:spPr>
+        <p:txBody>
+          <a:bodyPr/>
+          <a:lstStyle/>
+          <a:p>
+            <a:endParaRPr lang="pt-PT"/>
           </a:p>
         </p:txBody>
       </p:sp>
@@ -34285,2925 +37829,6 @@
           </a:p>
         </p:txBody>
       </p:sp>
-      <p:sp>
-        <p:nvSpPr>
-          <p:cNvPr id="8" name="Text Box 29">
-            <a:extLst>
-              <a:ext uri="{FF2B5EF4-FFF2-40B4-BE49-F238E27FC236}">
-                <a16:creationId xmlns:a16="http://schemas.microsoft.com/office/drawing/2014/main" id="{CC2C16EB-A380-74AB-6859-6EE7531E10E6}"/>
-              </a:ext>
-            </a:extLst>
-          </p:cNvPr>
-          <p:cNvSpPr txBox="1">
-            <a:spLocks noChangeArrowheads="1"/>
-          </p:cNvSpPr>
-          <p:nvPr/>
-        </p:nvSpPr>
-        <p:spPr bwMode="auto">
-          <a:xfrm>
-            <a:off x="8709611" y="2113112"/>
-            <a:ext cx="1267719" cy="307777"/>
-          </a:xfrm>
-          <a:prstGeom prst="rect">
-            <a:avLst/>
-          </a:prstGeom>
-          <a:noFill/>
-          <a:ln w="9525">
-            <a:noFill/>
-            <a:miter lim="800000"/>
-            <a:headEnd/>
-            <a:tailEnd/>
-          </a:ln>
-        </p:spPr>
-        <p:txBody>
-          <a:bodyPr wrap="none">
-            <a:spAutoFit/>
-          </a:bodyPr>
-          <a:lstStyle/>
-          <a:p>
-            <a:pPr>
-              <a:spcBef>
-                <a:spcPts val="0"/>
-              </a:spcBef>
-            </a:pPr>
-            <a:r>
-              <a:rPr lang="pt-PT" sz="1400" b="1" dirty="0">
-                <a:solidFill>
-                  <a:srgbClr val="003E6C"/>
-                </a:solidFill>
-              </a:rPr>
-              <a:t>Fase Aplicação</a:t>
-            </a:r>
-          </a:p>
-        </p:txBody>
-      </p:sp>
-      <p:sp>
-        <p:nvSpPr>
-          <p:cNvPr id="9" name="Cube 8">
-            <a:extLst>
-              <a:ext uri="{FF2B5EF4-FFF2-40B4-BE49-F238E27FC236}">
-                <a16:creationId xmlns:a16="http://schemas.microsoft.com/office/drawing/2014/main" id="{36E2297F-3215-B168-BAC9-496B869C99A0}"/>
-              </a:ext>
-            </a:extLst>
-          </p:cNvPr>
-          <p:cNvSpPr/>
-          <p:nvPr/>
-        </p:nvSpPr>
-        <p:spPr bwMode="auto">
-          <a:xfrm>
-            <a:off x="9061494" y="3356992"/>
-            <a:ext cx="576064" cy="1153180"/>
-          </a:xfrm>
-          <a:prstGeom prst="cube">
-            <a:avLst/>
-          </a:prstGeom>
-          <a:solidFill>
-            <a:schemeClr val="accent1"/>
-          </a:solidFill>
-          <a:ln w="9525" cap="flat" cmpd="sng" algn="ctr">
-            <a:solidFill>
-              <a:schemeClr val="tx1"/>
-            </a:solidFill>
-            <a:prstDash val="solid"/>
-            <a:round/>
-            <a:headEnd type="none" w="med" len="med"/>
-            <a:tailEnd type="none" w="med" len="med"/>
-          </a:ln>
-          <a:effectLst/>
-        </p:spPr>
-        <p:txBody>
-          <a:bodyPr vert="horz" wrap="square" lIns="91440" tIns="45720" rIns="91440" bIns="45720" numCol="1" rtlCol="0" anchor="t" anchorCtr="0" compatLnSpc="1">
-            <a:prstTxWarp prst="textNoShape">
-              <a:avLst/>
-            </a:prstTxWarp>
-            <a:spAutoFit/>
-          </a:bodyPr>
-          <a:lstStyle/>
-          <a:p>
-            <a:endParaRPr lang="pt-PT"/>
-          </a:p>
-        </p:txBody>
-      </p:sp>
-      <p:sp>
-        <p:nvSpPr>
-          <p:cNvPr id="51" name="Can 53">
-            <a:extLst>
-              <a:ext uri="{FF2B5EF4-FFF2-40B4-BE49-F238E27FC236}">
-                <a16:creationId xmlns:a16="http://schemas.microsoft.com/office/drawing/2014/main" id="{9B00B881-E7A5-8513-8F2D-B4E6961F4478}"/>
-              </a:ext>
-            </a:extLst>
-          </p:cNvPr>
-          <p:cNvSpPr>
-            <a:spLocks noChangeAspect="1"/>
-          </p:cNvSpPr>
-          <p:nvPr/>
-        </p:nvSpPr>
-        <p:spPr bwMode="auto">
-          <a:xfrm>
-            <a:off x="9236268" y="2564904"/>
-            <a:ext cx="225000" cy="1094244"/>
-          </a:xfrm>
-          <a:prstGeom prst="can">
-            <a:avLst/>
-          </a:prstGeom>
-          <a:solidFill>
-            <a:schemeClr val="accent1"/>
-          </a:solidFill>
-          <a:ln w="9525" cap="flat" cmpd="sng" algn="ctr">
-            <a:solidFill>
-              <a:schemeClr val="tx1"/>
-            </a:solidFill>
-            <a:prstDash val="solid"/>
-            <a:round/>
-            <a:headEnd type="none" w="med" len="med"/>
-            <a:tailEnd type="none" w="med" len="med"/>
-          </a:ln>
-          <a:effectLst/>
-        </p:spPr>
-        <p:txBody>
-          <a:bodyPr vert="horz" wrap="square" lIns="91440" tIns="45720" rIns="91440" bIns="45720" numCol="1" rtlCol="0" anchor="t" anchorCtr="0" compatLnSpc="1">
-            <a:prstTxWarp prst="textNoShape">
-              <a:avLst/>
-            </a:prstTxWarp>
-            <a:spAutoFit/>
-          </a:bodyPr>
-          <a:lstStyle/>
-          <a:p>
-            <a:endParaRPr lang="pt-PT"/>
-          </a:p>
-        </p:txBody>
-      </p:sp>
-      <p:sp>
-        <p:nvSpPr>
-          <p:cNvPr id="52" name="Line 31">
-            <a:extLst>
-              <a:ext uri="{FF2B5EF4-FFF2-40B4-BE49-F238E27FC236}">
-                <a16:creationId xmlns:a16="http://schemas.microsoft.com/office/drawing/2014/main" id="{BF13A75D-FDE8-A64A-95D6-90041EECA0C0}"/>
-              </a:ext>
-            </a:extLst>
-          </p:cNvPr>
-          <p:cNvSpPr>
-            <a:spLocks noChangeShapeType="1"/>
-          </p:cNvSpPr>
-          <p:nvPr/>
-        </p:nvSpPr>
-        <p:spPr bwMode="auto">
-          <a:xfrm rot="10800000" flipV="1">
-            <a:off x="9349526" y="3068960"/>
-            <a:ext cx="0" cy="270000"/>
-          </a:xfrm>
-          <a:prstGeom prst="line">
-            <a:avLst/>
-          </a:prstGeom>
-          <a:noFill/>
-          <a:ln w="9525">
-            <a:solidFill>
-              <a:schemeClr val="tx1"/>
-            </a:solidFill>
-            <a:round/>
-            <a:headEnd/>
-            <a:tailEnd type="triangle" w="med" len="med"/>
-          </a:ln>
-        </p:spPr>
-        <p:txBody>
-          <a:bodyPr/>
-          <a:lstStyle/>
-          <a:p>
-            <a:endParaRPr lang="pt-PT"/>
-          </a:p>
-        </p:txBody>
-      </p:sp>
-      <p:sp>
-        <p:nvSpPr>
-          <p:cNvPr id="53" name="Line 31">
-            <a:extLst>
-              <a:ext uri="{FF2B5EF4-FFF2-40B4-BE49-F238E27FC236}">
-                <a16:creationId xmlns:a16="http://schemas.microsoft.com/office/drawing/2014/main" id="{56253411-EDAF-256B-0F23-4C0E55755090}"/>
-              </a:ext>
-            </a:extLst>
-          </p:cNvPr>
-          <p:cNvSpPr>
-            <a:spLocks noChangeShapeType="1"/>
-          </p:cNvSpPr>
-          <p:nvPr/>
-        </p:nvSpPr>
-        <p:spPr bwMode="auto">
-          <a:xfrm rot="10800000" flipV="1">
-            <a:off x="9349527" y="3933056"/>
-            <a:ext cx="0" cy="270000"/>
-          </a:xfrm>
-          <a:prstGeom prst="line">
-            <a:avLst/>
-          </a:prstGeom>
-          <a:noFill/>
-          <a:ln w="9525">
-            <a:solidFill>
-              <a:schemeClr val="tx1"/>
-            </a:solidFill>
-            <a:round/>
-            <a:headEnd/>
-            <a:tailEnd type="triangle" w="med" len="med"/>
-          </a:ln>
-        </p:spPr>
-        <p:txBody>
-          <a:bodyPr/>
-          <a:lstStyle/>
-          <a:p>
-            <a:endParaRPr lang="pt-PT"/>
-          </a:p>
-        </p:txBody>
-      </p:sp>
-      <p:sp>
-        <p:nvSpPr>
-          <p:cNvPr id="54" name="Text Box 6">
-            <a:extLst>
-              <a:ext uri="{FF2B5EF4-FFF2-40B4-BE49-F238E27FC236}">
-                <a16:creationId xmlns:a16="http://schemas.microsoft.com/office/drawing/2014/main" id="{691259C9-7F85-FE58-7AE4-A574D4FD97BD}"/>
-              </a:ext>
-            </a:extLst>
-          </p:cNvPr>
-          <p:cNvSpPr txBox="1">
-            <a:spLocks noChangeArrowheads="1"/>
-          </p:cNvSpPr>
-          <p:nvPr/>
-        </p:nvSpPr>
-        <p:spPr bwMode="auto">
-          <a:xfrm>
-            <a:off x="8773462" y="4201344"/>
-            <a:ext cx="1264898" cy="307777"/>
-          </a:xfrm>
-          <a:prstGeom prst="rect">
-            <a:avLst/>
-          </a:prstGeom>
-          <a:noFill/>
-          <a:ln w="9525">
-            <a:noFill/>
-            <a:miter lim="800000"/>
-            <a:headEnd/>
-            <a:tailEnd/>
-          </a:ln>
-        </p:spPr>
-        <p:txBody>
-          <a:bodyPr wrap="none">
-            <a:spAutoFit/>
-          </a:bodyPr>
-          <a:lstStyle/>
-          <a:p>
-            <a:pPr>
-              <a:spcBef>
-                <a:spcPts val="0"/>
-              </a:spcBef>
-            </a:pPr>
-            <a:r>
-              <a:rPr lang="pt-PT" sz="1400" b="1" dirty="0">
-                <a:solidFill>
-                  <a:schemeClr val="tx1"/>
-                </a:solidFill>
-              </a:rPr>
-              <a:t>Conhecimento</a:t>
-            </a:r>
-          </a:p>
-        </p:txBody>
-      </p:sp>
-      <p:sp>
-        <p:nvSpPr>
-          <p:cNvPr id="55" name="Text Box 6">
-            <a:extLst>
-              <a:ext uri="{FF2B5EF4-FFF2-40B4-BE49-F238E27FC236}">
-                <a16:creationId xmlns:a16="http://schemas.microsoft.com/office/drawing/2014/main" id="{B83F4A44-B0A3-5C0D-5B88-F9A07C8AD7F2}"/>
-              </a:ext>
-            </a:extLst>
-          </p:cNvPr>
-          <p:cNvSpPr txBox="1">
-            <a:spLocks noChangeArrowheads="1"/>
-          </p:cNvSpPr>
-          <p:nvPr/>
-        </p:nvSpPr>
-        <p:spPr bwMode="auto">
-          <a:xfrm>
-            <a:off x="9421535" y="2545740"/>
-            <a:ext cx="650563" cy="523220"/>
-          </a:xfrm>
-          <a:prstGeom prst="rect">
-            <a:avLst/>
-          </a:prstGeom>
-          <a:noFill/>
-          <a:ln w="9525">
-            <a:noFill/>
-            <a:miter lim="800000"/>
-            <a:headEnd/>
-            <a:tailEnd/>
-          </a:ln>
-        </p:spPr>
-        <p:txBody>
-          <a:bodyPr wrap="none">
-            <a:spAutoFit/>
-          </a:bodyPr>
-          <a:lstStyle/>
-          <a:p>
-            <a:pPr>
-              <a:spcBef>
-                <a:spcPts val="0"/>
-              </a:spcBef>
-            </a:pPr>
-            <a:r>
-              <a:rPr lang="pt-PT" sz="1400" b="1" dirty="0">
-                <a:solidFill>
-                  <a:schemeClr val="tx1"/>
-                </a:solidFill>
-              </a:rPr>
-              <a:t>Novos</a:t>
-            </a:r>
-          </a:p>
-          <a:p>
-            <a:pPr>
-              <a:spcBef>
-                <a:spcPts val="0"/>
-              </a:spcBef>
-            </a:pPr>
-            <a:r>
-              <a:rPr lang="pt-PT" sz="1400" b="1" dirty="0">
-                <a:solidFill>
-                  <a:schemeClr val="tx1"/>
-                </a:solidFill>
-              </a:rPr>
-              <a:t>dados</a:t>
-            </a:r>
-          </a:p>
-        </p:txBody>
-      </p:sp>
-      <p:sp>
-        <p:nvSpPr>
-          <p:cNvPr id="56" name="Text Box 29">
-            <a:extLst>
-              <a:ext uri="{FF2B5EF4-FFF2-40B4-BE49-F238E27FC236}">
-                <a16:creationId xmlns:a16="http://schemas.microsoft.com/office/drawing/2014/main" id="{F8C0A46A-B5B1-C3EC-3332-98A1B48139C2}"/>
-              </a:ext>
-            </a:extLst>
-          </p:cNvPr>
-          <p:cNvSpPr txBox="1">
-            <a:spLocks noChangeArrowheads="1"/>
-          </p:cNvSpPr>
-          <p:nvPr/>
-        </p:nvSpPr>
-        <p:spPr bwMode="auto">
-          <a:xfrm>
-            <a:off x="9104496" y="3429001"/>
-            <a:ext cx="338554" cy="461665"/>
-          </a:xfrm>
-          <a:prstGeom prst="rect">
-            <a:avLst/>
-          </a:prstGeom>
-          <a:noFill/>
-          <a:ln w="9525">
-            <a:noFill/>
-            <a:miter lim="800000"/>
-            <a:headEnd/>
-            <a:tailEnd/>
-          </a:ln>
-        </p:spPr>
-        <p:txBody>
-          <a:bodyPr wrap="none">
-            <a:spAutoFit/>
-          </a:bodyPr>
-          <a:lstStyle/>
-          <a:p>
-            <a:pPr>
-              <a:spcBef>
-                <a:spcPts val="0"/>
-              </a:spcBef>
-            </a:pPr>
-            <a:r>
-              <a:rPr lang="pt-PT" sz="2400" b="1" dirty="0">
-                <a:solidFill>
-                  <a:srgbClr val="00B050"/>
-                </a:solidFill>
-                <a:latin typeface="Calibri"/>
-              </a:rPr>
-              <a:t>√</a:t>
-            </a:r>
-            <a:endParaRPr lang="pt-PT" sz="2400" b="1" dirty="0">
-              <a:solidFill>
-                <a:srgbClr val="00B050"/>
-              </a:solidFill>
-            </a:endParaRPr>
-          </a:p>
-        </p:txBody>
-      </p:sp>
-      <p:sp>
-        <p:nvSpPr>
-          <p:cNvPr id="57" name="Line 31">
-            <a:extLst>
-              <a:ext uri="{FF2B5EF4-FFF2-40B4-BE49-F238E27FC236}">
-                <a16:creationId xmlns:a16="http://schemas.microsoft.com/office/drawing/2014/main" id="{2B6F87E5-49DD-59E7-7801-339BDB7072A1}"/>
-              </a:ext>
-            </a:extLst>
-          </p:cNvPr>
-          <p:cNvSpPr>
-            <a:spLocks noChangeShapeType="1"/>
-          </p:cNvSpPr>
-          <p:nvPr/>
-        </p:nvSpPr>
-        <p:spPr bwMode="auto">
-          <a:xfrm flipV="1">
-            <a:off x="8197398" y="3645024"/>
-            <a:ext cx="720000" cy="0"/>
-          </a:xfrm>
-          <a:prstGeom prst="line">
-            <a:avLst/>
-          </a:prstGeom>
-          <a:noFill/>
-          <a:ln w="9525">
-            <a:solidFill>
-              <a:schemeClr val="tx1"/>
-            </a:solidFill>
-            <a:round/>
-            <a:headEnd/>
-            <a:tailEnd type="triangle" w="med" len="med"/>
-          </a:ln>
-        </p:spPr>
-        <p:txBody>
-          <a:bodyPr/>
-          <a:lstStyle/>
-          <a:p>
-            <a:endParaRPr lang="pt-PT"/>
-          </a:p>
-        </p:txBody>
-      </p:sp>
-      <p:sp>
-        <p:nvSpPr>
-          <p:cNvPr id="18" name="Text Box 6">
-            <a:extLst>
-              <a:ext uri="{FF2B5EF4-FFF2-40B4-BE49-F238E27FC236}">
-                <a16:creationId xmlns:a16="http://schemas.microsoft.com/office/drawing/2014/main" id="{D0A47A3A-CE2D-550C-3B05-B90C118A97B2}"/>
-              </a:ext>
-            </a:extLst>
-          </p:cNvPr>
-          <p:cNvSpPr txBox="1">
-            <a:spLocks noChangeArrowheads="1"/>
-          </p:cNvSpPr>
-          <p:nvPr/>
-        </p:nvSpPr>
-        <p:spPr bwMode="auto">
-          <a:xfrm>
-            <a:off x="2004711" y="3284985"/>
-            <a:ext cx="837089" cy="307777"/>
-          </a:xfrm>
-          <a:prstGeom prst="rect">
-            <a:avLst/>
-          </a:prstGeom>
-          <a:noFill/>
-          <a:ln w="9525">
-            <a:noFill/>
-            <a:miter lim="800000"/>
-            <a:headEnd/>
-            <a:tailEnd/>
-          </a:ln>
-        </p:spPr>
-        <p:txBody>
-          <a:bodyPr wrap="none">
-            <a:spAutoFit/>
-          </a:bodyPr>
-          <a:lstStyle/>
-          <a:p>
-            <a:pPr>
-              <a:spcBef>
-                <a:spcPts val="0"/>
-              </a:spcBef>
-            </a:pPr>
-            <a:r>
-              <a:rPr lang="pt-PT" sz="1400" b="1" dirty="0">
-                <a:solidFill>
-                  <a:schemeClr val="tx1"/>
-                </a:solidFill>
-              </a:rPr>
-              <a:t>Modelos</a:t>
-            </a:r>
-          </a:p>
-        </p:txBody>
-      </p:sp>
-      <p:sp>
-        <p:nvSpPr>
-          <p:cNvPr id="23" name="Line 31">
-            <a:extLst>
-              <a:ext uri="{FF2B5EF4-FFF2-40B4-BE49-F238E27FC236}">
-                <a16:creationId xmlns:a16="http://schemas.microsoft.com/office/drawing/2014/main" id="{E605F218-E992-B973-F010-51972182FE59}"/>
-              </a:ext>
-            </a:extLst>
-          </p:cNvPr>
-          <p:cNvSpPr>
-            <a:spLocks noChangeShapeType="1"/>
-          </p:cNvSpPr>
-          <p:nvPr/>
-        </p:nvSpPr>
-        <p:spPr bwMode="auto">
-          <a:xfrm rot="5400000" flipV="1">
-            <a:off x="3561798" y="2843960"/>
-            <a:ext cx="450000" cy="900000"/>
-          </a:xfrm>
-          <a:prstGeom prst="line">
-            <a:avLst/>
-          </a:prstGeom>
-          <a:noFill/>
-          <a:ln w="9525">
-            <a:solidFill>
-              <a:schemeClr val="tx1"/>
-            </a:solidFill>
-            <a:round/>
-            <a:headEnd/>
-            <a:tailEnd type="triangle" w="med" len="med"/>
-          </a:ln>
-        </p:spPr>
-        <p:txBody>
-          <a:bodyPr/>
-          <a:lstStyle/>
-          <a:p>
-            <a:endParaRPr lang="pt-PT"/>
-          </a:p>
-        </p:txBody>
-      </p:sp>
-      <p:sp>
-        <p:nvSpPr>
-          <p:cNvPr id="28" name="Cube 27">
-            <a:extLst>
-              <a:ext uri="{FF2B5EF4-FFF2-40B4-BE49-F238E27FC236}">
-                <a16:creationId xmlns:a16="http://schemas.microsoft.com/office/drawing/2014/main" id="{E944B7E8-777B-5E32-4B4B-2BDF22A6CBB3}"/>
-              </a:ext>
-            </a:extLst>
-          </p:cNvPr>
-          <p:cNvSpPr/>
-          <p:nvPr/>
-        </p:nvSpPr>
-        <p:spPr bwMode="auto">
-          <a:xfrm>
-            <a:off x="2148726" y="2492896"/>
-            <a:ext cx="576064" cy="1153180"/>
-          </a:xfrm>
-          <a:prstGeom prst="cube">
-            <a:avLst/>
-          </a:prstGeom>
-          <a:solidFill>
-            <a:schemeClr val="bg1"/>
-          </a:solidFill>
-          <a:ln w="9525" cap="flat" cmpd="sng" algn="ctr">
-            <a:solidFill>
-              <a:schemeClr val="tx1"/>
-            </a:solidFill>
-            <a:prstDash val="solid"/>
-            <a:round/>
-            <a:headEnd type="none" w="med" len="med"/>
-            <a:tailEnd type="none" w="med" len="med"/>
-          </a:ln>
-          <a:effectLst/>
-        </p:spPr>
-        <p:txBody>
-          <a:bodyPr vert="horz" wrap="square" lIns="91440" tIns="45720" rIns="91440" bIns="45720" numCol="1" rtlCol="0" anchor="t" anchorCtr="0" compatLnSpc="1">
-            <a:prstTxWarp prst="textNoShape">
-              <a:avLst/>
-            </a:prstTxWarp>
-            <a:spAutoFit/>
-          </a:bodyPr>
-          <a:lstStyle/>
-          <a:p>
-            <a:endParaRPr lang="pt-PT"/>
-          </a:p>
-        </p:txBody>
-      </p:sp>
-    </p:spTree>
-    <p:extLst>
-      <p:ext uri="{BB962C8B-B14F-4D97-AF65-F5344CB8AC3E}">
-        <p14:creationId xmlns:p14="http://schemas.microsoft.com/office/powerpoint/2010/main" val="1530934277"/>
-      </p:ext>
-    </p:extLst>
-  </p:cSld>
-  <p:clrMapOvr>
-    <a:masterClrMapping/>
-  </p:clrMapOvr>
-</p:sld>
-</file>
-
-<file path=ppt/slides/slide34.xml><?xml version="1.0" encoding="utf-8"?>
-<p:sld xmlns:a="http://schemas.openxmlformats.org/drawingml/2006/main" xmlns:r="http://schemas.openxmlformats.org/officeDocument/2006/relationships" xmlns:p="http://schemas.openxmlformats.org/presentationml/2006/main">
-  <p:cSld>
-    <p:spTree>
-      <p:nvGrpSpPr>
-        <p:cNvPr id="1" name=""/>
-        <p:cNvGrpSpPr/>
-        <p:nvPr/>
-      </p:nvGrpSpPr>
-      <p:grpSpPr>
-        <a:xfrm>
-          <a:off x="0" y="0"/>
-          <a:ext cx="0" cy="0"/>
-          <a:chOff x="0" y="0"/>
-          <a:chExt cx="0" cy="0"/>
-        </a:xfrm>
-      </p:grpSpPr>
-      <p:sp>
-        <p:nvSpPr>
-          <p:cNvPr id="17413" name="Text Box 39"/>
-          <p:cNvSpPr txBox="1">
-            <a:spLocks noChangeArrowheads="1"/>
-          </p:cNvSpPr>
-          <p:nvPr/>
-        </p:nvSpPr>
-        <p:spPr bwMode="auto">
-          <a:xfrm rot="5400000" flipV="1">
-            <a:off x="9299576" y="946151"/>
-            <a:ext cx="504825" cy="1006475"/>
-          </a:xfrm>
-          <a:prstGeom prst="rect">
-            <a:avLst/>
-          </a:prstGeom>
-          <a:noFill/>
-          <a:ln w="9525">
-            <a:noFill/>
-            <a:miter lim="800000"/>
-            <a:headEnd/>
-            <a:tailEnd/>
-          </a:ln>
-        </p:spPr>
-        <p:txBody>
-          <a:bodyPr>
-            <a:spAutoFit/>
-          </a:bodyPr>
-          <a:lstStyle/>
-          <a:p>
-            <a:r>
-              <a:rPr lang="pt-PT">
-                <a:solidFill>
-                  <a:srgbClr val="CC301F"/>
-                </a:solidFill>
-              </a:rPr>
-              <a:t>«</a:t>
-            </a:r>
-          </a:p>
-        </p:txBody>
-      </p:sp>
-      <p:sp>
-        <p:nvSpPr>
-          <p:cNvPr id="8194" name="Rectangle 2"/>
-          <p:cNvSpPr>
-            <a:spLocks noChangeArrowheads="1"/>
-          </p:cNvSpPr>
-          <p:nvPr/>
-        </p:nvSpPr>
-        <p:spPr bwMode="auto">
-          <a:xfrm>
-            <a:off x="1524001" y="-507831"/>
-            <a:ext cx="184731" cy="1015663"/>
-          </a:xfrm>
-          <a:prstGeom prst="rect">
-            <a:avLst/>
-          </a:prstGeom>
-          <a:noFill/>
-          <a:ln w="9525">
-            <a:noFill/>
-            <a:miter lim="800000"/>
-            <a:headEnd/>
-            <a:tailEnd/>
-          </a:ln>
-          <a:effectLst/>
-        </p:spPr>
-        <p:txBody>
-          <a:bodyPr vert="horz" wrap="none" lIns="91440" tIns="45720" rIns="91440" bIns="45720" numCol="1" anchor="ctr" anchorCtr="0" compatLnSpc="1">
-            <a:prstTxWarp prst="textNoShape">
-              <a:avLst/>
-            </a:prstTxWarp>
-            <a:spAutoFit/>
-          </a:bodyPr>
-          <a:lstStyle/>
-          <a:p>
-            <a:endParaRPr lang="en-US"/>
-          </a:p>
-        </p:txBody>
-      </p:sp>
-      <p:sp>
-        <p:nvSpPr>
-          <p:cNvPr id="8196" name="Rectangle 4"/>
-          <p:cNvSpPr>
-            <a:spLocks noChangeArrowheads="1"/>
-          </p:cNvSpPr>
-          <p:nvPr/>
-        </p:nvSpPr>
-        <p:spPr bwMode="auto">
-          <a:xfrm>
-            <a:off x="1524001" y="-507831"/>
-            <a:ext cx="184731" cy="1015663"/>
-          </a:xfrm>
-          <a:prstGeom prst="rect">
-            <a:avLst/>
-          </a:prstGeom>
-          <a:noFill/>
-          <a:ln w="9525">
-            <a:noFill/>
-            <a:miter lim="800000"/>
-            <a:headEnd/>
-            <a:tailEnd/>
-          </a:ln>
-          <a:effectLst/>
-        </p:spPr>
-        <p:txBody>
-          <a:bodyPr vert="horz" wrap="none" lIns="91440" tIns="45720" rIns="91440" bIns="45720" numCol="1" anchor="ctr" anchorCtr="0" compatLnSpc="1">
-            <a:prstTxWarp prst="textNoShape">
-              <a:avLst/>
-            </a:prstTxWarp>
-            <a:spAutoFit/>
-          </a:bodyPr>
-          <a:lstStyle/>
-          <a:p>
-            <a:endParaRPr lang="en-US"/>
-          </a:p>
-        </p:txBody>
-      </p:sp>
-      <p:sp>
-        <p:nvSpPr>
-          <p:cNvPr id="2" name="Text Box 376">
-            <a:extLst>
-              <a:ext uri="{FF2B5EF4-FFF2-40B4-BE49-F238E27FC236}">
-                <a16:creationId xmlns:a16="http://schemas.microsoft.com/office/drawing/2014/main" id="{EB6B6BB2-6F69-BEBB-9BFD-CD4095E03018}"/>
-              </a:ext>
-            </a:extLst>
-          </p:cNvPr>
-          <p:cNvSpPr txBox="1">
-            <a:spLocks noChangeArrowheads="1"/>
-          </p:cNvSpPr>
-          <p:nvPr/>
-        </p:nvSpPr>
-        <p:spPr bwMode="auto">
-          <a:xfrm>
-            <a:off x="2206626" y="1511710"/>
-            <a:ext cx="7705725" cy="523875"/>
-          </a:xfrm>
-          <a:prstGeom prst="rect">
-            <a:avLst/>
-          </a:prstGeom>
-          <a:noFill/>
-          <a:ln w="9525">
-            <a:noFill/>
-            <a:miter lim="800000"/>
-            <a:headEnd/>
-            <a:tailEnd/>
-          </a:ln>
-        </p:spPr>
-        <p:txBody>
-          <a:bodyPr>
-            <a:spAutoFit/>
-          </a:bodyPr>
-          <a:lstStyle/>
-          <a:p>
-            <a:pPr>
-              <a:spcBef>
-                <a:spcPct val="0"/>
-              </a:spcBef>
-            </a:pPr>
-            <a:r>
-              <a:rPr lang="pt-PT" sz="2800" b="1" dirty="0">
-                <a:solidFill>
-                  <a:srgbClr val="CC301F"/>
-                </a:solidFill>
-              </a:rPr>
-              <a:t>»</a:t>
-            </a:r>
-            <a:r>
-              <a:rPr lang="pt-PT" sz="2800" dirty="0">
-                <a:solidFill>
-                  <a:schemeClr val="bg2"/>
-                </a:solidFill>
-                <a:latin typeface="Humnst777 BT" pitchFamily="34" charset="0"/>
-              </a:rPr>
-              <a:t> </a:t>
-            </a:r>
-            <a:r>
-              <a:rPr lang="pt-PT" sz="2800" dirty="0">
-                <a:solidFill>
-                  <a:schemeClr val="bg1">
-                    <a:lumMod val="50000"/>
-                  </a:schemeClr>
-                </a:solidFill>
-                <a:latin typeface="Humnst777 BT" pitchFamily="34" charset="0"/>
-              </a:rPr>
-              <a:t>Visão Geral</a:t>
-            </a:r>
-            <a:endParaRPr lang="pt-PT" sz="2800" b="1" i="1" dirty="0">
-              <a:solidFill>
-                <a:schemeClr val="bg1">
-                  <a:lumMod val="50000"/>
-                </a:schemeClr>
-              </a:solidFill>
-              <a:latin typeface="Humnst777 BT" pitchFamily="34" charset="0"/>
-            </a:endParaRPr>
-          </a:p>
-        </p:txBody>
-      </p:sp>
-      <p:sp>
-        <p:nvSpPr>
-          <p:cNvPr id="3" name="Rectangle 38">
-            <a:extLst>
-              <a:ext uri="{FF2B5EF4-FFF2-40B4-BE49-F238E27FC236}">
-                <a16:creationId xmlns:a16="http://schemas.microsoft.com/office/drawing/2014/main" id="{EA09A705-6330-F9C2-57C5-4CD7AE9AFE4E}"/>
-              </a:ext>
-            </a:extLst>
-          </p:cNvPr>
-          <p:cNvSpPr>
-            <a:spLocks noChangeArrowheads="1"/>
-          </p:cNvSpPr>
-          <p:nvPr/>
-        </p:nvSpPr>
-        <p:spPr bwMode="auto">
-          <a:xfrm>
-            <a:off x="4295776" y="404814"/>
-            <a:ext cx="6048375" cy="854075"/>
-          </a:xfrm>
-          <a:prstGeom prst="rect">
-            <a:avLst/>
-          </a:prstGeom>
-          <a:noFill/>
-          <a:ln w="9525">
-            <a:noFill/>
-            <a:miter lim="800000"/>
-            <a:headEnd/>
-            <a:tailEnd/>
-          </a:ln>
-        </p:spPr>
-        <p:txBody>
-          <a:bodyPr anchor="ctr"/>
-          <a:lstStyle/>
-          <a:p>
-            <a:pPr algn="r">
-              <a:spcBef>
-                <a:spcPct val="0"/>
-              </a:spcBef>
-            </a:pPr>
-            <a:r>
-              <a:rPr lang="pt-PT" sz="3800" dirty="0">
-                <a:solidFill>
-                  <a:schemeClr val="bg1">
-                    <a:lumMod val="50000"/>
-                  </a:schemeClr>
-                </a:solidFill>
-                <a:latin typeface="Humnst777 BT" pitchFamily="34" charset="0"/>
-              </a:rPr>
-              <a:t>Avaliação de modelos</a:t>
-            </a:r>
-          </a:p>
-        </p:txBody>
-      </p:sp>
-      <p:sp>
-        <p:nvSpPr>
-          <p:cNvPr id="4" name="Cube 3">
-            <a:extLst>
-              <a:ext uri="{FF2B5EF4-FFF2-40B4-BE49-F238E27FC236}">
-                <a16:creationId xmlns:a16="http://schemas.microsoft.com/office/drawing/2014/main" id="{B128C0FD-79D1-FCE6-FDFF-91D8CF6CB86B}"/>
-              </a:ext>
-            </a:extLst>
-          </p:cNvPr>
-          <p:cNvSpPr/>
-          <p:nvPr/>
-        </p:nvSpPr>
-        <p:spPr bwMode="auto">
-          <a:xfrm>
-            <a:off x="2148726" y="2492896"/>
-            <a:ext cx="576064" cy="1153180"/>
-          </a:xfrm>
-          <a:prstGeom prst="cube">
-            <a:avLst/>
-          </a:prstGeom>
-          <a:solidFill>
-            <a:schemeClr val="bg1"/>
-          </a:solidFill>
-          <a:ln w="9525" cap="flat" cmpd="sng" algn="ctr">
-            <a:solidFill>
-              <a:schemeClr val="tx1"/>
-            </a:solidFill>
-            <a:prstDash val="solid"/>
-            <a:round/>
-            <a:headEnd type="none" w="med" len="med"/>
-            <a:tailEnd type="none" w="med" len="med"/>
-          </a:ln>
-          <a:effectLst/>
-        </p:spPr>
-        <p:txBody>
-          <a:bodyPr vert="horz" wrap="square" lIns="91440" tIns="45720" rIns="91440" bIns="45720" numCol="1" rtlCol="0" anchor="t" anchorCtr="0" compatLnSpc="1">
-            <a:prstTxWarp prst="textNoShape">
-              <a:avLst/>
-            </a:prstTxWarp>
-            <a:spAutoFit/>
-          </a:bodyPr>
-          <a:lstStyle/>
-          <a:p>
-            <a:endParaRPr lang="pt-PT"/>
-          </a:p>
-        </p:txBody>
-      </p:sp>
-      <p:sp>
-        <p:nvSpPr>
-          <p:cNvPr id="5" name="Cube 4">
-            <a:extLst>
-              <a:ext uri="{FF2B5EF4-FFF2-40B4-BE49-F238E27FC236}">
-                <a16:creationId xmlns:a16="http://schemas.microsoft.com/office/drawing/2014/main" id="{DEF3CD51-7FAF-4DD5-E79B-E80D897F783F}"/>
-              </a:ext>
-            </a:extLst>
-          </p:cNvPr>
-          <p:cNvSpPr/>
-          <p:nvPr/>
-        </p:nvSpPr>
-        <p:spPr bwMode="auto">
-          <a:xfrm>
-            <a:off x="2652782" y="2564904"/>
-            <a:ext cx="576064" cy="1153180"/>
-          </a:xfrm>
-          <a:prstGeom prst="cube">
-            <a:avLst/>
-          </a:prstGeom>
-          <a:solidFill>
-            <a:schemeClr val="bg1"/>
-          </a:solidFill>
-          <a:ln w="9525" cap="flat" cmpd="sng" algn="ctr">
-            <a:solidFill>
-              <a:schemeClr val="tx1"/>
-            </a:solidFill>
-            <a:prstDash val="solid"/>
-            <a:round/>
-            <a:headEnd type="none" w="med" len="med"/>
-            <a:tailEnd type="none" w="med" len="med"/>
-          </a:ln>
-          <a:effectLst/>
-        </p:spPr>
-        <p:txBody>
-          <a:bodyPr vert="horz" wrap="square" lIns="91440" tIns="45720" rIns="91440" bIns="45720" numCol="1" rtlCol="0" anchor="t" anchorCtr="0" compatLnSpc="1">
-            <a:prstTxWarp prst="textNoShape">
-              <a:avLst/>
-            </a:prstTxWarp>
-            <a:spAutoFit/>
-          </a:bodyPr>
-          <a:lstStyle/>
-          <a:p>
-            <a:endParaRPr lang="pt-PT"/>
-          </a:p>
-        </p:txBody>
-      </p:sp>
-      <p:sp>
-        <p:nvSpPr>
-          <p:cNvPr id="6" name="Text Box 6">
-            <a:extLst>
-              <a:ext uri="{FF2B5EF4-FFF2-40B4-BE49-F238E27FC236}">
-                <a16:creationId xmlns:a16="http://schemas.microsoft.com/office/drawing/2014/main" id="{3A619511-069C-CE8C-A9E6-F5D13899867C}"/>
-              </a:ext>
-            </a:extLst>
-          </p:cNvPr>
-          <p:cNvSpPr txBox="1">
-            <a:spLocks noChangeArrowheads="1"/>
-          </p:cNvSpPr>
-          <p:nvPr/>
-        </p:nvSpPr>
-        <p:spPr bwMode="auto">
-          <a:xfrm>
-            <a:off x="2004710" y="5157193"/>
-            <a:ext cx="651140" cy="307777"/>
-          </a:xfrm>
-          <a:prstGeom prst="rect">
-            <a:avLst/>
-          </a:prstGeom>
-          <a:noFill/>
-          <a:ln w="9525">
-            <a:noFill/>
-            <a:miter lim="800000"/>
-            <a:headEnd/>
-            <a:tailEnd/>
-          </a:ln>
-        </p:spPr>
-        <p:txBody>
-          <a:bodyPr wrap="none">
-            <a:spAutoFit/>
-          </a:bodyPr>
-          <a:lstStyle/>
-          <a:p>
-            <a:pPr>
-              <a:spcBef>
-                <a:spcPts val="0"/>
-              </a:spcBef>
-            </a:pPr>
-            <a:r>
-              <a:rPr lang="pt-PT" sz="1400" b="1" dirty="0">
-                <a:solidFill>
-                  <a:schemeClr val="tx1"/>
-                </a:solidFill>
-              </a:rPr>
-              <a:t>Dados</a:t>
-            </a:r>
-          </a:p>
-        </p:txBody>
-      </p:sp>
-      <p:sp>
-        <p:nvSpPr>
-          <p:cNvPr id="7" name="Text Box 29">
-            <a:extLst>
-              <a:ext uri="{FF2B5EF4-FFF2-40B4-BE49-F238E27FC236}">
-                <a16:creationId xmlns:a16="http://schemas.microsoft.com/office/drawing/2014/main" id="{0ECE434C-3A76-1B9A-2D21-109834274A29}"/>
-              </a:ext>
-            </a:extLst>
-          </p:cNvPr>
-          <p:cNvSpPr txBox="1">
-            <a:spLocks noChangeArrowheads="1"/>
-          </p:cNvSpPr>
-          <p:nvPr/>
-        </p:nvSpPr>
-        <p:spPr bwMode="auto">
-          <a:xfrm>
-            <a:off x="3012822" y="4293097"/>
-            <a:ext cx="572464" cy="276999"/>
-          </a:xfrm>
-          <a:prstGeom prst="rect">
-            <a:avLst/>
-          </a:prstGeom>
-          <a:noFill/>
-          <a:ln w="9525">
-            <a:noFill/>
-            <a:miter lim="800000"/>
-            <a:headEnd/>
-            <a:tailEnd/>
-          </a:ln>
-        </p:spPr>
-        <p:txBody>
-          <a:bodyPr wrap="none">
-            <a:spAutoFit/>
-          </a:bodyPr>
-          <a:lstStyle/>
-          <a:p>
-            <a:pPr>
-              <a:spcBef>
-                <a:spcPts val="0"/>
-              </a:spcBef>
-            </a:pPr>
-            <a:r>
-              <a:rPr lang="pt-PT" sz="1200" b="1" dirty="0">
-                <a:solidFill>
-                  <a:schemeClr val="tx1"/>
-                </a:solidFill>
-              </a:rPr>
-              <a:t>treino</a:t>
-            </a:r>
-          </a:p>
-        </p:txBody>
-      </p:sp>
-      <p:sp>
-        <p:nvSpPr>
-          <p:cNvPr id="10" name="Line 31">
-            <a:extLst>
-              <a:ext uri="{FF2B5EF4-FFF2-40B4-BE49-F238E27FC236}">
-                <a16:creationId xmlns:a16="http://schemas.microsoft.com/office/drawing/2014/main" id="{13114C4A-E9F6-769B-4808-561F0D77E19D}"/>
-              </a:ext>
-            </a:extLst>
-          </p:cNvPr>
-          <p:cNvSpPr>
-            <a:spLocks noChangeShapeType="1"/>
-          </p:cNvSpPr>
-          <p:nvPr/>
-        </p:nvSpPr>
-        <p:spPr bwMode="auto">
-          <a:xfrm flipV="1">
-            <a:off x="2724830" y="4329120"/>
-            <a:ext cx="360000" cy="180000"/>
-          </a:xfrm>
-          <a:prstGeom prst="line">
-            <a:avLst/>
-          </a:prstGeom>
-          <a:noFill/>
-          <a:ln w="9525">
-            <a:solidFill>
-              <a:schemeClr val="tx1"/>
-            </a:solidFill>
-            <a:round/>
-            <a:headEnd/>
-            <a:tailEnd type="triangle" w="med" len="med"/>
-          </a:ln>
-        </p:spPr>
-        <p:txBody>
-          <a:bodyPr/>
-          <a:lstStyle/>
-          <a:p>
-            <a:endParaRPr lang="pt-PT"/>
-          </a:p>
-        </p:txBody>
-      </p:sp>
-      <p:sp>
-        <p:nvSpPr>
-          <p:cNvPr id="12" name="Text Box 26">
-            <a:extLst>
-              <a:ext uri="{FF2B5EF4-FFF2-40B4-BE49-F238E27FC236}">
-                <a16:creationId xmlns:a16="http://schemas.microsoft.com/office/drawing/2014/main" id="{D65E235C-FEBD-1232-1F7B-8FD15AE519A5}"/>
-              </a:ext>
-            </a:extLst>
-          </p:cNvPr>
-          <p:cNvSpPr txBox="1">
-            <a:spLocks noChangeArrowheads="1"/>
-          </p:cNvSpPr>
-          <p:nvPr/>
-        </p:nvSpPr>
-        <p:spPr bwMode="auto">
-          <a:xfrm>
-            <a:off x="2651698" y="4149081"/>
-            <a:ext cx="436338" cy="307777"/>
-          </a:xfrm>
-          <a:prstGeom prst="rect">
-            <a:avLst/>
-          </a:prstGeom>
-          <a:noFill/>
-          <a:ln w="9525">
-            <a:noFill/>
-            <a:miter lim="800000"/>
-            <a:headEnd/>
-            <a:tailEnd/>
-          </a:ln>
-        </p:spPr>
-        <p:txBody>
-          <a:bodyPr wrap="none">
-            <a:spAutoFit/>
-          </a:bodyPr>
-          <a:lstStyle/>
-          <a:p>
-            <a:pPr>
-              <a:spcBef>
-                <a:spcPts val="0"/>
-              </a:spcBef>
-            </a:pPr>
-            <a:r>
-              <a:rPr lang="pt-PT" sz="1400" dirty="0">
-                <a:solidFill>
-                  <a:srgbClr val="003E6C"/>
-                </a:solidFill>
-              </a:rPr>
-              <a:t>2/4</a:t>
-            </a:r>
-          </a:p>
-        </p:txBody>
-      </p:sp>
-      <p:sp>
-        <p:nvSpPr>
-          <p:cNvPr id="13" name="Line 31">
-            <a:extLst>
-              <a:ext uri="{FF2B5EF4-FFF2-40B4-BE49-F238E27FC236}">
-                <a16:creationId xmlns:a16="http://schemas.microsoft.com/office/drawing/2014/main" id="{FA53B61B-5B40-629A-D00D-908ED88CF33C}"/>
-              </a:ext>
-            </a:extLst>
-          </p:cNvPr>
-          <p:cNvSpPr>
-            <a:spLocks noChangeShapeType="1"/>
-          </p:cNvSpPr>
-          <p:nvPr/>
-        </p:nvSpPr>
-        <p:spPr bwMode="auto">
-          <a:xfrm rot="5400000" flipV="1">
-            <a:off x="2814830" y="5139200"/>
-            <a:ext cx="180000" cy="360000"/>
-          </a:xfrm>
-          <a:prstGeom prst="line">
-            <a:avLst/>
-          </a:prstGeom>
-          <a:noFill/>
-          <a:ln w="9525">
-            <a:solidFill>
-              <a:schemeClr val="tx1"/>
-            </a:solidFill>
-            <a:round/>
-            <a:headEnd/>
-            <a:tailEnd type="triangle" w="med" len="med"/>
-          </a:ln>
-        </p:spPr>
-        <p:txBody>
-          <a:bodyPr/>
-          <a:lstStyle/>
-          <a:p>
-            <a:endParaRPr lang="pt-PT"/>
-          </a:p>
-        </p:txBody>
-      </p:sp>
-      <p:sp>
-        <p:nvSpPr>
-          <p:cNvPr id="14" name="Text Box 26">
-            <a:extLst>
-              <a:ext uri="{FF2B5EF4-FFF2-40B4-BE49-F238E27FC236}">
-                <a16:creationId xmlns:a16="http://schemas.microsoft.com/office/drawing/2014/main" id="{DA8E19DA-7D48-DED6-54F7-ECA920171657}"/>
-              </a:ext>
-            </a:extLst>
-          </p:cNvPr>
-          <p:cNvSpPr txBox="1">
-            <a:spLocks noChangeArrowheads="1"/>
-          </p:cNvSpPr>
-          <p:nvPr/>
-        </p:nvSpPr>
-        <p:spPr bwMode="auto">
-          <a:xfrm>
-            <a:off x="2651698" y="5013177"/>
-            <a:ext cx="433132" cy="307777"/>
-          </a:xfrm>
-          <a:prstGeom prst="rect">
-            <a:avLst/>
-          </a:prstGeom>
-          <a:noFill/>
-          <a:ln w="9525">
-            <a:noFill/>
-            <a:miter lim="800000"/>
-            <a:headEnd/>
-            <a:tailEnd/>
-          </a:ln>
-        </p:spPr>
-        <p:txBody>
-          <a:bodyPr wrap="none">
-            <a:spAutoFit/>
-          </a:bodyPr>
-          <a:lstStyle/>
-          <a:p>
-            <a:pPr>
-              <a:spcBef>
-                <a:spcPts val="0"/>
-              </a:spcBef>
-            </a:pPr>
-            <a:r>
-              <a:rPr lang="pt-PT" sz="1400" dirty="0">
-                <a:solidFill>
-                  <a:srgbClr val="003E6C"/>
-                </a:solidFill>
-              </a:rPr>
-              <a:t>1/4</a:t>
-            </a:r>
-          </a:p>
-        </p:txBody>
-      </p:sp>
-      <p:sp>
-        <p:nvSpPr>
-          <p:cNvPr id="15" name="Text Box 29">
-            <a:extLst>
-              <a:ext uri="{FF2B5EF4-FFF2-40B4-BE49-F238E27FC236}">
-                <a16:creationId xmlns:a16="http://schemas.microsoft.com/office/drawing/2014/main" id="{6DC5D463-E163-2F45-3F76-9156FDE607B3}"/>
-              </a:ext>
-            </a:extLst>
-          </p:cNvPr>
-          <p:cNvSpPr txBox="1">
-            <a:spLocks noChangeArrowheads="1"/>
-          </p:cNvSpPr>
-          <p:nvPr/>
-        </p:nvSpPr>
-        <p:spPr bwMode="auto">
-          <a:xfrm>
-            <a:off x="3012823" y="5816298"/>
-            <a:ext cx="499817" cy="276999"/>
-          </a:xfrm>
-          <a:prstGeom prst="rect">
-            <a:avLst/>
-          </a:prstGeom>
-          <a:noFill/>
-          <a:ln w="9525">
-            <a:noFill/>
-            <a:miter lim="800000"/>
-            <a:headEnd/>
-            <a:tailEnd/>
-          </a:ln>
-        </p:spPr>
-        <p:txBody>
-          <a:bodyPr wrap="none">
-            <a:spAutoFit/>
-          </a:bodyPr>
-          <a:lstStyle/>
-          <a:p>
-            <a:pPr>
-              <a:spcBef>
-                <a:spcPts val="0"/>
-              </a:spcBef>
-            </a:pPr>
-            <a:r>
-              <a:rPr lang="pt-PT" sz="1200" b="1" dirty="0">
-                <a:solidFill>
-                  <a:schemeClr val="tx1"/>
-                </a:solidFill>
-              </a:rPr>
-              <a:t>teste</a:t>
-            </a:r>
-          </a:p>
-        </p:txBody>
-      </p:sp>
-      <p:sp>
-        <p:nvSpPr>
-          <p:cNvPr id="16" name="Text Box 29">
-            <a:extLst>
-              <a:ext uri="{FF2B5EF4-FFF2-40B4-BE49-F238E27FC236}">
-                <a16:creationId xmlns:a16="http://schemas.microsoft.com/office/drawing/2014/main" id="{AA057A22-F2CE-E2A7-232A-5DDB9335D9AB}"/>
-              </a:ext>
-            </a:extLst>
-          </p:cNvPr>
-          <p:cNvSpPr txBox="1">
-            <a:spLocks noChangeArrowheads="1"/>
-          </p:cNvSpPr>
-          <p:nvPr/>
-        </p:nvSpPr>
-        <p:spPr bwMode="auto">
-          <a:xfrm>
-            <a:off x="4007769" y="2132857"/>
-            <a:ext cx="1019703" cy="307777"/>
-          </a:xfrm>
-          <a:prstGeom prst="rect">
-            <a:avLst/>
-          </a:prstGeom>
-          <a:noFill/>
-          <a:ln w="9525">
-            <a:noFill/>
-            <a:miter lim="800000"/>
-            <a:headEnd/>
-            <a:tailEnd/>
-          </a:ln>
-        </p:spPr>
-        <p:txBody>
-          <a:bodyPr wrap="none">
-            <a:spAutoFit/>
-          </a:bodyPr>
-          <a:lstStyle/>
-          <a:p>
-            <a:pPr>
-              <a:spcBef>
-                <a:spcPts val="0"/>
-              </a:spcBef>
-            </a:pPr>
-            <a:r>
-              <a:rPr lang="pt-PT" sz="1400" b="1" dirty="0">
-                <a:solidFill>
-                  <a:srgbClr val="003E6C"/>
-                </a:solidFill>
-              </a:rPr>
-              <a:t>Fase Treino</a:t>
-            </a:r>
-          </a:p>
-        </p:txBody>
-      </p:sp>
-      <p:sp>
-        <p:nvSpPr>
-          <p:cNvPr id="17" name="Text Box 29">
-            <a:extLst>
-              <a:ext uri="{FF2B5EF4-FFF2-40B4-BE49-F238E27FC236}">
-                <a16:creationId xmlns:a16="http://schemas.microsoft.com/office/drawing/2014/main" id="{ABA72F21-AEAE-3591-5E3C-C499B85B99D2}"/>
-              </a:ext>
-            </a:extLst>
-          </p:cNvPr>
-          <p:cNvSpPr txBox="1">
-            <a:spLocks noChangeArrowheads="1"/>
-          </p:cNvSpPr>
-          <p:nvPr/>
-        </p:nvSpPr>
-        <p:spPr bwMode="auto">
-          <a:xfrm>
-            <a:off x="7233590" y="2132857"/>
-            <a:ext cx="934295" cy="307777"/>
-          </a:xfrm>
-          <a:prstGeom prst="rect">
-            <a:avLst/>
-          </a:prstGeom>
-          <a:noFill/>
-          <a:ln w="9525">
-            <a:noFill/>
-            <a:miter lim="800000"/>
-            <a:headEnd/>
-            <a:tailEnd/>
-          </a:ln>
-        </p:spPr>
-        <p:txBody>
-          <a:bodyPr wrap="none">
-            <a:spAutoFit/>
-          </a:bodyPr>
-          <a:lstStyle/>
-          <a:p>
-            <a:pPr>
-              <a:spcBef>
-                <a:spcPts val="0"/>
-              </a:spcBef>
-            </a:pPr>
-            <a:r>
-              <a:rPr lang="pt-PT" sz="1400" b="1" dirty="0">
-                <a:solidFill>
-                  <a:srgbClr val="003E6C"/>
-                </a:solidFill>
-              </a:rPr>
-              <a:t>Fase Teste</a:t>
-            </a:r>
-          </a:p>
-        </p:txBody>
-      </p:sp>
-      <p:sp>
-        <p:nvSpPr>
-          <p:cNvPr id="18" name="Text Box 29">
-            <a:extLst>
-              <a:ext uri="{FF2B5EF4-FFF2-40B4-BE49-F238E27FC236}">
-                <a16:creationId xmlns:a16="http://schemas.microsoft.com/office/drawing/2014/main" id="{B41A5F79-8C90-9F58-62AB-A63B8D7977FD}"/>
-              </a:ext>
-            </a:extLst>
-          </p:cNvPr>
-          <p:cNvSpPr txBox="1">
-            <a:spLocks noChangeArrowheads="1"/>
-          </p:cNvSpPr>
-          <p:nvPr/>
-        </p:nvSpPr>
-        <p:spPr bwMode="auto">
-          <a:xfrm>
-            <a:off x="8709611" y="2113112"/>
-            <a:ext cx="1267719" cy="307777"/>
-          </a:xfrm>
-          <a:prstGeom prst="rect">
-            <a:avLst/>
-          </a:prstGeom>
-          <a:noFill/>
-          <a:ln w="9525">
-            <a:noFill/>
-            <a:miter lim="800000"/>
-            <a:headEnd/>
-            <a:tailEnd/>
-          </a:ln>
-        </p:spPr>
-        <p:txBody>
-          <a:bodyPr wrap="none">
-            <a:spAutoFit/>
-          </a:bodyPr>
-          <a:lstStyle/>
-          <a:p>
-            <a:pPr>
-              <a:spcBef>
-                <a:spcPts val="0"/>
-              </a:spcBef>
-            </a:pPr>
-            <a:r>
-              <a:rPr lang="pt-PT" sz="1400" b="1" dirty="0">
-                <a:solidFill>
-                  <a:srgbClr val="003E6C"/>
-                </a:solidFill>
-              </a:rPr>
-              <a:t>Fase Aplicação</a:t>
-            </a:r>
-          </a:p>
-        </p:txBody>
-      </p:sp>
-      <p:sp>
-        <p:nvSpPr>
-          <p:cNvPr id="19" name="Cube 18">
-            <a:extLst>
-              <a:ext uri="{FF2B5EF4-FFF2-40B4-BE49-F238E27FC236}">
-                <a16:creationId xmlns:a16="http://schemas.microsoft.com/office/drawing/2014/main" id="{040E1F8D-2F15-9C26-D2F4-50F7431DD571}"/>
-              </a:ext>
-            </a:extLst>
-          </p:cNvPr>
-          <p:cNvSpPr/>
-          <p:nvPr/>
-        </p:nvSpPr>
-        <p:spPr bwMode="auto">
-          <a:xfrm>
-            <a:off x="4308966" y="3356992"/>
-            <a:ext cx="576064" cy="1153180"/>
-          </a:xfrm>
-          <a:prstGeom prst="cube">
-            <a:avLst/>
-          </a:prstGeom>
-          <a:solidFill>
-            <a:schemeClr val="accent1"/>
-          </a:solidFill>
-          <a:ln w="9525" cap="flat" cmpd="sng" algn="ctr">
-            <a:solidFill>
-              <a:schemeClr val="tx1"/>
-            </a:solidFill>
-            <a:prstDash val="solid"/>
-            <a:round/>
-            <a:headEnd type="none" w="med" len="med"/>
-            <a:tailEnd type="none" w="med" len="med"/>
-          </a:ln>
-          <a:effectLst/>
-        </p:spPr>
-        <p:txBody>
-          <a:bodyPr vert="horz" wrap="square" lIns="91440" tIns="45720" rIns="91440" bIns="45720" numCol="1" rtlCol="0" anchor="t" anchorCtr="0" compatLnSpc="1">
-            <a:prstTxWarp prst="textNoShape">
-              <a:avLst/>
-            </a:prstTxWarp>
-            <a:spAutoFit/>
-          </a:bodyPr>
-          <a:lstStyle/>
-          <a:p>
-            <a:endParaRPr lang="pt-PT"/>
-          </a:p>
-        </p:txBody>
-      </p:sp>
-      <p:sp>
-        <p:nvSpPr>
-          <p:cNvPr id="20" name="Can 39">
-            <a:extLst>
-              <a:ext uri="{FF2B5EF4-FFF2-40B4-BE49-F238E27FC236}">
-                <a16:creationId xmlns:a16="http://schemas.microsoft.com/office/drawing/2014/main" id="{BED22CE5-DCB8-6ECF-4C5D-CAC41F6152A7}"/>
-              </a:ext>
-            </a:extLst>
-          </p:cNvPr>
-          <p:cNvSpPr/>
-          <p:nvPr/>
-        </p:nvSpPr>
-        <p:spPr bwMode="auto">
-          <a:xfrm>
-            <a:off x="2148726" y="4293096"/>
-            <a:ext cx="450000" cy="1182648"/>
-          </a:xfrm>
-          <a:prstGeom prst="can">
-            <a:avLst/>
-          </a:prstGeom>
-          <a:solidFill>
-            <a:schemeClr val="accent1"/>
-          </a:solidFill>
-          <a:ln w="9525" cap="flat" cmpd="sng" algn="ctr">
-            <a:solidFill>
-              <a:schemeClr val="tx1"/>
-            </a:solidFill>
-            <a:prstDash val="solid"/>
-            <a:round/>
-            <a:headEnd type="none" w="med" len="med"/>
-            <a:tailEnd type="none" w="med" len="med"/>
-          </a:ln>
-          <a:effectLst/>
-        </p:spPr>
-        <p:txBody>
-          <a:bodyPr vert="horz" wrap="square" lIns="91440" tIns="45720" rIns="91440" bIns="45720" numCol="1" rtlCol="0" anchor="t" anchorCtr="0" compatLnSpc="1">
-            <a:prstTxWarp prst="textNoShape">
-              <a:avLst/>
-            </a:prstTxWarp>
-            <a:spAutoFit/>
-          </a:bodyPr>
-          <a:lstStyle/>
-          <a:p>
-            <a:endParaRPr lang="pt-PT"/>
-          </a:p>
-        </p:txBody>
-      </p:sp>
-      <p:sp>
-        <p:nvSpPr>
-          <p:cNvPr id="21" name="Can 40">
-            <a:extLst>
-              <a:ext uri="{FF2B5EF4-FFF2-40B4-BE49-F238E27FC236}">
-                <a16:creationId xmlns:a16="http://schemas.microsoft.com/office/drawing/2014/main" id="{72299155-0C96-F7DB-56EA-247745DEDA45}"/>
-              </a:ext>
-            </a:extLst>
-          </p:cNvPr>
-          <p:cNvSpPr>
-            <a:spLocks noChangeAspect="1"/>
-          </p:cNvSpPr>
-          <p:nvPr/>
-        </p:nvSpPr>
-        <p:spPr bwMode="auto">
-          <a:xfrm>
-            <a:off x="3156838" y="3861048"/>
-            <a:ext cx="225000" cy="1094244"/>
-          </a:xfrm>
-          <a:prstGeom prst="can">
-            <a:avLst/>
-          </a:prstGeom>
-          <a:solidFill>
-            <a:schemeClr val="accent1"/>
-          </a:solidFill>
-          <a:ln w="9525" cap="flat" cmpd="sng" algn="ctr">
-            <a:solidFill>
-              <a:schemeClr val="tx1"/>
-            </a:solidFill>
-            <a:prstDash val="solid"/>
-            <a:round/>
-            <a:headEnd type="none" w="med" len="med"/>
-            <a:tailEnd type="none" w="med" len="med"/>
-          </a:ln>
-          <a:effectLst/>
-        </p:spPr>
-        <p:txBody>
-          <a:bodyPr vert="horz" wrap="square" lIns="91440" tIns="45720" rIns="91440" bIns="45720" numCol="1" rtlCol="0" anchor="t" anchorCtr="0" compatLnSpc="1">
-            <a:prstTxWarp prst="textNoShape">
-              <a:avLst/>
-            </a:prstTxWarp>
-            <a:spAutoFit/>
-          </a:bodyPr>
-          <a:lstStyle/>
-          <a:p>
-            <a:endParaRPr lang="pt-PT"/>
-          </a:p>
-        </p:txBody>
-      </p:sp>
-      <p:sp>
-        <p:nvSpPr>
-          <p:cNvPr id="22" name="Can 42">
-            <a:extLst>
-              <a:ext uri="{FF2B5EF4-FFF2-40B4-BE49-F238E27FC236}">
-                <a16:creationId xmlns:a16="http://schemas.microsoft.com/office/drawing/2014/main" id="{1A4B3FF6-7DA6-7B67-73A1-37A259E643A1}"/>
-              </a:ext>
-            </a:extLst>
-          </p:cNvPr>
-          <p:cNvSpPr>
-            <a:spLocks noChangeAspect="1"/>
-          </p:cNvSpPr>
-          <p:nvPr/>
-        </p:nvSpPr>
-        <p:spPr bwMode="auto">
-          <a:xfrm>
-            <a:off x="3156838" y="5384249"/>
-            <a:ext cx="225000" cy="1094244"/>
-          </a:xfrm>
-          <a:prstGeom prst="can">
-            <a:avLst/>
-          </a:prstGeom>
-          <a:solidFill>
-            <a:schemeClr val="accent1"/>
-          </a:solidFill>
-          <a:ln w="9525" cap="flat" cmpd="sng" algn="ctr">
-            <a:solidFill>
-              <a:schemeClr val="tx1"/>
-            </a:solidFill>
-            <a:prstDash val="solid"/>
-            <a:round/>
-            <a:headEnd type="none" w="med" len="med"/>
-            <a:tailEnd type="none" w="med" len="med"/>
-          </a:ln>
-          <a:effectLst/>
-        </p:spPr>
-        <p:txBody>
-          <a:bodyPr vert="horz" wrap="square" lIns="91440" tIns="45720" rIns="91440" bIns="45720" numCol="1" rtlCol="0" anchor="t" anchorCtr="0" compatLnSpc="1">
-            <a:prstTxWarp prst="textNoShape">
-              <a:avLst/>
-            </a:prstTxWarp>
-            <a:spAutoFit/>
-          </a:bodyPr>
-          <a:lstStyle/>
-          <a:p>
-            <a:endParaRPr lang="pt-PT"/>
-          </a:p>
-        </p:txBody>
-      </p:sp>
-      <p:sp>
-        <p:nvSpPr>
-          <p:cNvPr id="23" name="Text Box 6">
-            <a:extLst>
-              <a:ext uri="{FF2B5EF4-FFF2-40B4-BE49-F238E27FC236}">
-                <a16:creationId xmlns:a16="http://schemas.microsoft.com/office/drawing/2014/main" id="{344AECC9-D6E1-CAD0-9B33-E727BD767478}"/>
-              </a:ext>
-            </a:extLst>
-          </p:cNvPr>
-          <p:cNvSpPr txBox="1">
-            <a:spLocks noChangeArrowheads="1"/>
-          </p:cNvSpPr>
-          <p:nvPr/>
-        </p:nvSpPr>
-        <p:spPr bwMode="auto">
-          <a:xfrm>
-            <a:off x="2004711" y="3284985"/>
-            <a:ext cx="837089" cy="307777"/>
-          </a:xfrm>
-          <a:prstGeom prst="rect">
-            <a:avLst/>
-          </a:prstGeom>
-          <a:noFill/>
-          <a:ln w="9525">
-            <a:noFill/>
-            <a:miter lim="800000"/>
-            <a:headEnd/>
-            <a:tailEnd/>
-          </a:ln>
-        </p:spPr>
-        <p:txBody>
-          <a:bodyPr wrap="none">
-            <a:spAutoFit/>
-          </a:bodyPr>
-          <a:lstStyle/>
-          <a:p>
-            <a:pPr>
-              <a:spcBef>
-                <a:spcPts val="0"/>
-              </a:spcBef>
-            </a:pPr>
-            <a:r>
-              <a:rPr lang="pt-PT" sz="1400" b="1" dirty="0">
-                <a:solidFill>
-                  <a:schemeClr val="tx1"/>
-                </a:solidFill>
-              </a:rPr>
-              <a:t>Modelos</a:t>
-            </a:r>
-          </a:p>
-        </p:txBody>
-      </p:sp>
-      <p:sp>
-        <p:nvSpPr>
-          <p:cNvPr id="24" name="Line 31">
-            <a:extLst>
-              <a:ext uri="{FF2B5EF4-FFF2-40B4-BE49-F238E27FC236}">
-                <a16:creationId xmlns:a16="http://schemas.microsoft.com/office/drawing/2014/main" id="{707763E0-71F9-25F8-D523-802FEBD03563}"/>
-              </a:ext>
-            </a:extLst>
-          </p:cNvPr>
-          <p:cNvSpPr>
-            <a:spLocks noChangeShapeType="1"/>
-          </p:cNvSpPr>
-          <p:nvPr/>
-        </p:nvSpPr>
-        <p:spPr bwMode="auto">
-          <a:xfrm flipV="1">
-            <a:off x="3516878" y="3789040"/>
-            <a:ext cx="720000" cy="360000"/>
-          </a:xfrm>
-          <a:prstGeom prst="line">
-            <a:avLst/>
-          </a:prstGeom>
-          <a:noFill/>
-          <a:ln w="9525">
-            <a:solidFill>
-              <a:schemeClr val="tx1"/>
-            </a:solidFill>
-            <a:round/>
-            <a:headEnd/>
-            <a:tailEnd type="triangle" w="med" len="med"/>
-          </a:ln>
-        </p:spPr>
-        <p:txBody>
-          <a:bodyPr/>
-          <a:lstStyle/>
-          <a:p>
-            <a:endParaRPr lang="pt-PT"/>
-          </a:p>
-        </p:txBody>
-      </p:sp>
-      <p:sp>
-        <p:nvSpPr>
-          <p:cNvPr id="25" name="Line 31">
-            <a:extLst>
-              <a:ext uri="{FF2B5EF4-FFF2-40B4-BE49-F238E27FC236}">
-                <a16:creationId xmlns:a16="http://schemas.microsoft.com/office/drawing/2014/main" id="{B19F5C67-08C8-319F-4165-BC6D2A66B37A}"/>
-              </a:ext>
-            </a:extLst>
-          </p:cNvPr>
-          <p:cNvSpPr>
-            <a:spLocks noChangeShapeType="1"/>
-          </p:cNvSpPr>
-          <p:nvPr/>
-        </p:nvSpPr>
-        <p:spPr bwMode="auto">
-          <a:xfrm rot="5400000" flipV="1">
-            <a:off x="3561798" y="2843960"/>
-            <a:ext cx="450000" cy="900000"/>
-          </a:xfrm>
-          <a:prstGeom prst="line">
-            <a:avLst/>
-          </a:prstGeom>
-          <a:noFill/>
-          <a:ln w="9525">
-            <a:solidFill>
-              <a:schemeClr val="tx1"/>
-            </a:solidFill>
-            <a:round/>
-            <a:headEnd/>
-            <a:tailEnd type="triangle" w="med" len="med"/>
-          </a:ln>
-        </p:spPr>
-        <p:txBody>
-          <a:bodyPr/>
-          <a:lstStyle/>
-          <a:p>
-            <a:endParaRPr lang="pt-PT"/>
-          </a:p>
-        </p:txBody>
-      </p:sp>
-      <p:sp>
-        <p:nvSpPr>
-          <p:cNvPr id="26" name="Line 31">
-            <a:extLst>
-              <a:ext uri="{FF2B5EF4-FFF2-40B4-BE49-F238E27FC236}">
-                <a16:creationId xmlns:a16="http://schemas.microsoft.com/office/drawing/2014/main" id="{5C5844A7-288D-F57D-C4C8-3257C51F591A}"/>
-              </a:ext>
-            </a:extLst>
-          </p:cNvPr>
-          <p:cNvSpPr>
-            <a:spLocks noChangeShapeType="1"/>
-          </p:cNvSpPr>
-          <p:nvPr/>
-        </p:nvSpPr>
-        <p:spPr bwMode="auto">
-          <a:xfrm flipV="1">
-            <a:off x="3516878" y="3789040"/>
-            <a:ext cx="3888000" cy="1944000"/>
-          </a:xfrm>
-          <a:prstGeom prst="line">
-            <a:avLst/>
-          </a:prstGeom>
-          <a:noFill/>
-          <a:ln w="9525">
-            <a:solidFill>
-              <a:schemeClr val="tx1"/>
-            </a:solidFill>
-            <a:round/>
-            <a:headEnd/>
-            <a:tailEnd type="triangle" w="med" len="med"/>
-          </a:ln>
-        </p:spPr>
-        <p:txBody>
-          <a:bodyPr/>
-          <a:lstStyle/>
-          <a:p>
-            <a:endParaRPr lang="pt-PT"/>
-          </a:p>
-        </p:txBody>
-      </p:sp>
-      <p:sp>
-        <p:nvSpPr>
-          <p:cNvPr id="27" name="Cube 26">
-            <a:extLst>
-              <a:ext uri="{FF2B5EF4-FFF2-40B4-BE49-F238E27FC236}">
-                <a16:creationId xmlns:a16="http://schemas.microsoft.com/office/drawing/2014/main" id="{791B3B77-D984-BCA7-08A7-6C684AAD8909}"/>
-              </a:ext>
-            </a:extLst>
-          </p:cNvPr>
-          <p:cNvSpPr/>
-          <p:nvPr/>
-        </p:nvSpPr>
-        <p:spPr bwMode="auto">
-          <a:xfrm>
-            <a:off x="7477318" y="3356992"/>
-            <a:ext cx="576064" cy="1153180"/>
-          </a:xfrm>
-          <a:prstGeom prst="cube">
-            <a:avLst/>
-          </a:prstGeom>
-          <a:solidFill>
-            <a:schemeClr val="accent1"/>
-          </a:solidFill>
-          <a:ln w="9525" cap="flat" cmpd="sng" algn="ctr">
-            <a:solidFill>
-              <a:schemeClr val="tx1"/>
-            </a:solidFill>
-            <a:prstDash val="solid"/>
-            <a:round/>
-            <a:headEnd type="none" w="med" len="med"/>
-            <a:tailEnd type="none" w="med" len="med"/>
-          </a:ln>
-          <a:effectLst/>
-        </p:spPr>
-        <p:txBody>
-          <a:bodyPr vert="horz" wrap="square" lIns="91440" tIns="45720" rIns="91440" bIns="45720" numCol="1" rtlCol="0" anchor="t" anchorCtr="0" compatLnSpc="1">
-            <a:prstTxWarp prst="textNoShape">
-              <a:avLst/>
-            </a:prstTxWarp>
-            <a:spAutoFit/>
-          </a:bodyPr>
-          <a:lstStyle/>
-          <a:p>
-            <a:endParaRPr lang="pt-PT"/>
-          </a:p>
-        </p:txBody>
-      </p:sp>
-      <p:sp>
-        <p:nvSpPr>
-          <p:cNvPr id="28" name="Cube 27">
-            <a:extLst>
-              <a:ext uri="{FF2B5EF4-FFF2-40B4-BE49-F238E27FC236}">
-                <a16:creationId xmlns:a16="http://schemas.microsoft.com/office/drawing/2014/main" id="{54189133-DFF0-B772-C37D-07C4991B3374}"/>
-              </a:ext>
-            </a:extLst>
-          </p:cNvPr>
-          <p:cNvSpPr/>
-          <p:nvPr/>
-        </p:nvSpPr>
-        <p:spPr bwMode="auto">
-          <a:xfrm>
-            <a:off x="9061494" y="3356992"/>
-            <a:ext cx="576064" cy="1153180"/>
-          </a:xfrm>
-          <a:prstGeom prst="cube">
-            <a:avLst/>
-          </a:prstGeom>
-          <a:solidFill>
-            <a:schemeClr val="accent1"/>
-          </a:solidFill>
-          <a:ln w="9525" cap="flat" cmpd="sng" algn="ctr">
-            <a:solidFill>
-              <a:schemeClr val="tx1"/>
-            </a:solidFill>
-            <a:prstDash val="solid"/>
-            <a:round/>
-            <a:headEnd type="none" w="med" len="med"/>
-            <a:tailEnd type="none" w="med" len="med"/>
-          </a:ln>
-          <a:effectLst/>
-        </p:spPr>
-        <p:txBody>
-          <a:bodyPr vert="horz" wrap="square" lIns="91440" tIns="45720" rIns="91440" bIns="45720" numCol="1" rtlCol="0" anchor="t" anchorCtr="0" compatLnSpc="1">
-            <a:prstTxWarp prst="textNoShape">
-              <a:avLst/>
-            </a:prstTxWarp>
-            <a:spAutoFit/>
-          </a:bodyPr>
-          <a:lstStyle/>
-          <a:p>
-            <a:endParaRPr lang="pt-PT"/>
-          </a:p>
-        </p:txBody>
-      </p:sp>
-      <p:sp>
-        <p:nvSpPr>
-          <p:cNvPr id="29" name="Line 31">
-            <a:extLst>
-              <a:ext uri="{FF2B5EF4-FFF2-40B4-BE49-F238E27FC236}">
-                <a16:creationId xmlns:a16="http://schemas.microsoft.com/office/drawing/2014/main" id="{BDD0B19B-E52D-7B6D-089C-D0A79C122F31}"/>
-              </a:ext>
-            </a:extLst>
-          </p:cNvPr>
-          <p:cNvSpPr>
-            <a:spLocks noChangeShapeType="1"/>
-          </p:cNvSpPr>
-          <p:nvPr/>
-        </p:nvSpPr>
-        <p:spPr bwMode="auto">
-          <a:xfrm flipV="1">
-            <a:off x="4957038" y="3573016"/>
-            <a:ext cx="720000" cy="0"/>
-          </a:xfrm>
-          <a:prstGeom prst="line">
-            <a:avLst/>
-          </a:prstGeom>
-          <a:noFill/>
-          <a:ln w="9525">
-            <a:solidFill>
-              <a:schemeClr val="tx1"/>
-            </a:solidFill>
-            <a:round/>
-            <a:headEnd/>
-            <a:tailEnd type="triangle" w="med" len="med"/>
-          </a:ln>
-        </p:spPr>
-        <p:txBody>
-          <a:bodyPr/>
-          <a:lstStyle/>
-          <a:p>
-            <a:endParaRPr lang="pt-PT"/>
-          </a:p>
-        </p:txBody>
-      </p:sp>
-      <p:sp>
-        <p:nvSpPr>
-          <p:cNvPr id="30" name="Line 31">
-            <a:extLst>
-              <a:ext uri="{FF2B5EF4-FFF2-40B4-BE49-F238E27FC236}">
-                <a16:creationId xmlns:a16="http://schemas.microsoft.com/office/drawing/2014/main" id="{E17D6B00-FF38-0FC9-4434-E45F0FD41549}"/>
-              </a:ext>
-            </a:extLst>
-          </p:cNvPr>
-          <p:cNvSpPr>
-            <a:spLocks noChangeShapeType="1"/>
-          </p:cNvSpPr>
-          <p:nvPr/>
-        </p:nvSpPr>
-        <p:spPr bwMode="auto">
-          <a:xfrm flipV="1">
-            <a:off x="6613222" y="3645024"/>
-            <a:ext cx="720000" cy="0"/>
-          </a:xfrm>
-          <a:prstGeom prst="line">
-            <a:avLst/>
-          </a:prstGeom>
-          <a:noFill/>
-          <a:ln w="9525">
-            <a:solidFill>
-              <a:schemeClr val="tx1"/>
-            </a:solidFill>
-            <a:round/>
-            <a:headEnd/>
-            <a:tailEnd type="triangle" w="med" len="med"/>
-          </a:ln>
-        </p:spPr>
-        <p:txBody>
-          <a:bodyPr/>
-          <a:lstStyle/>
-          <a:p>
-            <a:endParaRPr lang="pt-PT"/>
-          </a:p>
-        </p:txBody>
-      </p:sp>
-      <p:sp>
-        <p:nvSpPr>
-          <p:cNvPr id="31" name="Can 53">
-            <a:extLst>
-              <a:ext uri="{FF2B5EF4-FFF2-40B4-BE49-F238E27FC236}">
-                <a16:creationId xmlns:a16="http://schemas.microsoft.com/office/drawing/2014/main" id="{8CE6CCBE-9F4B-3326-D325-513090015111}"/>
-              </a:ext>
-            </a:extLst>
-          </p:cNvPr>
-          <p:cNvSpPr>
-            <a:spLocks noChangeAspect="1"/>
-          </p:cNvSpPr>
-          <p:nvPr/>
-        </p:nvSpPr>
-        <p:spPr bwMode="auto">
-          <a:xfrm>
-            <a:off x="9236268" y="2564904"/>
-            <a:ext cx="225000" cy="1094244"/>
-          </a:xfrm>
-          <a:prstGeom prst="can">
-            <a:avLst/>
-          </a:prstGeom>
-          <a:solidFill>
-            <a:schemeClr val="accent1"/>
-          </a:solidFill>
-          <a:ln w="9525" cap="flat" cmpd="sng" algn="ctr">
-            <a:solidFill>
-              <a:schemeClr val="tx1"/>
-            </a:solidFill>
-            <a:prstDash val="solid"/>
-            <a:round/>
-            <a:headEnd type="none" w="med" len="med"/>
-            <a:tailEnd type="none" w="med" len="med"/>
-          </a:ln>
-          <a:effectLst/>
-        </p:spPr>
-        <p:txBody>
-          <a:bodyPr vert="horz" wrap="square" lIns="91440" tIns="45720" rIns="91440" bIns="45720" numCol="1" rtlCol="0" anchor="t" anchorCtr="0" compatLnSpc="1">
-            <a:prstTxWarp prst="textNoShape">
-              <a:avLst/>
-            </a:prstTxWarp>
-            <a:spAutoFit/>
-          </a:bodyPr>
-          <a:lstStyle/>
-          <a:p>
-            <a:endParaRPr lang="pt-PT"/>
-          </a:p>
-        </p:txBody>
-      </p:sp>
-      <p:sp>
-        <p:nvSpPr>
-          <p:cNvPr id="32" name="Line 31">
-            <a:extLst>
-              <a:ext uri="{FF2B5EF4-FFF2-40B4-BE49-F238E27FC236}">
-                <a16:creationId xmlns:a16="http://schemas.microsoft.com/office/drawing/2014/main" id="{E0FF1C8A-9FFF-6DDF-9688-C92C47BCF60C}"/>
-              </a:ext>
-            </a:extLst>
-          </p:cNvPr>
-          <p:cNvSpPr>
-            <a:spLocks noChangeShapeType="1"/>
-          </p:cNvSpPr>
-          <p:nvPr/>
-        </p:nvSpPr>
-        <p:spPr bwMode="auto">
-          <a:xfrm rot="10800000" flipV="1">
-            <a:off x="9349526" y="3068960"/>
-            <a:ext cx="0" cy="270000"/>
-          </a:xfrm>
-          <a:prstGeom prst="line">
-            <a:avLst/>
-          </a:prstGeom>
-          <a:noFill/>
-          <a:ln w="9525">
-            <a:solidFill>
-              <a:schemeClr val="tx1"/>
-            </a:solidFill>
-            <a:round/>
-            <a:headEnd/>
-            <a:tailEnd type="triangle" w="med" len="med"/>
-          </a:ln>
-        </p:spPr>
-        <p:txBody>
-          <a:bodyPr/>
-          <a:lstStyle/>
-          <a:p>
-            <a:endParaRPr lang="pt-PT"/>
-          </a:p>
-        </p:txBody>
-      </p:sp>
-      <p:sp>
-        <p:nvSpPr>
-          <p:cNvPr id="33" name="Line 31">
-            <a:extLst>
-              <a:ext uri="{FF2B5EF4-FFF2-40B4-BE49-F238E27FC236}">
-                <a16:creationId xmlns:a16="http://schemas.microsoft.com/office/drawing/2014/main" id="{F866C931-6E0D-F5B6-CDE2-5D11EA0D9527}"/>
-              </a:ext>
-            </a:extLst>
-          </p:cNvPr>
-          <p:cNvSpPr>
-            <a:spLocks noChangeShapeType="1"/>
-          </p:cNvSpPr>
-          <p:nvPr/>
-        </p:nvSpPr>
-        <p:spPr bwMode="auto">
-          <a:xfrm rot="10800000" flipV="1">
-            <a:off x="9349527" y="3933056"/>
-            <a:ext cx="0" cy="270000"/>
-          </a:xfrm>
-          <a:prstGeom prst="line">
-            <a:avLst/>
-          </a:prstGeom>
-          <a:noFill/>
-          <a:ln w="9525">
-            <a:solidFill>
-              <a:schemeClr val="tx1"/>
-            </a:solidFill>
-            <a:round/>
-            <a:headEnd/>
-            <a:tailEnd type="triangle" w="med" len="med"/>
-          </a:ln>
-        </p:spPr>
-        <p:txBody>
-          <a:bodyPr/>
-          <a:lstStyle/>
-          <a:p>
-            <a:endParaRPr lang="pt-PT"/>
-          </a:p>
-        </p:txBody>
-      </p:sp>
-      <p:sp>
-        <p:nvSpPr>
-          <p:cNvPr id="34" name="Text Box 6">
-            <a:extLst>
-              <a:ext uri="{FF2B5EF4-FFF2-40B4-BE49-F238E27FC236}">
-                <a16:creationId xmlns:a16="http://schemas.microsoft.com/office/drawing/2014/main" id="{EFA1D60F-ACD2-6094-4E43-0C8DBD52E217}"/>
-              </a:ext>
-            </a:extLst>
-          </p:cNvPr>
-          <p:cNvSpPr txBox="1">
-            <a:spLocks noChangeArrowheads="1"/>
-          </p:cNvSpPr>
-          <p:nvPr/>
-        </p:nvSpPr>
-        <p:spPr bwMode="auto">
-          <a:xfrm>
-            <a:off x="8773462" y="4201344"/>
-            <a:ext cx="1264898" cy="307777"/>
-          </a:xfrm>
-          <a:prstGeom prst="rect">
-            <a:avLst/>
-          </a:prstGeom>
-          <a:noFill/>
-          <a:ln w="9525">
-            <a:noFill/>
-            <a:miter lim="800000"/>
-            <a:headEnd/>
-            <a:tailEnd/>
-          </a:ln>
-        </p:spPr>
-        <p:txBody>
-          <a:bodyPr wrap="none">
-            <a:spAutoFit/>
-          </a:bodyPr>
-          <a:lstStyle/>
-          <a:p>
-            <a:pPr>
-              <a:spcBef>
-                <a:spcPts val="0"/>
-              </a:spcBef>
-            </a:pPr>
-            <a:r>
-              <a:rPr lang="pt-PT" sz="1400" b="1" dirty="0">
-                <a:solidFill>
-                  <a:schemeClr val="tx1"/>
-                </a:solidFill>
-              </a:rPr>
-              <a:t>Conhecimento</a:t>
-            </a:r>
-          </a:p>
-        </p:txBody>
-      </p:sp>
-      <p:sp>
-        <p:nvSpPr>
-          <p:cNvPr id="35" name="Text Box 6">
-            <a:extLst>
-              <a:ext uri="{FF2B5EF4-FFF2-40B4-BE49-F238E27FC236}">
-                <a16:creationId xmlns:a16="http://schemas.microsoft.com/office/drawing/2014/main" id="{EAB0F8CB-C056-2ED0-7E7F-2C564C484B38}"/>
-              </a:ext>
-            </a:extLst>
-          </p:cNvPr>
-          <p:cNvSpPr txBox="1">
-            <a:spLocks noChangeArrowheads="1"/>
-          </p:cNvSpPr>
-          <p:nvPr/>
-        </p:nvSpPr>
-        <p:spPr bwMode="auto">
-          <a:xfrm>
-            <a:off x="9421535" y="2545740"/>
-            <a:ext cx="650563" cy="523220"/>
-          </a:xfrm>
-          <a:prstGeom prst="rect">
-            <a:avLst/>
-          </a:prstGeom>
-          <a:noFill/>
-          <a:ln w="9525">
-            <a:noFill/>
-            <a:miter lim="800000"/>
-            <a:headEnd/>
-            <a:tailEnd/>
-          </a:ln>
-        </p:spPr>
-        <p:txBody>
-          <a:bodyPr wrap="none">
-            <a:spAutoFit/>
-          </a:bodyPr>
-          <a:lstStyle/>
-          <a:p>
-            <a:pPr>
-              <a:spcBef>
-                <a:spcPts val="0"/>
-              </a:spcBef>
-            </a:pPr>
-            <a:r>
-              <a:rPr lang="pt-PT" sz="1400" b="1" dirty="0">
-                <a:solidFill>
-                  <a:schemeClr val="tx1"/>
-                </a:solidFill>
-              </a:rPr>
-              <a:t>Novos</a:t>
-            </a:r>
-          </a:p>
-          <a:p>
-            <a:pPr>
-              <a:spcBef>
-                <a:spcPts val="0"/>
-              </a:spcBef>
-            </a:pPr>
-            <a:r>
-              <a:rPr lang="pt-PT" sz="1400" b="1" dirty="0">
-                <a:solidFill>
-                  <a:schemeClr val="tx1"/>
-                </a:solidFill>
-              </a:rPr>
-              <a:t>dados</a:t>
-            </a:r>
-          </a:p>
-        </p:txBody>
-      </p:sp>
-      <p:sp>
-        <p:nvSpPr>
-          <p:cNvPr id="36" name="Line 31">
-            <a:extLst>
-              <a:ext uri="{FF2B5EF4-FFF2-40B4-BE49-F238E27FC236}">
-                <a16:creationId xmlns:a16="http://schemas.microsoft.com/office/drawing/2014/main" id="{CE70F70C-E00A-5EAE-8819-239A52BD7719}"/>
-              </a:ext>
-            </a:extLst>
-          </p:cNvPr>
-          <p:cNvSpPr>
-            <a:spLocks noChangeShapeType="1"/>
-          </p:cNvSpPr>
-          <p:nvPr/>
-        </p:nvSpPr>
-        <p:spPr bwMode="auto">
-          <a:xfrm rot="10800000" flipV="1">
-            <a:off x="4957038" y="3717032"/>
-            <a:ext cx="720000" cy="0"/>
-          </a:xfrm>
-          <a:prstGeom prst="line">
-            <a:avLst/>
-          </a:prstGeom>
-          <a:noFill/>
-          <a:ln w="9525">
-            <a:solidFill>
-              <a:schemeClr val="tx1"/>
-            </a:solidFill>
-            <a:round/>
-            <a:headEnd/>
-            <a:tailEnd type="triangle" w="med" len="med"/>
-          </a:ln>
-        </p:spPr>
-        <p:txBody>
-          <a:bodyPr/>
-          <a:lstStyle/>
-          <a:p>
-            <a:endParaRPr lang="pt-PT"/>
-          </a:p>
-        </p:txBody>
-      </p:sp>
-      <p:sp>
-        <p:nvSpPr>
-          <p:cNvPr id="37" name="Text Box 29">
-            <a:extLst>
-              <a:ext uri="{FF2B5EF4-FFF2-40B4-BE49-F238E27FC236}">
-                <a16:creationId xmlns:a16="http://schemas.microsoft.com/office/drawing/2014/main" id="{6DD38017-796C-6493-6A52-C622B99BCB04}"/>
-              </a:ext>
-            </a:extLst>
-          </p:cNvPr>
-          <p:cNvSpPr txBox="1">
-            <a:spLocks noChangeArrowheads="1"/>
-          </p:cNvSpPr>
-          <p:nvPr/>
-        </p:nvSpPr>
-        <p:spPr bwMode="auto">
-          <a:xfrm>
-            <a:off x="7520320" y="3439759"/>
-            <a:ext cx="338554" cy="461665"/>
-          </a:xfrm>
-          <a:prstGeom prst="rect">
-            <a:avLst/>
-          </a:prstGeom>
-          <a:noFill/>
-          <a:ln w="9525">
-            <a:noFill/>
-            <a:miter lim="800000"/>
-            <a:headEnd/>
-            <a:tailEnd/>
-          </a:ln>
-        </p:spPr>
-        <p:txBody>
-          <a:bodyPr wrap="none">
-            <a:spAutoFit/>
-          </a:bodyPr>
-          <a:lstStyle/>
-          <a:p>
-            <a:pPr>
-              <a:spcBef>
-                <a:spcPts val="0"/>
-              </a:spcBef>
-            </a:pPr>
-            <a:r>
-              <a:rPr lang="pt-PT" sz="2400" b="1" dirty="0">
-                <a:solidFill>
-                  <a:srgbClr val="00B050"/>
-                </a:solidFill>
-                <a:latin typeface="Calibri"/>
-              </a:rPr>
-              <a:t>√</a:t>
-            </a:r>
-            <a:endParaRPr lang="pt-PT" sz="2400" b="1" dirty="0">
-              <a:solidFill>
-                <a:srgbClr val="00B050"/>
-              </a:solidFill>
-            </a:endParaRPr>
-          </a:p>
-        </p:txBody>
-      </p:sp>
-      <p:sp>
-        <p:nvSpPr>
-          <p:cNvPr id="38" name="Text Box 29">
-            <a:extLst>
-              <a:ext uri="{FF2B5EF4-FFF2-40B4-BE49-F238E27FC236}">
-                <a16:creationId xmlns:a16="http://schemas.microsoft.com/office/drawing/2014/main" id="{7670ADD0-9CB7-3FE8-F83E-EA37F9D29122}"/>
-              </a:ext>
-            </a:extLst>
-          </p:cNvPr>
-          <p:cNvSpPr txBox="1">
-            <a:spLocks noChangeArrowheads="1"/>
-          </p:cNvSpPr>
-          <p:nvPr/>
-        </p:nvSpPr>
-        <p:spPr bwMode="auto">
-          <a:xfrm>
-            <a:off x="9104496" y="3429001"/>
-            <a:ext cx="338554" cy="461665"/>
-          </a:xfrm>
-          <a:prstGeom prst="rect">
-            <a:avLst/>
-          </a:prstGeom>
-          <a:noFill/>
-          <a:ln w="9525">
-            <a:noFill/>
-            <a:miter lim="800000"/>
-            <a:headEnd/>
-            <a:tailEnd/>
-          </a:ln>
-        </p:spPr>
-        <p:txBody>
-          <a:bodyPr wrap="none">
-            <a:spAutoFit/>
-          </a:bodyPr>
-          <a:lstStyle/>
-          <a:p>
-            <a:pPr>
-              <a:spcBef>
-                <a:spcPts val="0"/>
-              </a:spcBef>
-            </a:pPr>
-            <a:r>
-              <a:rPr lang="pt-PT" sz="2400" b="1" dirty="0">
-                <a:solidFill>
-                  <a:srgbClr val="00B050"/>
-                </a:solidFill>
-                <a:latin typeface="Calibri"/>
-              </a:rPr>
-              <a:t>√</a:t>
-            </a:r>
-            <a:endParaRPr lang="pt-PT" sz="2400" b="1" dirty="0">
-              <a:solidFill>
-                <a:srgbClr val="00B050"/>
-              </a:solidFill>
-            </a:endParaRPr>
-          </a:p>
-        </p:txBody>
-      </p:sp>
-      <p:sp>
-        <p:nvSpPr>
-          <p:cNvPr id="40" name="Text Box 29">
-            <a:extLst>
-              <a:ext uri="{FF2B5EF4-FFF2-40B4-BE49-F238E27FC236}">
-                <a16:creationId xmlns:a16="http://schemas.microsoft.com/office/drawing/2014/main" id="{ACCB09BC-7D92-EF3D-62BA-F3F5C888EABB}"/>
-              </a:ext>
-            </a:extLst>
-          </p:cNvPr>
-          <p:cNvSpPr txBox="1">
-            <a:spLocks noChangeArrowheads="1"/>
-          </p:cNvSpPr>
-          <p:nvPr/>
-        </p:nvSpPr>
-        <p:spPr bwMode="auto">
-          <a:xfrm>
-            <a:off x="5565802" y="2132857"/>
-            <a:ext cx="1204625" cy="307777"/>
-          </a:xfrm>
-          <a:prstGeom prst="rect">
-            <a:avLst/>
-          </a:prstGeom>
-          <a:noFill/>
-          <a:ln w="9525">
-            <a:noFill/>
-            <a:miter lim="800000"/>
-            <a:headEnd/>
-            <a:tailEnd/>
-          </a:ln>
-        </p:spPr>
-        <p:txBody>
-          <a:bodyPr wrap="none">
-            <a:spAutoFit/>
-          </a:bodyPr>
-          <a:lstStyle/>
-          <a:p>
-            <a:pPr>
-              <a:spcBef>
-                <a:spcPts val="0"/>
-              </a:spcBef>
-            </a:pPr>
-            <a:r>
-              <a:rPr lang="pt-PT" sz="1400" b="1" dirty="0">
-                <a:solidFill>
-                  <a:srgbClr val="003E6C"/>
-                </a:solidFill>
-              </a:rPr>
-              <a:t>Fase Afinação</a:t>
-            </a:r>
-          </a:p>
-        </p:txBody>
-      </p:sp>
-      <p:sp>
-        <p:nvSpPr>
-          <p:cNvPr id="41" name="Text Box 29">
-            <a:extLst>
-              <a:ext uri="{FF2B5EF4-FFF2-40B4-BE49-F238E27FC236}">
-                <a16:creationId xmlns:a16="http://schemas.microsoft.com/office/drawing/2014/main" id="{FB0029D4-6753-F597-575A-41BD503F1914}"/>
-              </a:ext>
-            </a:extLst>
-          </p:cNvPr>
-          <p:cNvSpPr txBox="1">
-            <a:spLocks noChangeArrowheads="1"/>
-          </p:cNvSpPr>
-          <p:nvPr/>
-        </p:nvSpPr>
-        <p:spPr bwMode="auto">
-          <a:xfrm>
-            <a:off x="3012822" y="5085185"/>
-            <a:ext cx="787460" cy="276999"/>
-          </a:xfrm>
-          <a:prstGeom prst="rect">
-            <a:avLst/>
-          </a:prstGeom>
-          <a:noFill/>
-          <a:ln w="9525">
-            <a:noFill/>
-            <a:miter lim="800000"/>
-            <a:headEnd/>
-            <a:tailEnd/>
-          </a:ln>
-        </p:spPr>
-        <p:txBody>
-          <a:bodyPr wrap="none">
-            <a:spAutoFit/>
-          </a:bodyPr>
-          <a:lstStyle/>
-          <a:p>
-            <a:pPr>
-              <a:spcBef>
-                <a:spcPts val="0"/>
-              </a:spcBef>
-            </a:pPr>
-            <a:r>
-              <a:rPr lang="pt-PT" sz="1200" b="1" dirty="0">
-                <a:solidFill>
-                  <a:schemeClr val="tx1"/>
-                </a:solidFill>
-              </a:rPr>
-              <a:t>validação</a:t>
-            </a:r>
-          </a:p>
-        </p:txBody>
-      </p:sp>
-      <p:sp>
-        <p:nvSpPr>
-          <p:cNvPr id="42" name="Can 64">
-            <a:extLst>
-              <a:ext uri="{FF2B5EF4-FFF2-40B4-BE49-F238E27FC236}">
-                <a16:creationId xmlns:a16="http://schemas.microsoft.com/office/drawing/2014/main" id="{F33A9CD8-83E3-DA78-6740-DA52B68F9D62}"/>
-              </a:ext>
-            </a:extLst>
-          </p:cNvPr>
-          <p:cNvSpPr>
-            <a:spLocks noChangeAspect="1"/>
-          </p:cNvSpPr>
-          <p:nvPr/>
-        </p:nvSpPr>
-        <p:spPr bwMode="auto">
-          <a:xfrm>
-            <a:off x="3156838" y="4653136"/>
-            <a:ext cx="225000" cy="1094244"/>
-          </a:xfrm>
-          <a:prstGeom prst="can">
-            <a:avLst/>
-          </a:prstGeom>
-          <a:solidFill>
-            <a:schemeClr val="accent1"/>
-          </a:solidFill>
-          <a:ln w="9525" cap="flat" cmpd="sng" algn="ctr">
-            <a:solidFill>
-              <a:schemeClr val="tx1"/>
-            </a:solidFill>
-            <a:prstDash val="solid"/>
-            <a:round/>
-            <a:headEnd type="none" w="med" len="med"/>
-            <a:tailEnd type="none" w="med" len="med"/>
-          </a:ln>
-          <a:effectLst/>
-        </p:spPr>
-        <p:txBody>
-          <a:bodyPr vert="horz" wrap="square" lIns="91440" tIns="45720" rIns="91440" bIns="45720" numCol="1" rtlCol="0" anchor="t" anchorCtr="0" compatLnSpc="1">
-            <a:prstTxWarp prst="textNoShape">
-              <a:avLst/>
-            </a:prstTxWarp>
-            <a:spAutoFit/>
-          </a:bodyPr>
-          <a:lstStyle/>
-          <a:p>
-            <a:endParaRPr lang="pt-PT"/>
-          </a:p>
-        </p:txBody>
-      </p:sp>
-      <p:sp>
-        <p:nvSpPr>
-          <p:cNvPr id="43" name="Line 31">
-            <a:extLst>
-              <a:ext uri="{FF2B5EF4-FFF2-40B4-BE49-F238E27FC236}">
-                <a16:creationId xmlns:a16="http://schemas.microsoft.com/office/drawing/2014/main" id="{29DF4926-8DD5-2248-E3F7-C253B2F09DFA}"/>
-              </a:ext>
-            </a:extLst>
-          </p:cNvPr>
-          <p:cNvSpPr>
-            <a:spLocks noChangeShapeType="1"/>
-          </p:cNvSpPr>
-          <p:nvPr/>
-        </p:nvSpPr>
-        <p:spPr bwMode="auto">
-          <a:xfrm flipV="1">
-            <a:off x="2724790" y="4869160"/>
-            <a:ext cx="360000" cy="0"/>
-          </a:xfrm>
-          <a:prstGeom prst="line">
-            <a:avLst/>
-          </a:prstGeom>
-          <a:noFill/>
-          <a:ln w="9525">
-            <a:solidFill>
-              <a:schemeClr val="tx1"/>
-            </a:solidFill>
-            <a:round/>
-            <a:headEnd/>
-            <a:tailEnd type="triangle" w="med" len="med"/>
-          </a:ln>
-        </p:spPr>
-        <p:txBody>
-          <a:bodyPr/>
-          <a:lstStyle/>
-          <a:p>
-            <a:endParaRPr lang="pt-PT"/>
-          </a:p>
-        </p:txBody>
-      </p:sp>
-      <p:sp>
-        <p:nvSpPr>
-          <p:cNvPr id="44" name="Text Box 26">
-            <a:extLst>
-              <a:ext uri="{FF2B5EF4-FFF2-40B4-BE49-F238E27FC236}">
-                <a16:creationId xmlns:a16="http://schemas.microsoft.com/office/drawing/2014/main" id="{2714D106-CF56-EF1F-A6C1-35E87B99BA0F}"/>
-              </a:ext>
-            </a:extLst>
-          </p:cNvPr>
-          <p:cNvSpPr txBox="1">
-            <a:spLocks noChangeArrowheads="1"/>
-          </p:cNvSpPr>
-          <p:nvPr/>
-        </p:nvSpPr>
-        <p:spPr bwMode="auto">
-          <a:xfrm>
-            <a:off x="2652782" y="4581129"/>
-            <a:ext cx="433132" cy="307777"/>
-          </a:xfrm>
-          <a:prstGeom prst="rect">
-            <a:avLst/>
-          </a:prstGeom>
-          <a:noFill/>
-          <a:ln w="9525">
-            <a:noFill/>
-            <a:miter lim="800000"/>
-            <a:headEnd/>
-            <a:tailEnd/>
-          </a:ln>
-        </p:spPr>
-        <p:txBody>
-          <a:bodyPr wrap="none">
-            <a:spAutoFit/>
-          </a:bodyPr>
-          <a:lstStyle/>
-          <a:p>
-            <a:pPr>
-              <a:spcBef>
-                <a:spcPts val="0"/>
-              </a:spcBef>
-            </a:pPr>
-            <a:r>
-              <a:rPr lang="pt-PT" sz="1400" dirty="0">
-                <a:solidFill>
-                  <a:srgbClr val="003E6C"/>
-                </a:solidFill>
-              </a:rPr>
-              <a:t>1/4</a:t>
-            </a:r>
-          </a:p>
-        </p:txBody>
-      </p:sp>
-      <p:sp>
-        <p:nvSpPr>
-          <p:cNvPr id="45" name="Line 31">
-            <a:extLst>
-              <a:ext uri="{FF2B5EF4-FFF2-40B4-BE49-F238E27FC236}">
-                <a16:creationId xmlns:a16="http://schemas.microsoft.com/office/drawing/2014/main" id="{0378890F-E4D2-EB6D-BD05-9C2B7B13DA36}"/>
-              </a:ext>
-            </a:extLst>
-          </p:cNvPr>
-          <p:cNvSpPr>
-            <a:spLocks noChangeShapeType="1"/>
-          </p:cNvSpPr>
-          <p:nvPr/>
-        </p:nvSpPr>
-        <p:spPr bwMode="auto">
-          <a:xfrm flipV="1">
-            <a:off x="3516878" y="3789040"/>
-            <a:ext cx="2304000" cy="1152000"/>
-          </a:xfrm>
-          <a:prstGeom prst="line">
-            <a:avLst/>
-          </a:prstGeom>
-          <a:noFill/>
-          <a:ln w="9525">
-            <a:solidFill>
-              <a:schemeClr val="tx1"/>
-            </a:solidFill>
-            <a:round/>
-            <a:headEnd/>
-            <a:tailEnd type="triangle" w="med" len="med"/>
-          </a:ln>
-        </p:spPr>
-        <p:txBody>
-          <a:bodyPr/>
-          <a:lstStyle/>
-          <a:p>
-            <a:endParaRPr lang="pt-PT"/>
-          </a:p>
-        </p:txBody>
-      </p:sp>
-      <p:sp>
-        <p:nvSpPr>
-          <p:cNvPr id="46" name="Cube 45">
-            <a:extLst>
-              <a:ext uri="{FF2B5EF4-FFF2-40B4-BE49-F238E27FC236}">
-                <a16:creationId xmlns:a16="http://schemas.microsoft.com/office/drawing/2014/main" id="{B917E564-7A3C-1DD1-2C40-39DCE2B6531F}"/>
-              </a:ext>
-            </a:extLst>
-          </p:cNvPr>
-          <p:cNvSpPr/>
-          <p:nvPr/>
-        </p:nvSpPr>
-        <p:spPr bwMode="auto">
-          <a:xfrm>
-            <a:off x="5893142" y="3356992"/>
-            <a:ext cx="576064" cy="1153180"/>
-          </a:xfrm>
-          <a:prstGeom prst="cube">
-            <a:avLst/>
-          </a:prstGeom>
-          <a:solidFill>
-            <a:schemeClr val="accent1"/>
-          </a:solidFill>
-          <a:ln w="9525" cap="flat" cmpd="sng" algn="ctr">
-            <a:solidFill>
-              <a:schemeClr val="tx1"/>
-            </a:solidFill>
-            <a:prstDash val="solid"/>
-            <a:round/>
-            <a:headEnd type="none" w="med" len="med"/>
-            <a:tailEnd type="none" w="med" len="med"/>
-          </a:ln>
-          <a:effectLst/>
-        </p:spPr>
-        <p:txBody>
-          <a:bodyPr vert="horz" wrap="square" lIns="91440" tIns="45720" rIns="91440" bIns="45720" numCol="1" rtlCol="0" anchor="t" anchorCtr="0" compatLnSpc="1">
-            <a:prstTxWarp prst="textNoShape">
-              <a:avLst/>
-            </a:prstTxWarp>
-            <a:spAutoFit/>
-          </a:bodyPr>
-          <a:lstStyle/>
-          <a:p>
-            <a:endParaRPr lang="pt-PT"/>
-          </a:p>
-        </p:txBody>
-      </p:sp>
-      <p:sp>
-        <p:nvSpPr>
-          <p:cNvPr id="47" name="Cube 46">
-            <a:extLst>
-              <a:ext uri="{FF2B5EF4-FFF2-40B4-BE49-F238E27FC236}">
-                <a16:creationId xmlns:a16="http://schemas.microsoft.com/office/drawing/2014/main" id="{FF1C8608-4BF6-0E55-ED5E-836878D88CC8}"/>
-              </a:ext>
-            </a:extLst>
-          </p:cNvPr>
-          <p:cNvSpPr/>
-          <p:nvPr/>
-        </p:nvSpPr>
-        <p:spPr bwMode="auto">
-          <a:xfrm>
-            <a:off x="2292742" y="2780928"/>
-            <a:ext cx="576064" cy="1153180"/>
-          </a:xfrm>
-          <a:prstGeom prst="cube">
-            <a:avLst/>
-          </a:prstGeom>
-          <a:solidFill>
-            <a:schemeClr val="bg1"/>
-          </a:solidFill>
-          <a:ln w="9525" cap="flat" cmpd="sng" algn="ctr">
-            <a:solidFill>
-              <a:schemeClr val="tx1"/>
-            </a:solidFill>
-            <a:prstDash val="solid"/>
-            <a:round/>
-            <a:headEnd type="none" w="med" len="med"/>
-            <a:tailEnd type="none" w="med" len="med"/>
-          </a:ln>
-          <a:effectLst/>
-        </p:spPr>
-        <p:txBody>
-          <a:bodyPr vert="horz" wrap="square" lIns="91440" tIns="45720" rIns="91440" bIns="45720" numCol="1" rtlCol="0" anchor="t" anchorCtr="0" compatLnSpc="1">
-            <a:prstTxWarp prst="textNoShape">
-              <a:avLst/>
-            </a:prstTxWarp>
-            <a:spAutoFit/>
-          </a:bodyPr>
-          <a:lstStyle/>
-          <a:p>
-            <a:endParaRPr lang="pt-PT"/>
-          </a:p>
-        </p:txBody>
-      </p:sp>
-      <p:sp>
-        <p:nvSpPr>
-          <p:cNvPr id="48" name="Line 31">
-            <a:extLst>
-              <a:ext uri="{FF2B5EF4-FFF2-40B4-BE49-F238E27FC236}">
-                <a16:creationId xmlns:a16="http://schemas.microsoft.com/office/drawing/2014/main" id="{DF5A9C51-BE11-D37F-5A92-448B1ACAEE46}"/>
-              </a:ext>
-            </a:extLst>
-          </p:cNvPr>
-          <p:cNvSpPr>
-            <a:spLocks noChangeShapeType="1"/>
-          </p:cNvSpPr>
-          <p:nvPr/>
-        </p:nvSpPr>
-        <p:spPr bwMode="auto">
-          <a:xfrm flipV="1">
-            <a:off x="8197398" y="3645024"/>
-            <a:ext cx="720000" cy="0"/>
-          </a:xfrm>
-          <a:prstGeom prst="line">
-            <a:avLst/>
-          </a:prstGeom>
-          <a:noFill/>
-          <a:ln w="9525">
-            <a:solidFill>
-              <a:schemeClr val="tx1"/>
-            </a:solidFill>
-            <a:round/>
-            <a:headEnd/>
-            <a:tailEnd type="triangle" w="med" len="med"/>
-          </a:ln>
-        </p:spPr>
-        <p:txBody>
-          <a:bodyPr/>
-          <a:lstStyle/>
-          <a:p>
-            <a:endParaRPr lang="pt-PT"/>
-          </a:p>
-        </p:txBody>
-      </p:sp>
-      <p:sp>
-        <p:nvSpPr>
-          <p:cNvPr id="49" name="Text Box 6">
-            <a:extLst>
-              <a:ext uri="{FF2B5EF4-FFF2-40B4-BE49-F238E27FC236}">
-                <a16:creationId xmlns:a16="http://schemas.microsoft.com/office/drawing/2014/main" id="{EA646E43-7F2C-47ED-75A2-280DA3A29D12}"/>
-              </a:ext>
-            </a:extLst>
-          </p:cNvPr>
-          <p:cNvSpPr txBox="1">
-            <a:spLocks noChangeArrowheads="1"/>
-          </p:cNvSpPr>
-          <p:nvPr/>
-        </p:nvSpPr>
-        <p:spPr bwMode="auto">
-          <a:xfrm>
-            <a:off x="7243079" y="2401144"/>
-            <a:ext cx="896399" cy="307777"/>
-          </a:xfrm>
-          <a:prstGeom prst="rect">
-            <a:avLst/>
-          </a:prstGeom>
-          <a:noFill/>
-          <a:ln w="9525">
-            <a:noFill/>
-            <a:miter lim="800000"/>
-            <a:headEnd/>
-            <a:tailEnd/>
-          </a:ln>
-        </p:spPr>
-        <p:txBody>
-          <a:bodyPr wrap="none">
-            <a:spAutoFit/>
-          </a:bodyPr>
-          <a:lstStyle/>
-          <a:p>
-            <a:pPr>
-              <a:spcBef>
-                <a:spcPts val="0"/>
-              </a:spcBef>
-            </a:pPr>
-            <a:r>
-              <a:rPr lang="pt-PT" sz="1400" b="1" dirty="0">
-                <a:solidFill>
-                  <a:schemeClr val="tx1"/>
-                </a:solidFill>
-              </a:rPr>
-              <a:t>Avaliação</a:t>
-            </a:r>
-          </a:p>
-        </p:txBody>
-      </p:sp>
-      <p:sp>
-        <p:nvSpPr>
-          <p:cNvPr id="50" name="Text Box 6">
-            <a:extLst>
-              <a:ext uri="{FF2B5EF4-FFF2-40B4-BE49-F238E27FC236}">
-                <a16:creationId xmlns:a16="http://schemas.microsoft.com/office/drawing/2014/main" id="{62A5E17B-12B6-6AE5-8198-C704F1DB01FA}"/>
-              </a:ext>
-            </a:extLst>
-          </p:cNvPr>
-          <p:cNvSpPr txBox="1">
-            <a:spLocks noChangeArrowheads="1"/>
-          </p:cNvSpPr>
-          <p:nvPr/>
-        </p:nvSpPr>
-        <p:spPr bwMode="auto">
-          <a:xfrm>
-            <a:off x="4007768" y="2420889"/>
-            <a:ext cx="1228926" cy="307777"/>
-          </a:xfrm>
-          <a:prstGeom prst="rect">
-            <a:avLst/>
-          </a:prstGeom>
-          <a:noFill/>
-          <a:ln w="9525">
-            <a:noFill/>
-            <a:miter lim="800000"/>
-            <a:headEnd/>
-            <a:tailEnd/>
-          </a:ln>
-        </p:spPr>
-        <p:txBody>
-          <a:bodyPr wrap="none">
-            <a:spAutoFit/>
-          </a:bodyPr>
-          <a:lstStyle/>
-          <a:p>
-            <a:pPr>
-              <a:spcBef>
-                <a:spcPts val="0"/>
-              </a:spcBef>
-            </a:pPr>
-            <a:r>
-              <a:rPr lang="pt-PT" sz="1400" b="1" dirty="0">
-                <a:solidFill>
-                  <a:schemeClr val="tx1"/>
-                </a:solidFill>
-              </a:rPr>
-              <a:t>Generalização</a:t>
-            </a:r>
-          </a:p>
-        </p:txBody>
-      </p:sp>
     </p:spTree>
     <p:extLst>
       <p:ext uri="{BB962C8B-B14F-4D97-AF65-F5344CB8AC3E}">
@@ -37234,8 +37859,8 @@
           <a:chExt cx="0" cy="0"/>
         </a:xfrm>
       </p:grpSpPr>
-      <mc:AlternateContent xmlns:mc="http://schemas.openxmlformats.org/markup-compatibility/2006">
-        <mc:Choice xmlns:a14="http://schemas.microsoft.com/office/drawing/2010/main" Requires="a14">
+      <mc:AlternateContent xmlns:mc="http://schemas.openxmlformats.org/markup-compatibility/2006" xmlns:a14="http://schemas.microsoft.com/office/drawing/2010/main">
+        <mc:Choice Requires="a14">
           <p:sp>
             <p:nvSpPr>
               <p:cNvPr id="5" name="Text Box 13">
@@ -37738,7 +38363,7 @@
             </p:txBody>
           </p:sp>
         </mc:Choice>
-        <mc:Fallback>
+        <mc:Fallback xmlns="">
           <p:sp>
             <p:nvSpPr>
               <p:cNvPr id="5" name="Text Box 13">
@@ -38119,8 +38744,8 @@
           </a:p>
         </p:txBody>
       </p:sp>
-      <mc:AlternateContent xmlns:mc="http://schemas.openxmlformats.org/markup-compatibility/2006">
-        <mc:Choice xmlns:a14="http://schemas.microsoft.com/office/drawing/2010/main" Requires="a14">
+      <mc:AlternateContent xmlns:mc="http://schemas.openxmlformats.org/markup-compatibility/2006" xmlns:a14="http://schemas.microsoft.com/office/drawing/2010/main">
+        <mc:Choice Requires="a14">
           <p:sp>
             <p:nvSpPr>
               <p:cNvPr id="53" name="Text Box 13">
@@ -38417,7 +39042,7 @@
             </p:txBody>
           </p:sp>
         </mc:Choice>
-        <mc:Fallback>
+        <mc:Fallback xmlns="">
           <p:sp>
             <p:nvSpPr>
               <p:cNvPr id="53" name="Text Box 13">
@@ -39690,8 +40315,8 @@
           </a:p>
         </p:txBody>
       </p:sp>
-      <mc:AlternateContent xmlns:mc="http://schemas.openxmlformats.org/markup-compatibility/2006">
-        <mc:Choice xmlns:a14="http://schemas.microsoft.com/office/drawing/2010/main" Requires="a14">
+      <mc:AlternateContent xmlns:mc="http://schemas.openxmlformats.org/markup-compatibility/2006" xmlns:a14="http://schemas.microsoft.com/office/drawing/2010/main">
+        <mc:Choice Requires="a14">
           <p:sp>
             <p:nvSpPr>
               <p:cNvPr id="6" name="Text Box 13">
@@ -39988,7 +40613,7 @@
             </p:txBody>
           </p:sp>
         </mc:Choice>
-        <mc:Fallback>
+        <mc:Fallback xmlns="">
           <p:sp>
             <p:nvSpPr>
               <p:cNvPr id="6" name="Text Box 13">
@@ -45696,7 +46321,7 @@
                 <a:latin typeface="Courier New" panose="02070309020205020404" pitchFamily="49" charset="0"/>
                 <a:cs typeface="Courier New" panose="02070309020205020404" pitchFamily="49" charset="0"/>
               </a:rPr>
-              <a:t>dplyer</a:t>
+              <a:t>dplyr</a:t>
             </a:r>
             <a:endParaRPr lang="pt-PT" sz="2800" b="1" i="1" dirty="0">
               <a:solidFill>
@@ -45982,7 +46607,7 @@
                 <a:latin typeface="Courier New" panose="02070309020205020404" pitchFamily="49" charset="0"/>
                 <a:cs typeface="Courier New" panose="02070309020205020404" pitchFamily="49" charset="0"/>
               </a:rPr>
-              <a:t>dplyer</a:t>
+              <a:t>dplyr</a:t>
             </a:r>
             <a:endParaRPr lang="pt-PT" sz="2800" b="1" i="1" dirty="0">
               <a:solidFill>
